--- a/docs/异步页流水-技术说明.pptx
+++ b/docs/异步页流水-技术说明.pptx
@@ -5013,7 +5013,7 @@
                 <a:ea typeface="Microsoft YaHei" pitchFamily="34" charset="-122"/>
                 <a:cs typeface="Microsoft YaHei" pitchFamily="34" charset="-120"/>
               </a:rPr>
-              <a:t>偶发延迟尖峰：同一步耗时可从 30 ms 级 → 数百 ms 级</a:t>
+              <a:t>偶发延迟尖峰：同一步耗时可从 30 ms 级 → 数百 ms 级（深端可达秒级）</a:t>
             </a:r>
             <a:endParaRPr lang="en-US" sz="950" dirty="0"/>
           </a:p>
@@ -5034,7 +5034,7 @@
                 <a:ea typeface="Microsoft YaHei" pitchFamily="34" charset="-122"/>
                 <a:cs typeface="Microsoft YaHei" pitchFamily="34" charset="-120"/>
               </a:rPr>
-              <a:t>指纹：GPU 满占用/满频，但功耗极低、显存几乎不动——“空转等待”（自旋）特征</a:t>
+              <a:t>指纹：GPU 满占用 / 满频，但功耗极低、显存几乎不动</a:t>
             </a:r>
             <a:endParaRPr lang="en-US" sz="950" dirty="0"/>
           </a:p>
@@ -5076,7 +5076,7 @@
                 <a:ea typeface="Microsoft YaHei" pitchFamily="34" charset="-122"/>
                 <a:cs typeface="Microsoft YaHei" pitchFamily="34" charset="-120"/>
               </a:rPr>
-              <a:t>难点：触发窗口不规则，复现以小时计</a:t>
+              <a:t>曾以“小时级窗口”极难复现——现已可按需制造（见右）</a:t>
             </a:r>
             <a:endParaRPr lang="en-US" sz="950" dirty="0"/>
           </a:p>
@@ -5162,7 +5162,7 @@
                 <a:ea typeface="Microsoft YaHei" pitchFamily="34" charset="-122"/>
                 <a:cs typeface="Microsoft YaHei" pitchFamily="34" charset="-120"/>
               </a:rPr>
-              <a:t>我们做的排查（有实测支撑）</a:t>
+              <a:t>攻关进展（最新）</a:t>
             </a:r>
             <a:endParaRPr lang="en-US" sz="1300" dirty="0"/>
           </a:p>
@@ -5205,7 +5205,7 @@
                 <a:ea typeface="Microsoft YaHei" pitchFamily="34" charset="-122"/>
                 <a:cs typeface="Microsoft YaHei" pitchFamily="34" charset="-120"/>
               </a:rPr>
-              <a:t>仪表化：解码步四区段分解 + 设备侧段内打点——时间花在哪，可视化</a:t>
+              <a:t>按需复现：外部显存压力（约 1.2 GiB）⇒ 施加即入谷（速度降至 1/25）、释放即恢复、可重复</a:t>
             </a:r>
             <a:endParaRPr lang="en-US" sz="950" dirty="0"/>
           </a:p>
@@ -5226,7 +5226,7 @@
                 <a:ea typeface="Microsoft YaHei" pitchFamily="34" charset="-122"/>
                 <a:cs typeface="Microsoft YaHei" pitchFamily="34" charset="-120"/>
               </a:rPr>
-              <a:t>路径收敛：关闭投机解码（MTP）后谷消失（A-B-A 验证）⇒ 病灶在验证路径内</a:t>
+              <a:t>机制定位：时间全在 host 侧提交调用（submit≈wall、wait=sync≈0）⇒ 驱动内部阻塞</a:t>
             </a:r>
             <a:endParaRPr lang="en-US" sz="950" dirty="0"/>
           </a:p>
@@ -5247,7 +5247,28 @@
                 <a:ea typeface="Microsoft YaHei" pitchFamily="34" charset="-122"/>
                 <a:cs typeface="Microsoft YaHei" pitchFamily="34" charset="-120"/>
               </a:rPr>
-              <a:t>逐项排除：搬运/带宽（谷窗内传输=0 也发生）、降频（慢窗仍满频）、外部进程、提交/驱动卡死</a:t>
+              <a:t>排除清单：PDL ❌ 出局（原最大嫌疑）· 页中转 ❌ · 宿主路径 ❌ · 页档位 ❌ · 池大小 ❌ · 节流 ❌</a:t>
+            </a:r>
+            <a:endParaRPr lang="en-US" sz="950" dirty="0"/>
+          </a:p>
+          <a:p>
+            <a:pPr marL="342900" indent="-342900">
+              <a:spcAft>
+                <a:spcPts val="500"/>
+              </a:spcAft>
+              <a:buSzPct val="100000"/>
+              <a:buChar char="▪"/>
+            </a:pPr>
+            <a:r>
+              <a:rPr lang="en-US" sz="950" dirty="0">
+                <a:solidFill>
+                  <a:srgbClr val="6B7C8A"/>
+                </a:solidFill>
+                <a:latin typeface="Microsoft YaHei" pitchFamily="34" charset="0"/>
+                <a:ea typeface="Microsoft YaHei" pitchFamily="34" charset="-122"/>
+                <a:cs typeface="Microsoft YaHei" pitchFamily="34" charset="-120"/>
+              </a:rPr>
+              <a:t>应对：避免与引擎争抢显存（唯一确证有效）；最小复现协议已备（供上游）</a:t>
             </a:r>
             <a:endParaRPr lang="en-US" sz="950" dirty="0"/>
           </a:p>
@@ -5326,7 +5347,7 @@
                 <a:ea typeface="Microsoft YaHei" pitchFamily="34" charset="-122"/>
                 <a:cs typeface="Microsoft YaHei" pitchFamily="34" charset="-120"/>
               </a:rPr>
-              <a:t>当前最大嫌疑人：PDL（内核间重叠的依赖等待路径，sm120a 原生构建默认启用）</a:t>
+              <a:t>机制已收敛：</a:t>
             </a:r>
             <a:pPr indent="0" marL="0">
               <a:buNone/>
@@ -5340,21 +5361,7 @@
                 <a:ea typeface="Microsoft YaHei" pitchFamily="34" charset="-122"/>
                 <a:cs typeface="Microsoft YaHei" pitchFamily="34" charset="-120"/>
               </a:rPr>
-              <a:t>——其等待为纯轮询实现，与“满频低功耗”自旋指纹吻合；已收敛到少数候选等待点。</a:t>
-            </a:r>
-            <a:pPr indent="0" marL="0">
-              <a:buNone/>
-            </a:pPr>
-            <a:r>
-              <a:rPr lang="en-US" sz="1000" b="1" dirty="0">
-                <a:solidFill>
-                  <a:srgbClr val="C0504D"/>
-                </a:solidFill>
-                <a:latin typeface="Microsoft YaHei" pitchFamily="34" charset="0"/>
-                <a:ea typeface="Microsoft YaHei" pitchFamily="34" charset="-122"/>
-                <a:cs typeface="Microsoft YaHei" pitchFamily="34" charset="-120"/>
-              </a:rPr>
-              <a:t>尚未完成最终判决</a:t>
+              <a:t>整轮时间全部花在 host 侧提交调用里（submit ≈ wall、wait = sync ≈ 0）⇒ 卡点在引擎自身的提交路径（驱动内部阻塞）——</a:t>
             </a:r>
             <a:pPr indent="0" marL="0">
               <a:buNone/>
@@ -5368,7 +5375,7 @@
                 <a:ea typeface="Microsoft YaHei" pitchFamily="34" charset="-122"/>
                 <a:cs typeface="Microsoft YaHei" pitchFamily="34" charset="-120"/>
               </a:rPr>
-              <a:t>（复现窗口小时级；守望 + 自动采样持续抓取中）。</a:t>
+              <a:t>外部算力 / 拷贝 / 节流全部正常。</a:t>
             </a:r>
             <a:endParaRPr lang="en-US" sz="1000" dirty="0"/>
           </a:p>
@@ -5407,7 +5414,7 @@
                 <a:ea typeface="Microsoft YaHei" pitchFamily="34" charset="-122"/>
                 <a:cs typeface="Microsoft YaHei" pitchFamily="34" charset="-120"/>
               </a:rPr>
-              <a:t>缓解与应对：全时段监控与自动检测 · 自愈机制 · 现成关闭开关兜底 · 候选修法（等待触发时机 / 逐点确认链上等待点）。</a:t>
+              <a:t>里程碑：可按需复现（约 1.2 GiB 外部显存压力）；3 步、约 2 分钟的最小复现协议已备好供上游 / 驱动侧研判。仍待解：自然状态下的触发源。</a:t>
             </a:r>
             <a:endParaRPr lang="en-US" sz="1050" dirty="0"/>
           </a:p>
@@ -7223,7 +7230,7 @@
                 <a:ea typeface="Microsoft YaHei" pitchFamily="34" charset="-122"/>
                 <a:cs typeface="Microsoft YaHei" pitchFamily="34" charset="-120"/>
               </a:rPr>
-              <a:t>完成最大嫌疑（PDL 等待路径）的最终判决与修法</a:t>
+              <a:t>驱动提交阻塞的上游定位（3 步最小复现已备）；自然触发源追查</a:t>
             </a:r>
             <a:endParaRPr lang="en-US" sz="950" dirty="0"/>
           </a:p>

--- a/docs/异步页流水-技术说明.pptx
+++ b/docs/异步页流水-技术说明.pptx
@@ -6122,7 +6122,7 @@
                 <a:ea typeface="Microsoft YaHei" pitchFamily="34" charset="-122"/>
                 <a:cs typeface="Microsoft YaHei" pitchFamily="34" charset="-120"/>
               </a:rPr>
-              <a:t>我们的 demote/restore 仍是拷贝；原作者已实现“所有权移动”——正在追赶</a:t>
+              <a:t>仍是拷贝；原作者已实现“所有权移动”——追赶中。落地后用按需协议做拷贝版 vs 移动版对照（入谷率/谷深），并测对暴露面的作用</a:t>
             </a:r>
             <a:endParaRPr lang="en-US" sz="950" dirty="0"/>
           </a:p>

--- a/docs/异步页流水-技术说明.pptx
+++ b/docs/异步页流水-技术说明.pptx
@@ -20,9 +20,11 @@
     <p:sldId id="268" r:id="rId14"/>
     <p:sldId id="269" r:id="rId15"/>
     <p:sldId id="270" r:id="rId16"/>
+    <p:sldId id="271" r:id="rId17"/>
+    <p:sldId id="272" r:id="rId18"/>
   </p:sldIdLst>
   <p:notesMasterIdLst>
-    <p:notesMasterId r:id="rId17"/>
+    <p:notesMasterId r:id="rId19"/>
   </p:notesMasterIdLst>
   <p:sldSz cx="9144000" cy="5143500"/>
   <p:notesSz cx="5143500" cy="9144000"/>
@@ -1068,6 +1070,182 @@
             <a:fld id="{F7021451-1387-4CA6-816F-3879F97B5CBC}" type="slidenum">
               <a:rPr lang="en-US"/>
               <a:t>15</a:t>
+            </a:fld>
+            <a:endParaRPr lang="en-US"/>
+          </a:p>
+        </p:txBody>
+      </p:sp>
+    </p:spTree>
+    <p:extLst>
+      <p:ext uri="{BB962C8B-B14F-4D97-AF65-F5344CB8AC3E}">
+        <p14:creationId xmlns:p14="http://schemas.microsoft.com/office/powerpoint/2010/main" val="1024086991"/>
+      </p:ext>
+    </p:extLst>
+  </p:cSld>
+  <p:clrMapOvr>
+    <a:masterClrMapping/>
+  </p:clrMapOvr>
+</p:notes>
+</file>
+
+<file path=ppt/notesSlides/notesSlide16.xml><?xml version="1.0" encoding="utf-8"?>
+<p:notes xmlns:a="http://schemas.openxmlformats.org/drawingml/2006/main" xmlns:r="http://schemas.openxmlformats.org/officeDocument/2006/relationships" xmlns:p="http://schemas.openxmlformats.org/presentationml/2006/main">
+  <p:cSld>
+    <p:spTree>
+      <p:nvGrpSpPr>
+        <p:cNvPr id="1" name=""/>
+        <p:cNvGrpSpPr/>
+        <p:nvPr/>
+      </p:nvGrpSpPr>
+      <p:grpSpPr>
+        <a:xfrm>
+          <a:off x="0" y="0"/>
+          <a:ext cx="0" cy="0"/>
+          <a:chOff x="0" y="0"/>
+          <a:chExt cx="0" cy="0"/>
+        </a:xfrm>
+      </p:grpSpPr>
+      <p:sp>
+        <p:nvSpPr>
+          <p:cNvPr id="2" name="Slide Image Placeholder 1"/>
+          <p:cNvSpPr>
+            <a:spLocks noGrp="1" noRot="1" noChangeAspect="1"/>
+          </p:cNvSpPr>
+          <p:nvPr>
+            <p:ph type="sldImg"/>
+          </p:nvPr>
+        </p:nvSpPr>
+        <p:spPr/>
+      </p:sp>
+      <p:sp>
+        <p:nvSpPr>
+          <p:cNvPr id="3" name="Notes Placeholder 2"/>
+          <p:cNvSpPr>
+            <a:spLocks noGrp="1"/>
+          </p:cNvSpPr>
+          <p:nvPr>
+            <p:ph type="body" idx="1"/>
+          </p:nvPr>
+        </p:nvSpPr>
+        <p:spPr/>
+        <p:txBody>
+          <a:bodyPr/>
+          <a:lstStyle/>
+          <a:p>
+            <a:r>
+              <a:rPr lang="en-US" dirty="0"/>
+              <a:t/>
+            </a:r>
+            <a:endParaRPr lang="en-US" dirty="0"/>
+          </a:p>
+        </p:txBody>
+      </p:sp>
+      <p:sp>
+        <p:nvSpPr>
+          <p:cNvPr id="4" name="Slide Number Placeholder 3"/>
+          <p:cNvSpPr>
+            <a:spLocks noGrp="1"/>
+          </p:cNvSpPr>
+          <p:nvPr>
+            <p:ph type="sldNum" sz="quarter" idx="10"/>
+          </p:nvPr>
+        </p:nvSpPr>
+        <p:spPr/>
+        <p:txBody>
+          <a:bodyPr/>
+          <a:lstStyle/>
+          <a:p>
+            <a:fld id="{F7021451-1387-4CA6-816F-3879F97B5CBC}" type="slidenum">
+              <a:rPr lang="en-US"/>
+              <a:t>16</a:t>
+            </a:fld>
+            <a:endParaRPr lang="en-US"/>
+          </a:p>
+        </p:txBody>
+      </p:sp>
+    </p:spTree>
+    <p:extLst>
+      <p:ext uri="{BB962C8B-B14F-4D97-AF65-F5344CB8AC3E}">
+        <p14:creationId xmlns:p14="http://schemas.microsoft.com/office/powerpoint/2010/main" val="1024086991"/>
+      </p:ext>
+    </p:extLst>
+  </p:cSld>
+  <p:clrMapOvr>
+    <a:masterClrMapping/>
+  </p:clrMapOvr>
+</p:notes>
+</file>
+
+<file path=ppt/notesSlides/notesSlide17.xml><?xml version="1.0" encoding="utf-8"?>
+<p:notes xmlns:a="http://schemas.openxmlformats.org/drawingml/2006/main" xmlns:r="http://schemas.openxmlformats.org/officeDocument/2006/relationships" xmlns:p="http://schemas.openxmlformats.org/presentationml/2006/main">
+  <p:cSld>
+    <p:spTree>
+      <p:nvGrpSpPr>
+        <p:cNvPr id="1" name=""/>
+        <p:cNvGrpSpPr/>
+        <p:nvPr/>
+      </p:nvGrpSpPr>
+      <p:grpSpPr>
+        <a:xfrm>
+          <a:off x="0" y="0"/>
+          <a:ext cx="0" cy="0"/>
+          <a:chOff x="0" y="0"/>
+          <a:chExt cx="0" cy="0"/>
+        </a:xfrm>
+      </p:grpSpPr>
+      <p:sp>
+        <p:nvSpPr>
+          <p:cNvPr id="2" name="Slide Image Placeholder 1"/>
+          <p:cNvSpPr>
+            <a:spLocks noGrp="1" noRot="1" noChangeAspect="1"/>
+          </p:cNvSpPr>
+          <p:nvPr>
+            <p:ph type="sldImg"/>
+          </p:nvPr>
+        </p:nvSpPr>
+        <p:spPr/>
+      </p:sp>
+      <p:sp>
+        <p:nvSpPr>
+          <p:cNvPr id="3" name="Notes Placeholder 2"/>
+          <p:cNvSpPr>
+            <a:spLocks noGrp="1"/>
+          </p:cNvSpPr>
+          <p:nvPr>
+            <p:ph type="body" idx="1"/>
+          </p:nvPr>
+        </p:nvSpPr>
+        <p:spPr/>
+        <p:txBody>
+          <a:bodyPr/>
+          <a:lstStyle/>
+          <a:p>
+            <a:r>
+              <a:rPr lang="en-US" dirty="0"/>
+              <a:t/>
+            </a:r>
+            <a:endParaRPr lang="en-US" dirty="0"/>
+          </a:p>
+        </p:txBody>
+      </p:sp>
+      <p:sp>
+        <p:nvSpPr>
+          <p:cNvPr id="4" name="Slide Number Placeholder 3"/>
+          <p:cNvSpPr>
+            <a:spLocks noGrp="1"/>
+          </p:cNvSpPr>
+          <p:nvPr>
+            <p:ph type="sldNum" sz="quarter" idx="10"/>
+          </p:nvPr>
+        </p:nvSpPr>
+        <p:spPr/>
+        <p:txBody>
+          <a:bodyPr/>
+          <a:lstStyle/>
+          <a:p>
+            <a:fld id="{F7021451-1387-4CA6-816F-3879F97B5CBC}" type="slidenum">
+              <a:rPr lang="en-US"/>
+              <a:t>17</a:t>
             </a:fld>
             <a:endParaRPr lang="en-US"/>
           </a:p>
@@ -2769,7 +2947,7 @@
                 <a:ea typeface="Microsoft YaHei" pitchFamily="34" charset="-122"/>
                 <a:cs typeface="Microsoft YaHei" pitchFamily="34" charset="-120"/>
               </a:rPr>
-              <a:t>目前实现的阶段：第一阶段已交付</a:t>
+              <a:t>目前实现的阶段（截至 2026-10-13 · v2 转正时点）</a:t>
             </a:r>
             <a:endParaRPr lang="en-US" sz="2400" dirty="0"/>
           </a:p>
@@ -3779,7 +3957,46 @@
         </p:nvSpPr>
         <p:spPr>
           <a:xfrm>
-            <a:off x="548640" y="4114800"/>
+            <a:off x="548640" y="3931920"/>
+            <a:ext cx="8046720" cy="274320"/>
+          </a:xfrm>
+          <a:prstGeom prst="rect">
+            <a:avLst/>
+          </a:prstGeom>
+          <a:noFill/>
+          <a:ln/>
+        </p:spPr>
+        <p:txBody>
+          <a:bodyPr wrap="square" lIns="0" tIns="0" rIns="0" bIns="0" rtlCol="0" anchor="ctr"/>
+          <a:lstStyle/>
+          <a:p>
+            <a:pPr indent="0" marL="0">
+              <a:buNone/>
+            </a:pPr>
+            <a:r>
+              <a:rPr lang="en-US" sz="1000" dirty="0">
+                <a:solidFill>
+                  <a:srgbClr val="6B7C8A"/>
+                </a:solidFill>
+                <a:latin typeface="Microsoft YaHei" pitchFamily="34" charset="0"/>
+                <a:ea typeface="Microsoft YaHei" pitchFamily="34" charset="-122"/>
+                <a:cs typeface="Microsoft YaHei" pitchFamily="34" charset="-120"/>
+              </a:rPr>
+              <a:t>↑ 以上为 v2 转正时点（2026-10-13）的快照；其后的进展（按需复现 / 机制定位 / 深轮 AB 铁证）见第 13-14 页。</a:t>
+            </a:r>
+            <a:endParaRPr lang="en-US" sz="1000" dirty="0"/>
+          </a:p>
+        </p:txBody>
+      </p:sp>
+      <p:sp>
+        <p:nvSpPr>
+          <p:cNvPr id="7" name="Text 4"/>
+          <p:cNvSpPr/>
+          <p:nvPr/>
+        </p:nvSpPr>
+        <p:spPr>
+          <a:xfrm>
+            <a:off x="548640" y="4224528"/>
             <a:ext cx="8046720" cy="457200"/>
           </a:xfrm>
           <a:prstGeom prst="rect">
@@ -3812,7 +4029,7 @@
       </p:sp>
       <p:sp>
         <p:nvSpPr>
-          <p:cNvPr id="7" name="Text 4"/>
+          <p:cNvPr id="8" name="Text 5"/>
           <p:cNvSpPr/>
           <p:nvPr/>
         </p:nvSpPr>
@@ -3851,7 +4068,7 @@
       </p:sp>
       <p:sp>
         <p:nvSpPr>
-          <p:cNvPr id="8" name="Text 5"/>
+          <p:cNvPr id="9" name="Text 6"/>
           <p:cNvSpPr/>
           <p:nvPr/>
         </p:nvSpPr>
@@ -5583,7 +5800,7 @@
                 <a:ea typeface="Microsoft YaHei" pitchFamily="34" charset="-122"/>
                 <a:cs typeface="Microsoft YaHei" pitchFamily="34" charset="-120"/>
               </a:rPr>
-              <a:t>OPEN ISSUES</a:t>
+              <a:t>MANHUNT</a:t>
             </a:r>
             <a:endParaRPr lang="en-US" sz="1100" dirty="0"/>
           </a:p>
@@ -5622,7 +5839,7 @@
                 <a:ea typeface="Microsoft YaHei" pitchFamily="34" charset="-122"/>
                 <a:cs typeface="Microsoft YaHei" pitchFamily="34" charset="-120"/>
               </a:rPr>
-              <a:t>其余问题（诚实清单）</a:t>
+              <a:t>追捕进行时：真凶未获，但包围圈在收紧</a:t>
             </a:r>
             <a:endParaRPr lang="en-US" sz="2400" dirty="0"/>
           </a:p>
@@ -5630,14 +5847,81 @@
       </p:sp>
       <p:sp>
         <p:nvSpPr>
-          <p:cNvPr id="5" name="Shape 3"/>
-          <p:cNvSpPr/>
-          <p:nvPr/>
-        </p:nvSpPr>
-        <p:spPr>
-          <a:xfrm>
-            <a:off x="548640" y="1188720"/>
-            <a:ext cx="3840480" cy="950976"/>
+          <p:cNvPr id="5" name="Text 3"/>
+          <p:cNvSpPr/>
+          <p:nvPr/>
+        </p:nvSpPr>
+        <p:spPr>
+          <a:xfrm>
+            <a:off x="548640" y="1024128"/>
+            <a:ext cx="8046720" cy="512064"/>
+          </a:xfrm>
+          <a:prstGeom prst="rect">
+            <a:avLst/>
+          </a:prstGeom>
+          <a:noFill/>
+          <a:ln/>
+        </p:spPr>
+        <p:txBody>
+          <a:bodyPr wrap="square" lIns="0" tIns="0" rIns="0" bIns="0" rtlCol="0" anchor="ctr"/>
+          <a:lstStyle/>
+          <a:p>
+            <a:pPr indent="0" marL="0">
+              <a:buNone/>
+            </a:pPr>
+            <a:r>
+              <a:rPr lang="en-US" sz="1050" dirty="0">
+                <a:solidFill>
+                  <a:srgbClr val="22303C"/>
+                </a:solidFill>
+                <a:latin typeface="Microsoft YaHei" pitchFamily="34" charset="0"/>
+                <a:ea typeface="Microsoft YaHei" pitchFamily="34" charset="-122"/>
+                <a:cs typeface="Microsoft YaHei" pitchFamily="34" charset="-120"/>
+              </a:rPr>
+              <a:t>追凶已连续 </a:t>
+            </a:r>
+            <a:pPr indent="0" marL="0">
+              <a:buNone/>
+            </a:pPr>
+            <a:r>
+              <a:rPr lang="en-US" sz="1050" b="1" dirty="0">
+                <a:solidFill>
+                  <a:srgbClr val="B07A00"/>
+                </a:solidFill>
+                <a:latin typeface="Microsoft YaHei" pitchFamily="34" charset="0"/>
+                <a:ea typeface="Microsoft YaHei" pitchFamily="34" charset="-122"/>
+                <a:cs typeface="Microsoft YaHei" pitchFamily="34" charset="-120"/>
+              </a:rPr>
+              <a:t>120 小时（5 昼夜）不间断</a:t>
+            </a:r>
+            <a:pPr indent="0" marL="0">
+              <a:buNone/>
+            </a:pPr>
+            <a:r>
+              <a:rPr lang="en-US" sz="1050" dirty="0">
+                <a:solidFill>
+                  <a:srgbClr val="22303C"/>
+                </a:solidFill>
+                <a:latin typeface="Microsoft YaHei" pitchFamily="34" charset="0"/>
+                <a:ea typeface="Microsoft YaHei" pitchFamily="34" charset="-122"/>
+                <a:cs typeface="Microsoft YaHei" pitchFamily="34" charset="-120"/>
+              </a:rPr>
+              <a:t>（10-11 → 10-16）：全程工程化受控压测 + 现场取证；中途顺手修复和改进了大量问题（仪表缺陷、回归、自伤 bug 等）。今天（10-16）再次进行异步页流水极深池 AB 测试——结果见下页。</a:t>
+            </a:r>
+            <a:endParaRPr lang="en-US" sz="1050" dirty="0"/>
+          </a:p>
+        </p:txBody>
+      </p:sp>
+      <p:sp>
+        <p:nvSpPr>
+          <p:cNvPr id="6" name="Shape 4"/>
+          <p:cNvSpPr/>
+          <p:nvPr/>
+        </p:nvSpPr>
+        <p:spPr>
+          <a:xfrm>
+            <a:off x="548640" y="1627632"/>
+            <a:ext cx="3886200" cy="1664208"/>
           </a:xfrm>
           <a:prstGeom prst="rect">
             <a:avLst/>
@@ -5657,50 +5941,50 @@
       </p:sp>
       <p:sp>
         <p:nvSpPr>
-          <p:cNvPr id="6" name="Shape 4"/>
-          <p:cNvSpPr/>
-          <p:nvPr/>
-        </p:nvSpPr>
-        <p:spPr>
-          <a:xfrm>
-            <a:off x="548640" y="1188720"/>
-            <a:ext cx="91440" cy="950976"/>
+          <p:cNvPr id="7" name="Shape 5"/>
+          <p:cNvSpPr/>
+          <p:nvPr/>
+        </p:nvSpPr>
+        <p:spPr>
+          <a:xfrm>
+            <a:off x="548640" y="1627632"/>
+            <a:ext cx="3886200" cy="73152"/>
           </a:xfrm>
           <a:prstGeom prst="rect">
             <a:avLst/>
           </a:prstGeom>
           <a:solidFill>
-            <a:srgbClr val="C0504D"/>
+            <a:srgbClr val="0FA3A8"/>
           </a:solidFill>
           <a:ln/>
         </p:spPr>
       </p:sp>
       <p:sp>
         <p:nvSpPr>
-          <p:cNvPr id="7" name="Text 5"/>
-          <p:cNvSpPr/>
-          <p:nvPr/>
-        </p:nvSpPr>
-        <p:spPr>
-          <a:xfrm>
-            <a:off x="804672" y="1271016"/>
-            <a:ext cx="3383280" cy="292608"/>
-          </a:xfrm>
-          <a:prstGeom prst="rect">
-            <a:avLst/>
-          </a:prstGeom>
-          <a:noFill/>
-          <a:ln/>
-        </p:spPr>
-        <p:txBody>
-          <a:bodyPr wrap="square" lIns="0" tIns="0" rIns="0" bIns="0" rtlCol="0" anchor="ctr"/>
-          <a:lstStyle/>
-          <a:p>
-            <a:pPr indent="0" marL="0">
-              <a:buNone/>
-            </a:pPr>
-            <a:r>
-              <a:rPr lang="en-US" sz="1200" b="1" dirty="0">
+          <p:cNvPr id="8" name="Text 6"/>
+          <p:cNvSpPr/>
+          <p:nvPr/>
+        </p:nvSpPr>
+        <p:spPr>
+          <a:xfrm>
+            <a:off x="777240" y="1755648"/>
+            <a:ext cx="3474720" cy="292608"/>
+          </a:xfrm>
+          <a:prstGeom prst="rect">
+            <a:avLst/>
+          </a:prstGeom>
+          <a:noFill/>
+          <a:ln/>
+        </p:spPr>
+        <p:txBody>
+          <a:bodyPr wrap="square" lIns="0" tIns="0" rIns="0" bIns="0" rtlCol="0" anchor="ctr"/>
+          <a:lstStyle/>
+          <a:p>
+            <a:pPr indent="0" marL="0">
+              <a:buNone/>
+            </a:pPr>
+            <a:r>
+              <a:rPr lang="en-US" sz="1300" b="1" dirty="0">
                 <a:solidFill>
                   <a:srgbClr val="22303C"/>
                 </a:solidFill>
@@ -5708,38 +5992,42 @@
                 <a:ea typeface="Microsoft YaHei" pitchFamily="34" charset="-122"/>
                 <a:cs typeface="Microsoft YaHei" pitchFamily="34" charset="-120"/>
               </a:rPr>
-              <a:t>流水击穿边界</a:t>
-            </a:r>
-            <a:endParaRPr lang="en-US" sz="1200" dirty="0"/>
-          </a:p>
-        </p:txBody>
-      </p:sp>
-      <p:sp>
-        <p:nvSpPr>
-          <p:cNvPr id="8" name="Text 6"/>
-          <p:cNvSpPr/>
-          <p:nvPr/>
-        </p:nvSpPr>
-        <p:spPr>
-          <a:xfrm>
-            <a:off x="804672" y="1572768"/>
-            <a:ext cx="3520440" cy="548640"/>
-          </a:xfrm>
-          <a:prstGeom prst="rect">
-            <a:avLst/>
-          </a:prstGeom>
-          <a:noFill/>
-          <a:ln/>
-        </p:spPr>
-        <p:txBody>
-          <a:bodyPr wrap="square" lIns="0" tIns="0" rIns="0" bIns="0" rtlCol="0" anchor="ctr"/>
-          <a:lstStyle/>
-          <a:p>
-            <a:pPr indent="0" marL="0">
-              <a:buNone/>
-            </a:pPr>
-            <a:r>
-              <a:rPr lang="en-US" sz="950" dirty="0">
+              <a:t>异步的贡献：同条件对照铁证</a:t>
+            </a:r>
+            <a:endParaRPr lang="en-US" sz="1300" dirty="0"/>
+          </a:p>
+        </p:txBody>
+      </p:sp>
+      <p:sp>
+        <p:nvSpPr>
+          <p:cNvPr id="9" name="Text 7"/>
+          <p:cNvSpPr/>
+          <p:nvPr/>
+        </p:nvSpPr>
+        <p:spPr>
+          <a:xfrm>
+            <a:off x="777240" y="2066544"/>
+            <a:ext cx="3520440" cy="1170432"/>
+          </a:xfrm>
+          <a:prstGeom prst="rect">
+            <a:avLst/>
+          </a:prstGeom>
+          <a:noFill/>
+          <a:ln/>
+        </p:spPr>
+        <p:txBody>
+          <a:bodyPr wrap="square" lIns="0" tIns="0" rIns="0" bIns="0" rtlCol="0" anchor="ctr"/>
+          <a:lstStyle/>
+          <a:p>
+            <a:pPr marL="342900" indent="-342900">
+              <a:spcAft>
+                <a:spcPts val="400"/>
+              </a:spcAft>
+              <a:buSzPct val="100000"/>
+              <a:buChar char="▪"/>
+            </a:pPr>
+            <a:r>
+              <a:rPr lang="en-US" sz="900" dirty="0">
                 <a:solidFill>
                   <a:srgbClr val="6B7C8A"/>
                 </a:solidFill>
@@ -5747,22 +6035,85 @@
                 <a:ea typeface="Microsoft YaHei" pitchFamily="34" charset="-122"/>
                 <a:cs typeface="Microsoft YaHei" pitchFamily="34" charset="-120"/>
               </a:rPr>
-              <a:t>慢峰单批搬运 11.5-33.7 ms 会接近/超过解码步窗——异步方案固有的暴露窗口</a:t>
-            </a:r>
-            <a:endParaRPr lang="en-US" sz="950" dirty="0"/>
-          </a:p>
-        </p:txBody>
-      </p:sp>
-      <p:sp>
-        <p:nvSpPr>
-          <p:cNvPr id="9" name="Shape 7"/>
-          <p:cNvSpPr/>
-          <p:nvPr/>
-        </p:nvSpPr>
-        <p:spPr>
-          <a:xfrm>
-            <a:off x="4663440" y="1188720"/>
-            <a:ext cx="3840480" cy="950976"/>
+              <a:t>深轮重载（2.3-3.5× 超池）拆掉异步：decode 拖慢约 20%（r=0.80）</a:t>
+            </a:r>
+            <a:endParaRPr lang="en-US" sz="900" dirty="0"/>
+          </a:p>
+          <a:p>
+            <a:pPr marL="342900" indent="-342900">
+              <a:spcAft>
+                <a:spcPts val="400"/>
+              </a:spcAft>
+              <a:buSzPct val="100000"/>
+              <a:buChar char="▪"/>
+            </a:pPr>
+            <a:r>
+              <a:rPr lang="en-US" sz="900" dirty="0">
+                <a:solidFill>
+                  <a:srgbClr val="6B7C8A"/>
+                </a:solidFill>
+                <a:latin typeface="Microsoft YaHei" pitchFamily="34" charset="0"/>
+                <a:ea typeface="Microsoft YaHei" pitchFamily="34" charset="-122"/>
+                <a:cs typeface="Microsoft YaHei" pitchFamily="34" charset="-120"/>
+              </a:rPr>
+              <a:t>最深段（3.5× 超池）：≈ 2.0 倍差（235.6 vs 119.4 tok/s）</a:t>
+            </a:r>
+            <a:endParaRPr lang="en-US" sz="900" dirty="0"/>
+          </a:p>
+          <a:p>
+            <a:pPr marL="342900" indent="-342900">
+              <a:spcAft>
+                <a:spcPts val="400"/>
+              </a:spcAft>
+              <a:buSzPct val="100000"/>
+              <a:buChar char="▪"/>
+            </a:pPr>
+            <a:r>
+              <a:rPr lang="en-US" sz="900" dirty="0">
+                <a:solidFill>
+                  <a:srgbClr val="6B7C8A"/>
+                </a:solidFill>
+                <a:latin typeface="Microsoft YaHei" pitchFamily="34" charset="0"/>
+                <a:ea typeface="Microsoft YaHei" pitchFamily="34" charset="-122"/>
+                <a:cs typeface="Microsoft YaHei" pitchFamily="34" charset="-120"/>
+              </a:rPr>
+              <a:t>停机（ring STALL）：33 → 2 次（约 16×）</a:t>
+            </a:r>
+            <a:endParaRPr lang="en-US" sz="900" dirty="0"/>
+          </a:p>
+          <a:p>
+            <a:pPr marL="342900" indent="-342900">
+              <a:spcAft>
+                <a:spcPts val="400"/>
+              </a:spcAft>
+              <a:buSzPct val="100000"/>
+              <a:buChar char="▪"/>
+            </a:pPr>
+            <a:r>
+              <a:rPr lang="en-US" sz="900" dirty="0">
+                <a:solidFill>
+                  <a:srgbClr val="6B7C8A"/>
+                </a:solidFill>
+                <a:latin typeface="Microsoft YaHei" pitchFamily="34" charset="0"/>
+                <a:ea typeface="Microsoft YaHei" pitchFamily="34" charset="-122"/>
+                <a:cs typeface="Microsoft YaHei" pitchFamily="34" charset="-120"/>
+              </a:rPr>
+              <a:t>浅载/单发：打平（r=1.13）⇒ 口径：“看工作集深度”</a:t>
+            </a:r>
+            <a:endParaRPr lang="en-US" sz="900" dirty="0"/>
+          </a:p>
+        </p:txBody>
+      </p:sp>
+      <p:sp>
+        <p:nvSpPr>
+          <p:cNvPr id="10" name="Shape 8"/>
+          <p:cNvSpPr/>
+          <p:nvPr/>
+        </p:nvSpPr>
+        <p:spPr>
+          <a:xfrm>
+            <a:off x="4709160" y="1627632"/>
+            <a:ext cx="3886200" cy="1664208"/>
           </a:xfrm>
           <a:prstGeom prst="rect">
             <a:avLst/>
@@ -5782,50 +6133,50 @@
       </p:sp>
       <p:sp>
         <p:nvSpPr>
-          <p:cNvPr id="10" name="Shape 8"/>
-          <p:cNvSpPr/>
-          <p:nvPr/>
-        </p:nvSpPr>
-        <p:spPr>
-          <a:xfrm>
-            <a:off x="4663440" y="1188720"/>
-            <a:ext cx="91440" cy="950976"/>
+          <p:cNvPr id="11" name="Shape 9"/>
+          <p:cNvSpPr/>
+          <p:nvPr/>
+        </p:nvSpPr>
+        <p:spPr>
+          <a:xfrm>
+            <a:off x="4709160" y="1627632"/>
+            <a:ext cx="3886200" cy="73152"/>
           </a:xfrm>
           <a:prstGeom prst="rect">
             <a:avLst/>
           </a:prstGeom>
           <a:solidFill>
-            <a:srgbClr val="C0504D"/>
+            <a:srgbClr val="0E4C6E"/>
           </a:solidFill>
           <a:ln/>
         </p:spPr>
       </p:sp>
       <p:sp>
         <p:nvSpPr>
-          <p:cNvPr id="11" name="Text 9"/>
-          <p:cNvSpPr/>
-          <p:nvPr/>
-        </p:nvSpPr>
-        <p:spPr>
-          <a:xfrm>
-            <a:off x="4919472" y="1271016"/>
-            <a:ext cx="3383280" cy="292608"/>
-          </a:xfrm>
-          <a:prstGeom prst="rect">
-            <a:avLst/>
-          </a:prstGeom>
-          <a:noFill/>
-          <a:ln/>
-        </p:spPr>
-        <p:txBody>
-          <a:bodyPr wrap="square" lIns="0" tIns="0" rIns="0" bIns="0" rtlCol="0" anchor="ctr"/>
-          <a:lstStyle/>
-          <a:p>
-            <a:pPr indent="0" marL="0">
-              <a:buNone/>
-            </a:pPr>
-            <a:r>
-              <a:rPr lang="en-US" sz="1200" b="1" dirty="0">
+          <p:cNvPr id="12" name="Text 10"/>
+          <p:cNvSpPr/>
+          <p:nvPr/>
+        </p:nvSpPr>
+        <p:spPr>
+          <a:xfrm>
+            <a:off x="4937760" y="1755648"/>
+            <a:ext cx="3474720" cy="292608"/>
+          </a:xfrm>
+          <a:prstGeom prst="rect">
+            <a:avLst/>
+          </a:prstGeom>
+          <a:noFill/>
+          <a:ln/>
+        </p:spPr>
+        <p:txBody>
+          <a:bodyPr wrap="square" lIns="0" tIns="0" rIns="0" bIns="0" rtlCol="0" anchor="ctr"/>
+          <a:lstStyle/>
+          <a:p>
+            <a:pPr indent="0" marL="0">
+              <a:buNone/>
+            </a:pPr>
+            <a:r>
+              <a:rPr lang="en-US" sz="1300" b="1" dirty="0">
                 <a:solidFill>
                   <a:srgbClr val="22303C"/>
                 </a:solidFill>
@@ -5833,38 +6184,42 @@
                 <a:ea typeface="Microsoft YaHei" pitchFamily="34" charset="-122"/>
                 <a:cs typeface="Microsoft YaHei" pitchFamily="34" charset="-120"/>
               </a:rPr>
-              <a:t>深流水尚未转正</a:t>
-            </a:r>
-            <a:endParaRPr lang="en-US" sz="1200" dirty="0"/>
-          </a:p>
-        </p:txBody>
-      </p:sp>
-      <p:sp>
-        <p:nvSpPr>
-          <p:cNvPr id="12" name="Text 10"/>
-          <p:cNvSpPr/>
-          <p:nvPr/>
-        </p:nvSpPr>
-        <p:spPr>
-          <a:xfrm>
-            <a:off x="4919472" y="1572768"/>
-            <a:ext cx="3520440" cy="548640"/>
-          </a:xfrm>
-          <a:prstGeom prst="rect">
-            <a:avLst/>
-          </a:prstGeom>
-          <a:noFill/>
-          <a:ln/>
-        </p:spPr>
-        <p:txBody>
-          <a:bodyPr wrap="square" lIns="0" tIns="0" rIns="0" bIns="0" rtlCol="0" anchor="ctr"/>
-          <a:lstStyle/>
-          <a:p>
-            <a:pPr indent="0" marL="0">
-              <a:buNone/>
-            </a:pPr>
-            <a:r>
-              <a:rPr lang="en-US" sz="950" dirty="0">
+              <a:t>嫌疑范围：不断收紧的排除法</a:t>
+            </a:r>
+            <a:endParaRPr lang="en-US" sz="1300" dirty="0"/>
+          </a:p>
+        </p:txBody>
+      </p:sp>
+      <p:sp>
+        <p:nvSpPr>
+          <p:cNvPr id="13" name="Text 11"/>
+          <p:cNvSpPr/>
+          <p:nvPr/>
+        </p:nvSpPr>
+        <p:spPr>
+          <a:xfrm>
+            <a:off x="4937760" y="2066544"/>
+            <a:ext cx="3520440" cy="1170432"/>
+          </a:xfrm>
+          <a:prstGeom prst="rect">
+            <a:avLst/>
+          </a:prstGeom>
+          <a:noFill/>
+          <a:ln/>
+        </p:spPr>
+        <p:txBody>
+          <a:bodyPr wrap="square" lIns="0" tIns="0" rIns="0" bIns="0" rtlCol="0" anchor="ctr"/>
+          <a:lstStyle/>
+          <a:p>
+            <a:pPr marL="342900" indent="-342900">
+              <a:spcAft>
+                <a:spcPts val="400"/>
+              </a:spcAft>
+              <a:buSzPct val="100000"/>
+              <a:buChar char="▪"/>
+            </a:pPr>
+            <a:r>
+              <a:rPr lang="en-US" sz="900" dirty="0">
                 <a:solidFill>
                   <a:srgbClr val="6B7C8A"/>
                 </a:solidFill>
@@ -5872,85 +6227,155 @@
                 <a:ea typeface="Microsoft YaHei" pitchFamily="34" charset="-122"/>
                 <a:cs typeface="Microsoft YaHei" pitchFamily="34" charset="-120"/>
               </a:rPr>
-              <a:t>多批同时搬运在飞是摊薄击穿的方向，仍在验证中</a:t>
-            </a:r>
-            <a:endParaRPr lang="en-US" sz="950" dirty="0"/>
-          </a:p>
-        </p:txBody>
-      </p:sp>
-      <p:sp>
-        <p:nvSpPr>
-          <p:cNvPr id="13" name="Shape 11"/>
-          <p:cNvSpPr/>
-          <p:nvPr/>
-        </p:nvSpPr>
-        <p:spPr>
-          <a:xfrm>
-            <a:off x="548640" y="2286000"/>
-            <a:ext cx="3840480" cy="950976"/>
+              <a:t>已出局：PDL（原最大嫌疑）· 页中转 · 宿主路径 · 页档位 · 池大小 · 驱动节流——逐项实测</a:t>
+            </a:r>
+            <a:endParaRPr lang="en-US" sz="900" dirty="0"/>
+          </a:p>
+          <a:p>
+            <a:pPr marL="342900" indent="-342900">
+              <a:spcAft>
+                <a:spcPts val="400"/>
+              </a:spcAft>
+              <a:buSzPct val="100000"/>
+              <a:buChar char="▪"/>
+            </a:pPr>
+            <a:r>
+              <a:rPr lang="en-US" sz="900" dirty="0">
+                <a:solidFill>
+                  <a:srgbClr val="6B7C8A"/>
+                </a:solidFill>
+                <a:latin typeface="Microsoft YaHei" pitchFamily="34" charset="0"/>
+                <a:ea typeface="Microsoft YaHei" pitchFamily="34" charset="-122"/>
+                <a:cs typeface="Microsoft YaHei" pitchFamily="34" charset="-120"/>
+              </a:rPr>
+              <a:t>已锁定：时间全在 host 侧提交调用（submit≈wall）⇒ 驱动内部阻塞</a:t>
+            </a:r>
+            <a:endParaRPr lang="en-US" sz="900" dirty="0"/>
+          </a:p>
+          <a:p>
+            <a:pPr marL="342900" indent="-342900">
+              <a:spcAft>
+                <a:spcPts val="400"/>
+              </a:spcAft>
+              <a:buSzPct val="100000"/>
+              <a:buChar char="▪"/>
+            </a:pPr>
+            <a:r>
+              <a:rPr lang="en-US" sz="900" dirty="0">
+                <a:solidFill>
+                  <a:srgbClr val="6B7C8A"/>
+                </a:solidFill>
+                <a:latin typeface="Microsoft YaHei" pitchFamily="34" charset="0"/>
+                <a:ea typeface="Microsoft YaHei" pitchFamily="34" charset="-122"/>
+                <a:cs typeface="Microsoft YaHei" pitchFamily="34" charset="-120"/>
+              </a:rPr>
+              <a:t>已可按需复现（外部显存压力协议）：不再“等窗口”</a:t>
+            </a:r>
+            <a:endParaRPr lang="en-US" sz="900" dirty="0"/>
+          </a:p>
+          <a:p>
+            <a:pPr marL="342900" indent="-342900">
+              <a:spcAft>
+                <a:spcPts val="400"/>
+              </a:spcAft>
+              <a:buSzPct val="100000"/>
+              <a:buChar char="▪"/>
+            </a:pPr>
+            <a:r>
+              <a:rPr lang="en-US" sz="900" dirty="0">
+                <a:solidFill>
+                  <a:srgbClr val="6B7C8A"/>
+                </a:solidFill>
+                <a:latin typeface="Microsoft YaHei" pitchFamily="34" charset="0"/>
+                <a:ea typeface="Microsoft YaHei" pitchFamily="34" charset="-122"/>
+                <a:cs typeface="Microsoft YaHei" pitchFamily="34" charset="-120"/>
+              </a:rPr>
+              <a:t>现存嫌疑人：驱动提交路径内部 · 自然触发源 · 叠加态假说</a:t>
+            </a:r>
+            <a:endParaRPr lang="en-US" sz="900" dirty="0"/>
+          </a:p>
+        </p:txBody>
+      </p:sp>
+      <p:sp>
+        <p:nvSpPr>
+          <p:cNvPr id="14" name="Shape 12"/>
+          <p:cNvSpPr/>
+          <p:nvPr/>
+        </p:nvSpPr>
+        <p:spPr>
+          <a:xfrm>
+            <a:off x="548640" y="3419856"/>
+            <a:ext cx="8046720" cy="676656"/>
           </a:xfrm>
           <a:prstGeom prst="rect">
             <a:avLst/>
           </a:prstGeom>
           <a:solidFill>
-            <a:srgbClr val="FFFFFF"/>
+            <a:srgbClr val="FFF4DC"/>
           </a:solidFill>
           <a:ln/>
-          <a:effectLst>
-            <a:outerShdw sx="100000" sy="100000" kx="0" ky="0" algn="bl" rotWithShape="0" blurRad="76200" dist="25400" dir="8100000">
-              <a:srgbClr val="000000">
-                <a:alpha val="12000"/>
-              </a:srgbClr>
-            </a:outerShdw>
-          </a:effectLst>
-        </p:spPr>
-      </p:sp>
-      <p:sp>
-        <p:nvSpPr>
-          <p:cNvPr id="14" name="Shape 12"/>
-          <p:cNvSpPr/>
-          <p:nvPr/>
-        </p:nvSpPr>
-        <p:spPr>
-          <a:xfrm>
-            <a:off x="548640" y="2286000"/>
-            <a:ext cx="91440" cy="950976"/>
+        </p:spPr>
+      </p:sp>
+      <p:sp>
+        <p:nvSpPr>
+          <p:cNvPr id="15" name="Shape 13"/>
+          <p:cNvSpPr/>
+          <p:nvPr/>
+        </p:nvSpPr>
+        <p:spPr>
+          <a:xfrm>
+            <a:off x="548640" y="3419856"/>
+            <a:ext cx="109728" cy="676656"/>
           </a:xfrm>
           <a:prstGeom prst="rect">
             <a:avLst/>
           </a:prstGeom>
           <a:solidFill>
-            <a:srgbClr val="C0504D"/>
+            <a:srgbClr val="F59E0B"/>
           </a:solidFill>
           <a:ln/>
         </p:spPr>
       </p:sp>
       <p:sp>
         <p:nvSpPr>
-          <p:cNvPr id="15" name="Text 13"/>
-          <p:cNvSpPr/>
-          <p:nvPr/>
-        </p:nvSpPr>
-        <p:spPr>
-          <a:xfrm>
-            <a:off x="804672" y="2368296"/>
-            <a:ext cx="3383280" cy="292608"/>
-          </a:xfrm>
-          <a:prstGeom prst="rect">
-            <a:avLst/>
-          </a:prstGeom>
-          <a:noFill/>
-          <a:ln/>
-        </p:spPr>
-        <p:txBody>
-          <a:bodyPr wrap="square" lIns="0" tIns="0" rIns="0" bIns="0" rtlCol="0" anchor="ctr"/>
-          <a:lstStyle/>
-          <a:p>
-            <a:pPr indent="0" marL="0">
-              <a:buNone/>
-            </a:pPr>
-            <a:r>
-              <a:rPr lang="en-US" sz="1200" b="1" dirty="0">
+          <p:cNvPr id="16" name="Text 14"/>
+          <p:cNvSpPr/>
+          <p:nvPr/>
+        </p:nvSpPr>
+        <p:spPr>
+          <a:xfrm>
+            <a:off x="777240" y="3474720"/>
+            <a:ext cx="7680960" cy="585216"/>
+          </a:xfrm>
+          <a:prstGeom prst="rect">
+            <a:avLst/>
+          </a:prstGeom>
+          <a:noFill/>
+          <a:ln/>
+        </p:spPr>
+        <p:txBody>
+          <a:bodyPr wrap="square" lIns="0" tIns="0" rIns="0" bIns="0" rtlCol="0" anchor="ctr"/>
+          <a:lstStyle/>
+          <a:p>
+            <a:pPr indent="0" marL="0">
+              <a:buNone/>
+            </a:pPr>
+            <a:r>
+              <a:rPr lang="en-US" sz="1100" b="1" dirty="0">
+                <a:solidFill>
+                  <a:srgbClr val="B07A00"/>
+                </a:solidFill>
+                <a:latin typeface="Microsoft YaHei" pitchFamily="34" charset="0"/>
+                <a:ea typeface="Microsoft YaHei" pitchFamily="34" charset="-122"/>
+                <a:cs typeface="Microsoft YaHei" pitchFamily="34" charset="-120"/>
+              </a:rPr>
+              <a:t>真凶未获，但猎捕方式已从“等它出现”变成“随时造它出来”</a:t>
+            </a:r>
+            <a:pPr indent="0" marL="0">
+              <a:buNone/>
+            </a:pPr>
+            <a:r>
+              <a:rPr lang="en-US" sz="1100" dirty="0">
                 <a:solidFill>
                   <a:srgbClr val="22303C"/>
                 </a:solidFill>
@@ -5958,38 +6383,38 @@
                 <a:ea typeface="Microsoft YaHei" pitchFamily="34" charset="-122"/>
                 <a:cs typeface="Microsoft YaHei" pitchFamily="34" charset="-120"/>
               </a:rPr>
-              <a:t>SSD 层：有意取舍</a:t>
-            </a:r>
-            <a:endParaRPr lang="en-US" sz="1200" dirty="0"/>
-          </a:p>
-        </p:txBody>
-      </p:sp>
-      <p:sp>
-        <p:nvSpPr>
-          <p:cNvPr id="16" name="Text 14"/>
-          <p:cNvSpPr/>
-          <p:nvPr/>
-        </p:nvSpPr>
-        <p:spPr>
-          <a:xfrm>
-            <a:off x="804672" y="2670048"/>
-            <a:ext cx="3520440" cy="548640"/>
-          </a:xfrm>
-          <a:prstGeom prst="rect">
-            <a:avLst/>
-          </a:prstGeom>
-          <a:noFill/>
-          <a:ln/>
-        </p:spPr>
-        <p:txBody>
-          <a:bodyPr wrap="square" lIns="0" tIns="0" rIns="0" bIns="0" rtlCol="0" anchor="ctr"/>
-          <a:lstStyle/>
-          <a:p>
-            <a:pPr indent="0" marL="0">
-              <a:buNone/>
-            </a:pPr>
-            <a:r>
-              <a:rPr lang="en-US" sz="950" dirty="0">
+              <a:t>——剩下的问题：把提交路径上的具体阻塞点钉到行号级（驱动侧定位 + 现场取证并行推进）。</a:t>
+            </a:r>
+            <a:endParaRPr lang="en-US" sz="1100" dirty="0"/>
+          </a:p>
+        </p:txBody>
+      </p:sp>
+      <p:sp>
+        <p:nvSpPr>
+          <p:cNvPr id="17" name="Text 15"/>
+          <p:cNvSpPr/>
+          <p:nvPr/>
+        </p:nvSpPr>
+        <p:spPr>
+          <a:xfrm>
+            <a:off x="548640" y="4206240"/>
+            <a:ext cx="8046720" cy="411480"/>
+          </a:xfrm>
+          <a:prstGeom prst="rect">
+            <a:avLst/>
+          </a:prstGeom>
+          <a:noFill/>
+          <a:ln/>
+        </p:spPr>
+        <p:txBody>
+          <a:bodyPr wrap="square" lIns="0" tIns="0" rIns="0" bIns="0" rtlCol="0" anchor="ctr"/>
+          <a:lstStyle/>
+          <a:p>
+            <a:pPr indent="0" marL="0">
+              <a:buNone/>
+            </a:pPr>
+            <a:r>
+              <a:rPr lang="en-US" sz="1050" dirty="0">
                 <a:solidFill>
                   <a:srgbClr val="6B7C8A"/>
                 </a:solidFill>
@@ -5997,304 +6422,15 @@
                 <a:ea typeface="Microsoft YaHei" pitchFamily="34" charset="-122"/>
                 <a:cs typeface="Microsoft YaHei" pitchFamily="34" charset="-120"/>
               </a:rPr>
-              <a:t>全部 KV 可常驻 Host RAM（最坏 ≈8.6 GB / 本机 128 GB）——无容量必要，热成本 +11% 不划算</a:t>
-            </a:r>
-            <a:endParaRPr lang="en-US" sz="950" dirty="0"/>
-          </a:p>
-        </p:txBody>
-      </p:sp>
-      <p:sp>
-        <p:nvSpPr>
-          <p:cNvPr id="17" name="Shape 15"/>
-          <p:cNvSpPr/>
-          <p:nvPr/>
-        </p:nvSpPr>
-        <p:spPr>
-          <a:xfrm>
-            <a:off x="4663440" y="2286000"/>
-            <a:ext cx="3840480" cy="950976"/>
-          </a:xfrm>
-          <a:prstGeom prst="rect">
-            <a:avLst/>
-          </a:prstGeom>
-          <a:solidFill>
-            <a:srgbClr val="FFFFFF"/>
-          </a:solidFill>
-          <a:ln/>
-          <a:effectLst>
-            <a:outerShdw sx="100000" sy="100000" kx="0" ky="0" algn="bl" rotWithShape="0" blurRad="76200" dist="25400" dir="8100000">
-              <a:srgbClr val="000000">
-                <a:alpha val="12000"/>
-              </a:srgbClr>
-            </a:outerShdw>
-          </a:effectLst>
-        </p:spPr>
-      </p:sp>
-      <p:sp>
-        <p:nvSpPr>
-          <p:cNvPr id="18" name="Shape 16"/>
-          <p:cNvSpPr/>
-          <p:nvPr/>
-        </p:nvSpPr>
-        <p:spPr>
-          <a:xfrm>
-            <a:off x="4663440" y="2286000"/>
-            <a:ext cx="91440" cy="950976"/>
-          </a:xfrm>
-          <a:prstGeom prst="rect">
-            <a:avLst/>
-          </a:prstGeom>
-          <a:solidFill>
-            <a:srgbClr val="C0504D"/>
-          </a:solidFill>
-          <a:ln/>
-        </p:spPr>
-      </p:sp>
-      <p:sp>
-        <p:nvSpPr>
-          <p:cNvPr id="19" name="Text 17"/>
-          <p:cNvSpPr/>
-          <p:nvPr/>
-        </p:nvSpPr>
-        <p:spPr>
-          <a:xfrm>
-            <a:off x="4919472" y="2368296"/>
-            <a:ext cx="3383280" cy="292608"/>
-          </a:xfrm>
-          <a:prstGeom prst="rect">
-            <a:avLst/>
-          </a:prstGeom>
-          <a:noFill/>
-          <a:ln/>
-        </p:spPr>
-        <p:txBody>
-          <a:bodyPr wrap="square" lIns="0" tIns="0" rIns="0" bIns="0" rtlCol="0" anchor="ctr"/>
-          <a:lstStyle/>
-          <a:p>
-            <a:pPr indent="0" marL="0">
-              <a:buNone/>
-            </a:pPr>
-            <a:r>
-              <a:rPr lang="en-US" sz="1200" b="1" dirty="0">
-                <a:solidFill>
-                  <a:srgbClr val="22303C"/>
-                </a:solidFill>
-                <a:latin typeface="Microsoft YaHei" pitchFamily="34" charset="0"/>
-                <a:ea typeface="Microsoft YaHei" pitchFamily="34" charset="-122"/>
-                <a:cs typeface="Microsoft YaHei" pitchFamily="34" charset="-120"/>
-              </a:rPr>
-              <a:t>拷贝式搬运</a:t>
-            </a:r>
-            <a:endParaRPr lang="en-US" sz="1200" dirty="0"/>
-          </a:p>
-        </p:txBody>
-      </p:sp>
-      <p:sp>
-        <p:nvSpPr>
-          <p:cNvPr id="20" name="Text 18"/>
-          <p:cNvSpPr/>
-          <p:nvPr/>
-        </p:nvSpPr>
-        <p:spPr>
-          <a:xfrm>
-            <a:off x="4919472" y="2670048"/>
-            <a:ext cx="3520440" cy="548640"/>
-          </a:xfrm>
-          <a:prstGeom prst="rect">
-            <a:avLst/>
-          </a:prstGeom>
-          <a:noFill/>
-          <a:ln/>
-        </p:spPr>
-        <p:txBody>
-          <a:bodyPr wrap="square" lIns="0" tIns="0" rIns="0" bIns="0" rtlCol="0" anchor="ctr"/>
-          <a:lstStyle/>
-          <a:p>
-            <a:pPr indent="0" marL="0">
-              <a:buNone/>
-            </a:pPr>
-            <a:r>
-              <a:rPr lang="en-US" sz="950" dirty="0">
-                <a:solidFill>
-                  <a:srgbClr val="6B7C8A"/>
-                </a:solidFill>
-                <a:latin typeface="Microsoft YaHei" pitchFamily="34" charset="0"/>
-                <a:ea typeface="Microsoft YaHei" pitchFamily="34" charset="-122"/>
-                <a:cs typeface="Microsoft YaHei" pitchFamily="34" charset="-120"/>
-              </a:rPr>
-              <a:t>仍是拷贝；原作者已实现“所有权移动”——追赶中。落地后用按需协议做拷贝版 vs 移动版对照（入谷率/谷深），并测对暴露面的作用</a:t>
-            </a:r>
-            <a:endParaRPr lang="en-US" sz="950" dirty="0"/>
-          </a:p>
-        </p:txBody>
-      </p:sp>
-      <p:sp>
-        <p:nvSpPr>
-          <p:cNvPr id="21" name="Shape 19"/>
-          <p:cNvSpPr/>
-          <p:nvPr/>
-        </p:nvSpPr>
-        <p:spPr>
-          <a:xfrm>
-            <a:off x="548640" y="3383280"/>
-            <a:ext cx="3840480" cy="950976"/>
-          </a:xfrm>
-          <a:prstGeom prst="rect">
-            <a:avLst/>
-          </a:prstGeom>
-          <a:solidFill>
-            <a:srgbClr val="FFFFFF"/>
-          </a:solidFill>
-          <a:ln/>
-          <a:effectLst>
-            <a:outerShdw sx="100000" sy="100000" kx="0" ky="0" algn="bl" rotWithShape="0" blurRad="76200" dist="25400" dir="8100000">
-              <a:srgbClr val="000000">
-                <a:alpha val="12000"/>
-              </a:srgbClr>
-            </a:outerShdw>
-          </a:effectLst>
-        </p:spPr>
-      </p:sp>
-      <p:sp>
-        <p:nvSpPr>
-          <p:cNvPr id="22" name="Shape 20"/>
-          <p:cNvSpPr/>
-          <p:nvPr/>
-        </p:nvSpPr>
-        <p:spPr>
-          <a:xfrm>
-            <a:off x="548640" y="3383280"/>
-            <a:ext cx="91440" cy="950976"/>
-          </a:xfrm>
-          <a:prstGeom prst="rect">
-            <a:avLst/>
-          </a:prstGeom>
-          <a:solidFill>
-            <a:srgbClr val="C0504D"/>
-          </a:solidFill>
-          <a:ln/>
-        </p:spPr>
-      </p:sp>
-      <p:sp>
-        <p:nvSpPr>
-          <p:cNvPr id="23" name="Text 21"/>
-          <p:cNvSpPr/>
-          <p:nvPr/>
-        </p:nvSpPr>
-        <p:spPr>
-          <a:xfrm>
-            <a:off x="804672" y="3465576"/>
-            <a:ext cx="3383280" cy="292608"/>
-          </a:xfrm>
-          <a:prstGeom prst="rect">
-            <a:avLst/>
-          </a:prstGeom>
-          <a:noFill/>
-          <a:ln/>
-        </p:spPr>
-        <p:txBody>
-          <a:bodyPr wrap="square" lIns="0" tIns="0" rIns="0" bIns="0" rtlCol="0" anchor="ctr"/>
-          <a:lstStyle/>
-          <a:p>
-            <a:pPr indent="0" marL="0">
-              <a:buNone/>
-            </a:pPr>
-            <a:r>
-              <a:rPr lang="en-US" sz="1200" b="1" dirty="0">
-                <a:solidFill>
-                  <a:srgbClr val="22303C"/>
-                </a:solidFill>
-                <a:latin typeface="Microsoft YaHei" pitchFamily="34" charset="0"/>
-                <a:ea typeface="Microsoft YaHei" pitchFamily="34" charset="-122"/>
-                <a:cs typeface="Microsoft YaHei" pitchFamily="34" charset="-120"/>
-              </a:rPr>
-              <a:t>覆盖差异</a:t>
-            </a:r>
-            <a:endParaRPr lang="en-US" sz="1200" dirty="0"/>
-          </a:p>
-        </p:txBody>
-      </p:sp>
-      <p:sp>
-        <p:nvSpPr>
-          <p:cNvPr id="24" name="Text 22"/>
-          <p:cNvSpPr/>
-          <p:nvPr/>
-        </p:nvSpPr>
-        <p:spPr>
-          <a:xfrm>
-            <a:off x="804672" y="3767328"/>
-            <a:ext cx="3520440" cy="548640"/>
-          </a:xfrm>
-          <a:prstGeom prst="rect">
-            <a:avLst/>
-          </a:prstGeom>
-          <a:noFill/>
-          <a:ln/>
-        </p:spPr>
-        <p:txBody>
-          <a:bodyPr wrap="square" lIns="0" tIns="0" rIns="0" bIns="0" rtlCol="0" anchor="ctr"/>
-          <a:lstStyle/>
-          <a:p>
-            <a:pPr indent="0" marL="0">
-              <a:buNone/>
-            </a:pPr>
-            <a:r>
-              <a:rPr lang="en-US" sz="950" dirty="0">
-                <a:solidFill>
-                  <a:srgbClr val="6B7C8A"/>
-                </a:solidFill>
-                <a:latin typeface="Microsoft YaHei" pitchFamily="34" charset="0"/>
-                <a:ea typeface="Microsoft YaHei" pitchFamily="34" charset="-122"/>
-                <a:cs typeface="Microsoft YaHei" pitchFamily="34" charset="-120"/>
-              </a:rPr>
-              <a:t>我们深耕单路长上下文；原作者的多路并发场景我们覆盖不足</a:t>
-            </a:r>
-            <a:endParaRPr lang="en-US" sz="950" dirty="0"/>
-          </a:p>
-        </p:txBody>
-      </p:sp>
-      <p:sp>
-        <p:nvSpPr>
-          <p:cNvPr id="25" name="Text 23"/>
-          <p:cNvSpPr/>
-          <p:nvPr/>
-        </p:nvSpPr>
-        <p:spPr>
-          <a:xfrm>
-            <a:off x="548640" y="4480560"/>
-            <a:ext cx="8046720" cy="274320"/>
-          </a:xfrm>
-          <a:prstGeom prst="rect">
-            <a:avLst/>
-          </a:prstGeom>
-          <a:noFill/>
-          <a:ln/>
-        </p:spPr>
-        <p:txBody>
-          <a:bodyPr wrap="square" lIns="0" tIns="0" rIns="0" bIns="0" rtlCol="0" anchor="ctr"/>
-          <a:lstStyle/>
-          <a:p>
-            <a:pPr indent="0" marL="0">
-              <a:buNone/>
-            </a:pPr>
-            <a:r>
-              <a:rPr lang="en-US" sz="950" dirty="0">
-                <a:solidFill>
-                  <a:srgbClr val="6B7C8A"/>
-                </a:solidFill>
-                <a:latin typeface="Microsoft YaHei" pitchFamily="34" charset="0"/>
-                <a:ea typeface="Microsoft YaHei" pitchFamily="34" charset="-122"/>
-                <a:cs typeface="Microsoft YaHei" pitchFamily="34" charset="-120"/>
-              </a:rPr>
-              <a:t>注：“时段性慢态”已在上一页单独展开。</a:t>
-            </a:r>
-            <a:endParaRPr lang="en-US" sz="950" dirty="0"/>
-          </a:p>
-        </p:txBody>
-      </p:sp>
-      <p:sp>
-        <p:nvSpPr>
-          <p:cNvPr id="26" name="Text 24"/>
+              <a:t>备注：异步收益的对照证据口径 = n=3/臂、单机、健康期；谷期影响未覆盖（留作后续）。</a:t>
+            </a:r>
+            <a:endParaRPr lang="en-US" sz="1050" dirty="0"/>
+          </a:p>
+        </p:txBody>
+      </p:sp>
+      <p:sp>
+        <p:nvSpPr>
+          <p:cNvPr id="18" name="Text 16"/>
           <p:cNvSpPr/>
           <p:nvPr/>
         </p:nvSpPr>
@@ -6333,7 +6469,7 @@
       </p:sp>
       <p:sp>
         <p:nvSpPr>
-          <p:cNvPr id="27" name="Text 25"/>
+          <p:cNvPr id="19" name="Text 17"/>
           <p:cNvSpPr/>
           <p:nvPr/>
         </p:nvSpPr>
@@ -6455,7 +6591,7 @@
                 <a:ea typeface="Microsoft YaHei" pitchFamily="34" charset="-122"/>
                 <a:cs typeface="Microsoft YaHei" pitchFamily="34" charset="-120"/>
               </a:rPr>
-              <a:t>ROADMAP</a:t>
+              <a:t>EVIDENCE</a:t>
             </a:r>
             <a:endParaRPr lang="en-US" sz="1100" dirty="0"/>
           </a:p>
@@ -6494,144 +6630,2995 @@
                 <a:ea typeface="Microsoft YaHei" pitchFamily="34" charset="-122"/>
                 <a:cs typeface="Microsoft YaHei" pitchFamily="34" charset="-120"/>
               </a:rPr>
-              <a:t>未来的方向</a:t>
+              <a:t>异步贡献的判决实验：极深池 AB 对照（2026-10-16）</a:t>
             </a:r>
             <a:endParaRPr lang="en-US" sz="2400" dirty="0"/>
           </a:p>
         </p:txBody>
       </p:sp>
-      <p:sp>
-        <p:nvSpPr>
-          <p:cNvPr id="5" name="Shape 3"/>
-          <p:cNvSpPr/>
-          <p:nvPr/>
-        </p:nvSpPr>
-        <p:spPr>
-          <a:xfrm>
-            <a:off x="548640" y="1024128"/>
-            <a:ext cx="8046720" cy="530352"/>
-          </a:xfrm>
-          <a:prstGeom prst="rect">
-            <a:avLst/>
-          </a:prstGeom>
-          <a:solidFill>
-            <a:srgbClr val="FFFFFF"/>
-          </a:solidFill>
-          <a:ln/>
-          <a:effectLst>
-            <a:outerShdw sx="100000" sy="100000" kx="0" ky="0" algn="bl" rotWithShape="0" blurRad="76200" dist="25400" dir="8100000">
-              <a:srgbClr val="000000">
-                <a:alpha val="12000"/>
-              </a:srgbClr>
-            </a:outerShdw>
-          </a:effectLst>
-        </p:spPr>
-      </p:sp>
-      <p:sp>
-        <p:nvSpPr>
-          <p:cNvPr id="6" name="Shape 4"/>
-          <p:cNvSpPr/>
-          <p:nvPr/>
-        </p:nvSpPr>
-        <p:spPr>
-          <a:xfrm>
-            <a:off x="548640" y="1024128"/>
-            <a:ext cx="91440" cy="530352"/>
-          </a:xfrm>
-          <a:prstGeom prst="rect">
-            <a:avLst/>
-          </a:prstGeom>
-          <a:solidFill>
-            <a:srgbClr val="0FA3A8"/>
-          </a:solidFill>
-          <a:ln/>
-        </p:spPr>
-      </p:sp>
-      <p:sp>
-        <p:nvSpPr>
-          <p:cNvPr id="7" name="Shape 5"/>
-          <p:cNvSpPr/>
-          <p:nvPr/>
-        </p:nvSpPr>
-        <p:spPr>
-          <a:xfrm>
-            <a:off x="777240" y="1106424"/>
-            <a:ext cx="365760" cy="365760"/>
-          </a:xfrm>
-          <a:prstGeom prst="ellipse">
-            <a:avLst/>
-          </a:prstGeom>
-          <a:solidFill>
-            <a:srgbClr val="0FA3A8"/>
-          </a:solidFill>
-          <a:ln/>
-        </p:spPr>
-      </p:sp>
-      <p:sp>
-        <p:nvSpPr>
-          <p:cNvPr id="8" name="Text 6"/>
-          <p:cNvSpPr/>
-          <p:nvPr/>
-        </p:nvSpPr>
-        <p:spPr>
-          <a:xfrm>
-            <a:off x="777240" y="1115568"/>
-            <a:ext cx="365760" cy="347472"/>
-          </a:xfrm>
-          <a:prstGeom prst="rect">
-            <a:avLst/>
-          </a:prstGeom>
-          <a:noFill/>
-          <a:ln/>
-        </p:spPr>
-        <p:txBody>
-          <a:bodyPr wrap="square" lIns="0" tIns="0" rIns="0" bIns="0" rtlCol="0" anchor="ctr"/>
-          <a:lstStyle/>
-          <a:p>
-            <a:pPr algn="ctr" indent="0" marL="0">
-              <a:buNone/>
-            </a:pPr>
-            <a:r>
-              <a:rPr lang="en-US" sz="1250" b="1" dirty="0">
-                <a:solidFill>
-                  <a:srgbClr val="FFFFFF"/>
-                </a:solidFill>
-                <a:latin typeface="Microsoft YaHei" pitchFamily="34" charset="0"/>
-                <a:ea typeface="Microsoft YaHei" pitchFamily="34" charset="-122"/>
-                <a:cs typeface="Microsoft YaHei" pitchFamily="34" charset="-120"/>
-              </a:rPr>
-              <a:t>1</a:t>
-            </a:r>
-            <a:endParaRPr lang="en-US" sz="1250" dirty="0"/>
-          </a:p>
-        </p:txBody>
-      </p:sp>
-      <p:sp>
-        <p:nvSpPr>
-          <p:cNvPr id="9" name="Text 7"/>
-          <p:cNvSpPr/>
-          <p:nvPr/>
-        </p:nvSpPr>
-        <p:spPr>
-          <a:xfrm>
-            <a:off x="1325880" y="1069848"/>
-            <a:ext cx="2103120" cy="438912"/>
-          </a:xfrm>
-          <a:prstGeom prst="rect">
-            <a:avLst/>
-          </a:prstGeom>
-          <a:noFill/>
-          <a:ln/>
-        </p:spPr>
-        <p:txBody>
-          <a:bodyPr wrap="square" lIns="0" tIns="0" rIns="0" bIns="0" rtlCol="0" anchor="ctr"/>
-          <a:lstStyle/>
-          <a:p>
-            <a:pPr indent="0" marL="0">
-              <a:buNone/>
-            </a:pPr>
-            <a:r>
-              <a:rPr lang="en-US" sz="1200" b="1" dirty="0">
+      <p:graphicFrame>
+        <p:nvGraphicFramePr>
+          <p:cNvPr id="15" name="Table 0"/>
+          <p:cNvGraphicFramePr>
+            <a:graphicFrameLocks noGrp="1"/>
+          </p:cNvGraphicFramePr>
+          <p:nvPr>
+            <p:extLst>
+              <p:ext uri="{D42A27DB-BD31-4B8C-83A1-F6EECF244321}">
+                <p14:modId xmlns:p14="http://schemas.microsoft.com/office/powerpoint/2010/main" val="1579011935"/>
+              </p:ext>
+            </p:extLst>
+          </p:nvPr>
+        </p:nvGraphicFramePr>
+        <p:xfrm>
+          <a:off x="548640" y="1078992"/>
+          <a:ext cx="8046720" cy="914400"/>
+        </p:xfrm>
+        <a:graphic>
+          <a:graphicData uri="http://schemas.openxmlformats.org/drawingml/2006/table">
+            <a:tbl>
+              <a:tblPr/>
+              <a:tblGrid>
+                <a:gridCol w="1828800"/>
+                <a:gridCol w="548640"/>
+                <a:gridCol w="1645920"/>
+                <a:gridCol w="1371600"/>
+                <a:gridCol w="1371600"/>
+                <a:gridCol w="1280160"/>
+              </a:tblGrid>
+              <a:tr h="301752">
+                <a:tc>
+                  <a:txBody>
+                    <a:bodyPr/>
+                    <a:lstStyle/>
+                    <a:p>
+                      <a:pPr algn="ctr" indent="0" marL="0">
+                        <a:buNone/>
+                      </a:pPr>
+                      <a:r>
+                        <a:rPr lang="en-US" sz="950" b="1" dirty="0">
+                          <a:solidFill>
+                            <a:srgbClr val="FFFFFF"/>
+                          </a:solidFill>
+                          <a:latin typeface="Microsoft YaHei" pitchFamily="34" charset="0"/>
+                          <a:ea typeface="Microsoft YaHei" pitchFamily="34" charset="-122"/>
+                          <a:cs typeface="Microsoft YaHei" pitchFamily="34" charset="-120"/>
+                        </a:rPr>
+                        <a:t>臂</a:t>
+                      </a:r>
+                      <a:endParaRPr lang="en-US" sz="950" dirty="0">
+                        <a:latin typeface="Microsoft YaHei" charset="0"/>
+                        <a:ea typeface="Microsoft YaHei" charset="0"/>
+                        <a:cs typeface="Microsoft YaHei" charset="0"/>
+                      </a:endParaRPr>
+                    </a:p>
+                  </a:txBody>
+                  <a:tcPr marL="36576" marR="36576" marT="36576" marB="36576" anchor="ctr">
+                    <a:lnL w="6350" cap="flat" cmpd="sng" algn="ctr">
+                      <a:solidFill>
+                        <a:srgbClr val="D8E3EA"/>
+                      </a:solidFill>
+                      <a:prstDash val="solid"/>
+                      <a:round/>
+                      <a:headEnd type="none" w="med" len="med"/>
+                      <a:tailEnd type="none" w="med" len="med"/>
+                    </a:lnL>
+                    <a:lnR w="6350" cap="flat" cmpd="sng" algn="ctr">
+                      <a:solidFill>
+                        <a:srgbClr val="D8E3EA"/>
+                      </a:solidFill>
+                      <a:prstDash val="solid"/>
+                      <a:round/>
+                      <a:headEnd type="none" w="med" len="med"/>
+                      <a:tailEnd type="none" w="med" len="med"/>
+                    </a:lnR>
+                    <a:lnT w="6350" cap="flat" cmpd="sng" algn="ctr">
+                      <a:solidFill>
+                        <a:srgbClr val="D8E3EA"/>
+                      </a:solidFill>
+                      <a:prstDash val="solid"/>
+                      <a:round/>
+                      <a:headEnd type="none" w="med" len="med"/>
+                      <a:tailEnd type="none" w="med" len="med"/>
+                    </a:lnT>
+                    <a:lnB w="6350" cap="flat" cmpd="sng" algn="ctr">
+                      <a:solidFill>
+                        <a:srgbClr val="D8E3EA"/>
+                      </a:solidFill>
+                      <a:prstDash val="solid"/>
+                      <a:round/>
+                      <a:headEnd type="none" w="med" len="med"/>
+                      <a:tailEnd type="none" w="med" len="med"/>
+                    </a:lnB>
+                    <a:solidFill>
+                      <a:srgbClr val="0E4C6E"/>
+                    </a:solidFill>
+                  </a:tcPr>
+                </a:tc>
+                <a:tc>
+                  <a:txBody>
+                    <a:bodyPr/>
+                    <a:lstStyle/>
+                    <a:p>
+                      <a:pPr algn="ctr" indent="0" marL="0">
+                        <a:buNone/>
+                      </a:pPr>
+                      <a:r>
+                        <a:rPr lang="en-US" sz="950" b="1" dirty="0">
+                          <a:solidFill>
+                            <a:srgbClr val="FFFFFF"/>
+                          </a:solidFill>
+                          <a:latin typeface="Microsoft YaHei" pitchFamily="34" charset="0"/>
+                          <a:ea typeface="Microsoft YaHei" pitchFamily="34" charset="-122"/>
+                          <a:cs typeface="Microsoft YaHei" pitchFamily="34" charset="-120"/>
+                        </a:rPr>
+                        <a:t>run</a:t>
+                      </a:r>
+                      <a:endParaRPr lang="en-US" sz="950" dirty="0">
+                        <a:latin typeface="Microsoft YaHei" charset="0"/>
+                        <a:ea typeface="Microsoft YaHei" charset="0"/>
+                        <a:cs typeface="Microsoft YaHei" charset="0"/>
+                      </a:endParaRPr>
+                    </a:p>
+                  </a:txBody>
+                  <a:tcPr marL="36576" marR="36576" marT="36576" marB="36576" anchor="ctr">
+                    <a:lnL w="6350" cap="flat" cmpd="sng" algn="ctr">
+                      <a:solidFill>
+                        <a:srgbClr val="D8E3EA"/>
+                      </a:solidFill>
+                      <a:prstDash val="solid"/>
+                      <a:round/>
+                      <a:headEnd type="none" w="med" len="med"/>
+                      <a:tailEnd type="none" w="med" len="med"/>
+                    </a:lnL>
+                    <a:lnR w="6350" cap="flat" cmpd="sng" algn="ctr">
+                      <a:solidFill>
+                        <a:srgbClr val="D8E3EA"/>
+                      </a:solidFill>
+                      <a:prstDash val="solid"/>
+                      <a:round/>
+                      <a:headEnd type="none" w="med" len="med"/>
+                      <a:tailEnd type="none" w="med" len="med"/>
+                    </a:lnR>
+                    <a:lnT w="6350" cap="flat" cmpd="sng" algn="ctr">
+                      <a:solidFill>
+                        <a:srgbClr val="D8E3EA"/>
+                      </a:solidFill>
+                      <a:prstDash val="solid"/>
+                      <a:round/>
+                      <a:headEnd type="none" w="med" len="med"/>
+                      <a:tailEnd type="none" w="med" len="med"/>
+                    </a:lnT>
+                    <a:lnB w="6350" cap="flat" cmpd="sng" algn="ctr">
+                      <a:solidFill>
+                        <a:srgbClr val="D8E3EA"/>
+                      </a:solidFill>
+                      <a:prstDash val="solid"/>
+                      <a:round/>
+                      <a:headEnd type="none" w="med" len="med"/>
+                      <a:tailEnd type="none" w="med" len="med"/>
+                    </a:lnB>
+                    <a:solidFill>
+                      <a:srgbClr val="0E4C6E"/>
+                    </a:solidFill>
+                  </a:tcPr>
+                </a:tc>
+                <a:tc>
+                  <a:txBody>
+                    <a:bodyPr/>
+                    <a:lstStyle/>
+                    <a:p>
+                      <a:pPr algn="ctr" indent="0" marL="0">
+                        <a:buNone/>
+                      </a:pPr>
+                      <a:r>
+                        <a:rPr lang="en-US" sz="950" b="1" dirty="0">
+                          <a:solidFill>
+                            <a:srgbClr val="FFFFFF"/>
+                          </a:solidFill>
+                          <a:latin typeface="Microsoft YaHei" pitchFamily="34" charset="0"/>
+                          <a:ea typeface="Microsoft YaHei" pitchFamily="34" charset="-122"/>
+                          <a:cs typeface="Microsoft YaHei" pitchFamily="34" charset="-120"/>
+                        </a:rPr>
+                        <a:t>round1（1.15× 超池）</a:t>
+                      </a:r>
+                      <a:endParaRPr lang="en-US" sz="950" dirty="0">
+                        <a:latin typeface="Microsoft YaHei" charset="0"/>
+                        <a:ea typeface="Microsoft YaHei" charset="0"/>
+                        <a:cs typeface="Microsoft YaHei" charset="0"/>
+                      </a:endParaRPr>
+                    </a:p>
+                  </a:txBody>
+                  <a:tcPr marL="36576" marR="36576" marT="36576" marB="36576" anchor="ctr">
+                    <a:lnL w="6350" cap="flat" cmpd="sng" algn="ctr">
+                      <a:solidFill>
+                        <a:srgbClr val="D8E3EA"/>
+                      </a:solidFill>
+                      <a:prstDash val="solid"/>
+                      <a:round/>
+                      <a:headEnd type="none" w="med" len="med"/>
+                      <a:tailEnd type="none" w="med" len="med"/>
+                    </a:lnL>
+                    <a:lnR w="6350" cap="flat" cmpd="sng" algn="ctr">
+                      <a:solidFill>
+                        <a:srgbClr val="D8E3EA"/>
+                      </a:solidFill>
+                      <a:prstDash val="solid"/>
+                      <a:round/>
+                      <a:headEnd type="none" w="med" len="med"/>
+                      <a:tailEnd type="none" w="med" len="med"/>
+                    </a:lnR>
+                    <a:lnT w="6350" cap="flat" cmpd="sng" algn="ctr">
+                      <a:solidFill>
+                        <a:srgbClr val="D8E3EA"/>
+                      </a:solidFill>
+                      <a:prstDash val="solid"/>
+                      <a:round/>
+                      <a:headEnd type="none" w="med" len="med"/>
+                      <a:tailEnd type="none" w="med" len="med"/>
+                    </a:lnT>
+                    <a:lnB w="6350" cap="flat" cmpd="sng" algn="ctr">
+                      <a:solidFill>
+                        <a:srgbClr val="D8E3EA"/>
+                      </a:solidFill>
+                      <a:prstDash val="solid"/>
+                      <a:round/>
+                      <a:headEnd type="none" w="med" len="med"/>
+                      <a:tailEnd type="none" w="med" len="med"/>
+                    </a:lnB>
+                    <a:solidFill>
+                      <a:srgbClr val="0E4C6E"/>
+                    </a:solidFill>
+                  </a:tcPr>
+                </a:tc>
+                <a:tc>
+                  <a:txBody>
+                    <a:bodyPr/>
+                    <a:lstStyle/>
+                    <a:p>
+                      <a:pPr algn="ctr" indent="0" marL="0">
+                        <a:buNone/>
+                      </a:pPr>
+                      <a:r>
+                        <a:rPr lang="en-US" sz="950" b="1" dirty="0">
+                          <a:solidFill>
+                            <a:srgbClr val="FFFFFF"/>
+                          </a:solidFill>
+                          <a:latin typeface="Microsoft YaHei" pitchFamily="34" charset="0"/>
+                          <a:ea typeface="Microsoft YaHei" pitchFamily="34" charset="-122"/>
+                          <a:cs typeface="Microsoft YaHei" pitchFamily="34" charset="-120"/>
+                        </a:rPr>
+                        <a:t>round2（2.3×）</a:t>
+                      </a:r>
+                      <a:endParaRPr lang="en-US" sz="950" dirty="0">
+                        <a:latin typeface="Microsoft YaHei" charset="0"/>
+                        <a:ea typeface="Microsoft YaHei" charset="0"/>
+                        <a:cs typeface="Microsoft YaHei" charset="0"/>
+                      </a:endParaRPr>
+                    </a:p>
+                  </a:txBody>
+                  <a:tcPr marL="36576" marR="36576" marT="36576" marB="36576" anchor="ctr">
+                    <a:lnL w="6350" cap="flat" cmpd="sng" algn="ctr">
+                      <a:solidFill>
+                        <a:srgbClr val="D8E3EA"/>
+                      </a:solidFill>
+                      <a:prstDash val="solid"/>
+                      <a:round/>
+                      <a:headEnd type="none" w="med" len="med"/>
+                      <a:tailEnd type="none" w="med" len="med"/>
+                    </a:lnL>
+                    <a:lnR w="6350" cap="flat" cmpd="sng" algn="ctr">
+                      <a:solidFill>
+                        <a:srgbClr val="D8E3EA"/>
+                      </a:solidFill>
+                      <a:prstDash val="solid"/>
+                      <a:round/>
+                      <a:headEnd type="none" w="med" len="med"/>
+                      <a:tailEnd type="none" w="med" len="med"/>
+                    </a:lnR>
+                    <a:lnT w="6350" cap="flat" cmpd="sng" algn="ctr">
+                      <a:solidFill>
+                        <a:srgbClr val="D8E3EA"/>
+                      </a:solidFill>
+                      <a:prstDash val="solid"/>
+                      <a:round/>
+                      <a:headEnd type="none" w="med" len="med"/>
+                      <a:tailEnd type="none" w="med" len="med"/>
+                    </a:lnT>
+                    <a:lnB w="6350" cap="flat" cmpd="sng" algn="ctr">
+                      <a:solidFill>
+                        <a:srgbClr val="D8E3EA"/>
+                      </a:solidFill>
+                      <a:prstDash val="solid"/>
+                      <a:round/>
+                      <a:headEnd type="none" w="med" len="med"/>
+                      <a:tailEnd type="none" w="med" len="med"/>
+                    </a:lnB>
+                    <a:solidFill>
+                      <a:srgbClr val="0E4C6E"/>
+                    </a:solidFill>
+                  </a:tcPr>
+                </a:tc>
+                <a:tc>
+                  <a:txBody>
+                    <a:bodyPr/>
+                    <a:lstStyle/>
+                    <a:p>
+                      <a:pPr algn="ctr" indent="0" marL="0">
+                        <a:buNone/>
+                      </a:pPr>
+                      <a:r>
+                        <a:rPr lang="en-US" sz="950" b="1" dirty="0">
+                          <a:solidFill>
+                            <a:srgbClr val="FFFFFF"/>
+                          </a:solidFill>
+                          <a:latin typeface="Microsoft YaHei" pitchFamily="34" charset="0"/>
+                          <a:ea typeface="Microsoft YaHei" pitchFamily="34" charset="-122"/>
+                          <a:cs typeface="Microsoft YaHei" pitchFamily="34" charset="-120"/>
+                        </a:rPr>
+                        <a:t>round3（3.5×）</a:t>
+                      </a:r>
+                      <a:endParaRPr lang="en-US" sz="950" dirty="0">
+                        <a:latin typeface="Microsoft YaHei" charset="0"/>
+                        <a:ea typeface="Microsoft YaHei" charset="0"/>
+                        <a:cs typeface="Microsoft YaHei" charset="0"/>
+                      </a:endParaRPr>
+                    </a:p>
+                  </a:txBody>
+                  <a:tcPr marL="36576" marR="36576" marT="36576" marB="36576" anchor="ctr">
+                    <a:lnL w="6350" cap="flat" cmpd="sng" algn="ctr">
+                      <a:solidFill>
+                        <a:srgbClr val="D8E3EA"/>
+                      </a:solidFill>
+                      <a:prstDash val="solid"/>
+                      <a:round/>
+                      <a:headEnd type="none" w="med" len="med"/>
+                      <a:tailEnd type="none" w="med" len="med"/>
+                    </a:lnL>
+                    <a:lnR w="6350" cap="flat" cmpd="sng" algn="ctr">
+                      <a:solidFill>
+                        <a:srgbClr val="D8E3EA"/>
+                      </a:solidFill>
+                      <a:prstDash val="solid"/>
+                      <a:round/>
+                      <a:headEnd type="none" w="med" len="med"/>
+                      <a:tailEnd type="none" w="med" len="med"/>
+                    </a:lnR>
+                    <a:lnT w="6350" cap="flat" cmpd="sng" algn="ctr">
+                      <a:solidFill>
+                        <a:srgbClr val="D8E3EA"/>
+                      </a:solidFill>
+                      <a:prstDash val="solid"/>
+                      <a:round/>
+                      <a:headEnd type="none" w="med" len="med"/>
+                      <a:tailEnd type="none" w="med" len="med"/>
+                    </a:lnT>
+                    <a:lnB w="6350" cap="flat" cmpd="sng" algn="ctr">
+                      <a:solidFill>
+                        <a:srgbClr val="D8E3EA"/>
+                      </a:solidFill>
+                      <a:prstDash val="solid"/>
+                      <a:round/>
+                      <a:headEnd type="none" w="med" len="med"/>
+                      <a:tailEnd type="none" w="med" len="med"/>
+                    </a:lnB>
+                    <a:solidFill>
+                      <a:srgbClr val="0E4C6E"/>
+                    </a:solidFill>
+                  </a:tcPr>
+                </a:tc>
+                <a:tc>
+                  <a:txBody>
+                    <a:bodyPr/>
+                    <a:lstStyle/>
+                    <a:p>
+                      <a:pPr algn="ctr" indent="0" marL="0">
+                        <a:buNone/>
+                      </a:pPr>
+                      <a:r>
+                        <a:rPr lang="en-US" sz="950" b="1" dirty="0">
+                          <a:solidFill>
+                            <a:srgbClr val="FFFFFF"/>
+                          </a:solidFill>
+                          <a:latin typeface="Microsoft YaHei" pitchFamily="34" charset="0"/>
+                          <a:ea typeface="Microsoft YaHei" pitchFamily="34" charset="-122"/>
+                          <a:cs typeface="Microsoft YaHei" pitchFamily="34" charset="-120"/>
+                        </a:rPr>
+                        <a:t>深段均值(r2,r3)</a:t>
+                      </a:r>
+                      <a:endParaRPr lang="en-US" sz="950" dirty="0">
+                        <a:latin typeface="Microsoft YaHei" charset="0"/>
+                        <a:ea typeface="Microsoft YaHei" charset="0"/>
+                        <a:cs typeface="Microsoft YaHei" charset="0"/>
+                      </a:endParaRPr>
+                    </a:p>
+                  </a:txBody>
+                  <a:tcPr marL="36576" marR="36576" marT="36576" marB="36576" anchor="ctr">
+                    <a:lnL w="6350" cap="flat" cmpd="sng" algn="ctr">
+                      <a:solidFill>
+                        <a:srgbClr val="D8E3EA"/>
+                      </a:solidFill>
+                      <a:prstDash val="solid"/>
+                      <a:round/>
+                      <a:headEnd type="none" w="med" len="med"/>
+                      <a:tailEnd type="none" w="med" len="med"/>
+                    </a:lnL>
+                    <a:lnR w="6350" cap="flat" cmpd="sng" algn="ctr">
+                      <a:solidFill>
+                        <a:srgbClr val="D8E3EA"/>
+                      </a:solidFill>
+                      <a:prstDash val="solid"/>
+                      <a:round/>
+                      <a:headEnd type="none" w="med" len="med"/>
+                      <a:tailEnd type="none" w="med" len="med"/>
+                    </a:lnR>
+                    <a:lnT w="6350" cap="flat" cmpd="sng" algn="ctr">
+                      <a:solidFill>
+                        <a:srgbClr val="D8E3EA"/>
+                      </a:solidFill>
+                      <a:prstDash val="solid"/>
+                      <a:round/>
+                      <a:headEnd type="none" w="med" len="med"/>
+                      <a:tailEnd type="none" w="med" len="med"/>
+                    </a:lnT>
+                    <a:lnB w="6350" cap="flat" cmpd="sng" algn="ctr">
+                      <a:solidFill>
+                        <a:srgbClr val="D8E3EA"/>
+                      </a:solidFill>
+                      <a:prstDash val="solid"/>
+                      <a:round/>
+                      <a:headEnd type="none" w="med" len="med"/>
+                      <a:tailEnd type="none" w="med" len="med"/>
+                    </a:lnB>
+                    <a:solidFill>
+                      <a:srgbClr val="0E4C6E"/>
+                    </a:solidFill>
+                  </a:tcPr>
+                </a:tc>
+              </a:tr>
+              <a:tr h="301752">
+                <a:tc>
+                  <a:txBody>
+                    <a:bodyPr/>
+                    <a:lstStyle/>
+                    <a:p>
+                      <a:pPr algn="ctr" indent="0" marL="0">
+                        <a:buNone/>
+                      </a:pPr>
+                      <a:r>
+                        <a:rPr lang="en-US" sz="1050" dirty="0">
+                          <a:solidFill>
+                            <a:srgbClr val="22303C"/>
+                          </a:solidFill>
+                          <a:latin typeface="Microsoft YaHei" pitchFamily="34" charset="0"/>
+                          <a:ea typeface="Microsoft YaHei" pitchFamily="34" charset="-122"/>
+                          <a:cs typeface="Microsoft YaHei" pitchFamily="34" charset="-120"/>
+                        </a:rPr>
+                        <a:t>OFF（同步回退）</a:t>
+                      </a:r>
+                      <a:endParaRPr lang="en-US" sz="1050" dirty="0">
+                        <a:latin typeface="Microsoft YaHei" charset="0"/>
+                        <a:ea typeface="Microsoft YaHei" charset="0"/>
+                        <a:cs typeface="Microsoft YaHei" charset="0"/>
+                      </a:endParaRPr>
+                    </a:p>
+                  </a:txBody>
+                  <a:tcPr marL="36576" marR="36576" marT="36576" marB="36576" anchor="ctr">
+                    <a:lnL w="6350" cap="flat" cmpd="sng" algn="ctr">
+                      <a:solidFill>
+                        <a:srgbClr val="D8E3EA"/>
+                      </a:solidFill>
+                      <a:prstDash val="solid"/>
+                      <a:round/>
+                      <a:headEnd type="none" w="med" len="med"/>
+                      <a:tailEnd type="none" w="med" len="med"/>
+                    </a:lnL>
+                    <a:lnR w="6350" cap="flat" cmpd="sng" algn="ctr">
+                      <a:solidFill>
+                        <a:srgbClr val="D8E3EA"/>
+                      </a:solidFill>
+                      <a:prstDash val="solid"/>
+                      <a:round/>
+                      <a:headEnd type="none" w="med" len="med"/>
+                      <a:tailEnd type="none" w="med" len="med"/>
+                    </a:lnR>
+                    <a:lnT w="6350" cap="flat" cmpd="sng" algn="ctr">
+                      <a:solidFill>
+                        <a:srgbClr val="D8E3EA"/>
+                      </a:solidFill>
+                      <a:prstDash val="solid"/>
+                      <a:round/>
+                      <a:headEnd type="none" w="med" len="med"/>
+                      <a:tailEnd type="none" w="med" len="med"/>
+                    </a:lnT>
+                    <a:lnB w="6350" cap="flat" cmpd="sng" algn="ctr">
+                      <a:solidFill>
+                        <a:srgbClr val="D8E3EA"/>
+                      </a:solidFill>
+                      <a:prstDash val="solid"/>
+                      <a:round/>
+                      <a:headEnd type="none" w="med" len="med"/>
+                      <a:tailEnd type="none" w="med" len="med"/>
+                    </a:lnB>
+                    <a:solidFill>
+                      <a:srgbClr val="FFFFFF"/>
+                    </a:solidFill>
+                  </a:tcPr>
+                </a:tc>
+                <a:tc>
+                  <a:txBody>
+                    <a:bodyPr/>
+                    <a:lstStyle/>
+                    <a:p>
+                      <a:pPr algn="ctr" indent="0" marL="0">
+                        <a:buNone/>
+                      </a:pPr>
+                      <a:r>
+                        <a:rPr lang="en-US" sz="1050" dirty="0">
+                          <a:solidFill>
+                            <a:srgbClr val="22303C"/>
+                          </a:solidFill>
+                          <a:latin typeface="Microsoft YaHei" pitchFamily="34" charset="0"/>
+                          <a:ea typeface="Microsoft YaHei" pitchFamily="34" charset="-122"/>
+                          <a:cs typeface="Microsoft YaHei" pitchFamily="34" charset="-120"/>
+                        </a:rPr>
+                        <a:t>1</a:t>
+                      </a:r>
+                      <a:endParaRPr lang="en-US" sz="1050" dirty="0">
+                        <a:latin typeface="Microsoft YaHei" charset="0"/>
+                        <a:ea typeface="Microsoft YaHei" charset="0"/>
+                        <a:cs typeface="Microsoft YaHei" charset="0"/>
+                      </a:endParaRPr>
+                    </a:p>
+                  </a:txBody>
+                  <a:tcPr marL="36576" marR="36576" marT="36576" marB="36576" anchor="ctr">
+                    <a:lnL w="6350" cap="flat" cmpd="sng" algn="ctr">
+                      <a:solidFill>
+                        <a:srgbClr val="D8E3EA"/>
+                      </a:solidFill>
+                      <a:prstDash val="solid"/>
+                      <a:round/>
+                      <a:headEnd type="none" w="med" len="med"/>
+                      <a:tailEnd type="none" w="med" len="med"/>
+                    </a:lnL>
+                    <a:lnR w="6350" cap="flat" cmpd="sng" algn="ctr">
+                      <a:solidFill>
+                        <a:srgbClr val="D8E3EA"/>
+                      </a:solidFill>
+                      <a:prstDash val="solid"/>
+                      <a:round/>
+                      <a:headEnd type="none" w="med" len="med"/>
+                      <a:tailEnd type="none" w="med" len="med"/>
+                    </a:lnR>
+                    <a:lnT w="6350" cap="flat" cmpd="sng" algn="ctr">
+                      <a:solidFill>
+                        <a:srgbClr val="D8E3EA"/>
+                      </a:solidFill>
+                      <a:prstDash val="solid"/>
+                      <a:round/>
+                      <a:headEnd type="none" w="med" len="med"/>
+                      <a:tailEnd type="none" w="med" len="med"/>
+                    </a:lnT>
+                    <a:lnB w="6350" cap="flat" cmpd="sng" algn="ctr">
+                      <a:solidFill>
+                        <a:srgbClr val="D8E3EA"/>
+                      </a:solidFill>
+                      <a:prstDash val="solid"/>
+                      <a:round/>
+                      <a:headEnd type="none" w="med" len="med"/>
+                      <a:tailEnd type="none" w="med" len="med"/>
+                    </a:lnB>
+                    <a:solidFill>
+                      <a:srgbClr val="FFFFFF"/>
+                    </a:solidFill>
+                  </a:tcPr>
+                </a:tc>
+                <a:tc>
+                  <a:txBody>
+                    <a:bodyPr/>
+                    <a:lstStyle/>
+                    <a:p>
+                      <a:pPr algn="ctr" indent="0" marL="0">
+                        <a:buNone/>
+                      </a:pPr>
+                      <a:r>
+                        <a:rPr lang="en-US" sz="1050" dirty="0">
+                          <a:solidFill>
+                            <a:srgbClr val="22303C"/>
+                          </a:solidFill>
+                          <a:latin typeface="Microsoft YaHei" pitchFamily="34" charset="0"/>
+                          <a:ea typeface="Microsoft YaHei" pitchFamily="34" charset="-122"/>
+                          <a:cs typeface="Microsoft YaHei" pitchFamily="34" charset="-120"/>
+                        </a:rPr>
+                        <a:t>327.6</a:t>
+                      </a:r>
+                      <a:endParaRPr lang="en-US" sz="1050" dirty="0">
+                        <a:latin typeface="Microsoft YaHei" charset="0"/>
+                        <a:ea typeface="Microsoft YaHei" charset="0"/>
+                        <a:cs typeface="Microsoft YaHei" charset="0"/>
+                      </a:endParaRPr>
+                    </a:p>
+                  </a:txBody>
+                  <a:tcPr marL="36576" marR="36576" marT="36576" marB="36576" anchor="ctr">
+                    <a:lnL w="6350" cap="flat" cmpd="sng" algn="ctr">
+                      <a:solidFill>
+                        <a:srgbClr val="D8E3EA"/>
+                      </a:solidFill>
+                      <a:prstDash val="solid"/>
+                      <a:round/>
+                      <a:headEnd type="none" w="med" len="med"/>
+                      <a:tailEnd type="none" w="med" len="med"/>
+                    </a:lnL>
+                    <a:lnR w="6350" cap="flat" cmpd="sng" algn="ctr">
+                      <a:solidFill>
+                        <a:srgbClr val="D8E3EA"/>
+                      </a:solidFill>
+                      <a:prstDash val="solid"/>
+                      <a:round/>
+                      <a:headEnd type="none" w="med" len="med"/>
+                      <a:tailEnd type="none" w="med" len="med"/>
+                    </a:lnR>
+                    <a:lnT w="6350" cap="flat" cmpd="sng" algn="ctr">
+                      <a:solidFill>
+                        <a:srgbClr val="D8E3EA"/>
+                      </a:solidFill>
+                      <a:prstDash val="solid"/>
+                      <a:round/>
+                      <a:headEnd type="none" w="med" len="med"/>
+                      <a:tailEnd type="none" w="med" len="med"/>
+                    </a:lnT>
+                    <a:lnB w="6350" cap="flat" cmpd="sng" algn="ctr">
+                      <a:solidFill>
+                        <a:srgbClr val="D8E3EA"/>
+                      </a:solidFill>
+                      <a:prstDash val="solid"/>
+                      <a:round/>
+                      <a:headEnd type="none" w="med" len="med"/>
+                      <a:tailEnd type="none" w="med" len="med"/>
+                    </a:lnB>
+                    <a:solidFill>
+                      <a:srgbClr val="FFFFFF"/>
+                    </a:solidFill>
+                  </a:tcPr>
+                </a:tc>
+                <a:tc>
+                  <a:txBody>
+                    <a:bodyPr/>
+                    <a:lstStyle/>
+                    <a:p>
+                      <a:pPr algn="ctr" indent="0" marL="0">
+                        <a:buNone/>
+                      </a:pPr>
+                      <a:r>
+                        <a:rPr lang="en-US" sz="1050" dirty="0">
+                          <a:solidFill>
+                            <a:srgbClr val="22303C"/>
+                          </a:solidFill>
+                          <a:latin typeface="Microsoft YaHei" pitchFamily="34" charset="0"/>
+                          <a:ea typeface="Microsoft YaHei" pitchFamily="34" charset="-122"/>
+                          <a:cs typeface="Microsoft YaHei" pitchFamily="34" charset="-120"/>
+                        </a:rPr>
+                        <a:t>218.9</a:t>
+                      </a:r>
+                      <a:endParaRPr lang="en-US" sz="1050" dirty="0">
+                        <a:latin typeface="Microsoft YaHei" charset="0"/>
+                        <a:ea typeface="Microsoft YaHei" charset="0"/>
+                        <a:cs typeface="Microsoft YaHei" charset="0"/>
+                      </a:endParaRPr>
+                    </a:p>
+                  </a:txBody>
+                  <a:tcPr marL="36576" marR="36576" marT="36576" marB="36576" anchor="ctr">
+                    <a:lnL w="6350" cap="flat" cmpd="sng" algn="ctr">
+                      <a:solidFill>
+                        <a:srgbClr val="D8E3EA"/>
+                      </a:solidFill>
+                      <a:prstDash val="solid"/>
+                      <a:round/>
+                      <a:headEnd type="none" w="med" len="med"/>
+                      <a:tailEnd type="none" w="med" len="med"/>
+                    </a:lnL>
+                    <a:lnR w="6350" cap="flat" cmpd="sng" algn="ctr">
+                      <a:solidFill>
+                        <a:srgbClr val="D8E3EA"/>
+                      </a:solidFill>
+                      <a:prstDash val="solid"/>
+                      <a:round/>
+                      <a:headEnd type="none" w="med" len="med"/>
+                      <a:tailEnd type="none" w="med" len="med"/>
+                    </a:lnR>
+                    <a:lnT w="6350" cap="flat" cmpd="sng" algn="ctr">
+                      <a:solidFill>
+                        <a:srgbClr val="D8E3EA"/>
+                      </a:solidFill>
+                      <a:prstDash val="solid"/>
+                      <a:round/>
+                      <a:headEnd type="none" w="med" len="med"/>
+                      <a:tailEnd type="none" w="med" len="med"/>
+                    </a:lnT>
+                    <a:lnB w="6350" cap="flat" cmpd="sng" algn="ctr">
+                      <a:solidFill>
+                        <a:srgbClr val="D8E3EA"/>
+                      </a:solidFill>
+                      <a:prstDash val="solid"/>
+                      <a:round/>
+                      <a:headEnd type="none" w="med" len="med"/>
+                      <a:tailEnd type="none" w="med" len="med"/>
+                    </a:lnB>
+                    <a:solidFill>
+                      <a:srgbClr val="FFFFFF"/>
+                    </a:solidFill>
+                  </a:tcPr>
+                </a:tc>
+                <a:tc>
+                  <a:txBody>
+                    <a:bodyPr/>
+                    <a:lstStyle/>
+                    <a:p>
+                      <a:pPr algn="ctr" indent="0" marL="0">
+                        <a:buNone/>
+                      </a:pPr>
+                      <a:r>
+                        <a:rPr lang="en-US" sz="1050" dirty="0">
+                          <a:solidFill>
+                            <a:srgbClr val="22303C"/>
+                          </a:solidFill>
+                          <a:latin typeface="Microsoft YaHei" pitchFamily="34" charset="0"/>
+                          <a:ea typeface="Microsoft YaHei" pitchFamily="34" charset="-122"/>
+                          <a:cs typeface="Microsoft YaHei" pitchFamily="34" charset="-120"/>
+                        </a:rPr>
+                        <a:t>228.1</a:t>
+                      </a:r>
+                      <a:endParaRPr lang="en-US" sz="1050" dirty="0">
+                        <a:latin typeface="Microsoft YaHei" charset="0"/>
+                        <a:ea typeface="Microsoft YaHei" charset="0"/>
+                        <a:cs typeface="Microsoft YaHei" charset="0"/>
+                      </a:endParaRPr>
+                    </a:p>
+                  </a:txBody>
+                  <a:tcPr marL="36576" marR="36576" marT="36576" marB="36576" anchor="ctr">
+                    <a:lnL w="6350" cap="flat" cmpd="sng" algn="ctr">
+                      <a:solidFill>
+                        <a:srgbClr val="D8E3EA"/>
+                      </a:solidFill>
+                      <a:prstDash val="solid"/>
+                      <a:round/>
+                      <a:headEnd type="none" w="med" len="med"/>
+                      <a:tailEnd type="none" w="med" len="med"/>
+                    </a:lnL>
+                    <a:lnR w="6350" cap="flat" cmpd="sng" algn="ctr">
+                      <a:solidFill>
+                        <a:srgbClr val="D8E3EA"/>
+                      </a:solidFill>
+                      <a:prstDash val="solid"/>
+                      <a:round/>
+                      <a:headEnd type="none" w="med" len="med"/>
+                      <a:tailEnd type="none" w="med" len="med"/>
+                    </a:lnR>
+                    <a:lnT w="6350" cap="flat" cmpd="sng" algn="ctr">
+                      <a:solidFill>
+                        <a:srgbClr val="D8E3EA"/>
+                      </a:solidFill>
+                      <a:prstDash val="solid"/>
+                      <a:round/>
+                      <a:headEnd type="none" w="med" len="med"/>
+                      <a:tailEnd type="none" w="med" len="med"/>
+                    </a:lnT>
+                    <a:lnB w="6350" cap="flat" cmpd="sng" algn="ctr">
+                      <a:solidFill>
+                        <a:srgbClr val="D8E3EA"/>
+                      </a:solidFill>
+                      <a:prstDash val="solid"/>
+                      <a:round/>
+                      <a:headEnd type="none" w="med" len="med"/>
+                      <a:tailEnd type="none" w="med" len="med"/>
+                    </a:lnB>
+                    <a:solidFill>
+                      <a:srgbClr val="FFFFFF"/>
+                    </a:solidFill>
+                  </a:tcPr>
+                </a:tc>
+                <a:tc>
+                  <a:txBody>
+                    <a:bodyPr/>
+                    <a:lstStyle/>
+                    <a:p>
+                      <a:pPr algn="ctr" indent="0" marL="0">
+                        <a:buNone/>
+                      </a:pPr>
+                      <a:r>
+                        <a:rPr lang="en-US" sz="1050" dirty="0">
+                          <a:solidFill>
+                            <a:srgbClr val="22303C"/>
+                          </a:solidFill>
+                          <a:latin typeface="Microsoft YaHei" pitchFamily="34" charset="0"/>
+                          <a:ea typeface="Microsoft YaHei" pitchFamily="34" charset="-122"/>
+                          <a:cs typeface="Microsoft YaHei" pitchFamily="34" charset="-120"/>
+                        </a:rPr>
+                        <a:t>223.5</a:t>
+                      </a:r>
+                      <a:endParaRPr lang="en-US" sz="1050" dirty="0">
+                        <a:latin typeface="Microsoft YaHei" charset="0"/>
+                        <a:ea typeface="Microsoft YaHei" charset="0"/>
+                        <a:cs typeface="Microsoft YaHei" charset="0"/>
+                      </a:endParaRPr>
+                    </a:p>
+                  </a:txBody>
+                  <a:tcPr marL="36576" marR="36576" marT="36576" marB="36576" anchor="ctr">
+                    <a:lnL w="6350" cap="flat" cmpd="sng" algn="ctr">
+                      <a:solidFill>
+                        <a:srgbClr val="D8E3EA"/>
+                      </a:solidFill>
+                      <a:prstDash val="solid"/>
+                      <a:round/>
+                      <a:headEnd type="none" w="med" len="med"/>
+                      <a:tailEnd type="none" w="med" len="med"/>
+                    </a:lnL>
+                    <a:lnR w="6350" cap="flat" cmpd="sng" algn="ctr">
+                      <a:solidFill>
+                        <a:srgbClr val="D8E3EA"/>
+                      </a:solidFill>
+                      <a:prstDash val="solid"/>
+                      <a:round/>
+                      <a:headEnd type="none" w="med" len="med"/>
+                      <a:tailEnd type="none" w="med" len="med"/>
+                    </a:lnR>
+                    <a:lnT w="6350" cap="flat" cmpd="sng" algn="ctr">
+                      <a:solidFill>
+                        <a:srgbClr val="D8E3EA"/>
+                      </a:solidFill>
+                      <a:prstDash val="solid"/>
+                      <a:round/>
+                      <a:headEnd type="none" w="med" len="med"/>
+                      <a:tailEnd type="none" w="med" len="med"/>
+                    </a:lnT>
+                    <a:lnB w="6350" cap="flat" cmpd="sng" algn="ctr">
+                      <a:solidFill>
+                        <a:srgbClr val="D8E3EA"/>
+                      </a:solidFill>
+                      <a:prstDash val="solid"/>
+                      <a:round/>
+                      <a:headEnd type="none" w="med" len="med"/>
+                      <a:tailEnd type="none" w="med" len="med"/>
+                    </a:lnB>
+                    <a:solidFill>
+                      <a:srgbClr val="FFFFFF"/>
+                    </a:solidFill>
+                  </a:tcPr>
+                </a:tc>
+              </a:tr>
+              <a:tr h="301752">
+                <a:tc>
+                  <a:txBody>
+                    <a:bodyPr/>
+                    <a:lstStyle/>
+                    <a:p>
+                      <a:pPr algn="ctr" indent="0" marL="0">
+                        <a:buNone/>
+                      </a:pPr>
+                      <a:r>
+                        <a:rPr lang="en-US" sz="1050" dirty="0">
+                          <a:solidFill>
+                            <a:srgbClr val="22303C"/>
+                          </a:solidFill>
+                          <a:latin typeface="Microsoft YaHei" pitchFamily="34" charset="0"/>
+                          <a:ea typeface="Microsoft YaHei" pitchFamily="34" charset="-122"/>
+                          <a:cs typeface="Microsoft YaHei" pitchFamily="34" charset="-120"/>
+                        </a:rPr>
+                        <a:t>OFF</a:t>
+                      </a:r>
+                      <a:endParaRPr lang="en-US" sz="1050" dirty="0">
+                        <a:latin typeface="Microsoft YaHei" charset="0"/>
+                        <a:ea typeface="Microsoft YaHei" charset="0"/>
+                        <a:cs typeface="Microsoft YaHei" charset="0"/>
+                      </a:endParaRPr>
+                    </a:p>
+                  </a:txBody>
+                  <a:tcPr marL="36576" marR="36576" marT="36576" marB="36576" anchor="ctr">
+                    <a:lnL w="6350" cap="flat" cmpd="sng" algn="ctr">
+                      <a:solidFill>
+                        <a:srgbClr val="D8E3EA"/>
+                      </a:solidFill>
+                      <a:prstDash val="solid"/>
+                      <a:round/>
+                      <a:headEnd type="none" w="med" len="med"/>
+                      <a:tailEnd type="none" w="med" len="med"/>
+                    </a:lnL>
+                    <a:lnR w="6350" cap="flat" cmpd="sng" algn="ctr">
+                      <a:solidFill>
+                        <a:srgbClr val="D8E3EA"/>
+                      </a:solidFill>
+                      <a:prstDash val="solid"/>
+                      <a:round/>
+                      <a:headEnd type="none" w="med" len="med"/>
+                      <a:tailEnd type="none" w="med" len="med"/>
+                    </a:lnR>
+                    <a:lnT w="6350" cap="flat" cmpd="sng" algn="ctr">
+                      <a:solidFill>
+                        <a:srgbClr val="D8E3EA"/>
+                      </a:solidFill>
+                      <a:prstDash val="solid"/>
+                      <a:round/>
+                      <a:headEnd type="none" w="med" len="med"/>
+                      <a:tailEnd type="none" w="med" len="med"/>
+                    </a:lnT>
+                    <a:lnB w="6350" cap="flat" cmpd="sng" algn="ctr">
+                      <a:solidFill>
+                        <a:srgbClr val="D8E3EA"/>
+                      </a:solidFill>
+                      <a:prstDash val="solid"/>
+                      <a:round/>
+                      <a:headEnd type="none" w="med" len="med"/>
+                      <a:tailEnd type="none" w="med" len="med"/>
+                    </a:lnB>
+                    <a:solidFill>
+                      <a:srgbClr val="F6F9FB"/>
+                    </a:solidFill>
+                  </a:tcPr>
+                </a:tc>
+                <a:tc>
+                  <a:txBody>
+                    <a:bodyPr/>
+                    <a:lstStyle/>
+                    <a:p>
+                      <a:pPr algn="ctr" indent="0" marL="0">
+                        <a:buNone/>
+                      </a:pPr>
+                      <a:r>
+                        <a:rPr lang="en-US" sz="1050" dirty="0">
+                          <a:solidFill>
+                            <a:srgbClr val="22303C"/>
+                          </a:solidFill>
+                          <a:latin typeface="Microsoft YaHei" pitchFamily="34" charset="0"/>
+                          <a:ea typeface="Microsoft YaHei" pitchFamily="34" charset="-122"/>
+                          <a:cs typeface="Microsoft YaHei" pitchFamily="34" charset="-120"/>
+                        </a:rPr>
+                        <a:t>2</a:t>
+                      </a:r>
+                      <a:endParaRPr lang="en-US" sz="1050" dirty="0">
+                        <a:latin typeface="Microsoft YaHei" charset="0"/>
+                        <a:ea typeface="Microsoft YaHei" charset="0"/>
+                        <a:cs typeface="Microsoft YaHei" charset="0"/>
+                      </a:endParaRPr>
+                    </a:p>
+                  </a:txBody>
+                  <a:tcPr marL="36576" marR="36576" marT="36576" marB="36576" anchor="ctr">
+                    <a:lnL w="6350" cap="flat" cmpd="sng" algn="ctr">
+                      <a:solidFill>
+                        <a:srgbClr val="D8E3EA"/>
+                      </a:solidFill>
+                      <a:prstDash val="solid"/>
+                      <a:round/>
+                      <a:headEnd type="none" w="med" len="med"/>
+                      <a:tailEnd type="none" w="med" len="med"/>
+                    </a:lnL>
+                    <a:lnR w="6350" cap="flat" cmpd="sng" algn="ctr">
+                      <a:solidFill>
+                        <a:srgbClr val="D8E3EA"/>
+                      </a:solidFill>
+                      <a:prstDash val="solid"/>
+                      <a:round/>
+                      <a:headEnd type="none" w="med" len="med"/>
+                      <a:tailEnd type="none" w="med" len="med"/>
+                    </a:lnR>
+                    <a:lnT w="6350" cap="flat" cmpd="sng" algn="ctr">
+                      <a:solidFill>
+                        <a:srgbClr val="D8E3EA"/>
+                      </a:solidFill>
+                      <a:prstDash val="solid"/>
+                      <a:round/>
+                      <a:headEnd type="none" w="med" len="med"/>
+                      <a:tailEnd type="none" w="med" len="med"/>
+                    </a:lnT>
+                    <a:lnB w="6350" cap="flat" cmpd="sng" algn="ctr">
+                      <a:solidFill>
+                        <a:srgbClr val="D8E3EA"/>
+                      </a:solidFill>
+                      <a:prstDash val="solid"/>
+                      <a:round/>
+                      <a:headEnd type="none" w="med" len="med"/>
+                      <a:tailEnd type="none" w="med" len="med"/>
+                    </a:lnB>
+                    <a:solidFill>
+                      <a:srgbClr val="F6F9FB"/>
+                    </a:solidFill>
+                  </a:tcPr>
+                </a:tc>
+                <a:tc>
+                  <a:txBody>
+                    <a:bodyPr/>
+                    <a:lstStyle/>
+                    <a:p>
+                      <a:pPr algn="ctr" indent="0" marL="0">
+                        <a:buNone/>
+                      </a:pPr>
+                      <a:r>
+                        <a:rPr lang="en-US" sz="1050" dirty="0">
+                          <a:solidFill>
+                            <a:srgbClr val="22303C"/>
+                          </a:solidFill>
+                          <a:latin typeface="Microsoft YaHei" pitchFamily="34" charset="0"/>
+                          <a:ea typeface="Microsoft YaHei" pitchFamily="34" charset="-122"/>
+                          <a:cs typeface="Microsoft YaHei" pitchFamily="34" charset="-120"/>
+                        </a:rPr>
+                        <a:t>332.0</a:t>
+                      </a:r>
+                      <a:endParaRPr lang="en-US" sz="1050" dirty="0">
+                        <a:latin typeface="Microsoft YaHei" charset="0"/>
+                        <a:ea typeface="Microsoft YaHei" charset="0"/>
+                        <a:cs typeface="Microsoft YaHei" charset="0"/>
+                      </a:endParaRPr>
+                    </a:p>
+                  </a:txBody>
+                  <a:tcPr marL="36576" marR="36576" marT="36576" marB="36576" anchor="ctr">
+                    <a:lnL w="6350" cap="flat" cmpd="sng" algn="ctr">
+                      <a:solidFill>
+                        <a:srgbClr val="D8E3EA"/>
+                      </a:solidFill>
+                      <a:prstDash val="solid"/>
+                      <a:round/>
+                      <a:headEnd type="none" w="med" len="med"/>
+                      <a:tailEnd type="none" w="med" len="med"/>
+                    </a:lnL>
+                    <a:lnR w="6350" cap="flat" cmpd="sng" algn="ctr">
+                      <a:solidFill>
+                        <a:srgbClr val="D8E3EA"/>
+                      </a:solidFill>
+                      <a:prstDash val="solid"/>
+                      <a:round/>
+                      <a:headEnd type="none" w="med" len="med"/>
+                      <a:tailEnd type="none" w="med" len="med"/>
+                    </a:lnR>
+                    <a:lnT w="6350" cap="flat" cmpd="sng" algn="ctr">
+                      <a:solidFill>
+                        <a:srgbClr val="D8E3EA"/>
+                      </a:solidFill>
+                      <a:prstDash val="solid"/>
+                      <a:round/>
+                      <a:headEnd type="none" w="med" len="med"/>
+                      <a:tailEnd type="none" w="med" len="med"/>
+                    </a:lnT>
+                    <a:lnB w="6350" cap="flat" cmpd="sng" algn="ctr">
+                      <a:solidFill>
+                        <a:srgbClr val="D8E3EA"/>
+                      </a:solidFill>
+                      <a:prstDash val="solid"/>
+                      <a:round/>
+                      <a:headEnd type="none" w="med" len="med"/>
+                      <a:tailEnd type="none" w="med" len="med"/>
+                    </a:lnB>
+                    <a:solidFill>
+                      <a:srgbClr val="F6F9FB"/>
+                    </a:solidFill>
+                  </a:tcPr>
+                </a:tc>
+                <a:tc>
+                  <a:txBody>
+                    <a:bodyPr/>
+                    <a:lstStyle/>
+                    <a:p>
+                      <a:pPr algn="ctr" indent="0" marL="0">
+                        <a:buNone/>
+                      </a:pPr>
+                      <a:r>
+                        <a:rPr lang="en-US" sz="1050" dirty="0">
+                          <a:solidFill>
+                            <a:srgbClr val="22303C"/>
+                          </a:solidFill>
+                          <a:latin typeface="Microsoft YaHei" pitchFamily="34" charset="0"/>
+                          <a:ea typeface="Microsoft YaHei" pitchFamily="34" charset="-122"/>
+                          <a:cs typeface="Microsoft YaHei" pitchFamily="34" charset="-120"/>
+                        </a:rPr>
+                        <a:t>191.5</a:t>
+                      </a:r>
+                      <a:endParaRPr lang="en-US" sz="1050" dirty="0">
+                        <a:latin typeface="Microsoft YaHei" charset="0"/>
+                        <a:ea typeface="Microsoft YaHei" charset="0"/>
+                        <a:cs typeface="Microsoft YaHei" charset="0"/>
+                      </a:endParaRPr>
+                    </a:p>
+                  </a:txBody>
+                  <a:tcPr marL="36576" marR="36576" marT="36576" marB="36576" anchor="ctr">
+                    <a:lnL w="6350" cap="flat" cmpd="sng" algn="ctr">
+                      <a:solidFill>
+                        <a:srgbClr val="D8E3EA"/>
+                      </a:solidFill>
+                      <a:prstDash val="solid"/>
+                      <a:round/>
+                      <a:headEnd type="none" w="med" len="med"/>
+                      <a:tailEnd type="none" w="med" len="med"/>
+                    </a:lnL>
+                    <a:lnR w="6350" cap="flat" cmpd="sng" algn="ctr">
+                      <a:solidFill>
+                        <a:srgbClr val="D8E3EA"/>
+                      </a:solidFill>
+                      <a:prstDash val="solid"/>
+                      <a:round/>
+                      <a:headEnd type="none" w="med" len="med"/>
+                      <a:tailEnd type="none" w="med" len="med"/>
+                    </a:lnR>
+                    <a:lnT w="6350" cap="flat" cmpd="sng" algn="ctr">
+                      <a:solidFill>
+                        <a:srgbClr val="D8E3EA"/>
+                      </a:solidFill>
+                      <a:prstDash val="solid"/>
+                      <a:round/>
+                      <a:headEnd type="none" w="med" len="med"/>
+                      <a:tailEnd type="none" w="med" len="med"/>
+                    </a:lnT>
+                    <a:lnB w="6350" cap="flat" cmpd="sng" algn="ctr">
+                      <a:solidFill>
+                        <a:srgbClr val="D8E3EA"/>
+                      </a:solidFill>
+                      <a:prstDash val="solid"/>
+                      <a:round/>
+                      <a:headEnd type="none" w="med" len="med"/>
+                      <a:tailEnd type="none" w="med" len="med"/>
+                    </a:lnB>
+                    <a:solidFill>
+                      <a:srgbClr val="F6F9FB"/>
+                    </a:solidFill>
+                  </a:tcPr>
+                </a:tc>
+                <a:tc>
+                  <a:txBody>
+                    <a:bodyPr/>
+                    <a:lstStyle/>
+                    <a:p>
+                      <a:pPr algn="ctr" indent="0" marL="0">
+                        <a:buNone/>
+                      </a:pPr>
+                      <a:r>
+                        <a:rPr lang="en-US" sz="1050" dirty="0">
+                          <a:solidFill>
+                            <a:srgbClr val="22303C"/>
+                          </a:solidFill>
+                          <a:latin typeface="Microsoft YaHei" pitchFamily="34" charset="0"/>
+                          <a:ea typeface="Microsoft YaHei" pitchFamily="34" charset="-122"/>
+                          <a:cs typeface="Microsoft YaHei" pitchFamily="34" charset="-120"/>
+                        </a:rPr>
+                        <a:t>107.5</a:t>
+                      </a:r>
+                      <a:endParaRPr lang="en-US" sz="1050" dirty="0">
+                        <a:latin typeface="Microsoft YaHei" charset="0"/>
+                        <a:ea typeface="Microsoft YaHei" charset="0"/>
+                        <a:cs typeface="Microsoft YaHei" charset="0"/>
+                      </a:endParaRPr>
+                    </a:p>
+                  </a:txBody>
+                  <a:tcPr marL="36576" marR="36576" marT="36576" marB="36576" anchor="ctr">
+                    <a:lnL w="6350" cap="flat" cmpd="sng" algn="ctr">
+                      <a:solidFill>
+                        <a:srgbClr val="D8E3EA"/>
+                      </a:solidFill>
+                      <a:prstDash val="solid"/>
+                      <a:round/>
+                      <a:headEnd type="none" w="med" len="med"/>
+                      <a:tailEnd type="none" w="med" len="med"/>
+                    </a:lnL>
+                    <a:lnR w="6350" cap="flat" cmpd="sng" algn="ctr">
+                      <a:solidFill>
+                        <a:srgbClr val="D8E3EA"/>
+                      </a:solidFill>
+                      <a:prstDash val="solid"/>
+                      <a:round/>
+                      <a:headEnd type="none" w="med" len="med"/>
+                      <a:tailEnd type="none" w="med" len="med"/>
+                    </a:lnR>
+                    <a:lnT w="6350" cap="flat" cmpd="sng" algn="ctr">
+                      <a:solidFill>
+                        <a:srgbClr val="D8E3EA"/>
+                      </a:solidFill>
+                      <a:prstDash val="solid"/>
+                      <a:round/>
+                      <a:headEnd type="none" w="med" len="med"/>
+                      <a:tailEnd type="none" w="med" len="med"/>
+                    </a:lnT>
+                    <a:lnB w="6350" cap="flat" cmpd="sng" algn="ctr">
+                      <a:solidFill>
+                        <a:srgbClr val="D8E3EA"/>
+                      </a:solidFill>
+                      <a:prstDash val="solid"/>
+                      <a:round/>
+                      <a:headEnd type="none" w="med" len="med"/>
+                      <a:tailEnd type="none" w="med" len="med"/>
+                    </a:lnB>
+                    <a:solidFill>
+                      <a:srgbClr val="F6F9FB"/>
+                    </a:solidFill>
+                  </a:tcPr>
+                </a:tc>
+                <a:tc>
+                  <a:txBody>
+                    <a:bodyPr/>
+                    <a:lstStyle/>
+                    <a:p>
+                      <a:pPr algn="ctr" indent="0" marL="0">
+                        <a:buNone/>
+                      </a:pPr>
+                      <a:r>
+                        <a:rPr lang="en-US" sz="1050" dirty="0">
+                          <a:solidFill>
+                            <a:srgbClr val="22303C"/>
+                          </a:solidFill>
+                          <a:latin typeface="Microsoft YaHei" pitchFamily="34" charset="0"/>
+                          <a:ea typeface="Microsoft YaHei" pitchFamily="34" charset="-122"/>
+                          <a:cs typeface="Microsoft YaHei" pitchFamily="34" charset="-120"/>
+                        </a:rPr>
+                        <a:t>149.5</a:t>
+                      </a:r>
+                      <a:endParaRPr lang="en-US" sz="1050" dirty="0">
+                        <a:latin typeface="Microsoft YaHei" charset="0"/>
+                        <a:ea typeface="Microsoft YaHei" charset="0"/>
+                        <a:cs typeface="Microsoft YaHei" charset="0"/>
+                      </a:endParaRPr>
+                    </a:p>
+                  </a:txBody>
+                  <a:tcPr marL="36576" marR="36576" marT="36576" marB="36576" anchor="ctr">
+                    <a:lnL w="6350" cap="flat" cmpd="sng" algn="ctr">
+                      <a:solidFill>
+                        <a:srgbClr val="D8E3EA"/>
+                      </a:solidFill>
+                      <a:prstDash val="solid"/>
+                      <a:round/>
+                      <a:headEnd type="none" w="med" len="med"/>
+                      <a:tailEnd type="none" w="med" len="med"/>
+                    </a:lnL>
+                    <a:lnR w="6350" cap="flat" cmpd="sng" algn="ctr">
+                      <a:solidFill>
+                        <a:srgbClr val="D8E3EA"/>
+                      </a:solidFill>
+                      <a:prstDash val="solid"/>
+                      <a:round/>
+                      <a:headEnd type="none" w="med" len="med"/>
+                      <a:tailEnd type="none" w="med" len="med"/>
+                    </a:lnR>
+                    <a:lnT w="6350" cap="flat" cmpd="sng" algn="ctr">
+                      <a:solidFill>
+                        <a:srgbClr val="D8E3EA"/>
+                      </a:solidFill>
+                      <a:prstDash val="solid"/>
+                      <a:round/>
+                      <a:headEnd type="none" w="med" len="med"/>
+                      <a:tailEnd type="none" w="med" len="med"/>
+                    </a:lnT>
+                    <a:lnB w="6350" cap="flat" cmpd="sng" algn="ctr">
+                      <a:solidFill>
+                        <a:srgbClr val="D8E3EA"/>
+                      </a:solidFill>
+                      <a:prstDash val="solid"/>
+                      <a:round/>
+                      <a:headEnd type="none" w="med" len="med"/>
+                      <a:tailEnd type="none" w="med" len="med"/>
+                    </a:lnB>
+                    <a:solidFill>
+                      <a:srgbClr val="F6F9FB"/>
+                    </a:solidFill>
+                  </a:tcPr>
+                </a:tc>
+              </a:tr>
+              <a:tr h="301752">
+                <a:tc>
+                  <a:txBody>
+                    <a:bodyPr/>
+                    <a:lstStyle/>
+                    <a:p>
+                      <a:pPr algn="ctr" indent="0" marL="0">
+                        <a:buNone/>
+                      </a:pPr>
+                      <a:r>
+                        <a:rPr lang="en-US" sz="1050" dirty="0">
+                          <a:solidFill>
+                            <a:srgbClr val="22303C"/>
+                          </a:solidFill>
+                          <a:latin typeface="Microsoft YaHei" pitchFamily="34" charset="0"/>
+                          <a:ea typeface="Microsoft YaHei" pitchFamily="34" charset="-122"/>
+                          <a:cs typeface="Microsoft YaHei" pitchFamily="34" charset="-120"/>
+                        </a:rPr>
+                        <a:t>OFF</a:t>
+                      </a:r>
+                      <a:endParaRPr lang="en-US" sz="1050" dirty="0">
+                        <a:latin typeface="Microsoft YaHei" charset="0"/>
+                        <a:ea typeface="Microsoft YaHei" charset="0"/>
+                        <a:cs typeface="Microsoft YaHei" charset="0"/>
+                      </a:endParaRPr>
+                    </a:p>
+                  </a:txBody>
+                  <a:tcPr marL="36576" marR="36576" marT="36576" marB="36576" anchor="ctr">
+                    <a:lnL w="6350" cap="flat" cmpd="sng" algn="ctr">
+                      <a:solidFill>
+                        <a:srgbClr val="D8E3EA"/>
+                      </a:solidFill>
+                      <a:prstDash val="solid"/>
+                      <a:round/>
+                      <a:headEnd type="none" w="med" len="med"/>
+                      <a:tailEnd type="none" w="med" len="med"/>
+                    </a:lnL>
+                    <a:lnR w="6350" cap="flat" cmpd="sng" algn="ctr">
+                      <a:solidFill>
+                        <a:srgbClr val="D8E3EA"/>
+                      </a:solidFill>
+                      <a:prstDash val="solid"/>
+                      <a:round/>
+                      <a:headEnd type="none" w="med" len="med"/>
+                      <a:tailEnd type="none" w="med" len="med"/>
+                    </a:lnR>
+                    <a:lnT w="6350" cap="flat" cmpd="sng" algn="ctr">
+                      <a:solidFill>
+                        <a:srgbClr val="D8E3EA"/>
+                      </a:solidFill>
+                      <a:prstDash val="solid"/>
+                      <a:round/>
+                      <a:headEnd type="none" w="med" len="med"/>
+                      <a:tailEnd type="none" w="med" len="med"/>
+                    </a:lnT>
+                    <a:lnB w="6350" cap="flat" cmpd="sng" algn="ctr">
+                      <a:solidFill>
+                        <a:srgbClr val="D8E3EA"/>
+                      </a:solidFill>
+                      <a:prstDash val="solid"/>
+                      <a:round/>
+                      <a:headEnd type="none" w="med" len="med"/>
+                      <a:tailEnd type="none" w="med" len="med"/>
+                    </a:lnB>
+                    <a:solidFill>
+                      <a:srgbClr val="FFFFFF"/>
+                    </a:solidFill>
+                  </a:tcPr>
+                </a:tc>
+                <a:tc>
+                  <a:txBody>
+                    <a:bodyPr/>
+                    <a:lstStyle/>
+                    <a:p>
+                      <a:pPr algn="ctr" indent="0" marL="0">
+                        <a:buNone/>
+                      </a:pPr>
+                      <a:r>
+                        <a:rPr lang="en-US" sz="1050" dirty="0">
+                          <a:solidFill>
+                            <a:srgbClr val="22303C"/>
+                          </a:solidFill>
+                          <a:latin typeface="Microsoft YaHei" pitchFamily="34" charset="0"/>
+                          <a:ea typeface="Microsoft YaHei" pitchFamily="34" charset="-122"/>
+                          <a:cs typeface="Microsoft YaHei" pitchFamily="34" charset="-120"/>
+                        </a:rPr>
+                        <a:t>3</a:t>
+                      </a:r>
+                      <a:endParaRPr lang="en-US" sz="1050" dirty="0">
+                        <a:latin typeface="Microsoft YaHei" charset="0"/>
+                        <a:ea typeface="Microsoft YaHei" charset="0"/>
+                        <a:cs typeface="Microsoft YaHei" charset="0"/>
+                      </a:endParaRPr>
+                    </a:p>
+                  </a:txBody>
+                  <a:tcPr marL="36576" marR="36576" marT="36576" marB="36576" anchor="ctr">
+                    <a:lnL w="6350" cap="flat" cmpd="sng" algn="ctr">
+                      <a:solidFill>
+                        <a:srgbClr val="D8E3EA"/>
+                      </a:solidFill>
+                      <a:prstDash val="solid"/>
+                      <a:round/>
+                      <a:headEnd type="none" w="med" len="med"/>
+                      <a:tailEnd type="none" w="med" len="med"/>
+                    </a:lnL>
+                    <a:lnR w="6350" cap="flat" cmpd="sng" algn="ctr">
+                      <a:solidFill>
+                        <a:srgbClr val="D8E3EA"/>
+                      </a:solidFill>
+                      <a:prstDash val="solid"/>
+                      <a:round/>
+                      <a:headEnd type="none" w="med" len="med"/>
+                      <a:tailEnd type="none" w="med" len="med"/>
+                    </a:lnR>
+                    <a:lnT w="6350" cap="flat" cmpd="sng" algn="ctr">
+                      <a:solidFill>
+                        <a:srgbClr val="D8E3EA"/>
+                      </a:solidFill>
+                      <a:prstDash val="solid"/>
+                      <a:round/>
+                      <a:headEnd type="none" w="med" len="med"/>
+                      <a:tailEnd type="none" w="med" len="med"/>
+                    </a:lnT>
+                    <a:lnB w="6350" cap="flat" cmpd="sng" algn="ctr">
+                      <a:solidFill>
+                        <a:srgbClr val="D8E3EA"/>
+                      </a:solidFill>
+                      <a:prstDash val="solid"/>
+                      <a:round/>
+                      <a:headEnd type="none" w="med" len="med"/>
+                      <a:tailEnd type="none" w="med" len="med"/>
+                    </a:lnB>
+                    <a:solidFill>
+                      <a:srgbClr val="FFFFFF"/>
+                    </a:solidFill>
+                  </a:tcPr>
+                </a:tc>
+                <a:tc>
+                  <a:txBody>
+                    <a:bodyPr/>
+                    <a:lstStyle/>
+                    <a:p>
+                      <a:pPr algn="ctr" indent="0" marL="0">
+                        <a:buNone/>
+                      </a:pPr>
+                      <a:r>
+                        <a:rPr lang="en-US" sz="1050" dirty="0">
+                          <a:solidFill>
+                            <a:srgbClr val="22303C"/>
+                          </a:solidFill>
+                          <a:latin typeface="Microsoft YaHei" pitchFamily="34" charset="0"/>
+                          <a:ea typeface="Microsoft YaHei" pitchFamily="34" charset="-122"/>
+                          <a:cs typeface="Microsoft YaHei" pitchFamily="34" charset="-120"/>
+                        </a:rPr>
+                        <a:t>325.8</a:t>
+                      </a:r>
+                      <a:endParaRPr lang="en-US" sz="1050" dirty="0">
+                        <a:latin typeface="Microsoft YaHei" charset="0"/>
+                        <a:ea typeface="Microsoft YaHei" charset="0"/>
+                        <a:cs typeface="Microsoft YaHei" charset="0"/>
+                      </a:endParaRPr>
+                    </a:p>
+                  </a:txBody>
+                  <a:tcPr marL="36576" marR="36576" marT="36576" marB="36576" anchor="ctr">
+                    <a:lnL w="6350" cap="flat" cmpd="sng" algn="ctr">
+                      <a:solidFill>
+                        <a:srgbClr val="D8E3EA"/>
+                      </a:solidFill>
+                      <a:prstDash val="solid"/>
+                      <a:round/>
+                      <a:headEnd type="none" w="med" len="med"/>
+                      <a:tailEnd type="none" w="med" len="med"/>
+                    </a:lnL>
+                    <a:lnR w="6350" cap="flat" cmpd="sng" algn="ctr">
+                      <a:solidFill>
+                        <a:srgbClr val="D8E3EA"/>
+                      </a:solidFill>
+                      <a:prstDash val="solid"/>
+                      <a:round/>
+                      <a:headEnd type="none" w="med" len="med"/>
+                      <a:tailEnd type="none" w="med" len="med"/>
+                    </a:lnR>
+                    <a:lnT w="6350" cap="flat" cmpd="sng" algn="ctr">
+                      <a:solidFill>
+                        <a:srgbClr val="D8E3EA"/>
+                      </a:solidFill>
+                      <a:prstDash val="solid"/>
+                      <a:round/>
+                      <a:headEnd type="none" w="med" len="med"/>
+                      <a:tailEnd type="none" w="med" len="med"/>
+                    </a:lnT>
+                    <a:lnB w="6350" cap="flat" cmpd="sng" algn="ctr">
+                      <a:solidFill>
+                        <a:srgbClr val="D8E3EA"/>
+                      </a:solidFill>
+                      <a:prstDash val="solid"/>
+                      <a:round/>
+                      <a:headEnd type="none" w="med" len="med"/>
+                      <a:tailEnd type="none" w="med" len="med"/>
+                    </a:lnB>
+                    <a:solidFill>
+                      <a:srgbClr val="FFFFFF"/>
+                    </a:solidFill>
+                  </a:tcPr>
+                </a:tc>
+                <a:tc>
+                  <a:txBody>
+                    <a:bodyPr/>
+                    <a:lstStyle/>
+                    <a:p>
+                      <a:pPr algn="ctr" indent="0" marL="0">
+                        <a:buNone/>
+                      </a:pPr>
+                      <a:r>
+                        <a:rPr lang="en-US" sz="1050" dirty="0">
+                          <a:solidFill>
+                            <a:srgbClr val="22303C"/>
+                          </a:solidFill>
+                          <a:latin typeface="Microsoft YaHei" pitchFamily="34" charset="0"/>
+                          <a:ea typeface="Microsoft YaHei" pitchFamily="34" charset="-122"/>
+                          <a:cs typeface="Microsoft YaHei" pitchFamily="34" charset="-120"/>
+                        </a:rPr>
+                        <a:t>256.7</a:t>
+                      </a:r>
+                      <a:endParaRPr lang="en-US" sz="1050" dirty="0">
+                        <a:latin typeface="Microsoft YaHei" charset="0"/>
+                        <a:ea typeface="Microsoft YaHei" charset="0"/>
+                        <a:cs typeface="Microsoft YaHei" charset="0"/>
+                      </a:endParaRPr>
+                    </a:p>
+                  </a:txBody>
+                  <a:tcPr marL="36576" marR="36576" marT="36576" marB="36576" anchor="ctr">
+                    <a:lnL w="6350" cap="flat" cmpd="sng" algn="ctr">
+                      <a:solidFill>
+                        <a:srgbClr val="D8E3EA"/>
+                      </a:solidFill>
+                      <a:prstDash val="solid"/>
+                      <a:round/>
+                      <a:headEnd type="none" w="med" len="med"/>
+                      <a:tailEnd type="none" w="med" len="med"/>
+                    </a:lnL>
+                    <a:lnR w="6350" cap="flat" cmpd="sng" algn="ctr">
+                      <a:solidFill>
+                        <a:srgbClr val="D8E3EA"/>
+                      </a:solidFill>
+                      <a:prstDash val="solid"/>
+                      <a:round/>
+                      <a:headEnd type="none" w="med" len="med"/>
+                      <a:tailEnd type="none" w="med" len="med"/>
+                    </a:lnR>
+                    <a:lnT w="6350" cap="flat" cmpd="sng" algn="ctr">
+                      <a:solidFill>
+                        <a:srgbClr val="D8E3EA"/>
+                      </a:solidFill>
+                      <a:prstDash val="solid"/>
+                      <a:round/>
+                      <a:headEnd type="none" w="med" len="med"/>
+                      <a:tailEnd type="none" w="med" len="med"/>
+                    </a:lnT>
+                    <a:lnB w="6350" cap="flat" cmpd="sng" algn="ctr">
+                      <a:solidFill>
+                        <a:srgbClr val="D8E3EA"/>
+                      </a:solidFill>
+                      <a:prstDash val="solid"/>
+                      <a:round/>
+                      <a:headEnd type="none" w="med" len="med"/>
+                      <a:tailEnd type="none" w="med" len="med"/>
+                    </a:lnB>
+                    <a:solidFill>
+                      <a:srgbClr val="FFFFFF"/>
+                    </a:solidFill>
+                  </a:tcPr>
+                </a:tc>
+                <a:tc>
+                  <a:txBody>
+                    <a:bodyPr/>
+                    <a:lstStyle/>
+                    <a:p>
+                      <a:pPr algn="ctr" indent="0" marL="0">
+                        <a:buNone/>
+                      </a:pPr>
+                      <a:r>
+                        <a:rPr lang="en-US" sz="1050" dirty="0">
+                          <a:solidFill>
+                            <a:srgbClr val="22303C"/>
+                          </a:solidFill>
+                          <a:latin typeface="Microsoft YaHei" pitchFamily="34" charset="0"/>
+                          <a:ea typeface="Microsoft YaHei" pitchFamily="34" charset="-122"/>
+                          <a:cs typeface="Microsoft YaHei" pitchFamily="34" charset="-120"/>
+                        </a:rPr>
+                        <a:t>119.4</a:t>
+                      </a:r>
+                      <a:endParaRPr lang="en-US" sz="1050" dirty="0">
+                        <a:latin typeface="Microsoft YaHei" charset="0"/>
+                        <a:ea typeface="Microsoft YaHei" charset="0"/>
+                        <a:cs typeface="Microsoft YaHei" charset="0"/>
+                      </a:endParaRPr>
+                    </a:p>
+                  </a:txBody>
+                  <a:tcPr marL="36576" marR="36576" marT="36576" marB="36576" anchor="ctr">
+                    <a:lnL w="6350" cap="flat" cmpd="sng" algn="ctr">
+                      <a:solidFill>
+                        <a:srgbClr val="D8E3EA"/>
+                      </a:solidFill>
+                      <a:prstDash val="solid"/>
+                      <a:round/>
+                      <a:headEnd type="none" w="med" len="med"/>
+                      <a:tailEnd type="none" w="med" len="med"/>
+                    </a:lnL>
+                    <a:lnR w="6350" cap="flat" cmpd="sng" algn="ctr">
+                      <a:solidFill>
+                        <a:srgbClr val="D8E3EA"/>
+                      </a:solidFill>
+                      <a:prstDash val="solid"/>
+                      <a:round/>
+                      <a:headEnd type="none" w="med" len="med"/>
+                      <a:tailEnd type="none" w="med" len="med"/>
+                    </a:lnR>
+                    <a:lnT w="6350" cap="flat" cmpd="sng" algn="ctr">
+                      <a:solidFill>
+                        <a:srgbClr val="D8E3EA"/>
+                      </a:solidFill>
+                      <a:prstDash val="solid"/>
+                      <a:round/>
+                      <a:headEnd type="none" w="med" len="med"/>
+                      <a:tailEnd type="none" w="med" len="med"/>
+                    </a:lnT>
+                    <a:lnB w="6350" cap="flat" cmpd="sng" algn="ctr">
+                      <a:solidFill>
+                        <a:srgbClr val="D8E3EA"/>
+                      </a:solidFill>
+                      <a:prstDash val="solid"/>
+                      <a:round/>
+                      <a:headEnd type="none" w="med" len="med"/>
+                      <a:tailEnd type="none" w="med" len="med"/>
+                    </a:lnB>
+                    <a:solidFill>
+                      <a:srgbClr val="FFFFFF"/>
+                    </a:solidFill>
+                  </a:tcPr>
+                </a:tc>
+                <a:tc>
+                  <a:txBody>
+                    <a:bodyPr/>
+                    <a:lstStyle/>
+                    <a:p>
+                      <a:pPr algn="ctr" indent="0" marL="0">
+                        <a:buNone/>
+                      </a:pPr>
+                      <a:r>
+                        <a:rPr lang="en-US" sz="1050" dirty="0">
+                          <a:solidFill>
+                            <a:srgbClr val="22303C"/>
+                          </a:solidFill>
+                          <a:latin typeface="Microsoft YaHei" pitchFamily="34" charset="0"/>
+                          <a:ea typeface="Microsoft YaHei" pitchFamily="34" charset="-122"/>
+                          <a:cs typeface="Microsoft YaHei" pitchFamily="34" charset="-120"/>
+                        </a:rPr>
+                        <a:t>188.1</a:t>
+                      </a:r>
+                      <a:endParaRPr lang="en-US" sz="1050" dirty="0">
+                        <a:latin typeface="Microsoft YaHei" charset="0"/>
+                        <a:ea typeface="Microsoft YaHei" charset="0"/>
+                        <a:cs typeface="Microsoft YaHei" charset="0"/>
+                      </a:endParaRPr>
+                    </a:p>
+                  </a:txBody>
+                  <a:tcPr marL="36576" marR="36576" marT="36576" marB="36576" anchor="ctr">
+                    <a:lnL w="6350" cap="flat" cmpd="sng" algn="ctr">
+                      <a:solidFill>
+                        <a:srgbClr val="D8E3EA"/>
+                      </a:solidFill>
+                      <a:prstDash val="solid"/>
+                      <a:round/>
+                      <a:headEnd type="none" w="med" len="med"/>
+                      <a:tailEnd type="none" w="med" len="med"/>
+                    </a:lnL>
+                    <a:lnR w="6350" cap="flat" cmpd="sng" algn="ctr">
+                      <a:solidFill>
+                        <a:srgbClr val="D8E3EA"/>
+                      </a:solidFill>
+                      <a:prstDash val="solid"/>
+                      <a:round/>
+                      <a:headEnd type="none" w="med" len="med"/>
+                      <a:tailEnd type="none" w="med" len="med"/>
+                    </a:lnR>
+                    <a:lnT w="6350" cap="flat" cmpd="sng" algn="ctr">
+                      <a:solidFill>
+                        <a:srgbClr val="D8E3EA"/>
+                      </a:solidFill>
+                      <a:prstDash val="solid"/>
+                      <a:round/>
+                      <a:headEnd type="none" w="med" len="med"/>
+                      <a:tailEnd type="none" w="med" len="med"/>
+                    </a:lnT>
+                    <a:lnB w="6350" cap="flat" cmpd="sng" algn="ctr">
+                      <a:solidFill>
+                        <a:srgbClr val="D8E3EA"/>
+                      </a:solidFill>
+                      <a:prstDash val="solid"/>
+                      <a:round/>
+                      <a:headEnd type="none" w="med" len="med"/>
+                      <a:tailEnd type="none" w="med" len="med"/>
+                    </a:lnB>
+                    <a:solidFill>
+                      <a:srgbClr val="FFFFFF"/>
+                    </a:solidFill>
+                  </a:tcPr>
+                </a:tc>
+              </a:tr>
+              <a:tr h="301752">
+                <a:tc>
+                  <a:txBody>
+                    <a:bodyPr/>
+                    <a:lstStyle/>
+                    <a:p>
+                      <a:pPr algn="ctr" indent="0" marL="0">
+                        <a:buNone/>
+                      </a:pPr>
+                      <a:r>
+                        <a:rPr lang="en-US" sz="1050" dirty="0">
+                          <a:solidFill>
+                            <a:srgbClr val="22303C"/>
+                          </a:solidFill>
+                          <a:latin typeface="Microsoft YaHei" pitchFamily="34" charset="0"/>
+                          <a:ea typeface="Microsoft YaHei" pitchFamily="34" charset="-122"/>
+                          <a:cs typeface="Microsoft YaHei" pitchFamily="34" charset="-120"/>
+                        </a:rPr>
+                        <a:t>ON（异步）</a:t>
+                      </a:r>
+                      <a:endParaRPr lang="en-US" sz="1050" dirty="0">
+                        <a:latin typeface="Microsoft YaHei" charset="0"/>
+                        <a:ea typeface="Microsoft YaHei" charset="0"/>
+                        <a:cs typeface="Microsoft YaHei" charset="0"/>
+                      </a:endParaRPr>
+                    </a:p>
+                  </a:txBody>
+                  <a:tcPr marL="36576" marR="36576" marT="36576" marB="36576" anchor="ctr">
+                    <a:lnL w="6350" cap="flat" cmpd="sng" algn="ctr">
+                      <a:solidFill>
+                        <a:srgbClr val="D8E3EA"/>
+                      </a:solidFill>
+                      <a:prstDash val="solid"/>
+                      <a:round/>
+                      <a:headEnd type="none" w="med" len="med"/>
+                      <a:tailEnd type="none" w="med" len="med"/>
+                    </a:lnL>
+                    <a:lnR w="6350" cap="flat" cmpd="sng" algn="ctr">
+                      <a:solidFill>
+                        <a:srgbClr val="D8E3EA"/>
+                      </a:solidFill>
+                      <a:prstDash val="solid"/>
+                      <a:round/>
+                      <a:headEnd type="none" w="med" len="med"/>
+                      <a:tailEnd type="none" w="med" len="med"/>
+                    </a:lnR>
+                    <a:lnT w="6350" cap="flat" cmpd="sng" algn="ctr">
+                      <a:solidFill>
+                        <a:srgbClr val="D8E3EA"/>
+                      </a:solidFill>
+                      <a:prstDash val="solid"/>
+                      <a:round/>
+                      <a:headEnd type="none" w="med" len="med"/>
+                      <a:tailEnd type="none" w="med" len="med"/>
+                    </a:lnT>
+                    <a:lnB w="6350" cap="flat" cmpd="sng" algn="ctr">
+                      <a:solidFill>
+                        <a:srgbClr val="D8E3EA"/>
+                      </a:solidFill>
+                      <a:prstDash val="solid"/>
+                      <a:round/>
+                      <a:headEnd type="none" w="med" len="med"/>
+                      <a:tailEnd type="none" w="med" len="med"/>
+                    </a:lnB>
+                    <a:solidFill>
+                      <a:srgbClr val="E4F2EF"/>
+                    </a:solidFill>
+                  </a:tcPr>
+                </a:tc>
+                <a:tc>
+                  <a:txBody>
+                    <a:bodyPr/>
+                    <a:lstStyle/>
+                    <a:p>
+                      <a:pPr algn="ctr" indent="0" marL="0">
+                        <a:buNone/>
+                      </a:pPr>
+                      <a:r>
+                        <a:rPr lang="en-US" sz="1050" dirty="0">
+                          <a:solidFill>
+                            <a:srgbClr val="22303C"/>
+                          </a:solidFill>
+                          <a:latin typeface="Microsoft YaHei" pitchFamily="34" charset="0"/>
+                          <a:ea typeface="Microsoft YaHei" pitchFamily="34" charset="-122"/>
+                          <a:cs typeface="Microsoft YaHei" pitchFamily="34" charset="-120"/>
+                        </a:rPr>
+                        <a:t>1</a:t>
+                      </a:r>
+                      <a:endParaRPr lang="en-US" sz="1050" dirty="0">
+                        <a:latin typeface="Microsoft YaHei" charset="0"/>
+                        <a:ea typeface="Microsoft YaHei" charset="0"/>
+                        <a:cs typeface="Microsoft YaHei" charset="0"/>
+                      </a:endParaRPr>
+                    </a:p>
+                  </a:txBody>
+                  <a:tcPr marL="36576" marR="36576" marT="36576" marB="36576" anchor="ctr">
+                    <a:lnL w="6350" cap="flat" cmpd="sng" algn="ctr">
+                      <a:solidFill>
+                        <a:srgbClr val="D8E3EA"/>
+                      </a:solidFill>
+                      <a:prstDash val="solid"/>
+                      <a:round/>
+                      <a:headEnd type="none" w="med" len="med"/>
+                      <a:tailEnd type="none" w="med" len="med"/>
+                    </a:lnL>
+                    <a:lnR w="6350" cap="flat" cmpd="sng" algn="ctr">
+                      <a:solidFill>
+                        <a:srgbClr val="D8E3EA"/>
+                      </a:solidFill>
+                      <a:prstDash val="solid"/>
+                      <a:round/>
+                      <a:headEnd type="none" w="med" len="med"/>
+                      <a:tailEnd type="none" w="med" len="med"/>
+                    </a:lnR>
+                    <a:lnT w="6350" cap="flat" cmpd="sng" algn="ctr">
+                      <a:solidFill>
+                        <a:srgbClr val="D8E3EA"/>
+                      </a:solidFill>
+                      <a:prstDash val="solid"/>
+                      <a:round/>
+                      <a:headEnd type="none" w="med" len="med"/>
+                      <a:tailEnd type="none" w="med" len="med"/>
+                    </a:lnT>
+                    <a:lnB w="6350" cap="flat" cmpd="sng" algn="ctr">
+                      <a:solidFill>
+                        <a:srgbClr val="D8E3EA"/>
+                      </a:solidFill>
+                      <a:prstDash val="solid"/>
+                      <a:round/>
+                      <a:headEnd type="none" w="med" len="med"/>
+                      <a:tailEnd type="none" w="med" len="med"/>
+                    </a:lnB>
+                    <a:solidFill>
+                      <a:srgbClr val="E4F2EF"/>
+                    </a:solidFill>
+                  </a:tcPr>
+                </a:tc>
+                <a:tc>
+                  <a:txBody>
+                    <a:bodyPr/>
+                    <a:lstStyle/>
+                    <a:p>
+                      <a:pPr algn="ctr" indent="0" marL="0">
+                        <a:buNone/>
+                      </a:pPr>
+                      <a:r>
+                        <a:rPr lang="en-US" sz="1050" dirty="0">
+                          <a:solidFill>
+                            <a:srgbClr val="22303C"/>
+                          </a:solidFill>
+                          <a:latin typeface="Microsoft YaHei" pitchFamily="34" charset="0"/>
+                          <a:ea typeface="Microsoft YaHei" pitchFamily="34" charset="-122"/>
+                          <a:cs typeface="Microsoft YaHei" pitchFamily="34" charset="-120"/>
+                        </a:rPr>
+                        <a:t>293.9</a:t>
+                      </a:r>
+                      <a:endParaRPr lang="en-US" sz="1050" dirty="0">
+                        <a:latin typeface="Microsoft YaHei" charset="0"/>
+                        <a:ea typeface="Microsoft YaHei" charset="0"/>
+                        <a:cs typeface="Microsoft YaHei" charset="0"/>
+                      </a:endParaRPr>
+                    </a:p>
+                  </a:txBody>
+                  <a:tcPr marL="36576" marR="36576" marT="36576" marB="36576" anchor="ctr">
+                    <a:lnL w="6350" cap="flat" cmpd="sng" algn="ctr">
+                      <a:solidFill>
+                        <a:srgbClr val="D8E3EA"/>
+                      </a:solidFill>
+                      <a:prstDash val="solid"/>
+                      <a:round/>
+                      <a:headEnd type="none" w="med" len="med"/>
+                      <a:tailEnd type="none" w="med" len="med"/>
+                    </a:lnL>
+                    <a:lnR w="6350" cap="flat" cmpd="sng" algn="ctr">
+                      <a:solidFill>
+                        <a:srgbClr val="D8E3EA"/>
+                      </a:solidFill>
+                      <a:prstDash val="solid"/>
+                      <a:round/>
+                      <a:headEnd type="none" w="med" len="med"/>
+                      <a:tailEnd type="none" w="med" len="med"/>
+                    </a:lnR>
+                    <a:lnT w="6350" cap="flat" cmpd="sng" algn="ctr">
+                      <a:solidFill>
+                        <a:srgbClr val="D8E3EA"/>
+                      </a:solidFill>
+                      <a:prstDash val="solid"/>
+                      <a:round/>
+                      <a:headEnd type="none" w="med" len="med"/>
+                      <a:tailEnd type="none" w="med" len="med"/>
+                    </a:lnT>
+                    <a:lnB w="6350" cap="flat" cmpd="sng" algn="ctr">
+                      <a:solidFill>
+                        <a:srgbClr val="D8E3EA"/>
+                      </a:solidFill>
+                      <a:prstDash val="solid"/>
+                      <a:round/>
+                      <a:headEnd type="none" w="med" len="med"/>
+                      <a:tailEnd type="none" w="med" len="med"/>
+                    </a:lnB>
+                    <a:solidFill>
+                      <a:srgbClr val="E4F2EF"/>
+                    </a:solidFill>
+                  </a:tcPr>
+                </a:tc>
+                <a:tc>
+                  <a:txBody>
+                    <a:bodyPr/>
+                    <a:lstStyle/>
+                    <a:p>
+                      <a:pPr algn="ctr" indent="0" marL="0">
+                        <a:buNone/>
+                      </a:pPr>
+                      <a:r>
+                        <a:rPr lang="en-US" sz="1050" dirty="0">
+                          <a:solidFill>
+                            <a:srgbClr val="22303C"/>
+                          </a:solidFill>
+                          <a:latin typeface="Microsoft YaHei" pitchFamily="34" charset="0"/>
+                          <a:ea typeface="Microsoft YaHei" pitchFamily="34" charset="-122"/>
+                          <a:cs typeface="Microsoft YaHei" pitchFamily="34" charset="-120"/>
+                        </a:rPr>
+                        <a:t>285.7</a:t>
+                      </a:r>
+                      <a:endParaRPr lang="en-US" sz="1050" dirty="0">
+                        <a:latin typeface="Microsoft YaHei" charset="0"/>
+                        <a:ea typeface="Microsoft YaHei" charset="0"/>
+                        <a:cs typeface="Microsoft YaHei" charset="0"/>
+                      </a:endParaRPr>
+                    </a:p>
+                  </a:txBody>
+                  <a:tcPr marL="36576" marR="36576" marT="36576" marB="36576" anchor="ctr">
+                    <a:lnL w="6350" cap="flat" cmpd="sng" algn="ctr">
+                      <a:solidFill>
+                        <a:srgbClr val="D8E3EA"/>
+                      </a:solidFill>
+                      <a:prstDash val="solid"/>
+                      <a:round/>
+                      <a:headEnd type="none" w="med" len="med"/>
+                      <a:tailEnd type="none" w="med" len="med"/>
+                    </a:lnL>
+                    <a:lnR w="6350" cap="flat" cmpd="sng" algn="ctr">
+                      <a:solidFill>
+                        <a:srgbClr val="D8E3EA"/>
+                      </a:solidFill>
+                      <a:prstDash val="solid"/>
+                      <a:round/>
+                      <a:headEnd type="none" w="med" len="med"/>
+                      <a:tailEnd type="none" w="med" len="med"/>
+                    </a:lnR>
+                    <a:lnT w="6350" cap="flat" cmpd="sng" algn="ctr">
+                      <a:solidFill>
+                        <a:srgbClr val="D8E3EA"/>
+                      </a:solidFill>
+                      <a:prstDash val="solid"/>
+                      <a:round/>
+                      <a:headEnd type="none" w="med" len="med"/>
+                      <a:tailEnd type="none" w="med" len="med"/>
+                    </a:lnT>
+                    <a:lnB w="6350" cap="flat" cmpd="sng" algn="ctr">
+                      <a:solidFill>
+                        <a:srgbClr val="D8E3EA"/>
+                      </a:solidFill>
+                      <a:prstDash val="solid"/>
+                      <a:round/>
+                      <a:headEnd type="none" w="med" len="med"/>
+                      <a:tailEnd type="none" w="med" len="med"/>
+                    </a:lnB>
+                    <a:solidFill>
+                      <a:srgbClr val="E4F2EF"/>
+                    </a:solidFill>
+                  </a:tcPr>
+                </a:tc>
+                <a:tc>
+                  <a:txBody>
+                    <a:bodyPr/>
+                    <a:lstStyle/>
+                    <a:p>
+                      <a:pPr algn="ctr" indent="0" marL="0">
+                        <a:buNone/>
+                      </a:pPr>
+                      <a:r>
+                        <a:rPr lang="en-US" sz="1050" dirty="0">
+                          <a:solidFill>
+                            <a:srgbClr val="22303C"/>
+                          </a:solidFill>
+                          <a:latin typeface="Microsoft YaHei" pitchFamily="34" charset="0"/>
+                          <a:ea typeface="Microsoft YaHei" pitchFamily="34" charset="-122"/>
+                          <a:cs typeface="Microsoft YaHei" pitchFamily="34" charset="-120"/>
+                        </a:rPr>
+                        <a:t>237.3</a:t>
+                      </a:r>
+                      <a:endParaRPr lang="en-US" sz="1050" dirty="0">
+                        <a:latin typeface="Microsoft YaHei" charset="0"/>
+                        <a:ea typeface="Microsoft YaHei" charset="0"/>
+                        <a:cs typeface="Microsoft YaHei" charset="0"/>
+                      </a:endParaRPr>
+                    </a:p>
+                  </a:txBody>
+                  <a:tcPr marL="36576" marR="36576" marT="36576" marB="36576" anchor="ctr">
+                    <a:lnL w="6350" cap="flat" cmpd="sng" algn="ctr">
+                      <a:solidFill>
+                        <a:srgbClr val="D8E3EA"/>
+                      </a:solidFill>
+                      <a:prstDash val="solid"/>
+                      <a:round/>
+                      <a:headEnd type="none" w="med" len="med"/>
+                      <a:tailEnd type="none" w="med" len="med"/>
+                    </a:lnL>
+                    <a:lnR w="6350" cap="flat" cmpd="sng" algn="ctr">
+                      <a:solidFill>
+                        <a:srgbClr val="D8E3EA"/>
+                      </a:solidFill>
+                      <a:prstDash val="solid"/>
+                      <a:round/>
+                      <a:headEnd type="none" w="med" len="med"/>
+                      <a:tailEnd type="none" w="med" len="med"/>
+                    </a:lnR>
+                    <a:lnT w="6350" cap="flat" cmpd="sng" algn="ctr">
+                      <a:solidFill>
+                        <a:srgbClr val="D8E3EA"/>
+                      </a:solidFill>
+                      <a:prstDash val="solid"/>
+                      <a:round/>
+                      <a:headEnd type="none" w="med" len="med"/>
+                      <a:tailEnd type="none" w="med" len="med"/>
+                    </a:lnT>
+                    <a:lnB w="6350" cap="flat" cmpd="sng" algn="ctr">
+                      <a:solidFill>
+                        <a:srgbClr val="D8E3EA"/>
+                      </a:solidFill>
+                      <a:prstDash val="solid"/>
+                      <a:round/>
+                      <a:headEnd type="none" w="med" len="med"/>
+                      <a:tailEnd type="none" w="med" len="med"/>
+                    </a:lnB>
+                    <a:solidFill>
+                      <a:srgbClr val="E4F2EF"/>
+                    </a:solidFill>
+                  </a:tcPr>
+                </a:tc>
+                <a:tc>
+                  <a:txBody>
+                    <a:bodyPr/>
+                    <a:lstStyle/>
+                    <a:p>
+                      <a:pPr algn="ctr" indent="0" marL="0">
+                        <a:buNone/>
+                      </a:pPr>
+                      <a:r>
+                        <a:rPr lang="en-US" sz="1050" dirty="0">
+                          <a:solidFill>
+                            <a:srgbClr val="22303C"/>
+                          </a:solidFill>
+                          <a:latin typeface="Microsoft YaHei" pitchFamily="34" charset="0"/>
+                          <a:ea typeface="Microsoft YaHei" pitchFamily="34" charset="-122"/>
+                          <a:cs typeface="Microsoft YaHei" pitchFamily="34" charset="-120"/>
+                        </a:rPr>
+                        <a:t>261.5</a:t>
+                      </a:r>
+                      <a:endParaRPr lang="en-US" sz="1050" dirty="0">
+                        <a:latin typeface="Microsoft YaHei" charset="0"/>
+                        <a:ea typeface="Microsoft YaHei" charset="0"/>
+                        <a:cs typeface="Microsoft YaHei" charset="0"/>
+                      </a:endParaRPr>
+                    </a:p>
+                  </a:txBody>
+                  <a:tcPr marL="36576" marR="36576" marT="36576" marB="36576" anchor="ctr">
+                    <a:lnL w="6350" cap="flat" cmpd="sng" algn="ctr">
+                      <a:solidFill>
+                        <a:srgbClr val="D8E3EA"/>
+                      </a:solidFill>
+                      <a:prstDash val="solid"/>
+                      <a:round/>
+                      <a:headEnd type="none" w="med" len="med"/>
+                      <a:tailEnd type="none" w="med" len="med"/>
+                    </a:lnL>
+                    <a:lnR w="6350" cap="flat" cmpd="sng" algn="ctr">
+                      <a:solidFill>
+                        <a:srgbClr val="D8E3EA"/>
+                      </a:solidFill>
+                      <a:prstDash val="solid"/>
+                      <a:round/>
+                      <a:headEnd type="none" w="med" len="med"/>
+                      <a:tailEnd type="none" w="med" len="med"/>
+                    </a:lnR>
+                    <a:lnT w="6350" cap="flat" cmpd="sng" algn="ctr">
+                      <a:solidFill>
+                        <a:srgbClr val="D8E3EA"/>
+                      </a:solidFill>
+                      <a:prstDash val="solid"/>
+                      <a:round/>
+                      <a:headEnd type="none" w="med" len="med"/>
+                      <a:tailEnd type="none" w="med" len="med"/>
+                    </a:lnT>
+                    <a:lnB w="6350" cap="flat" cmpd="sng" algn="ctr">
+                      <a:solidFill>
+                        <a:srgbClr val="D8E3EA"/>
+                      </a:solidFill>
+                      <a:prstDash val="solid"/>
+                      <a:round/>
+                      <a:headEnd type="none" w="med" len="med"/>
+                      <a:tailEnd type="none" w="med" len="med"/>
+                    </a:lnB>
+                    <a:solidFill>
+                      <a:srgbClr val="E4F2EF"/>
+                    </a:solidFill>
+                  </a:tcPr>
+                </a:tc>
+              </a:tr>
+              <a:tr h="301752">
+                <a:tc>
+                  <a:txBody>
+                    <a:bodyPr/>
+                    <a:lstStyle/>
+                    <a:p>
+                      <a:pPr algn="ctr" indent="0" marL="0">
+                        <a:buNone/>
+                      </a:pPr>
+                      <a:r>
+                        <a:rPr lang="en-US" sz="1050" dirty="0">
+                          <a:solidFill>
+                            <a:srgbClr val="22303C"/>
+                          </a:solidFill>
+                          <a:latin typeface="Microsoft YaHei" pitchFamily="34" charset="0"/>
+                          <a:ea typeface="Microsoft YaHei" pitchFamily="34" charset="-122"/>
+                          <a:cs typeface="Microsoft YaHei" pitchFamily="34" charset="-120"/>
+                        </a:rPr>
+                        <a:t>ON</a:t>
+                      </a:r>
+                      <a:endParaRPr lang="en-US" sz="1050" dirty="0">
+                        <a:latin typeface="Microsoft YaHei" charset="0"/>
+                        <a:ea typeface="Microsoft YaHei" charset="0"/>
+                        <a:cs typeface="Microsoft YaHei" charset="0"/>
+                      </a:endParaRPr>
+                    </a:p>
+                  </a:txBody>
+                  <a:tcPr marL="36576" marR="36576" marT="36576" marB="36576" anchor="ctr">
+                    <a:lnL w="6350" cap="flat" cmpd="sng" algn="ctr">
+                      <a:solidFill>
+                        <a:srgbClr val="D8E3EA"/>
+                      </a:solidFill>
+                      <a:prstDash val="solid"/>
+                      <a:round/>
+                      <a:headEnd type="none" w="med" len="med"/>
+                      <a:tailEnd type="none" w="med" len="med"/>
+                    </a:lnL>
+                    <a:lnR w="6350" cap="flat" cmpd="sng" algn="ctr">
+                      <a:solidFill>
+                        <a:srgbClr val="D8E3EA"/>
+                      </a:solidFill>
+                      <a:prstDash val="solid"/>
+                      <a:round/>
+                      <a:headEnd type="none" w="med" len="med"/>
+                      <a:tailEnd type="none" w="med" len="med"/>
+                    </a:lnR>
+                    <a:lnT w="6350" cap="flat" cmpd="sng" algn="ctr">
+                      <a:solidFill>
+                        <a:srgbClr val="D8E3EA"/>
+                      </a:solidFill>
+                      <a:prstDash val="solid"/>
+                      <a:round/>
+                      <a:headEnd type="none" w="med" len="med"/>
+                      <a:tailEnd type="none" w="med" len="med"/>
+                    </a:lnT>
+                    <a:lnB w="6350" cap="flat" cmpd="sng" algn="ctr">
+                      <a:solidFill>
+                        <a:srgbClr val="D8E3EA"/>
+                      </a:solidFill>
+                      <a:prstDash val="solid"/>
+                      <a:round/>
+                      <a:headEnd type="none" w="med" len="med"/>
+                      <a:tailEnd type="none" w="med" len="med"/>
+                    </a:lnB>
+                    <a:solidFill>
+                      <a:srgbClr val="E4F2EF"/>
+                    </a:solidFill>
+                  </a:tcPr>
+                </a:tc>
+                <a:tc>
+                  <a:txBody>
+                    <a:bodyPr/>
+                    <a:lstStyle/>
+                    <a:p>
+                      <a:pPr algn="ctr" indent="0" marL="0">
+                        <a:buNone/>
+                      </a:pPr>
+                      <a:r>
+                        <a:rPr lang="en-US" sz="1050" dirty="0">
+                          <a:solidFill>
+                            <a:srgbClr val="22303C"/>
+                          </a:solidFill>
+                          <a:latin typeface="Microsoft YaHei" pitchFamily="34" charset="0"/>
+                          <a:ea typeface="Microsoft YaHei" pitchFamily="34" charset="-122"/>
+                          <a:cs typeface="Microsoft YaHei" pitchFamily="34" charset="-120"/>
+                        </a:rPr>
+                        <a:t>2</a:t>
+                      </a:r>
+                      <a:endParaRPr lang="en-US" sz="1050" dirty="0">
+                        <a:latin typeface="Microsoft YaHei" charset="0"/>
+                        <a:ea typeface="Microsoft YaHei" charset="0"/>
+                        <a:cs typeface="Microsoft YaHei" charset="0"/>
+                      </a:endParaRPr>
+                    </a:p>
+                  </a:txBody>
+                  <a:tcPr marL="36576" marR="36576" marT="36576" marB="36576" anchor="ctr">
+                    <a:lnL w="6350" cap="flat" cmpd="sng" algn="ctr">
+                      <a:solidFill>
+                        <a:srgbClr val="D8E3EA"/>
+                      </a:solidFill>
+                      <a:prstDash val="solid"/>
+                      <a:round/>
+                      <a:headEnd type="none" w="med" len="med"/>
+                      <a:tailEnd type="none" w="med" len="med"/>
+                    </a:lnL>
+                    <a:lnR w="6350" cap="flat" cmpd="sng" algn="ctr">
+                      <a:solidFill>
+                        <a:srgbClr val="D8E3EA"/>
+                      </a:solidFill>
+                      <a:prstDash val="solid"/>
+                      <a:round/>
+                      <a:headEnd type="none" w="med" len="med"/>
+                      <a:tailEnd type="none" w="med" len="med"/>
+                    </a:lnR>
+                    <a:lnT w="6350" cap="flat" cmpd="sng" algn="ctr">
+                      <a:solidFill>
+                        <a:srgbClr val="D8E3EA"/>
+                      </a:solidFill>
+                      <a:prstDash val="solid"/>
+                      <a:round/>
+                      <a:headEnd type="none" w="med" len="med"/>
+                      <a:tailEnd type="none" w="med" len="med"/>
+                    </a:lnT>
+                    <a:lnB w="6350" cap="flat" cmpd="sng" algn="ctr">
+                      <a:solidFill>
+                        <a:srgbClr val="D8E3EA"/>
+                      </a:solidFill>
+                      <a:prstDash val="solid"/>
+                      <a:round/>
+                      <a:headEnd type="none" w="med" len="med"/>
+                      <a:tailEnd type="none" w="med" len="med"/>
+                    </a:lnB>
+                    <a:solidFill>
+                      <a:srgbClr val="E4F2EF"/>
+                    </a:solidFill>
+                  </a:tcPr>
+                </a:tc>
+                <a:tc>
+                  <a:txBody>
+                    <a:bodyPr/>
+                    <a:lstStyle/>
+                    <a:p>
+                      <a:pPr algn="ctr" indent="0" marL="0">
+                        <a:buNone/>
+                      </a:pPr>
+                      <a:r>
+                        <a:rPr lang="en-US" sz="1050" dirty="0">
+                          <a:solidFill>
+                            <a:srgbClr val="22303C"/>
+                          </a:solidFill>
+                          <a:latin typeface="Microsoft YaHei" pitchFamily="34" charset="0"/>
+                          <a:ea typeface="Microsoft YaHei" pitchFamily="34" charset="-122"/>
+                          <a:cs typeface="Microsoft YaHei" pitchFamily="34" charset="-120"/>
+                        </a:rPr>
+                        <a:t>303.1</a:t>
+                      </a:r>
+                      <a:endParaRPr lang="en-US" sz="1050" dirty="0">
+                        <a:latin typeface="Microsoft YaHei" charset="0"/>
+                        <a:ea typeface="Microsoft YaHei" charset="0"/>
+                        <a:cs typeface="Microsoft YaHei" charset="0"/>
+                      </a:endParaRPr>
+                    </a:p>
+                  </a:txBody>
+                  <a:tcPr marL="36576" marR="36576" marT="36576" marB="36576" anchor="ctr">
+                    <a:lnL w="6350" cap="flat" cmpd="sng" algn="ctr">
+                      <a:solidFill>
+                        <a:srgbClr val="D8E3EA"/>
+                      </a:solidFill>
+                      <a:prstDash val="solid"/>
+                      <a:round/>
+                      <a:headEnd type="none" w="med" len="med"/>
+                      <a:tailEnd type="none" w="med" len="med"/>
+                    </a:lnL>
+                    <a:lnR w="6350" cap="flat" cmpd="sng" algn="ctr">
+                      <a:solidFill>
+                        <a:srgbClr val="D8E3EA"/>
+                      </a:solidFill>
+                      <a:prstDash val="solid"/>
+                      <a:round/>
+                      <a:headEnd type="none" w="med" len="med"/>
+                      <a:tailEnd type="none" w="med" len="med"/>
+                    </a:lnR>
+                    <a:lnT w="6350" cap="flat" cmpd="sng" algn="ctr">
+                      <a:solidFill>
+                        <a:srgbClr val="D8E3EA"/>
+                      </a:solidFill>
+                      <a:prstDash val="solid"/>
+                      <a:round/>
+                      <a:headEnd type="none" w="med" len="med"/>
+                      <a:tailEnd type="none" w="med" len="med"/>
+                    </a:lnT>
+                    <a:lnB w="6350" cap="flat" cmpd="sng" algn="ctr">
+                      <a:solidFill>
+                        <a:srgbClr val="D8E3EA"/>
+                      </a:solidFill>
+                      <a:prstDash val="solid"/>
+                      <a:round/>
+                      <a:headEnd type="none" w="med" len="med"/>
+                      <a:tailEnd type="none" w="med" len="med"/>
+                    </a:lnB>
+                    <a:solidFill>
+                      <a:srgbClr val="E4F2EF"/>
+                    </a:solidFill>
+                  </a:tcPr>
+                </a:tc>
+                <a:tc>
+                  <a:txBody>
+                    <a:bodyPr/>
+                    <a:lstStyle/>
+                    <a:p>
+                      <a:pPr algn="ctr" indent="0" marL="0">
+                        <a:buNone/>
+                      </a:pPr>
+                      <a:r>
+                        <a:rPr lang="en-US" sz="1050" dirty="0">
+                          <a:solidFill>
+                            <a:srgbClr val="22303C"/>
+                          </a:solidFill>
+                          <a:latin typeface="Microsoft YaHei" pitchFamily="34" charset="0"/>
+                          <a:ea typeface="Microsoft YaHei" pitchFamily="34" charset="-122"/>
+                          <a:cs typeface="Microsoft YaHei" pitchFamily="34" charset="-120"/>
+                        </a:rPr>
+                        <a:t>264.2</a:t>
+                      </a:r>
+                      <a:endParaRPr lang="en-US" sz="1050" dirty="0">
+                        <a:latin typeface="Microsoft YaHei" charset="0"/>
+                        <a:ea typeface="Microsoft YaHei" charset="0"/>
+                        <a:cs typeface="Microsoft YaHei" charset="0"/>
+                      </a:endParaRPr>
+                    </a:p>
+                  </a:txBody>
+                  <a:tcPr marL="36576" marR="36576" marT="36576" marB="36576" anchor="ctr">
+                    <a:lnL w="6350" cap="flat" cmpd="sng" algn="ctr">
+                      <a:solidFill>
+                        <a:srgbClr val="D8E3EA"/>
+                      </a:solidFill>
+                      <a:prstDash val="solid"/>
+                      <a:round/>
+                      <a:headEnd type="none" w="med" len="med"/>
+                      <a:tailEnd type="none" w="med" len="med"/>
+                    </a:lnL>
+                    <a:lnR w="6350" cap="flat" cmpd="sng" algn="ctr">
+                      <a:solidFill>
+                        <a:srgbClr val="D8E3EA"/>
+                      </a:solidFill>
+                      <a:prstDash val="solid"/>
+                      <a:round/>
+                      <a:headEnd type="none" w="med" len="med"/>
+                      <a:tailEnd type="none" w="med" len="med"/>
+                    </a:lnR>
+                    <a:lnT w="6350" cap="flat" cmpd="sng" algn="ctr">
+                      <a:solidFill>
+                        <a:srgbClr val="D8E3EA"/>
+                      </a:solidFill>
+                      <a:prstDash val="solid"/>
+                      <a:round/>
+                      <a:headEnd type="none" w="med" len="med"/>
+                      <a:tailEnd type="none" w="med" len="med"/>
+                    </a:lnT>
+                    <a:lnB w="6350" cap="flat" cmpd="sng" algn="ctr">
+                      <a:solidFill>
+                        <a:srgbClr val="D8E3EA"/>
+                      </a:solidFill>
+                      <a:prstDash val="solid"/>
+                      <a:round/>
+                      <a:headEnd type="none" w="med" len="med"/>
+                      <a:tailEnd type="none" w="med" len="med"/>
+                    </a:lnB>
+                    <a:solidFill>
+                      <a:srgbClr val="E4F2EF"/>
+                    </a:solidFill>
+                  </a:tcPr>
+                </a:tc>
+                <a:tc>
+                  <a:txBody>
+                    <a:bodyPr/>
+                    <a:lstStyle/>
+                    <a:p>
+                      <a:pPr algn="ctr" indent="0" marL="0">
+                        <a:buNone/>
+                      </a:pPr>
+                      <a:r>
+                        <a:rPr lang="en-US" sz="1050" dirty="0">
+                          <a:solidFill>
+                            <a:srgbClr val="22303C"/>
+                          </a:solidFill>
+                          <a:latin typeface="Microsoft YaHei" pitchFamily="34" charset="0"/>
+                          <a:ea typeface="Microsoft YaHei" pitchFamily="34" charset="-122"/>
+                          <a:cs typeface="Microsoft YaHei" pitchFamily="34" charset="-120"/>
+                        </a:rPr>
+                        <a:t>125.8</a:t>
+                      </a:r>
+                      <a:endParaRPr lang="en-US" sz="1050" dirty="0">
+                        <a:latin typeface="Microsoft YaHei" charset="0"/>
+                        <a:ea typeface="Microsoft YaHei" charset="0"/>
+                        <a:cs typeface="Microsoft YaHei" charset="0"/>
+                      </a:endParaRPr>
+                    </a:p>
+                  </a:txBody>
+                  <a:tcPr marL="36576" marR="36576" marT="36576" marB="36576" anchor="ctr">
+                    <a:lnL w="6350" cap="flat" cmpd="sng" algn="ctr">
+                      <a:solidFill>
+                        <a:srgbClr val="D8E3EA"/>
+                      </a:solidFill>
+                      <a:prstDash val="solid"/>
+                      <a:round/>
+                      <a:headEnd type="none" w="med" len="med"/>
+                      <a:tailEnd type="none" w="med" len="med"/>
+                    </a:lnL>
+                    <a:lnR w="6350" cap="flat" cmpd="sng" algn="ctr">
+                      <a:solidFill>
+                        <a:srgbClr val="D8E3EA"/>
+                      </a:solidFill>
+                      <a:prstDash val="solid"/>
+                      <a:round/>
+                      <a:headEnd type="none" w="med" len="med"/>
+                      <a:tailEnd type="none" w="med" len="med"/>
+                    </a:lnR>
+                    <a:lnT w="6350" cap="flat" cmpd="sng" algn="ctr">
+                      <a:solidFill>
+                        <a:srgbClr val="D8E3EA"/>
+                      </a:solidFill>
+                      <a:prstDash val="solid"/>
+                      <a:round/>
+                      <a:headEnd type="none" w="med" len="med"/>
+                      <a:tailEnd type="none" w="med" len="med"/>
+                    </a:lnT>
+                    <a:lnB w="6350" cap="flat" cmpd="sng" algn="ctr">
+                      <a:solidFill>
+                        <a:srgbClr val="D8E3EA"/>
+                      </a:solidFill>
+                      <a:prstDash val="solid"/>
+                      <a:round/>
+                      <a:headEnd type="none" w="med" len="med"/>
+                      <a:tailEnd type="none" w="med" len="med"/>
+                    </a:lnB>
+                    <a:solidFill>
+                      <a:srgbClr val="E4F2EF"/>
+                    </a:solidFill>
+                  </a:tcPr>
+                </a:tc>
+                <a:tc>
+                  <a:txBody>
+                    <a:bodyPr/>
+                    <a:lstStyle/>
+                    <a:p>
+                      <a:pPr algn="ctr" indent="0" marL="0">
+                        <a:buNone/>
+                      </a:pPr>
+                      <a:r>
+                        <a:rPr lang="en-US" sz="1050" dirty="0">
+                          <a:solidFill>
+                            <a:srgbClr val="22303C"/>
+                          </a:solidFill>
+                          <a:latin typeface="Microsoft YaHei" pitchFamily="34" charset="0"/>
+                          <a:ea typeface="Microsoft YaHei" pitchFamily="34" charset="-122"/>
+                          <a:cs typeface="Microsoft YaHei" pitchFamily="34" charset="-120"/>
+                        </a:rPr>
+                        <a:t>195.0</a:t>
+                      </a:r>
+                      <a:endParaRPr lang="en-US" sz="1050" dirty="0">
+                        <a:latin typeface="Microsoft YaHei" charset="0"/>
+                        <a:ea typeface="Microsoft YaHei" charset="0"/>
+                        <a:cs typeface="Microsoft YaHei" charset="0"/>
+                      </a:endParaRPr>
+                    </a:p>
+                  </a:txBody>
+                  <a:tcPr marL="36576" marR="36576" marT="36576" marB="36576" anchor="ctr">
+                    <a:lnL w="6350" cap="flat" cmpd="sng" algn="ctr">
+                      <a:solidFill>
+                        <a:srgbClr val="D8E3EA"/>
+                      </a:solidFill>
+                      <a:prstDash val="solid"/>
+                      <a:round/>
+                      <a:headEnd type="none" w="med" len="med"/>
+                      <a:tailEnd type="none" w="med" len="med"/>
+                    </a:lnL>
+                    <a:lnR w="6350" cap="flat" cmpd="sng" algn="ctr">
+                      <a:solidFill>
+                        <a:srgbClr val="D8E3EA"/>
+                      </a:solidFill>
+                      <a:prstDash val="solid"/>
+                      <a:round/>
+                      <a:headEnd type="none" w="med" len="med"/>
+                      <a:tailEnd type="none" w="med" len="med"/>
+                    </a:lnR>
+                    <a:lnT w="6350" cap="flat" cmpd="sng" algn="ctr">
+                      <a:solidFill>
+                        <a:srgbClr val="D8E3EA"/>
+                      </a:solidFill>
+                      <a:prstDash val="solid"/>
+                      <a:round/>
+                      <a:headEnd type="none" w="med" len="med"/>
+                      <a:tailEnd type="none" w="med" len="med"/>
+                    </a:lnT>
+                    <a:lnB w="6350" cap="flat" cmpd="sng" algn="ctr">
+                      <a:solidFill>
+                        <a:srgbClr val="D8E3EA"/>
+                      </a:solidFill>
+                      <a:prstDash val="solid"/>
+                      <a:round/>
+                      <a:headEnd type="none" w="med" len="med"/>
+                      <a:tailEnd type="none" w="med" len="med"/>
+                    </a:lnB>
+                    <a:solidFill>
+                      <a:srgbClr val="E4F2EF"/>
+                    </a:solidFill>
+                  </a:tcPr>
+                </a:tc>
+              </a:tr>
+              <a:tr h="301752">
+                <a:tc>
+                  <a:txBody>
+                    <a:bodyPr/>
+                    <a:lstStyle/>
+                    <a:p>
+                      <a:pPr algn="ctr" indent="0" marL="0">
+                        <a:buNone/>
+                      </a:pPr>
+                      <a:r>
+                        <a:rPr lang="en-US" sz="1050" dirty="0">
+                          <a:solidFill>
+                            <a:srgbClr val="22303C"/>
+                          </a:solidFill>
+                          <a:latin typeface="Microsoft YaHei" pitchFamily="34" charset="0"/>
+                          <a:ea typeface="Microsoft YaHei" pitchFamily="34" charset="-122"/>
+                          <a:cs typeface="Microsoft YaHei" pitchFamily="34" charset="-120"/>
+                        </a:rPr>
+                        <a:t>ON</a:t>
+                      </a:r>
+                      <a:endParaRPr lang="en-US" sz="1050" dirty="0">
+                        <a:latin typeface="Microsoft YaHei" charset="0"/>
+                        <a:ea typeface="Microsoft YaHei" charset="0"/>
+                        <a:cs typeface="Microsoft YaHei" charset="0"/>
+                      </a:endParaRPr>
+                    </a:p>
+                  </a:txBody>
+                  <a:tcPr marL="36576" marR="36576" marT="36576" marB="36576" anchor="ctr">
+                    <a:lnL w="6350" cap="flat" cmpd="sng" algn="ctr">
+                      <a:solidFill>
+                        <a:srgbClr val="D8E3EA"/>
+                      </a:solidFill>
+                      <a:prstDash val="solid"/>
+                      <a:round/>
+                      <a:headEnd type="none" w="med" len="med"/>
+                      <a:tailEnd type="none" w="med" len="med"/>
+                    </a:lnL>
+                    <a:lnR w="6350" cap="flat" cmpd="sng" algn="ctr">
+                      <a:solidFill>
+                        <a:srgbClr val="D8E3EA"/>
+                      </a:solidFill>
+                      <a:prstDash val="solid"/>
+                      <a:round/>
+                      <a:headEnd type="none" w="med" len="med"/>
+                      <a:tailEnd type="none" w="med" len="med"/>
+                    </a:lnR>
+                    <a:lnT w="6350" cap="flat" cmpd="sng" algn="ctr">
+                      <a:solidFill>
+                        <a:srgbClr val="D8E3EA"/>
+                      </a:solidFill>
+                      <a:prstDash val="solid"/>
+                      <a:round/>
+                      <a:headEnd type="none" w="med" len="med"/>
+                      <a:tailEnd type="none" w="med" len="med"/>
+                    </a:lnT>
+                    <a:lnB w="6350" cap="flat" cmpd="sng" algn="ctr">
+                      <a:solidFill>
+                        <a:srgbClr val="D8E3EA"/>
+                      </a:solidFill>
+                      <a:prstDash val="solid"/>
+                      <a:round/>
+                      <a:headEnd type="none" w="med" len="med"/>
+                      <a:tailEnd type="none" w="med" len="med"/>
+                    </a:lnB>
+                    <a:solidFill>
+                      <a:srgbClr val="E4F2EF"/>
+                    </a:solidFill>
+                  </a:tcPr>
+                </a:tc>
+                <a:tc>
+                  <a:txBody>
+                    <a:bodyPr/>
+                    <a:lstStyle/>
+                    <a:p>
+                      <a:pPr algn="ctr" indent="0" marL="0">
+                        <a:buNone/>
+                      </a:pPr>
+                      <a:r>
+                        <a:rPr lang="en-US" sz="1050" dirty="0">
+                          <a:solidFill>
+                            <a:srgbClr val="22303C"/>
+                          </a:solidFill>
+                          <a:latin typeface="Microsoft YaHei" pitchFamily="34" charset="0"/>
+                          <a:ea typeface="Microsoft YaHei" pitchFamily="34" charset="-122"/>
+                          <a:cs typeface="Microsoft YaHei" pitchFamily="34" charset="-120"/>
+                        </a:rPr>
+                        <a:t>3</a:t>
+                      </a:r>
+                      <a:endParaRPr lang="en-US" sz="1050" dirty="0">
+                        <a:latin typeface="Microsoft YaHei" charset="0"/>
+                        <a:ea typeface="Microsoft YaHei" charset="0"/>
+                        <a:cs typeface="Microsoft YaHei" charset="0"/>
+                      </a:endParaRPr>
+                    </a:p>
+                  </a:txBody>
+                  <a:tcPr marL="36576" marR="36576" marT="36576" marB="36576" anchor="ctr">
+                    <a:lnL w="6350" cap="flat" cmpd="sng" algn="ctr">
+                      <a:solidFill>
+                        <a:srgbClr val="D8E3EA"/>
+                      </a:solidFill>
+                      <a:prstDash val="solid"/>
+                      <a:round/>
+                      <a:headEnd type="none" w="med" len="med"/>
+                      <a:tailEnd type="none" w="med" len="med"/>
+                    </a:lnL>
+                    <a:lnR w="6350" cap="flat" cmpd="sng" algn="ctr">
+                      <a:solidFill>
+                        <a:srgbClr val="D8E3EA"/>
+                      </a:solidFill>
+                      <a:prstDash val="solid"/>
+                      <a:round/>
+                      <a:headEnd type="none" w="med" len="med"/>
+                      <a:tailEnd type="none" w="med" len="med"/>
+                    </a:lnR>
+                    <a:lnT w="6350" cap="flat" cmpd="sng" algn="ctr">
+                      <a:solidFill>
+                        <a:srgbClr val="D8E3EA"/>
+                      </a:solidFill>
+                      <a:prstDash val="solid"/>
+                      <a:round/>
+                      <a:headEnd type="none" w="med" len="med"/>
+                      <a:tailEnd type="none" w="med" len="med"/>
+                    </a:lnT>
+                    <a:lnB w="6350" cap="flat" cmpd="sng" algn="ctr">
+                      <a:solidFill>
+                        <a:srgbClr val="D8E3EA"/>
+                      </a:solidFill>
+                      <a:prstDash val="solid"/>
+                      <a:round/>
+                      <a:headEnd type="none" w="med" len="med"/>
+                      <a:tailEnd type="none" w="med" len="med"/>
+                    </a:lnB>
+                    <a:solidFill>
+                      <a:srgbClr val="E4F2EF"/>
+                    </a:solidFill>
+                  </a:tcPr>
+                </a:tc>
+                <a:tc>
+                  <a:txBody>
+                    <a:bodyPr/>
+                    <a:lstStyle/>
+                    <a:p>
+                      <a:pPr algn="ctr" indent="0" marL="0">
+                        <a:buNone/>
+                      </a:pPr>
+                      <a:r>
+                        <a:rPr lang="en-US" sz="1050" dirty="0">
+                          <a:solidFill>
+                            <a:srgbClr val="22303C"/>
+                          </a:solidFill>
+                          <a:latin typeface="Microsoft YaHei" pitchFamily="34" charset="0"/>
+                          <a:ea typeface="Microsoft YaHei" pitchFamily="34" charset="-122"/>
+                          <a:cs typeface="Microsoft YaHei" pitchFamily="34" charset="-120"/>
+                        </a:rPr>
+                        <a:t>330.1</a:t>
+                      </a:r>
+                      <a:endParaRPr lang="en-US" sz="1050" dirty="0">
+                        <a:latin typeface="Microsoft YaHei" charset="0"/>
+                        <a:ea typeface="Microsoft YaHei" charset="0"/>
+                        <a:cs typeface="Microsoft YaHei" charset="0"/>
+                      </a:endParaRPr>
+                    </a:p>
+                  </a:txBody>
+                  <a:tcPr marL="36576" marR="36576" marT="36576" marB="36576" anchor="ctr">
+                    <a:lnL w="6350" cap="flat" cmpd="sng" algn="ctr">
+                      <a:solidFill>
+                        <a:srgbClr val="D8E3EA"/>
+                      </a:solidFill>
+                      <a:prstDash val="solid"/>
+                      <a:round/>
+                      <a:headEnd type="none" w="med" len="med"/>
+                      <a:tailEnd type="none" w="med" len="med"/>
+                    </a:lnL>
+                    <a:lnR w="6350" cap="flat" cmpd="sng" algn="ctr">
+                      <a:solidFill>
+                        <a:srgbClr val="D8E3EA"/>
+                      </a:solidFill>
+                      <a:prstDash val="solid"/>
+                      <a:round/>
+                      <a:headEnd type="none" w="med" len="med"/>
+                      <a:tailEnd type="none" w="med" len="med"/>
+                    </a:lnR>
+                    <a:lnT w="6350" cap="flat" cmpd="sng" algn="ctr">
+                      <a:solidFill>
+                        <a:srgbClr val="D8E3EA"/>
+                      </a:solidFill>
+                      <a:prstDash val="solid"/>
+                      <a:round/>
+                      <a:headEnd type="none" w="med" len="med"/>
+                      <a:tailEnd type="none" w="med" len="med"/>
+                    </a:lnT>
+                    <a:lnB w="6350" cap="flat" cmpd="sng" algn="ctr">
+                      <a:solidFill>
+                        <a:srgbClr val="D8E3EA"/>
+                      </a:solidFill>
+                      <a:prstDash val="solid"/>
+                      <a:round/>
+                      <a:headEnd type="none" w="med" len="med"/>
+                      <a:tailEnd type="none" w="med" len="med"/>
+                    </a:lnB>
+                    <a:solidFill>
+                      <a:srgbClr val="E4F2EF"/>
+                    </a:solidFill>
+                  </a:tcPr>
+                </a:tc>
+                <a:tc>
+                  <a:txBody>
+                    <a:bodyPr/>
+                    <a:lstStyle/>
+                    <a:p>
+                      <a:pPr algn="ctr" indent="0" marL="0">
+                        <a:buNone/>
+                      </a:pPr>
+                      <a:r>
+                        <a:rPr lang="en-US" sz="1050" dirty="0">
+                          <a:solidFill>
+                            <a:srgbClr val="22303C"/>
+                          </a:solidFill>
+                          <a:latin typeface="Microsoft YaHei" pitchFamily="34" charset="0"/>
+                          <a:ea typeface="Microsoft YaHei" pitchFamily="34" charset="-122"/>
+                          <a:cs typeface="Microsoft YaHei" pitchFamily="34" charset="-120"/>
+                        </a:rPr>
+                        <a:t>234.2</a:t>
+                      </a:r>
+                      <a:endParaRPr lang="en-US" sz="1050" dirty="0">
+                        <a:latin typeface="Microsoft YaHei" charset="0"/>
+                        <a:ea typeface="Microsoft YaHei" charset="0"/>
+                        <a:cs typeface="Microsoft YaHei" charset="0"/>
+                      </a:endParaRPr>
+                    </a:p>
+                  </a:txBody>
+                  <a:tcPr marL="36576" marR="36576" marT="36576" marB="36576" anchor="ctr">
+                    <a:lnL w="6350" cap="flat" cmpd="sng" algn="ctr">
+                      <a:solidFill>
+                        <a:srgbClr val="D8E3EA"/>
+                      </a:solidFill>
+                      <a:prstDash val="solid"/>
+                      <a:round/>
+                      <a:headEnd type="none" w="med" len="med"/>
+                      <a:tailEnd type="none" w="med" len="med"/>
+                    </a:lnL>
+                    <a:lnR w="6350" cap="flat" cmpd="sng" algn="ctr">
+                      <a:solidFill>
+                        <a:srgbClr val="D8E3EA"/>
+                      </a:solidFill>
+                      <a:prstDash val="solid"/>
+                      <a:round/>
+                      <a:headEnd type="none" w="med" len="med"/>
+                      <a:tailEnd type="none" w="med" len="med"/>
+                    </a:lnR>
+                    <a:lnT w="6350" cap="flat" cmpd="sng" algn="ctr">
+                      <a:solidFill>
+                        <a:srgbClr val="D8E3EA"/>
+                      </a:solidFill>
+                      <a:prstDash val="solid"/>
+                      <a:round/>
+                      <a:headEnd type="none" w="med" len="med"/>
+                      <a:tailEnd type="none" w="med" len="med"/>
+                    </a:lnT>
+                    <a:lnB w="6350" cap="flat" cmpd="sng" algn="ctr">
+                      <a:solidFill>
+                        <a:srgbClr val="D8E3EA"/>
+                      </a:solidFill>
+                      <a:prstDash val="solid"/>
+                      <a:round/>
+                      <a:headEnd type="none" w="med" len="med"/>
+                      <a:tailEnd type="none" w="med" len="med"/>
+                    </a:lnB>
+                    <a:solidFill>
+                      <a:srgbClr val="E4F2EF"/>
+                    </a:solidFill>
+                  </a:tcPr>
+                </a:tc>
+                <a:tc>
+                  <a:txBody>
+                    <a:bodyPr/>
+                    <a:lstStyle/>
+                    <a:p>
+                      <a:pPr algn="ctr" indent="0" marL="0">
+                        <a:buNone/>
+                      </a:pPr>
+                      <a:r>
+                        <a:rPr lang="en-US" sz="1050" dirty="0">
+                          <a:solidFill>
+                            <a:srgbClr val="22303C"/>
+                          </a:solidFill>
+                          <a:latin typeface="Microsoft YaHei" pitchFamily="34" charset="0"/>
+                          <a:ea typeface="Microsoft YaHei" pitchFamily="34" charset="-122"/>
+                          <a:cs typeface="Microsoft YaHei" pitchFamily="34" charset="-120"/>
+                        </a:rPr>
+                        <a:t>235.6</a:t>
+                      </a:r>
+                      <a:endParaRPr lang="en-US" sz="1050" dirty="0">
+                        <a:latin typeface="Microsoft YaHei" charset="0"/>
+                        <a:ea typeface="Microsoft YaHei" charset="0"/>
+                        <a:cs typeface="Microsoft YaHei" charset="0"/>
+                      </a:endParaRPr>
+                    </a:p>
+                  </a:txBody>
+                  <a:tcPr marL="36576" marR="36576" marT="36576" marB="36576" anchor="ctr">
+                    <a:lnL w="6350" cap="flat" cmpd="sng" algn="ctr">
+                      <a:solidFill>
+                        <a:srgbClr val="D8E3EA"/>
+                      </a:solidFill>
+                      <a:prstDash val="solid"/>
+                      <a:round/>
+                      <a:headEnd type="none" w="med" len="med"/>
+                      <a:tailEnd type="none" w="med" len="med"/>
+                    </a:lnL>
+                    <a:lnR w="6350" cap="flat" cmpd="sng" algn="ctr">
+                      <a:solidFill>
+                        <a:srgbClr val="D8E3EA"/>
+                      </a:solidFill>
+                      <a:prstDash val="solid"/>
+                      <a:round/>
+                      <a:headEnd type="none" w="med" len="med"/>
+                      <a:tailEnd type="none" w="med" len="med"/>
+                    </a:lnR>
+                    <a:lnT w="6350" cap="flat" cmpd="sng" algn="ctr">
+                      <a:solidFill>
+                        <a:srgbClr val="D8E3EA"/>
+                      </a:solidFill>
+                      <a:prstDash val="solid"/>
+                      <a:round/>
+                      <a:headEnd type="none" w="med" len="med"/>
+                      <a:tailEnd type="none" w="med" len="med"/>
+                    </a:lnT>
+                    <a:lnB w="6350" cap="flat" cmpd="sng" algn="ctr">
+                      <a:solidFill>
+                        <a:srgbClr val="D8E3EA"/>
+                      </a:solidFill>
+                      <a:prstDash val="solid"/>
+                      <a:round/>
+                      <a:headEnd type="none" w="med" len="med"/>
+                      <a:tailEnd type="none" w="med" len="med"/>
+                    </a:lnB>
+                    <a:solidFill>
+                      <a:srgbClr val="E4F2EF"/>
+                    </a:solidFill>
+                  </a:tcPr>
+                </a:tc>
+                <a:tc>
+                  <a:txBody>
+                    <a:bodyPr/>
+                    <a:lstStyle/>
+                    <a:p>
+                      <a:pPr algn="ctr" indent="0" marL="0">
+                        <a:buNone/>
+                      </a:pPr>
+                      <a:r>
+                        <a:rPr lang="en-US" sz="1050" dirty="0">
+                          <a:solidFill>
+                            <a:srgbClr val="22303C"/>
+                          </a:solidFill>
+                          <a:latin typeface="Microsoft YaHei" pitchFamily="34" charset="0"/>
+                          <a:ea typeface="Microsoft YaHei" pitchFamily="34" charset="-122"/>
+                          <a:cs typeface="Microsoft YaHei" pitchFamily="34" charset="-120"/>
+                        </a:rPr>
+                        <a:t>234.9</a:t>
+                      </a:r>
+                      <a:endParaRPr lang="en-US" sz="1050" dirty="0">
+                        <a:latin typeface="Microsoft YaHei" charset="0"/>
+                        <a:ea typeface="Microsoft YaHei" charset="0"/>
+                        <a:cs typeface="Microsoft YaHei" charset="0"/>
+                      </a:endParaRPr>
+                    </a:p>
+                  </a:txBody>
+                  <a:tcPr marL="36576" marR="36576" marT="36576" marB="36576" anchor="ctr">
+                    <a:lnL w="6350" cap="flat" cmpd="sng" algn="ctr">
+                      <a:solidFill>
+                        <a:srgbClr val="D8E3EA"/>
+                      </a:solidFill>
+                      <a:prstDash val="solid"/>
+                      <a:round/>
+                      <a:headEnd type="none" w="med" len="med"/>
+                      <a:tailEnd type="none" w="med" len="med"/>
+                    </a:lnL>
+                    <a:lnR w="6350" cap="flat" cmpd="sng" algn="ctr">
+                      <a:solidFill>
+                        <a:srgbClr val="D8E3EA"/>
+                      </a:solidFill>
+                      <a:prstDash val="solid"/>
+                      <a:round/>
+                      <a:headEnd type="none" w="med" len="med"/>
+                      <a:tailEnd type="none" w="med" len="med"/>
+                    </a:lnR>
+                    <a:lnT w="6350" cap="flat" cmpd="sng" algn="ctr">
+                      <a:solidFill>
+                        <a:srgbClr val="D8E3EA"/>
+                      </a:solidFill>
+                      <a:prstDash val="solid"/>
+                      <a:round/>
+                      <a:headEnd type="none" w="med" len="med"/>
+                      <a:tailEnd type="none" w="med" len="med"/>
+                    </a:lnT>
+                    <a:lnB w="6350" cap="flat" cmpd="sng" algn="ctr">
+                      <a:solidFill>
+                        <a:srgbClr val="D8E3EA"/>
+                      </a:solidFill>
+                      <a:prstDash val="solid"/>
+                      <a:round/>
+                      <a:headEnd type="none" w="med" len="med"/>
+                      <a:tailEnd type="none" w="med" len="med"/>
+                    </a:lnB>
+                    <a:solidFill>
+                      <a:srgbClr val="E4F2EF"/>
+                    </a:solidFill>
+                  </a:tcPr>
+                </a:tc>
+              </a:tr>
+            </a:tbl>
+          </a:graphicData>
+        </a:graphic>
+      </p:graphicFrame>
+      <p:sp>
+        <p:nvSpPr>
+          <p:cNvPr id="6" name="Text 3"/>
+          <p:cNvSpPr/>
+          <p:nvPr/>
+        </p:nvSpPr>
+        <p:spPr>
+          <a:xfrm>
+            <a:off x="548640" y="3310128"/>
+            <a:ext cx="8046720" cy="274320"/>
+          </a:xfrm>
+          <a:prstGeom prst="rect">
+            <a:avLst/>
+          </a:prstGeom>
+          <a:noFill/>
+          <a:ln/>
+        </p:spPr>
+        <p:txBody>
+          <a:bodyPr wrap="square" lIns="0" tIns="0" rIns="0" bIns="0" rtlCol="0" anchor="ctr"/>
+          <a:lstStyle/>
+          <a:p>
+            <a:pPr indent="0" marL="0">
+              <a:buNone/>
+            </a:pPr>
+            <a:r>
+              <a:rPr lang="en-US" sz="900" dirty="0">
+                <a:solidFill>
+                  <a:srgbClr val="6B7C8A"/>
+                </a:solidFill>
+                <a:latin typeface="Microsoft YaHei" pitchFamily="34" charset="0"/>
+                <a:ea typeface="Microsoft YaHei" pitchFamily="34" charset="-122"/>
+                <a:cs typeface="Microsoft YaHei" pitchFamily="34" charset="-120"/>
+              </a:rPr>
+              <a:t>decode（tok/s，a2gate 口径）；负载 = 3 轮同会话递进 + 轮间前缀缓存部分复用 + 每轮长输出（max 2000 token）；两臂仅差 NINFER_ASYNC_DEMOTE 开关</a:t>
+            </a:r>
+            <a:endParaRPr lang="en-US" sz="900" dirty="0"/>
+          </a:p>
+        </p:txBody>
+      </p:sp>
+      <p:sp>
+        <p:nvSpPr>
+          <p:cNvPr id="7" name="Text 4"/>
+          <p:cNvSpPr/>
+          <p:nvPr/>
+        </p:nvSpPr>
+        <p:spPr>
+          <a:xfrm>
+            <a:off x="548640" y="3657600"/>
+            <a:ext cx="8046720" cy="283464"/>
+          </a:xfrm>
+          <a:prstGeom prst="rect">
+            <a:avLst/>
+          </a:prstGeom>
+          <a:noFill/>
+          <a:ln/>
+        </p:spPr>
+        <p:txBody>
+          <a:bodyPr wrap="square" lIns="0" tIns="0" rIns="0" bIns="0" rtlCol="0" anchor="ctr"/>
+          <a:lstStyle/>
+          <a:p>
+            <a:pPr indent="0" marL="0">
+              <a:buNone/>
+            </a:pPr>
+            <a:r>
+              <a:rPr lang="en-US" sz="1050" b="1" dirty="0">
+                <a:solidFill>
+                  <a:srgbClr val="0E4C6E"/>
+                </a:solidFill>
+                <a:latin typeface="Microsoft YaHei" pitchFamily="34" charset="0"/>
+                <a:ea typeface="Microsoft YaHei" pitchFamily="34" charset="-122"/>
+                <a:cs typeface="Microsoft YaHei" pitchFamily="34" charset="-120"/>
+              </a:rPr>
+              <a:t>主判据：</a:t>
+            </a:r>
+            <a:pPr indent="0" marL="0">
+              <a:buNone/>
+            </a:pPr>
+            <a:r>
+              <a:rPr lang="en-US" sz="1050" dirty="0">
                 <a:solidFill>
                   <a:srgbClr val="22303C"/>
                 </a:solidFill>
@@ -6639,38 +9626,144 @@
                 <a:ea typeface="Microsoft YaHei" pitchFamily="34" charset="-122"/>
                 <a:cs typeface="Microsoft YaHei" pitchFamily="34" charset="-120"/>
               </a:rPr>
-              <a:t>深流水</a:t>
-            </a:r>
-            <a:endParaRPr lang="en-US" sz="1200" dirty="0"/>
-          </a:p>
-        </p:txBody>
-      </p:sp>
-      <p:sp>
-        <p:nvSpPr>
-          <p:cNvPr id="10" name="Text 8"/>
-          <p:cNvSpPr/>
-          <p:nvPr/>
-        </p:nvSpPr>
-        <p:spPr>
-          <a:xfrm>
-            <a:off x="3474720" y="1069848"/>
-            <a:ext cx="4983480" cy="438912"/>
-          </a:xfrm>
-          <a:prstGeom prst="rect">
-            <a:avLst/>
-          </a:prstGeom>
-          <a:noFill/>
-          <a:ln/>
-        </p:spPr>
-        <p:txBody>
-          <a:bodyPr wrap="square" lIns="0" tIns="0" rIns="0" bIns="0" rtlCol="0" anchor="ctr"/>
-          <a:lstStyle/>
-          <a:p>
-            <a:pPr indent="0" marL="0">
-              <a:buNone/>
-            </a:pPr>
-            <a:r>
-              <a:rPr lang="en-US" sz="950" dirty="0">
+              <a:t>OFF 深段 median 188.1 vs ON 234.9 ⇒ r = 0.80 &lt; 0.85：异步净收益成立；三轮配对 ON 全胜</a:t>
+            </a:r>
+            <a:endParaRPr lang="en-US" sz="1050" dirty="0"/>
+          </a:p>
+        </p:txBody>
+      </p:sp>
+      <p:sp>
+        <p:nvSpPr>
+          <p:cNvPr id="8" name="Text 5"/>
+          <p:cNvSpPr/>
+          <p:nvPr/>
+        </p:nvSpPr>
+        <p:spPr>
+          <a:xfrm>
+            <a:off x="548640" y="3959352"/>
+            <a:ext cx="8046720" cy="283464"/>
+          </a:xfrm>
+          <a:prstGeom prst="rect">
+            <a:avLst/>
+          </a:prstGeom>
+          <a:noFill/>
+          <a:ln/>
+        </p:spPr>
+        <p:txBody>
+          <a:bodyPr wrap="square" lIns="0" tIns="0" rIns="0" bIns="0" rtlCol="0" anchor="ctr"/>
+          <a:lstStyle/>
+          <a:p>
+            <a:pPr indent="0" marL="0">
+              <a:buNone/>
+            </a:pPr>
+            <a:r>
+              <a:rPr lang="en-US" sz="1050" b="1" dirty="0">
+                <a:solidFill>
+                  <a:srgbClr val="0E4C6E"/>
+                </a:solidFill>
+                <a:latin typeface="Microsoft YaHei" pitchFamily="34" charset="0"/>
+                <a:ea typeface="Microsoft YaHei" pitchFamily="34" charset="-122"/>
+                <a:cs typeface="Microsoft YaHei" pitchFamily="34" charset="-120"/>
+              </a:rPr>
+              <a:t>最深段（3.5× 超池）：</a:t>
+            </a:r>
+            <a:pPr indent="0" marL="0">
+              <a:buNone/>
+            </a:pPr>
+            <a:r>
+              <a:rPr lang="en-US" sz="1050" dirty="0">
+                <a:solidFill>
+                  <a:srgbClr val="22303C"/>
+                </a:solidFill>
+                <a:latin typeface="Microsoft YaHei" pitchFamily="34" charset="0"/>
+                <a:ea typeface="Microsoft YaHei" pitchFamily="34" charset="-122"/>
+                <a:cs typeface="Microsoft YaHei" pitchFamily="34" charset="-120"/>
+              </a:rPr>
+              <a:t>119.4 vs 235.6 ≈ 2.0 倍；停机（ring STALL）33 → 2 次（约 16×）</a:t>
+            </a:r>
+            <a:endParaRPr lang="en-US" sz="1050" dirty="0"/>
+          </a:p>
+        </p:txBody>
+      </p:sp>
+      <p:sp>
+        <p:nvSpPr>
+          <p:cNvPr id="9" name="Text 6"/>
+          <p:cNvSpPr/>
+          <p:nvPr/>
+        </p:nvSpPr>
+        <p:spPr>
+          <a:xfrm>
+            <a:off x="548640" y="4261104"/>
+            <a:ext cx="8046720" cy="283464"/>
+          </a:xfrm>
+          <a:prstGeom prst="rect">
+            <a:avLst/>
+          </a:prstGeom>
+          <a:noFill/>
+          <a:ln/>
+        </p:spPr>
+        <p:txBody>
+          <a:bodyPr wrap="square" lIns="0" tIns="0" rIns="0" bIns="0" rtlCol="0" anchor="ctr"/>
+          <a:lstStyle/>
+          <a:p>
+            <a:pPr indent="0" marL="0">
+              <a:buNone/>
+            </a:pPr>
+            <a:r>
+              <a:rPr lang="en-US" sz="1050" b="1" dirty="0">
+                <a:solidFill>
+                  <a:srgbClr val="0E4C6E"/>
+                </a:solidFill>
+                <a:latin typeface="Microsoft YaHei" pitchFamily="34" charset="0"/>
+                <a:ea typeface="Microsoft YaHei" pitchFamily="34" charset="-122"/>
+                <a:cs typeface="Microsoft YaHei" pitchFamily="34" charset="-120"/>
+              </a:rPr>
+              <a:t>浅载对照（同日单发）：</a:t>
+            </a:r>
+            <a:pPr indent="0" marL="0">
+              <a:buNone/>
+            </a:pPr>
+            <a:r>
+              <a:rPr lang="en-US" sz="1050" dirty="0">
+                <a:solidFill>
+                  <a:srgbClr val="22303C"/>
+                </a:solidFill>
+                <a:latin typeface="Microsoft YaHei" pitchFamily="34" charset="0"/>
+                <a:ea typeface="Microsoft YaHei" pitchFamily="34" charset="-122"/>
+                <a:cs typeface="Microsoft YaHei" pitchFamily="34" charset="-120"/>
+              </a:rPr>
+              <a:t>r = 1.13 打平 ⇒ 口径：价值随工作集深度上升而显现——异步正是为深载设计的</a:t>
+            </a:r>
+            <a:endParaRPr lang="en-US" sz="1050" dirty="0"/>
+          </a:p>
+        </p:txBody>
+      </p:sp>
+      <p:sp>
+        <p:nvSpPr>
+          <p:cNvPr id="10" name="Text 7"/>
+          <p:cNvSpPr/>
+          <p:nvPr/>
+        </p:nvSpPr>
+        <p:spPr>
+          <a:xfrm>
+            <a:off x="548640" y="4572000"/>
+            <a:ext cx="8046720" cy="256032"/>
+          </a:xfrm>
+          <a:prstGeom prst="rect">
+            <a:avLst/>
+          </a:prstGeom>
+          <a:noFill/>
+          <a:ln/>
+        </p:spPr>
+        <p:txBody>
+          <a:bodyPr wrap="square" lIns="0" tIns="0" rIns="0" bIns="0" rtlCol="0" anchor="ctr"/>
+          <a:lstStyle/>
+          <a:p>
+            <a:pPr indent="0" marL="0">
+              <a:buNone/>
+            </a:pPr>
+            <a:r>
+              <a:rPr lang="en-US" sz="900" dirty="0">
                 <a:solidFill>
                   <a:srgbClr val="6B7C8A"/>
                 </a:solidFill>
@@ -6678,935 +9771,15 @@
                 <a:ea typeface="Microsoft YaHei" pitchFamily="34" charset="-122"/>
                 <a:cs typeface="Microsoft YaHei" pitchFamily="34" charset="-120"/>
               </a:rPr>
-              <a:t>多批在飞，把击穿余量拿回来——“浅池+深流水+高精度”最后一环</a:t>
-            </a:r>
-            <a:endParaRPr lang="en-US" sz="950" dirty="0"/>
-          </a:p>
-        </p:txBody>
-      </p:sp>
-      <p:sp>
-        <p:nvSpPr>
-          <p:cNvPr id="11" name="Shape 9"/>
-          <p:cNvSpPr/>
-          <p:nvPr/>
-        </p:nvSpPr>
-        <p:spPr>
-          <a:xfrm>
-            <a:off x="548640" y="1645920"/>
-            <a:ext cx="8046720" cy="530352"/>
-          </a:xfrm>
-          <a:prstGeom prst="rect">
-            <a:avLst/>
-          </a:prstGeom>
-          <a:solidFill>
-            <a:srgbClr val="FFFFFF"/>
-          </a:solidFill>
-          <a:ln/>
-          <a:effectLst>
-            <a:outerShdw sx="100000" sy="100000" kx="0" ky="0" algn="bl" rotWithShape="0" blurRad="76200" dist="25400" dir="8100000">
-              <a:srgbClr val="000000">
-                <a:alpha val="12000"/>
-              </a:srgbClr>
-            </a:outerShdw>
-          </a:effectLst>
-        </p:spPr>
-      </p:sp>
-      <p:sp>
-        <p:nvSpPr>
-          <p:cNvPr id="12" name="Shape 10"/>
-          <p:cNvSpPr/>
-          <p:nvPr/>
-        </p:nvSpPr>
-        <p:spPr>
-          <a:xfrm>
-            <a:off x="548640" y="1645920"/>
-            <a:ext cx="91440" cy="530352"/>
-          </a:xfrm>
-          <a:prstGeom prst="rect">
-            <a:avLst/>
-          </a:prstGeom>
-          <a:solidFill>
-            <a:srgbClr val="0E4C6E"/>
-          </a:solidFill>
-          <a:ln/>
-        </p:spPr>
-      </p:sp>
-      <p:sp>
-        <p:nvSpPr>
-          <p:cNvPr id="13" name="Shape 11"/>
-          <p:cNvSpPr/>
-          <p:nvPr/>
-        </p:nvSpPr>
-        <p:spPr>
-          <a:xfrm>
-            <a:off x="777240" y="1728216"/>
-            <a:ext cx="365760" cy="365760"/>
-          </a:xfrm>
-          <a:prstGeom prst="ellipse">
-            <a:avLst/>
-          </a:prstGeom>
-          <a:solidFill>
-            <a:srgbClr val="0E4C6E"/>
-          </a:solidFill>
-          <a:ln/>
-        </p:spPr>
-      </p:sp>
-      <p:sp>
-        <p:nvSpPr>
-          <p:cNvPr id="14" name="Text 12"/>
-          <p:cNvSpPr/>
-          <p:nvPr/>
-        </p:nvSpPr>
-        <p:spPr>
-          <a:xfrm>
-            <a:off x="777240" y="1737360"/>
-            <a:ext cx="365760" cy="347472"/>
-          </a:xfrm>
-          <a:prstGeom prst="rect">
-            <a:avLst/>
-          </a:prstGeom>
-          <a:noFill/>
-          <a:ln/>
-        </p:spPr>
-        <p:txBody>
-          <a:bodyPr wrap="square" lIns="0" tIns="0" rIns="0" bIns="0" rtlCol="0" anchor="ctr"/>
-          <a:lstStyle/>
-          <a:p>
-            <a:pPr algn="ctr" indent="0" marL="0">
-              <a:buNone/>
-            </a:pPr>
-            <a:r>
-              <a:rPr lang="en-US" sz="1250" b="1" dirty="0">
-                <a:solidFill>
-                  <a:srgbClr val="FFFFFF"/>
-                </a:solidFill>
-                <a:latin typeface="Microsoft YaHei" pitchFamily="34" charset="0"/>
-                <a:ea typeface="Microsoft YaHei" pitchFamily="34" charset="-122"/>
-                <a:cs typeface="Microsoft YaHei" pitchFamily="34" charset="-120"/>
-              </a:rPr>
-              <a:t>2</a:t>
-            </a:r>
-            <a:endParaRPr lang="en-US" sz="1250" dirty="0"/>
-          </a:p>
-        </p:txBody>
-      </p:sp>
-      <p:sp>
-        <p:nvSpPr>
-          <p:cNvPr id="15" name="Text 13"/>
-          <p:cNvSpPr/>
-          <p:nvPr/>
-        </p:nvSpPr>
-        <p:spPr>
-          <a:xfrm>
-            <a:off x="1325880" y="1691640"/>
-            <a:ext cx="2103120" cy="438912"/>
-          </a:xfrm>
-          <a:prstGeom prst="rect">
-            <a:avLst/>
-          </a:prstGeom>
-          <a:noFill/>
-          <a:ln/>
-        </p:spPr>
-        <p:txBody>
-          <a:bodyPr wrap="square" lIns="0" tIns="0" rIns="0" bIns="0" rtlCol="0" anchor="ctr"/>
-          <a:lstStyle/>
-          <a:p>
-            <a:pPr indent="0" marL="0">
-              <a:buNone/>
-            </a:pPr>
-            <a:r>
-              <a:rPr lang="en-US" sz="1200" b="1" dirty="0">
-                <a:solidFill>
-                  <a:srgbClr val="22303C"/>
-                </a:solidFill>
-                <a:latin typeface="Microsoft YaHei" pitchFamily="34" charset="0"/>
-                <a:ea typeface="Microsoft YaHei" pitchFamily="34" charset="-122"/>
-                <a:cs typeface="Microsoft YaHei" pitchFamily="34" charset="-120"/>
-              </a:rPr>
-              <a:t>所有权移动</a:t>
-            </a:r>
-            <a:endParaRPr lang="en-US" sz="1200" dirty="0"/>
-          </a:p>
-        </p:txBody>
-      </p:sp>
-      <p:sp>
-        <p:nvSpPr>
-          <p:cNvPr id="16" name="Text 14"/>
-          <p:cNvSpPr/>
-          <p:nvPr/>
-        </p:nvSpPr>
-        <p:spPr>
-          <a:xfrm>
-            <a:off x="3474720" y="1691640"/>
-            <a:ext cx="4983480" cy="438912"/>
-          </a:xfrm>
-          <a:prstGeom prst="rect">
-            <a:avLst/>
-          </a:prstGeom>
-          <a:noFill/>
-          <a:ln/>
-        </p:spPr>
-        <p:txBody>
-          <a:bodyPr wrap="square" lIns="0" tIns="0" rIns="0" bIns="0" rtlCol="0" anchor="ctr"/>
-          <a:lstStyle/>
-          <a:p>
-            <a:pPr indent="0" marL="0">
-              <a:buNone/>
-            </a:pPr>
-            <a:r>
-              <a:rPr lang="en-US" sz="950" dirty="0">
-                <a:solidFill>
-                  <a:srgbClr val="6B7C8A"/>
-                </a:solidFill>
-                <a:latin typeface="Microsoft YaHei" pitchFamily="34" charset="0"/>
-                <a:ea typeface="Microsoft YaHei" pitchFamily="34" charset="-122"/>
-                <a:cs typeface="Microsoft YaHei" pitchFamily="34" charset="-120"/>
-              </a:rPr>
-              <a:t>向原作者语义看齐：搬运不复制、恢复零快照</a:t>
-            </a:r>
-            <a:endParaRPr lang="en-US" sz="950" dirty="0"/>
-          </a:p>
-        </p:txBody>
-      </p:sp>
-      <p:sp>
-        <p:nvSpPr>
-          <p:cNvPr id="17" name="Shape 15"/>
-          <p:cNvSpPr/>
-          <p:nvPr/>
-        </p:nvSpPr>
-        <p:spPr>
-          <a:xfrm>
-            <a:off x="548640" y="2267712"/>
-            <a:ext cx="8046720" cy="530352"/>
-          </a:xfrm>
-          <a:prstGeom prst="rect">
-            <a:avLst/>
-          </a:prstGeom>
-          <a:solidFill>
-            <a:srgbClr val="FFFFFF"/>
-          </a:solidFill>
-          <a:ln/>
-          <a:effectLst>
-            <a:outerShdw sx="100000" sy="100000" kx="0" ky="0" algn="bl" rotWithShape="0" blurRad="76200" dist="25400" dir="8100000">
-              <a:srgbClr val="000000">
-                <a:alpha val="12000"/>
-              </a:srgbClr>
-            </a:outerShdw>
-          </a:effectLst>
-        </p:spPr>
-      </p:sp>
-      <p:sp>
-        <p:nvSpPr>
-          <p:cNvPr id="18" name="Shape 16"/>
-          <p:cNvSpPr/>
-          <p:nvPr/>
-        </p:nvSpPr>
-        <p:spPr>
-          <a:xfrm>
-            <a:off x="548640" y="2267712"/>
-            <a:ext cx="91440" cy="530352"/>
-          </a:xfrm>
-          <a:prstGeom prst="rect">
-            <a:avLst/>
-          </a:prstGeom>
-          <a:solidFill>
-            <a:srgbClr val="0E4C6E"/>
-          </a:solidFill>
-          <a:ln/>
-        </p:spPr>
-      </p:sp>
-      <p:sp>
-        <p:nvSpPr>
-          <p:cNvPr id="19" name="Shape 17"/>
-          <p:cNvSpPr/>
-          <p:nvPr/>
-        </p:nvSpPr>
-        <p:spPr>
-          <a:xfrm>
-            <a:off x="777240" y="2350008"/>
-            <a:ext cx="365760" cy="365760"/>
-          </a:xfrm>
-          <a:prstGeom prst="ellipse">
-            <a:avLst/>
-          </a:prstGeom>
-          <a:solidFill>
-            <a:srgbClr val="0E4C6E"/>
-          </a:solidFill>
-          <a:ln/>
-        </p:spPr>
-      </p:sp>
-      <p:sp>
-        <p:nvSpPr>
-          <p:cNvPr id="20" name="Text 18"/>
-          <p:cNvSpPr/>
-          <p:nvPr/>
-        </p:nvSpPr>
-        <p:spPr>
-          <a:xfrm>
-            <a:off x="777240" y="2359152"/>
-            <a:ext cx="365760" cy="347472"/>
-          </a:xfrm>
-          <a:prstGeom prst="rect">
-            <a:avLst/>
-          </a:prstGeom>
-          <a:noFill/>
-          <a:ln/>
-        </p:spPr>
-        <p:txBody>
-          <a:bodyPr wrap="square" lIns="0" tIns="0" rIns="0" bIns="0" rtlCol="0" anchor="ctr"/>
-          <a:lstStyle/>
-          <a:p>
-            <a:pPr algn="ctr" indent="0" marL="0">
-              <a:buNone/>
-            </a:pPr>
-            <a:r>
-              <a:rPr lang="en-US" sz="1250" b="1" dirty="0">
-                <a:solidFill>
-                  <a:srgbClr val="FFFFFF"/>
-                </a:solidFill>
-                <a:latin typeface="Microsoft YaHei" pitchFamily="34" charset="0"/>
-                <a:ea typeface="Microsoft YaHei" pitchFamily="34" charset="-122"/>
-                <a:cs typeface="Microsoft YaHei" pitchFamily="34" charset="-120"/>
-              </a:rPr>
-              <a:t>3</a:t>
-            </a:r>
-            <a:endParaRPr lang="en-US" sz="1250" dirty="0"/>
-          </a:p>
-        </p:txBody>
-      </p:sp>
-      <p:sp>
-        <p:nvSpPr>
-          <p:cNvPr id="21" name="Text 19"/>
-          <p:cNvSpPr/>
-          <p:nvPr/>
-        </p:nvSpPr>
-        <p:spPr>
-          <a:xfrm>
-            <a:off x="1325880" y="2313432"/>
-            <a:ext cx="2103120" cy="438912"/>
-          </a:xfrm>
-          <a:prstGeom prst="rect">
-            <a:avLst/>
-          </a:prstGeom>
-          <a:noFill/>
-          <a:ln/>
-        </p:spPr>
-        <p:txBody>
-          <a:bodyPr wrap="square" lIns="0" tIns="0" rIns="0" bIns="0" rtlCol="0" anchor="ctr"/>
-          <a:lstStyle/>
-          <a:p>
-            <a:pPr indent="0" marL="0">
-              <a:buNone/>
-            </a:pPr>
-            <a:r>
-              <a:rPr lang="en-US" sz="1200" b="1" dirty="0">
-                <a:solidFill>
-                  <a:srgbClr val="22303C"/>
-                </a:solidFill>
-                <a:latin typeface="Microsoft YaHei" pitchFamily="34" charset="0"/>
-                <a:ea typeface="Microsoft YaHei" pitchFamily="34" charset="-122"/>
-                <a:cs typeface="Microsoft YaHei" pitchFamily="34" charset="-120"/>
-              </a:rPr>
-              <a:t>Host 层深化</a:t>
-            </a:r>
-            <a:endParaRPr lang="en-US" sz="1200" dirty="0"/>
-          </a:p>
-        </p:txBody>
-      </p:sp>
-      <p:sp>
-        <p:nvSpPr>
-          <p:cNvPr id="22" name="Text 20"/>
-          <p:cNvSpPr/>
-          <p:nvPr/>
-        </p:nvSpPr>
-        <p:spPr>
-          <a:xfrm>
-            <a:off x="3474720" y="2313432"/>
-            <a:ext cx="4983480" cy="438912"/>
-          </a:xfrm>
-          <a:prstGeom prst="rect">
-            <a:avLst/>
-          </a:prstGeom>
-          <a:noFill/>
-          <a:ln/>
-        </p:spPr>
-        <p:txBody>
-          <a:bodyPr wrap="square" lIns="0" tIns="0" rIns="0" bIns="0" rtlCol="0" anchor="ctr"/>
-          <a:lstStyle/>
-          <a:p>
-            <a:pPr indent="0" marL="0">
-              <a:buNone/>
-            </a:pPr>
-            <a:r>
-              <a:rPr lang="en-US" sz="950" dirty="0">
-                <a:solidFill>
-                  <a:srgbClr val="6B7C8A"/>
-                </a:solidFill>
-                <a:latin typeface="Microsoft YaHei" pitchFamily="34" charset="0"/>
-                <a:ea typeface="Microsoft YaHei" pitchFamily="34" charset="-122"/>
-                <a:cs typeface="Microsoft YaHei" pitchFamily="34" charset="-120"/>
-              </a:rPr>
-              <a:t>扩大 Host 配额 + 优化 RAM↔显存搬运；SSD 按需再评估（非跟随项）</a:t>
-            </a:r>
-            <a:endParaRPr lang="en-US" sz="950" dirty="0"/>
-          </a:p>
-        </p:txBody>
-      </p:sp>
-      <p:sp>
-        <p:nvSpPr>
-          <p:cNvPr id="23" name="Shape 21"/>
-          <p:cNvSpPr/>
-          <p:nvPr/>
-        </p:nvSpPr>
-        <p:spPr>
-          <a:xfrm>
-            <a:off x="548640" y="2889504"/>
-            <a:ext cx="8046720" cy="530352"/>
-          </a:xfrm>
-          <a:prstGeom prst="rect">
-            <a:avLst/>
-          </a:prstGeom>
-          <a:solidFill>
-            <a:srgbClr val="FFFFFF"/>
-          </a:solidFill>
-          <a:ln/>
-          <a:effectLst>
-            <a:outerShdw sx="100000" sy="100000" kx="0" ky="0" algn="bl" rotWithShape="0" blurRad="76200" dist="25400" dir="8100000">
-              <a:srgbClr val="000000">
-                <a:alpha val="12000"/>
-              </a:srgbClr>
-            </a:outerShdw>
-          </a:effectLst>
-        </p:spPr>
-      </p:sp>
-      <p:sp>
-        <p:nvSpPr>
-          <p:cNvPr id="24" name="Shape 22"/>
-          <p:cNvSpPr/>
-          <p:nvPr/>
-        </p:nvSpPr>
-        <p:spPr>
-          <a:xfrm>
-            <a:off x="548640" y="2889504"/>
-            <a:ext cx="91440" cy="530352"/>
-          </a:xfrm>
-          <a:prstGeom prst="rect">
-            <a:avLst/>
-          </a:prstGeom>
-          <a:solidFill>
-            <a:srgbClr val="B07A00"/>
-          </a:solidFill>
-          <a:ln/>
-        </p:spPr>
-      </p:sp>
-      <p:sp>
-        <p:nvSpPr>
-          <p:cNvPr id="25" name="Shape 23"/>
-          <p:cNvSpPr/>
-          <p:nvPr/>
-        </p:nvSpPr>
-        <p:spPr>
-          <a:xfrm>
-            <a:off x="777240" y="2971800"/>
-            <a:ext cx="365760" cy="365760"/>
-          </a:xfrm>
-          <a:prstGeom prst="ellipse">
-            <a:avLst/>
-          </a:prstGeom>
-          <a:solidFill>
-            <a:srgbClr val="B07A00"/>
-          </a:solidFill>
-          <a:ln/>
-        </p:spPr>
-      </p:sp>
-      <p:sp>
-        <p:nvSpPr>
-          <p:cNvPr id="26" name="Text 24"/>
-          <p:cNvSpPr/>
-          <p:nvPr/>
-        </p:nvSpPr>
-        <p:spPr>
-          <a:xfrm>
-            <a:off x="777240" y="2980944"/>
-            <a:ext cx="365760" cy="347472"/>
-          </a:xfrm>
-          <a:prstGeom prst="rect">
-            <a:avLst/>
-          </a:prstGeom>
-          <a:noFill/>
-          <a:ln/>
-        </p:spPr>
-        <p:txBody>
-          <a:bodyPr wrap="square" lIns="0" tIns="0" rIns="0" bIns="0" rtlCol="0" anchor="ctr"/>
-          <a:lstStyle/>
-          <a:p>
-            <a:pPr algn="ctr" indent="0" marL="0">
-              <a:buNone/>
-            </a:pPr>
-            <a:r>
-              <a:rPr lang="en-US" sz="1250" b="1" dirty="0">
-                <a:solidFill>
-                  <a:srgbClr val="FFFFFF"/>
-                </a:solidFill>
-                <a:latin typeface="Microsoft YaHei" pitchFamily="34" charset="0"/>
-                <a:ea typeface="Microsoft YaHei" pitchFamily="34" charset="-122"/>
-                <a:cs typeface="Microsoft YaHei" pitchFamily="34" charset="-120"/>
-              </a:rPr>
-              <a:t>4</a:t>
-            </a:r>
-            <a:endParaRPr lang="en-US" sz="1250" dirty="0"/>
-          </a:p>
-        </p:txBody>
-      </p:sp>
-      <p:sp>
-        <p:nvSpPr>
-          <p:cNvPr id="27" name="Text 25"/>
-          <p:cNvSpPr/>
-          <p:nvPr/>
-        </p:nvSpPr>
-        <p:spPr>
-          <a:xfrm>
-            <a:off x="1325880" y="2935224"/>
-            <a:ext cx="2103120" cy="438912"/>
-          </a:xfrm>
-          <a:prstGeom prst="rect">
-            <a:avLst/>
-          </a:prstGeom>
-          <a:noFill/>
-          <a:ln/>
-        </p:spPr>
-        <p:txBody>
-          <a:bodyPr wrap="square" lIns="0" tIns="0" rIns="0" bIns="0" rtlCol="0" anchor="ctr"/>
-          <a:lstStyle/>
-          <a:p>
-            <a:pPr indent="0" marL="0">
-              <a:buNone/>
-            </a:pPr>
-            <a:r>
-              <a:rPr lang="en-US" sz="1200" b="1" dirty="0">
-                <a:solidFill>
-                  <a:srgbClr val="22303C"/>
-                </a:solidFill>
-                <a:latin typeface="Microsoft YaHei" pitchFamily="34" charset="0"/>
-                <a:ea typeface="Microsoft YaHei" pitchFamily="34" charset="-122"/>
-                <a:cs typeface="Microsoft YaHei" pitchFamily="34" charset="-120"/>
-              </a:rPr>
-              <a:t>慢态收口</a:t>
-            </a:r>
-            <a:endParaRPr lang="en-US" sz="1200" dirty="0"/>
-          </a:p>
-        </p:txBody>
-      </p:sp>
-      <p:sp>
-        <p:nvSpPr>
-          <p:cNvPr id="28" name="Text 26"/>
-          <p:cNvSpPr/>
-          <p:nvPr/>
-        </p:nvSpPr>
-        <p:spPr>
-          <a:xfrm>
-            <a:off x="3474720" y="2935224"/>
-            <a:ext cx="4983480" cy="438912"/>
-          </a:xfrm>
-          <a:prstGeom prst="rect">
-            <a:avLst/>
-          </a:prstGeom>
-          <a:noFill/>
-          <a:ln/>
-        </p:spPr>
-        <p:txBody>
-          <a:bodyPr wrap="square" lIns="0" tIns="0" rIns="0" bIns="0" rtlCol="0" anchor="ctr"/>
-          <a:lstStyle/>
-          <a:p>
-            <a:pPr indent="0" marL="0">
-              <a:buNone/>
-            </a:pPr>
-            <a:r>
-              <a:rPr lang="en-US" sz="950" dirty="0">
-                <a:solidFill>
-                  <a:srgbClr val="6B7C8A"/>
-                </a:solidFill>
-                <a:latin typeface="Microsoft YaHei" pitchFamily="34" charset="0"/>
-                <a:ea typeface="Microsoft YaHei" pitchFamily="34" charset="-122"/>
-                <a:cs typeface="Microsoft YaHei" pitchFamily="34" charset="-120"/>
-              </a:rPr>
-              <a:t>驱动提交阻塞的上游定位（3 步最小复现已备）；自然触发源追查</a:t>
-            </a:r>
-            <a:endParaRPr lang="en-US" sz="950" dirty="0"/>
-          </a:p>
-        </p:txBody>
-      </p:sp>
-      <p:sp>
-        <p:nvSpPr>
-          <p:cNvPr id="29" name="Shape 27"/>
-          <p:cNvSpPr/>
-          <p:nvPr/>
-        </p:nvSpPr>
-        <p:spPr>
-          <a:xfrm>
-            <a:off x="548640" y="3511296"/>
-            <a:ext cx="8046720" cy="530352"/>
-          </a:xfrm>
-          <a:prstGeom prst="rect">
-            <a:avLst/>
-          </a:prstGeom>
-          <a:solidFill>
-            <a:srgbClr val="FFFFFF"/>
-          </a:solidFill>
-          <a:ln/>
-          <a:effectLst>
-            <a:outerShdw sx="100000" sy="100000" kx="0" ky="0" algn="bl" rotWithShape="0" blurRad="76200" dist="25400" dir="8100000">
-              <a:srgbClr val="000000">
-                <a:alpha val="12000"/>
-              </a:srgbClr>
-            </a:outerShdw>
-          </a:effectLst>
-        </p:spPr>
-      </p:sp>
-      <p:sp>
-        <p:nvSpPr>
-          <p:cNvPr id="30" name="Shape 28"/>
-          <p:cNvSpPr/>
-          <p:nvPr/>
-        </p:nvSpPr>
-        <p:spPr>
-          <a:xfrm>
-            <a:off x="548640" y="3511296"/>
-            <a:ext cx="91440" cy="530352"/>
-          </a:xfrm>
-          <a:prstGeom prst="rect">
-            <a:avLst/>
-          </a:prstGeom>
-          <a:solidFill>
-            <a:srgbClr val="0FA3A8"/>
-          </a:solidFill>
-          <a:ln/>
-        </p:spPr>
-      </p:sp>
-      <p:sp>
-        <p:nvSpPr>
-          <p:cNvPr id="31" name="Shape 29"/>
-          <p:cNvSpPr/>
-          <p:nvPr/>
-        </p:nvSpPr>
-        <p:spPr>
-          <a:xfrm>
-            <a:off x="777240" y="3593592"/>
-            <a:ext cx="365760" cy="365760"/>
-          </a:xfrm>
-          <a:prstGeom prst="ellipse">
-            <a:avLst/>
-          </a:prstGeom>
-          <a:solidFill>
-            <a:srgbClr val="0FA3A8"/>
-          </a:solidFill>
-          <a:ln/>
-        </p:spPr>
-      </p:sp>
-      <p:sp>
-        <p:nvSpPr>
-          <p:cNvPr id="32" name="Text 30"/>
-          <p:cNvSpPr/>
-          <p:nvPr/>
-        </p:nvSpPr>
-        <p:spPr>
-          <a:xfrm>
-            <a:off x="777240" y="3602736"/>
-            <a:ext cx="365760" cy="347472"/>
-          </a:xfrm>
-          <a:prstGeom prst="rect">
-            <a:avLst/>
-          </a:prstGeom>
-          <a:noFill/>
-          <a:ln/>
-        </p:spPr>
-        <p:txBody>
-          <a:bodyPr wrap="square" lIns="0" tIns="0" rIns="0" bIns="0" rtlCol="0" anchor="ctr"/>
-          <a:lstStyle/>
-          <a:p>
-            <a:pPr algn="ctr" indent="0" marL="0">
-              <a:buNone/>
-            </a:pPr>
-            <a:r>
-              <a:rPr lang="en-US" sz="1250" b="1" dirty="0">
-                <a:solidFill>
-                  <a:srgbClr val="FFFFFF"/>
-                </a:solidFill>
-                <a:latin typeface="Microsoft YaHei" pitchFamily="34" charset="0"/>
-                <a:ea typeface="Microsoft YaHei" pitchFamily="34" charset="-122"/>
-                <a:cs typeface="Microsoft YaHei" pitchFamily="34" charset="-120"/>
-              </a:rPr>
-              <a:t>5</a:t>
-            </a:r>
-            <a:endParaRPr lang="en-US" sz="1250" dirty="0"/>
-          </a:p>
-        </p:txBody>
-      </p:sp>
-      <p:sp>
-        <p:nvSpPr>
-          <p:cNvPr id="33" name="Text 31"/>
-          <p:cNvSpPr/>
-          <p:nvPr/>
-        </p:nvSpPr>
-        <p:spPr>
-          <a:xfrm>
-            <a:off x="1325880" y="3557016"/>
-            <a:ext cx="2103120" cy="438912"/>
-          </a:xfrm>
-          <a:prstGeom prst="rect">
-            <a:avLst/>
-          </a:prstGeom>
-          <a:noFill/>
-          <a:ln/>
-        </p:spPr>
-        <p:txBody>
-          <a:bodyPr wrap="square" lIns="0" tIns="0" rIns="0" bIns="0" rtlCol="0" anchor="ctr"/>
-          <a:lstStyle/>
-          <a:p>
-            <a:pPr indent="0" marL="0">
-              <a:buNone/>
-            </a:pPr>
-            <a:r>
-              <a:rPr lang="en-US" sz="1200" b="1" dirty="0">
-                <a:solidFill>
-                  <a:srgbClr val="22303C"/>
-                </a:solidFill>
-                <a:latin typeface="Microsoft YaHei" pitchFamily="34" charset="0"/>
-                <a:ea typeface="Microsoft YaHei" pitchFamily="34" charset="-122"/>
-                <a:cs typeface="Microsoft YaHei" pitchFamily="34" charset="-120"/>
-              </a:rPr>
-              <a:t>误搬率观测</a:t>
-            </a:r>
-            <a:endParaRPr lang="en-US" sz="1200" dirty="0"/>
-          </a:p>
-        </p:txBody>
-      </p:sp>
-      <p:sp>
-        <p:nvSpPr>
-          <p:cNvPr id="34" name="Text 32"/>
-          <p:cNvSpPr/>
-          <p:nvPr/>
-        </p:nvSpPr>
-        <p:spPr>
-          <a:xfrm>
-            <a:off x="3474720" y="3557016"/>
-            <a:ext cx="4983480" cy="438912"/>
-          </a:xfrm>
-          <a:prstGeom prst="rect">
-            <a:avLst/>
-          </a:prstGeom>
-          <a:noFill/>
-          <a:ln/>
-        </p:spPr>
-        <p:txBody>
-          <a:bodyPr wrap="square" lIns="0" tIns="0" rIns="0" bIns="0" rtlCol="0" anchor="ctr"/>
-          <a:lstStyle/>
-          <a:p>
-            <a:pPr indent="0" marL="0">
-              <a:buNone/>
-            </a:pPr>
-            <a:r>
-              <a:rPr lang="en-US" sz="950" dirty="0">
-                <a:solidFill>
-                  <a:srgbClr val="6B7C8A"/>
-                </a:solidFill>
-                <a:latin typeface="Microsoft YaHei" pitchFamily="34" charset="0"/>
-                <a:ea typeface="Microsoft YaHei" pitchFamily="34" charset="-122"/>
-                <a:cs typeface="Microsoft YaHei" pitchFamily="34" charset="-120"/>
-              </a:rPr>
-              <a:t>统计“搬出后又快速搬回”的比率——让决策质量从猜变成量</a:t>
-            </a:r>
-            <a:endParaRPr lang="en-US" sz="950" dirty="0"/>
-          </a:p>
-        </p:txBody>
-      </p:sp>
-      <p:sp>
-        <p:nvSpPr>
-          <p:cNvPr id="35" name="Shape 33"/>
-          <p:cNvSpPr/>
-          <p:nvPr/>
-        </p:nvSpPr>
-        <p:spPr>
-          <a:xfrm>
-            <a:off x="548640" y="4133088"/>
-            <a:ext cx="8046720" cy="530352"/>
-          </a:xfrm>
-          <a:prstGeom prst="rect">
-            <a:avLst/>
-          </a:prstGeom>
-          <a:solidFill>
-            <a:srgbClr val="FFFFFF"/>
-          </a:solidFill>
-          <a:ln/>
-          <a:effectLst>
-            <a:outerShdw sx="100000" sy="100000" kx="0" ky="0" algn="bl" rotWithShape="0" blurRad="76200" dist="25400" dir="8100000">
-              <a:srgbClr val="000000">
-                <a:alpha val="12000"/>
-              </a:srgbClr>
-            </a:outerShdw>
-          </a:effectLst>
-        </p:spPr>
-      </p:sp>
-      <p:sp>
-        <p:nvSpPr>
-          <p:cNvPr id="36" name="Shape 34"/>
-          <p:cNvSpPr/>
-          <p:nvPr/>
-        </p:nvSpPr>
-        <p:spPr>
-          <a:xfrm>
-            <a:off x="548640" y="4133088"/>
-            <a:ext cx="91440" cy="530352"/>
-          </a:xfrm>
-          <a:prstGeom prst="rect">
-            <a:avLst/>
-          </a:prstGeom>
-          <a:solidFill>
-            <a:srgbClr val="F59E0B"/>
-          </a:solidFill>
-          <a:ln/>
-        </p:spPr>
-      </p:sp>
-      <p:sp>
-        <p:nvSpPr>
-          <p:cNvPr id="37" name="Shape 35"/>
-          <p:cNvSpPr/>
-          <p:nvPr/>
-        </p:nvSpPr>
-        <p:spPr>
-          <a:xfrm>
-            <a:off x="777240" y="4215384"/>
-            <a:ext cx="365760" cy="365760"/>
-          </a:xfrm>
-          <a:prstGeom prst="ellipse">
-            <a:avLst/>
-          </a:prstGeom>
-          <a:solidFill>
-            <a:srgbClr val="F59E0B"/>
-          </a:solidFill>
-          <a:ln/>
-        </p:spPr>
-      </p:sp>
-      <p:sp>
-        <p:nvSpPr>
-          <p:cNvPr id="38" name="Text 36"/>
-          <p:cNvSpPr/>
-          <p:nvPr/>
-        </p:nvSpPr>
-        <p:spPr>
-          <a:xfrm>
-            <a:off x="777240" y="4224528"/>
-            <a:ext cx="365760" cy="347472"/>
-          </a:xfrm>
-          <a:prstGeom prst="rect">
-            <a:avLst/>
-          </a:prstGeom>
-          <a:noFill/>
-          <a:ln/>
-        </p:spPr>
-        <p:txBody>
-          <a:bodyPr wrap="square" lIns="0" tIns="0" rIns="0" bIns="0" rtlCol="0" anchor="ctr"/>
-          <a:lstStyle/>
-          <a:p>
-            <a:pPr algn="ctr" indent="0" marL="0">
-              <a:buNone/>
-            </a:pPr>
-            <a:r>
-              <a:rPr lang="en-US" sz="1250" b="1" dirty="0">
-                <a:solidFill>
-                  <a:srgbClr val="FFFFFF"/>
-                </a:solidFill>
-                <a:latin typeface="Microsoft YaHei" pitchFamily="34" charset="0"/>
-                <a:ea typeface="Microsoft YaHei" pitchFamily="34" charset="-122"/>
-                <a:cs typeface="Microsoft YaHei" pitchFamily="34" charset="-120"/>
-              </a:rPr>
-              <a:t>6</a:t>
-            </a:r>
-            <a:endParaRPr lang="en-US" sz="1250" dirty="0"/>
-          </a:p>
-        </p:txBody>
-      </p:sp>
-      <p:sp>
-        <p:nvSpPr>
-          <p:cNvPr id="39" name="Text 37"/>
-          <p:cNvSpPr/>
-          <p:nvPr/>
-        </p:nvSpPr>
-        <p:spPr>
-          <a:xfrm>
-            <a:off x="1325880" y="4178808"/>
-            <a:ext cx="2103120" cy="438912"/>
-          </a:xfrm>
-          <a:prstGeom prst="rect">
-            <a:avLst/>
-          </a:prstGeom>
-          <a:noFill/>
-          <a:ln/>
-        </p:spPr>
-        <p:txBody>
-          <a:bodyPr wrap="square" lIns="0" tIns="0" rIns="0" bIns="0" rtlCol="0" anchor="ctr"/>
-          <a:lstStyle/>
-          <a:p>
-            <a:pPr indent="0" marL="0">
-              <a:buNone/>
-            </a:pPr>
-            <a:r>
-              <a:rPr lang="en-US" sz="1200" b="1" dirty="0">
-                <a:solidFill>
-                  <a:srgbClr val="22303C"/>
-                </a:solidFill>
-                <a:latin typeface="Microsoft YaHei" pitchFamily="34" charset="0"/>
-                <a:ea typeface="Microsoft YaHei" pitchFamily="34" charset="-122"/>
-                <a:cs typeface="Microsoft YaHei" pitchFamily="34" charset="-120"/>
-              </a:rPr>
-              <a:t>向上游回馈</a:t>
-            </a:r>
-            <a:endParaRPr lang="en-US" sz="1200" dirty="0"/>
-          </a:p>
-        </p:txBody>
-      </p:sp>
-      <p:sp>
-        <p:nvSpPr>
-          <p:cNvPr id="40" name="Text 38"/>
-          <p:cNvSpPr/>
-          <p:nvPr/>
-        </p:nvSpPr>
-        <p:spPr>
-          <a:xfrm>
-            <a:off x="3474720" y="4178808"/>
-            <a:ext cx="4983480" cy="438912"/>
-          </a:xfrm>
-          <a:prstGeom prst="rect">
-            <a:avLst/>
-          </a:prstGeom>
-          <a:noFill/>
-          <a:ln/>
-        </p:spPr>
-        <p:txBody>
-          <a:bodyPr wrap="square" lIns="0" tIns="0" rIns="0" bIns="0" rtlCol="0" anchor="ctr"/>
-          <a:lstStyle/>
-          <a:p>
-            <a:pPr indent="0" marL="0">
-              <a:buNone/>
-            </a:pPr>
-            <a:r>
-              <a:rPr lang="en-US" sz="950" dirty="0">
-                <a:solidFill>
-                  <a:srgbClr val="6B7C8A"/>
-                </a:solidFill>
-                <a:latin typeface="Microsoft YaHei" pitchFamily="34" charset="0"/>
-                <a:ea typeface="Microsoft YaHei" pitchFamily="34" charset="-122"/>
-                <a:cs typeface="Microsoft YaHei" pitchFamily="34" charset="-120"/>
-              </a:rPr>
-              <a:t>修复与实测数据贡献回社区（含与 KVMem 官方后端的收敛对接）</a:t>
-            </a:r>
-            <a:endParaRPr lang="en-US" sz="950" dirty="0"/>
-          </a:p>
-        </p:txBody>
-      </p:sp>
-      <p:sp>
-        <p:nvSpPr>
-          <p:cNvPr id="41" name="Text 39"/>
+              <a:t>诚实备注：n=3/臂、单机、健康期；同步臂未“死”（历史“v2 前多轮必死”的更强主张未复现——观测为“可用但慢”）。</a:t>
+            </a:r>
+            <a:endParaRPr lang="en-US" sz="900" dirty="0"/>
+          </a:p>
+        </p:txBody>
+      </p:sp>
+      <p:sp>
+        <p:nvSpPr>
+          <p:cNvPr id="11" name="Text 8"/>
           <p:cNvSpPr/>
           <p:nvPr/>
         </p:nvSpPr>
@@ -7645,7 +9818,7 @@
       </p:sp>
       <p:sp>
         <p:nvSpPr>
-          <p:cNvPr id="42" name="Text 40"/>
+          <p:cNvPr id="12" name="Text 9"/>
           <p:cNvSpPr/>
           <p:nvPr/>
         </p:nvSpPr>
@@ -7693,6 +9866,2190 @@
 <file path=ppt/slides/slide15.xml><?xml version="1.0" encoding="utf-8"?>
 <p:sld xmlns:a="http://schemas.openxmlformats.org/drawingml/2006/main" xmlns:r="http://schemas.openxmlformats.org/officeDocument/2006/relationships" xmlns:p="http://schemas.openxmlformats.org/presentationml/2006/main">
   <p:cSld name="Slide 15">
+    <p:bg>
+      <p:bgPr>
+        <a:solidFill>
+          <a:srgbClr val="F6F9FB"/>
+        </a:solidFill>
+      </p:bgPr>
+    </p:bg>
+    <p:spTree>
+      <p:nvGrpSpPr>
+        <p:cNvPr id="1" name=""/>
+        <p:cNvGrpSpPr/>
+        <p:nvPr/>
+      </p:nvGrpSpPr>
+      <p:grpSpPr>
+        <a:xfrm>
+          <a:off x="0" y="0"/>
+          <a:ext cx="0" cy="0"/>
+          <a:chOff x="0" y="0"/>
+          <a:chExt cx="0" cy="0"/>
+        </a:xfrm>
+      </p:grpSpPr>
+      <p:sp>
+        <p:nvSpPr>
+          <p:cNvPr id="2" name="Shape 0"/>
+          <p:cNvSpPr/>
+          <p:nvPr/>
+        </p:nvSpPr>
+        <p:spPr>
+          <a:xfrm>
+            <a:off x="457200" y="384048"/>
+            <a:ext cx="109728" cy="457200"/>
+          </a:xfrm>
+          <a:prstGeom prst="rect">
+            <a:avLst/>
+          </a:prstGeom>
+          <a:solidFill>
+            <a:srgbClr val="0FA3A8"/>
+          </a:solidFill>
+          <a:ln/>
+        </p:spPr>
+      </p:sp>
+      <p:sp>
+        <p:nvSpPr>
+          <p:cNvPr id="3" name="Text 1"/>
+          <p:cNvSpPr/>
+          <p:nvPr/>
+        </p:nvSpPr>
+        <p:spPr>
+          <a:xfrm>
+            <a:off x="713232" y="310896"/>
+            <a:ext cx="7955280" cy="228600"/>
+          </a:xfrm>
+          <a:prstGeom prst="rect">
+            <a:avLst/>
+          </a:prstGeom>
+          <a:noFill/>
+          <a:ln/>
+        </p:spPr>
+        <p:txBody>
+          <a:bodyPr wrap="square" lIns="0" tIns="0" rIns="0" bIns="0" rtlCol="0" anchor="ctr"/>
+          <a:lstStyle/>
+          <a:p>
+            <a:pPr indent="0" marL="0">
+              <a:buNone/>
+            </a:pPr>
+            <a:r>
+              <a:rPr lang="en-US" sz="1100" b="1" spc="200" kern="0" dirty="0">
+                <a:solidFill>
+                  <a:srgbClr val="0FA3A8"/>
+                </a:solidFill>
+                <a:latin typeface="Microsoft YaHei" pitchFamily="34" charset="0"/>
+                <a:ea typeface="Microsoft YaHei" pitchFamily="34" charset="-122"/>
+                <a:cs typeface="Microsoft YaHei" pitchFamily="34" charset="-120"/>
+              </a:rPr>
+              <a:t>OPEN ISSUES</a:t>
+            </a:r>
+            <a:endParaRPr lang="en-US" sz="1100" dirty="0"/>
+          </a:p>
+        </p:txBody>
+      </p:sp>
+      <p:sp>
+        <p:nvSpPr>
+          <p:cNvPr id="4" name="Text 2"/>
+          <p:cNvSpPr/>
+          <p:nvPr/>
+        </p:nvSpPr>
+        <p:spPr>
+          <a:xfrm>
+            <a:off x="713232" y="548640"/>
+            <a:ext cx="8138160" cy="457200"/>
+          </a:xfrm>
+          <a:prstGeom prst="rect">
+            <a:avLst/>
+          </a:prstGeom>
+          <a:noFill/>
+          <a:ln/>
+        </p:spPr>
+        <p:txBody>
+          <a:bodyPr wrap="square" lIns="0" tIns="0" rIns="0" bIns="0" rtlCol="0" anchor="ctr"/>
+          <a:lstStyle/>
+          <a:p>
+            <a:pPr indent="0" marL="0">
+              <a:buNone/>
+            </a:pPr>
+            <a:r>
+              <a:rPr lang="en-US" sz="2400" b="1" dirty="0">
+                <a:solidFill>
+                  <a:srgbClr val="22303C"/>
+                </a:solidFill>
+                <a:latin typeface="Microsoft YaHei" pitchFamily="34" charset="0"/>
+                <a:ea typeface="Microsoft YaHei" pitchFamily="34" charset="-122"/>
+                <a:cs typeface="Microsoft YaHei" pitchFamily="34" charset="-120"/>
+              </a:rPr>
+              <a:t>其余问题（诚实清单）</a:t>
+            </a:r>
+            <a:endParaRPr lang="en-US" sz="2400" dirty="0"/>
+          </a:p>
+        </p:txBody>
+      </p:sp>
+      <p:sp>
+        <p:nvSpPr>
+          <p:cNvPr id="5" name="Shape 3"/>
+          <p:cNvSpPr/>
+          <p:nvPr/>
+        </p:nvSpPr>
+        <p:spPr>
+          <a:xfrm>
+            <a:off x="548640" y="1188720"/>
+            <a:ext cx="3840480" cy="950976"/>
+          </a:xfrm>
+          <a:prstGeom prst="rect">
+            <a:avLst/>
+          </a:prstGeom>
+          <a:solidFill>
+            <a:srgbClr val="FFFFFF"/>
+          </a:solidFill>
+          <a:ln/>
+          <a:effectLst>
+            <a:outerShdw sx="100000" sy="100000" kx="0" ky="0" algn="bl" rotWithShape="0" blurRad="76200" dist="25400" dir="8100000">
+              <a:srgbClr val="000000">
+                <a:alpha val="12000"/>
+              </a:srgbClr>
+            </a:outerShdw>
+          </a:effectLst>
+        </p:spPr>
+      </p:sp>
+      <p:sp>
+        <p:nvSpPr>
+          <p:cNvPr id="6" name="Shape 4"/>
+          <p:cNvSpPr/>
+          <p:nvPr/>
+        </p:nvSpPr>
+        <p:spPr>
+          <a:xfrm>
+            <a:off x="548640" y="1188720"/>
+            <a:ext cx="91440" cy="950976"/>
+          </a:xfrm>
+          <a:prstGeom prst="rect">
+            <a:avLst/>
+          </a:prstGeom>
+          <a:solidFill>
+            <a:srgbClr val="C0504D"/>
+          </a:solidFill>
+          <a:ln/>
+        </p:spPr>
+      </p:sp>
+      <p:sp>
+        <p:nvSpPr>
+          <p:cNvPr id="7" name="Text 5"/>
+          <p:cNvSpPr/>
+          <p:nvPr/>
+        </p:nvSpPr>
+        <p:spPr>
+          <a:xfrm>
+            <a:off x="804672" y="1271016"/>
+            <a:ext cx="3383280" cy="292608"/>
+          </a:xfrm>
+          <a:prstGeom prst="rect">
+            <a:avLst/>
+          </a:prstGeom>
+          <a:noFill/>
+          <a:ln/>
+        </p:spPr>
+        <p:txBody>
+          <a:bodyPr wrap="square" lIns="0" tIns="0" rIns="0" bIns="0" rtlCol="0" anchor="ctr"/>
+          <a:lstStyle/>
+          <a:p>
+            <a:pPr indent="0" marL="0">
+              <a:buNone/>
+            </a:pPr>
+            <a:r>
+              <a:rPr lang="en-US" sz="1200" b="1" dirty="0">
+                <a:solidFill>
+                  <a:srgbClr val="22303C"/>
+                </a:solidFill>
+                <a:latin typeface="Microsoft YaHei" pitchFamily="34" charset="0"/>
+                <a:ea typeface="Microsoft YaHei" pitchFamily="34" charset="-122"/>
+                <a:cs typeface="Microsoft YaHei" pitchFamily="34" charset="-120"/>
+              </a:rPr>
+              <a:t>流水击穿边界</a:t>
+            </a:r>
+            <a:endParaRPr lang="en-US" sz="1200" dirty="0"/>
+          </a:p>
+        </p:txBody>
+      </p:sp>
+      <p:sp>
+        <p:nvSpPr>
+          <p:cNvPr id="8" name="Text 6"/>
+          <p:cNvSpPr/>
+          <p:nvPr/>
+        </p:nvSpPr>
+        <p:spPr>
+          <a:xfrm>
+            <a:off x="804672" y="1572768"/>
+            <a:ext cx="3520440" cy="548640"/>
+          </a:xfrm>
+          <a:prstGeom prst="rect">
+            <a:avLst/>
+          </a:prstGeom>
+          <a:noFill/>
+          <a:ln/>
+        </p:spPr>
+        <p:txBody>
+          <a:bodyPr wrap="square" lIns="0" tIns="0" rIns="0" bIns="0" rtlCol="0" anchor="ctr"/>
+          <a:lstStyle/>
+          <a:p>
+            <a:pPr indent="0" marL="0">
+              <a:buNone/>
+            </a:pPr>
+            <a:r>
+              <a:rPr lang="en-US" sz="950" dirty="0">
+                <a:solidFill>
+                  <a:srgbClr val="6B7C8A"/>
+                </a:solidFill>
+                <a:latin typeface="Microsoft YaHei" pitchFamily="34" charset="0"/>
+                <a:ea typeface="Microsoft YaHei" pitchFamily="34" charset="-122"/>
+                <a:cs typeface="Microsoft YaHei" pitchFamily="34" charset="-120"/>
+              </a:rPr>
+              <a:t>慢峰单批搬运 11.5-33.7 ms 会接近/超过解码步窗——异步方案固有的暴露窗口</a:t>
+            </a:r>
+            <a:endParaRPr lang="en-US" sz="950" dirty="0"/>
+          </a:p>
+        </p:txBody>
+      </p:sp>
+      <p:sp>
+        <p:nvSpPr>
+          <p:cNvPr id="9" name="Shape 7"/>
+          <p:cNvSpPr/>
+          <p:nvPr/>
+        </p:nvSpPr>
+        <p:spPr>
+          <a:xfrm>
+            <a:off x="4663440" y="1188720"/>
+            <a:ext cx="3840480" cy="950976"/>
+          </a:xfrm>
+          <a:prstGeom prst="rect">
+            <a:avLst/>
+          </a:prstGeom>
+          <a:solidFill>
+            <a:srgbClr val="FFFFFF"/>
+          </a:solidFill>
+          <a:ln/>
+          <a:effectLst>
+            <a:outerShdw sx="100000" sy="100000" kx="0" ky="0" algn="bl" rotWithShape="0" blurRad="76200" dist="25400" dir="8100000">
+              <a:srgbClr val="000000">
+                <a:alpha val="12000"/>
+              </a:srgbClr>
+            </a:outerShdw>
+          </a:effectLst>
+        </p:spPr>
+      </p:sp>
+      <p:sp>
+        <p:nvSpPr>
+          <p:cNvPr id="10" name="Shape 8"/>
+          <p:cNvSpPr/>
+          <p:nvPr/>
+        </p:nvSpPr>
+        <p:spPr>
+          <a:xfrm>
+            <a:off x="4663440" y="1188720"/>
+            <a:ext cx="91440" cy="950976"/>
+          </a:xfrm>
+          <a:prstGeom prst="rect">
+            <a:avLst/>
+          </a:prstGeom>
+          <a:solidFill>
+            <a:srgbClr val="C0504D"/>
+          </a:solidFill>
+          <a:ln/>
+        </p:spPr>
+      </p:sp>
+      <p:sp>
+        <p:nvSpPr>
+          <p:cNvPr id="11" name="Text 9"/>
+          <p:cNvSpPr/>
+          <p:nvPr/>
+        </p:nvSpPr>
+        <p:spPr>
+          <a:xfrm>
+            <a:off x="4919472" y="1271016"/>
+            <a:ext cx="3383280" cy="292608"/>
+          </a:xfrm>
+          <a:prstGeom prst="rect">
+            <a:avLst/>
+          </a:prstGeom>
+          <a:noFill/>
+          <a:ln/>
+        </p:spPr>
+        <p:txBody>
+          <a:bodyPr wrap="square" lIns="0" tIns="0" rIns="0" bIns="0" rtlCol="0" anchor="ctr"/>
+          <a:lstStyle/>
+          <a:p>
+            <a:pPr indent="0" marL="0">
+              <a:buNone/>
+            </a:pPr>
+            <a:r>
+              <a:rPr lang="en-US" sz="1200" b="1" dirty="0">
+                <a:solidFill>
+                  <a:srgbClr val="22303C"/>
+                </a:solidFill>
+                <a:latin typeface="Microsoft YaHei" pitchFamily="34" charset="0"/>
+                <a:ea typeface="Microsoft YaHei" pitchFamily="34" charset="-122"/>
+                <a:cs typeface="Microsoft YaHei" pitchFamily="34" charset="-120"/>
+              </a:rPr>
+              <a:t>深流水尚未转正</a:t>
+            </a:r>
+            <a:endParaRPr lang="en-US" sz="1200" dirty="0"/>
+          </a:p>
+        </p:txBody>
+      </p:sp>
+      <p:sp>
+        <p:nvSpPr>
+          <p:cNvPr id="12" name="Text 10"/>
+          <p:cNvSpPr/>
+          <p:nvPr/>
+        </p:nvSpPr>
+        <p:spPr>
+          <a:xfrm>
+            <a:off x="4919472" y="1572768"/>
+            <a:ext cx="3520440" cy="548640"/>
+          </a:xfrm>
+          <a:prstGeom prst="rect">
+            <a:avLst/>
+          </a:prstGeom>
+          <a:noFill/>
+          <a:ln/>
+        </p:spPr>
+        <p:txBody>
+          <a:bodyPr wrap="square" lIns="0" tIns="0" rIns="0" bIns="0" rtlCol="0" anchor="ctr"/>
+          <a:lstStyle/>
+          <a:p>
+            <a:pPr indent="0" marL="0">
+              <a:buNone/>
+            </a:pPr>
+            <a:r>
+              <a:rPr lang="en-US" sz="950" dirty="0">
+                <a:solidFill>
+                  <a:srgbClr val="6B7C8A"/>
+                </a:solidFill>
+                <a:latin typeface="Microsoft YaHei" pitchFamily="34" charset="0"/>
+                <a:ea typeface="Microsoft YaHei" pitchFamily="34" charset="-122"/>
+                <a:cs typeface="Microsoft YaHei" pitchFamily="34" charset="-120"/>
+              </a:rPr>
+              <a:t>多批同时搬运在飞是摊薄击穿的方向，仍在验证中</a:t>
+            </a:r>
+            <a:endParaRPr lang="en-US" sz="950" dirty="0"/>
+          </a:p>
+        </p:txBody>
+      </p:sp>
+      <p:sp>
+        <p:nvSpPr>
+          <p:cNvPr id="13" name="Shape 11"/>
+          <p:cNvSpPr/>
+          <p:nvPr/>
+        </p:nvSpPr>
+        <p:spPr>
+          <a:xfrm>
+            <a:off x="548640" y="2286000"/>
+            <a:ext cx="3840480" cy="950976"/>
+          </a:xfrm>
+          <a:prstGeom prst="rect">
+            <a:avLst/>
+          </a:prstGeom>
+          <a:solidFill>
+            <a:srgbClr val="FFFFFF"/>
+          </a:solidFill>
+          <a:ln/>
+          <a:effectLst>
+            <a:outerShdw sx="100000" sy="100000" kx="0" ky="0" algn="bl" rotWithShape="0" blurRad="76200" dist="25400" dir="8100000">
+              <a:srgbClr val="000000">
+                <a:alpha val="12000"/>
+              </a:srgbClr>
+            </a:outerShdw>
+          </a:effectLst>
+        </p:spPr>
+      </p:sp>
+      <p:sp>
+        <p:nvSpPr>
+          <p:cNvPr id="14" name="Shape 12"/>
+          <p:cNvSpPr/>
+          <p:nvPr/>
+        </p:nvSpPr>
+        <p:spPr>
+          <a:xfrm>
+            <a:off x="548640" y="2286000"/>
+            <a:ext cx="91440" cy="950976"/>
+          </a:xfrm>
+          <a:prstGeom prst="rect">
+            <a:avLst/>
+          </a:prstGeom>
+          <a:solidFill>
+            <a:srgbClr val="C0504D"/>
+          </a:solidFill>
+          <a:ln/>
+        </p:spPr>
+      </p:sp>
+      <p:sp>
+        <p:nvSpPr>
+          <p:cNvPr id="15" name="Text 13"/>
+          <p:cNvSpPr/>
+          <p:nvPr/>
+        </p:nvSpPr>
+        <p:spPr>
+          <a:xfrm>
+            <a:off x="804672" y="2368296"/>
+            <a:ext cx="3383280" cy="292608"/>
+          </a:xfrm>
+          <a:prstGeom prst="rect">
+            <a:avLst/>
+          </a:prstGeom>
+          <a:noFill/>
+          <a:ln/>
+        </p:spPr>
+        <p:txBody>
+          <a:bodyPr wrap="square" lIns="0" tIns="0" rIns="0" bIns="0" rtlCol="0" anchor="ctr"/>
+          <a:lstStyle/>
+          <a:p>
+            <a:pPr indent="0" marL="0">
+              <a:buNone/>
+            </a:pPr>
+            <a:r>
+              <a:rPr lang="en-US" sz="1200" b="1" dirty="0">
+                <a:solidFill>
+                  <a:srgbClr val="22303C"/>
+                </a:solidFill>
+                <a:latin typeface="Microsoft YaHei" pitchFamily="34" charset="0"/>
+                <a:ea typeface="Microsoft YaHei" pitchFamily="34" charset="-122"/>
+                <a:cs typeface="Microsoft YaHei" pitchFamily="34" charset="-120"/>
+              </a:rPr>
+              <a:t>SSD 层：有意取舍</a:t>
+            </a:r>
+            <a:endParaRPr lang="en-US" sz="1200" dirty="0"/>
+          </a:p>
+        </p:txBody>
+      </p:sp>
+      <p:sp>
+        <p:nvSpPr>
+          <p:cNvPr id="16" name="Text 14"/>
+          <p:cNvSpPr/>
+          <p:nvPr/>
+        </p:nvSpPr>
+        <p:spPr>
+          <a:xfrm>
+            <a:off x="804672" y="2670048"/>
+            <a:ext cx="3520440" cy="548640"/>
+          </a:xfrm>
+          <a:prstGeom prst="rect">
+            <a:avLst/>
+          </a:prstGeom>
+          <a:noFill/>
+          <a:ln/>
+        </p:spPr>
+        <p:txBody>
+          <a:bodyPr wrap="square" lIns="0" tIns="0" rIns="0" bIns="0" rtlCol="0" anchor="ctr"/>
+          <a:lstStyle/>
+          <a:p>
+            <a:pPr indent="0" marL="0">
+              <a:buNone/>
+            </a:pPr>
+            <a:r>
+              <a:rPr lang="en-US" sz="950" dirty="0">
+                <a:solidFill>
+                  <a:srgbClr val="6B7C8A"/>
+                </a:solidFill>
+                <a:latin typeface="Microsoft YaHei" pitchFamily="34" charset="0"/>
+                <a:ea typeface="Microsoft YaHei" pitchFamily="34" charset="-122"/>
+                <a:cs typeface="Microsoft YaHei" pitchFamily="34" charset="-120"/>
+              </a:rPr>
+              <a:t>全部 KV 可常驻 Host RAM（最坏 ≈8.6 GB / 本机 128 GB）——无容量必要，热成本 +11% 不划算</a:t>
+            </a:r>
+            <a:endParaRPr lang="en-US" sz="950" dirty="0"/>
+          </a:p>
+        </p:txBody>
+      </p:sp>
+      <p:sp>
+        <p:nvSpPr>
+          <p:cNvPr id="17" name="Shape 15"/>
+          <p:cNvSpPr/>
+          <p:nvPr/>
+        </p:nvSpPr>
+        <p:spPr>
+          <a:xfrm>
+            <a:off x="4663440" y="2286000"/>
+            <a:ext cx="3840480" cy="950976"/>
+          </a:xfrm>
+          <a:prstGeom prst="rect">
+            <a:avLst/>
+          </a:prstGeom>
+          <a:solidFill>
+            <a:srgbClr val="FFFFFF"/>
+          </a:solidFill>
+          <a:ln/>
+          <a:effectLst>
+            <a:outerShdw sx="100000" sy="100000" kx="0" ky="0" algn="bl" rotWithShape="0" blurRad="76200" dist="25400" dir="8100000">
+              <a:srgbClr val="000000">
+                <a:alpha val="12000"/>
+              </a:srgbClr>
+            </a:outerShdw>
+          </a:effectLst>
+        </p:spPr>
+      </p:sp>
+      <p:sp>
+        <p:nvSpPr>
+          <p:cNvPr id="18" name="Shape 16"/>
+          <p:cNvSpPr/>
+          <p:nvPr/>
+        </p:nvSpPr>
+        <p:spPr>
+          <a:xfrm>
+            <a:off x="4663440" y="2286000"/>
+            <a:ext cx="91440" cy="950976"/>
+          </a:xfrm>
+          <a:prstGeom prst="rect">
+            <a:avLst/>
+          </a:prstGeom>
+          <a:solidFill>
+            <a:srgbClr val="C0504D"/>
+          </a:solidFill>
+          <a:ln/>
+        </p:spPr>
+      </p:sp>
+      <p:sp>
+        <p:nvSpPr>
+          <p:cNvPr id="19" name="Text 17"/>
+          <p:cNvSpPr/>
+          <p:nvPr/>
+        </p:nvSpPr>
+        <p:spPr>
+          <a:xfrm>
+            <a:off x="4919472" y="2368296"/>
+            <a:ext cx="3383280" cy="292608"/>
+          </a:xfrm>
+          <a:prstGeom prst="rect">
+            <a:avLst/>
+          </a:prstGeom>
+          <a:noFill/>
+          <a:ln/>
+        </p:spPr>
+        <p:txBody>
+          <a:bodyPr wrap="square" lIns="0" tIns="0" rIns="0" bIns="0" rtlCol="0" anchor="ctr"/>
+          <a:lstStyle/>
+          <a:p>
+            <a:pPr indent="0" marL="0">
+              <a:buNone/>
+            </a:pPr>
+            <a:r>
+              <a:rPr lang="en-US" sz="1200" b="1" dirty="0">
+                <a:solidFill>
+                  <a:srgbClr val="22303C"/>
+                </a:solidFill>
+                <a:latin typeface="Microsoft YaHei" pitchFamily="34" charset="0"/>
+                <a:ea typeface="Microsoft YaHei" pitchFamily="34" charset="-122"/>
+                <a:cs typeface="Microsoft YaHei" pitchFamily="34" charset="-120"/>
+              </a:rPr>
+              <a:t>拷贝式搬运</a:t>
+            </a:r>
+            <a:endParaRPr lang="en-US" sz="1200" dirty="0"/>
+          </a:p>
+        </p:txBody>
+      </p:sp>
+      <p:sp>
+        <p:nvSpPr>
+          <p:cNvPr id="20" name="Text 18"/>
+          <p:cNvSpPr/>
+          <p:nvPr/>
+        </p:nvSpPr>
+        <p:spPr>
+          <a:xfrm>
+            <a:off x="4919472" y="2670048"/>
+            <a:ext cx="3520440" cy="548640"/>
+          </a:xfrm>
+          <a:prstGeom prst="rect">
+            <a:avLst/>
+          </a:prstGeom>
+          <a:noFill/>
+          <a:ln/>
+        </p:spPr>
+        <p:txBody>
+          <a:bodyPr wrap="square" lIns="0" tIns="0" rIns="0" bIns="0" rtlCol="0" anchor="ctr"/>
+          <a:lstStyle/>
+          <a:p>
+            <a:pPr indent="0" marL="0">
+              <a:buNone/>
+            </a:pPr>
+            <a:r>
+              <a:rPr lang="en-US" sz="950" dirty="0">
+                <a:solidFill>
+                  <a:srgbClr val="6B7C8A"/>
+                </a:solidFill>
+                <a:latin typeface="Microsoft YaHei" pitchFamily="34" charset="0"/>
+                <a:ea typeface="Microsoft YaHei" pitchFamily="34" charset="-122"/>
+                <a:cs typeface="Microsoft YaHei" pitchFamily="34" charset="-120"/>
+              </a:rPr>
+              <a:t>仍是拷贝；原作者已实现“所有权移动”——追赶中。落地后用按需协议做拷贝版 vs 移动版对照（入谷率/谷深），并测对暴露面的作用</a:t>
+            </a:r>
+            <a:endParaRPr lang="en-US" sz="950" dirty="0"/>
+          </a:p>
+        </p:txBody>
+      </p:sp>
+      <p:sp>
+        <p:nvSpPr>
+          <p:cNvPr id="21" name="Shape 19"/>
+          <p:cNvSpPr/>
+          <p:nvPr/>
+        </p:nvSpPr>
+        <p:spPr>
+          <a:xfrm>
+            <a:off x="548640" y="3383280"/>
+            <a:ext cx="3840480" cy="950976"/>
+          </a:xfrm>
+          <a:prstGeom prst="rect">
+            <a:avLst/>
+          </a:prstGeom>
+          <a:solidFill>
+            <a:srgbClr val="FFFFFF"/>
+          </a:solidFill>
+          <a:ln/>
+          <a:effectLst>
+            <a:outerShdw sx="100000" sy="100000" kx="0" ky="0" algn="bl" rotWithShape="0" blurRad="76200" dist="25400" dir="8100000">
+              <a:srgbClr val="000000">
+                <a:alpha val="12000"/>
+              </a:srgbClr>
+            </a:outerShdw>
+          </a:effectLst>
+        </p:spPr>
+      </p:sp>
+      <p:sp>
+        <p:nvSpPr>
+          <p:cNvPr id="22" name="Shape 20"/>
+          <p:cNvSpPr/>
+          <p:nvPr/>
+        </p:nvSpPr>
+        <p:spPr>
+          <a:xfrm>
+            <a:off x="548640" y="3383280"/>
+            <a:ext cx="91440" cy="950976"/>
+          </a:xfrm>
+          <a:prstGeom prst="rect">
+            <a:avLst/>
+          </a:prstGeom>
+          <a:solidFill>
+            <a:srgbClr val="C0504D"/>
+          </a:solidFill>
+          <a:ln/>
+        </p:spPr>
+      </p:sp>
+      <p:sp>
+        <p:nvSpPr>
+          <p:cNvPr id="23" name="Text 21"/>
+          <p:cNvSpPr/>
+          <p:nvPr/>
+        </p:nvSpPr>
+        <p:spPr>
+          <a:xfrm>
+            <a:off x="804672" y="3465576"/>
+            <a:ext cx="3383280" cy="292608"/>
+          </a:xfrm>
+          <a:prstGeom prst="rect">
+            <a:avLst/>
+          </a:prstGeom>
+          <a:noFill/>
+          <a:ln/>
+        </p:spPr>
+        <p:txBody>
+          <a:bodyPr wrap="square" lIns="0" tIns="0" rIns="0" bIns="0" rtlCol="0" anchor="ctr"/>
+          <a:lstStyle/>
+          <a:p>
+            <a:pPr indent="0" marL="0">
+              <a:buNone/>
+            </a:pPr>
+            <a:r>
+              <a:rPr lang="en-US" sz="1200" b="1" dirty="0">
+                <a:solidFill>
+                  <a:srgbClr val="22303C"/>
+                </a:solidFill>
+                <a:latin typeface="Microsoft YaHei" pitchFamily="34" charset="0"/>
+                <a:ea typeface="Microsoft YaHei" pitchFamily="34" charset="-122"/>
+                <a:cs typeface="Microsoft YaHei" pitchFamily="34" charset="-120"/>
+              </a:rPr>
+              <a:t>覆盖差异</a:t>
+            </a:r>
+            <a:endParaRPr lang="en-US" sz="1200" dirty="0"/>
+          </a:p>
+        </p:txBody>
+      </p:sp>
+      <p:sp>
+        <p:nvSpPr>
+          <p:cNvPr id="24" name="Text 22"/>
+          <p:cNvSpPr/>
+          <p:nvPr/>
+        </p:nvSpPr>
+        <p:spPr>
+          <a:xfrm>
+            <a:off x="804672" y="3767328"/>
+            <a:ext cx="3520440" cy="548640"/>
+          </a:xfrm>
+          <a:prstGeom prst="rect">
+            <a:avLst/>
+          </a:prstGeom>
+          <a:noFill/>
+          <a:ln/>
+        </p:spPr>
+        <p:txBody>
+          <a:bodyPr wrap="square" lIns="0" tIns="0" rIns="0" bIns="0" rtlCol="0" anchor="ctr"/>
+          <a:lstStyle/>
+          <a:p>
+            <a:pPr indent="0" marL="0">
+              <a:buNone/>
+            </a:pPr>
+            <a:r>
+              <a:rPr lang="en-US" sz="950" dirty="0">
+                <a:solidFill>
+                  <a:srgbClr val="6B7C8A"/>
+                </a:solidFill>
+                <a:latin typeface="Microsoft YaHei" pitchFamily="34" charset="0"/>
+                <a:ea typeface="Microsoft YaHei" pitchFamily="34" charset="-122"/>
+                <a:cs typeface="Microsoft YaHei" pitchFamily="34" charset="-120"/>
+              </a:rPr>
+              <a:t>我们深耕单路长上下文；原作者的多路并发场景我们覆盖不足</a:t>
+            </a:r>
+            <a:endParaRPr lang="en-US" sz="950" dirty="0"/>
+          </a:p>
+        </p:txBody>
+      </p:sp>
+      <p:sp>
+        <p:nvSpPr>
+          <p:cNvPr id="25" name="Text 23"/>
+          <p:cNvSpPr/>
+          <p:nvPr/>
+        </p:nvSpPr>
+        <p:spPr>
+          <a:xfrm>
+            <a:off x="548640" y="4480560"/>
+            <a:ext cx="8046720" cy="274320"/>
+          </a:xfrm>
+          <a:prstGeom prst="rect">
+            <a:avLst/>
+          </a:prstGeom>
+          <a:noFill/>
+          <a:ln/>
+        </p:spPr>
+        <p:txBody>
+          <a:bodyPr wrap="square" lIns="0" tIns="0" rIns="0" bIns="0" rtlCol="0" anchor="ctr"/>
+          <a:lstStyle/>
+          <a:p>
+            <a:pPr indent="0" marL="0">
+              <a:buNone/>
+            </a:pPr>
+            <a:r>
+              <a:rPr lang="en-US" sz="950" dirty="0">
+                <a:solidFill>
+                  <a:srgbClr val="6B7C8A"/>
+                </a:solidFill>
+                <a:latin typeface="Microsoft YaHei" pitchFamily="34" charset="0"/>
+                <a:ea typeface="Microsoft YaHei" pitchFamily="34" charset="-122"/>
+                <a:cs typeface="Microsoft YaHei" pitchFamily="34" charset="-120"/>
+              </a:rPr>
+              <a:t>注：“时段性慢态”已在上一页单独展开。</a:t>
+            </a:r>
+            <a:endParaRPr lang="en-US" sz="950" dirty="0"/>
+          </a:p>
+        </p:txBody>
+      </p:sp>
+      <p:sp>
+        <p:nvSpPr>
+          <p:cNvPr id="26" name="Text 24"/>
+          <p:cNvSpPr/>
+          <p:nvPr/>
+        </p:nvSpPr>
+        <p:spPr>
+          <a:xfrm>
+            <a:off x="8549640" y="4800600"/>
+            <a:ext cx="457200" cy="274320"/>
+          </a:xfrm>
+          <a:prstGeom prst="rect">
+            <a:avLst/>
+          </a:prstGeom>
+          <a:noFill/>
+          <a:ln/>
+        </p:spPr>
+        <p:txBody>
+          <a:bodyPr wrap="square" lIns="0" tIns="0" rIns="0" bIns="0" rtlCol="0" anchor="ctr"/>
+          <a:lstStyle/>
+          <a:p>
+            <a:pPr algn="r" indent="0" marL="0">
+              <a:buNone/>
+            </a:pPr>
+            <a:r>
+              <a:rPr lang="en-US" sz="1000" dirty="0">
+                <a:solidFill>
+                  <a:srgbClr val="6B7C8A"/>
+                </a:solidFill>
+                <a:latin typeface="Microsoft YaHei" pitchFamily="34" charset="0"/>
+                <a:ea typeface="Microsoft YaHei" pitchFamily="34" charset="-122"/>
+                <a:cs typeface="Microsoft YaHei" pitchFamily="34" charset="-120"/>
+              </a:rPr>
+              <a:t>15</a:t>
+            </a:r>
+            <a:endParaRPr lang="en-US" sz="1000" dirty="0"/>
+          </a:p>
+        </p:txBody>
+      </p:sp>
+      <p:sp>
+        <p:nvSpPr>
+          <p:cNvPr id="27" name="Text 25"/>
+          <p:cNvSpPr/>
+          <p:nvPr/>
+        </p:nvSpPr>
+        <p:spPr>
+          <a:xfrm>
+            <a:off x="457200" y="4828032"/>
+            <a:ext cx="5486400" cy="228600"/>
+          </a:xfrm>
+          <a:prstGeom prst="rect">
+            <a:avLst/>
+          </a:prstGeom>
+          <a:noFill/>
+          <a:ln/>
+        </p:spPr>
+        <p:txBody>
+          <a:bodyPr wrap="square" lIns="0" tIns="0" rIns="0" bIns="0" rtlCol="0" anchor="ctr"/>
+          <a:lstStyle/>
+          <a:p>
+            <a:pPr indent="0" marL="0">
+              <a:buNone/>
+            </a:pPr>
+            <a:r>
+              <a:rPr lang="en-US" sz="900" dirty="0">
+                <a:solidFill>
+                  <a:srgbClr val="6B7C8A"/>
+                </a:solidFill>
+                <a:latin typeface="Microsoft YaHei" pitchFamily="34" charset="0"/>
+                <a:ea typeface="Microsoft YaHei" pitchFamily="34" charset="-122"/>
+                <a:cs typeface="Microsoft YaHei" pitchFamily="34" charset="-120"/>
+              </a:rPr>
+              <a:t>站在 KVMem 的肩膀上 · 异步页流水</a:t>
+            </a:r>
+            <a:endParaRPr lang="en-US" sz="900" dirty="0"/>
+          </a:p>
+        </p:txBody>
+      </p:sp>
+    </p:spTree>
+  </p:cSld>
+  <p:clrMapOvr>
+    <a:masterClrMapping/>
+  </p:clrMapOvr>
+</p:sld>
+</file>
+
+<file path=ppt/slides/slide16.xml><?xml version="1.0" encoding="utf-8"?>
+<p:sld xmlns:a="http://schemas.openxmlformats.org/drawingml/2006/main" xmlns:r="http://schemas.openxmlformats.org/officeDocument/2006/relationships" xmlns:p="http://schemas.openxmlformats.org/presentationml/2006/main">
+  <p:cSld name="Slide 16">
+    <p:bg>
+      <p:bgPr>
+        <a:solidFill>
+          <a:srgbClr val="F6F9FB"/>
+        </a:solidFill>
+      </p:bgPr>
+    </p:bg>
+    <p:spTree>
+      <p:nvGrpSpPr>
+        <p:cNvPr id="1" name=""/>
+        <p:cNvGrpSpPr/>
+        <p:nvPr/>
+      </p:nvGrpSpPr>
+      <p:grpSpPr>
+        <a:xfrm>
+          <a:off x="0" y="0"/>
+          <a:ext cx="0" cy="0"/>
+          <a:chOff x="0" y="0"/>
+          <a:chExt cx="0" cy="0"/>
+        </a:xfrm>
+      </p:grpSpPr>
+      <p:sp>
+        <p:nvSpPr>
+          <p:cNvPr id="2" name="Shape 0"/>
+          <p:cNvSpPr/>
+          <p:nvPr/>
+        </p:nvSpPr>
+        <p:spPr>
+          <a:xfrm>
+            <a:off x="457200" y="384048"/>
+            <a:ext cx="109728" cy="457200"/>
+          </a:xfrm>
+          <a:prstGeom prst="rect">
+            <a:avLst/>
+          </a:prstGeom>
+          <a:solidFill>
+            <a:srgbClr val="0FA3A8"/>
+          </a:solidFill>
+          <a:ln/>
+        </p:spPr>
+      </p:sp>
+      <p:sp>
+        <p:nvSpPr>
+          <p:cNvPr id="3" name="Text 1"/>
+          <p:cNvSpPr/>
+          <p:nvPr/>
+        </p:nvSpPr>
+        <p:spPr>
+          <a:xfrm>
+            <a:off x="713232" y="310896"/>
+            <a:ext cx="7955280" cy="228600"/>
+          </a:xfrm>
+          <a:prstGeom prst="rect">
+            <a:avLst/>
+          </a:prstGeom>
+          <a:noFill/>
+          <a:ln/>
+        </p:spPr>
+        <p:txBody>
+          <a:bodyPr wrap="square" lIns="0" tIns="0" rIns="0" bIns="0" rtlCol="0" anchor="ctr"/>
+          <a:lstStyle/>
+          <a:p>
+            <a:pPr indent="0" marL="0">
+              <a:buNone/>
+            </a:pPr>
+            <a:r>
+              <a:rPr lang="en-US" sz="1100" b="1" spc="200" kern="0" dirty="0">
+                <a:solidFill>
+                  <a:srgbClr val="0FA3A8"/>
+                </a:solidFill>
+                <a:latin typeface="Microsoft YaHei" pitchFamily="34" charset="0"/>
+                <a:ea typeface="Microsoft YaHei" pitchFamily="34" charset="-122"/>
+                <a:cs typeface="Microsoft YaHei" pitchFamily="34" charset="-120"/>
+              </a:rPr>
+              <a:t>ROADMAP</a:t>
+            </a:r>
+            <a:endParaRPr lang="en-US" sz="1100" dirty="0"/>
+          </a:p>
+        </p:txBody>
+      </p:sp>
+      <p:sp>
+        <p:nvSpPr>
+          <p:cNvPr id="4" name="Text 2"/>
+          <p:cNvSpPr/>
+          <p:nvPr/>
+        </p:nvSpPr>
+        <p:spPr>
+          <a:xfrm>
+            <a:off x="713232" y="548640"/>
+            <a:ext cx="8138160" cy="457200"/>
+          </a:xfrm>
+          <a:prstGeom prst="rect">
+            <a:avLst/>
+          </a:prstGeom>
+          <a:noFill/>
+          <a:ln/>
+        </p:spPr>
+        <p:txBody>
+          <a:bodyPr wrap="square" lIns="0" tIns="0" rIns="0" bIns="0" rtlCol="0" anchor="ctr"/>
+          <a:lstStyle/>
+          <a:p>
+            <a:pPr indent="0" marL="0">
+              <a:buNone/>
+            </a:pPr>
+            <a:r>
+              <a:rPr lang="en-US" sz="2400" b="1" dirty="0">
+                <a:solidFill>
+                  <a:srgbClr val="22303C"/>
+                </a:solidFill>
+                <a:latin typeface="Microsoft YaHei" pitchFamily="34" charset="0"/>
+                <a:ea typeface="Microsoft YaHei" pitchFamily="34" charset="-122"/>
+                <a:cs typeface="Microsoft YaHei" pitchFamily="34" charset="-120"/>
+              </a:rPr>
+              <a:t>未来的方向</a:t>
+            </a:r>
+            <a:endParaRPr lang="en-US" sz="2400" dirty="0"/>
+          </a:p>
+        </p:txBody>
+      </p:sp>
+      <p:sp>
+        <p:nvSpPr>
+          <p:cNvPr id="5" name="Shape 3"/>
+          <p:cNvSpPr/>
+          <p:nvPr/>
+        </p:nvSpPr>
+        <p:spPr>
+          <a:xfrm>
+            <a:off x="548640" y="1024128"/>
+            <a:ext cx="8046720" cy="530352"/>
+          </a:xfrm>
+          <a:prstGeom prst="rect">
+            <a:avLst/>
+          </a:prstGeom>
+          <a:solidFill>
+            <a:srgbClr val="FFFFFF"/>
+          </a:solidFill>
+          <a:ln/>
+          <a:effectLst>
+            <a:outerShdw sx="100000" sy="100000" kx="0" ky="0" algn="bl" rotWithShape="0" blurRad="76200" dist="25400" dir="8100000">
+              <a:srgbClr val="000000">
+                <a:alpha val="12000"/>
+              </a:srgbClr>
+            </a:outerShdw>
+          </a:effectLst>
+        </p:spPr>
+      </p:sp>
+      <p:sp>
+        <p:nvSpPr>
+          <p:cNvPr id="6" name="Shape 4"/>
+          <p:cNvSpPr/>
+          <p:nvPr/>
+        </p:nvSpPr>
+        <p:spPr>
+          <a:xfrm>
+            <a:off x="548640" y="1024128"/>
+            <a:ext cx="91440" cy="530352"/>
+          </a:xfrm>
+          <a:prstGeom prst="rect">
+            <a:avLst/>
+          </a:prstGeom>
+          <a:solidFill>
+            <a:srgbClr val="0FA3A8"/>
+          </a:solidFill>
+          <a:ln/>
+        </p:spPr>
+      </p:sp>
+      <p:sp>
+        <p:nvSpPr>
+          <p:cNvPr id="7" name="Shape 5"/>
+          <p:cNvSpPr/>
+          <p:nvPr/>
+        </p:nvSpPr>
+        <p:spPr>
+          <a:xfrm>
+            <a:off x="777240" y="1106424"/>
+            <a:ext cx="365760" cy="365760"/>
+          </a:xfrm>
+          <a:prstGeom prst="ellipse">
+            <a:avLst/>
+          </a:prstGeom>
+          <a:solidFill>
+            <a:srgbClr val="0FA3A8"/>
+          </a:solidFill>
+          <a:ln/>
+        </p:spPr>
+      </p:sp>
+      <p:sp>
+        <p:nvSpPr>
+          <p:cNvPr id="8" name="Text 6"/>
+          <p:cNvSpPr/>
+          <p:nvPr/>
+        </p:nvSpPr>
+        <p:spPr>
+          <a:xfrm>
+            <a:off x="777240" y="1115568"/>
+            <a:ext cx="365760" cy="347472"/>
+          </a:xfrm>
+          <a:prstGeom prst="rect">
+            <a:avLst/>
+          </a:prstGeom>
+          <a:noFill/>
+          <a:ln/>
+        </p:spPr>
+        <p:txBody>
+          <a:bodyPr wrap="square" lIns="0" tIns="0" rIns="0" bIns="0" rtlCol="0" anchor="ctr"/>
+          <a:lstStyle/>
+          <a:p>
+            <a:pPr algn="ctr" indent="0" marL="0">
+              <a:buNone/>
+            </a:pPr>
+            <a:r>
+              <a:rPr lang="en-US" sz="1250" b="1" dirty="0">
+                <a:solidFill>
+                  <a:srgbClr val="FFFFFF"/>
+                </a:solidFill>
+                <a:latin typeface="Microsoft YaHei" pitchFamily="34" charset="0"/>
+                <a:ea typeface="Microsoft YaHei" pitchFamily="34" charset="-122"/>
+                <a:cs typeface="Microsoft YaHei" pitchFamily="34" charset="-120"/>
+              </a:rPr>
+              <a:t>1</a:t>
+            </a:r>
+            <a:endParaRPr lang="en-US" sz="1250" dirty="0"/>
+          </a:p>
+        </p:txBody>
+      </p:sp>
+      <p:sp>
+        <p:nvSpPr>
+          <p:cNvPr id="9" name="Text 7"/>
+          <p:cNvSpPr/>
+          <p:nvPr/>
+        </p:nvSpPr>
+        <p:spPr>
+          <a:xfrm>
+            <a:off x="1325880" y="1069848"/>
+            <a:ext cx="2103120" cy="438912"/>
+          </a:xfrm>
+          <a:prstGeom prst="rect">
+            <a:avLst/>
+          </a:prstGeom>
+          <a:noFill/>
+          <a:ln/>
+        </p:spPr>
+        <p:txBody>
+          <a:bodyPr wrap="square" lIns="0" tIns="0" rIns="0" bIns="0" rtlCol="0" anchor="ctr"/>
+          <a:lstStyle/>
+          <a:p>
+            <a:pPr indent="0" marL="0">
+              <a:buNone/>
+            </a:pPr>
+            <a:r>
+              <a:rPr lang="en-US" sz="1200" b="1" dirty="0">
+                <a:solidFill>
+                  <a:srgbClr val="22303C"/>
+                </a:solidFill>
+                <a:latin typeface="Microsoft YaHei" pitchFamily="34" charset="0"/>
+                <a:ea typeface="Microsoft YaHei" pitchFamily="34" charset="-122"/>
+                <a:cs typeface="Microsoft YaHei" pitchFamily="34" charset="-120"/>
+              </a:rPr>
+              <a:t>深流水</a:t>
+            </a:r>
+            <a:endParaRPr lang="en-US" sz="1200" dirty="0"/>
+          </a:p>
+        </p:txBody>
+      </p:sp>
+      <p:sp>
+        <p:nvSpPr>
+          <p:cNvPr id="10" name="Text 8"/>
+          <p:cNvSpPr/>
+          <p:nvPr/>
+        </p:nvSpPr>
+        <p:spPr>
+          <a:xfrm>
+            <a:off x="3474720" y="1069848"/>
+            <a:ext cx="4983480" cy="438912"/>
+          </a:xfrm>
+          <a:prstGeom prst="rect">
+            <a:avLst/>
+          </a:prstGeom>
+          <a:noFill/>
+          <a:ln/>
+        </p:spPr>
+        <p:txBody>
+          <a:bodyPr wrap="square" lIns="0" tIns="0" rIns="0" bIns="0" rtlCol="0" anchor="ctr"/>
+          <a:lstStyle/>
+          <a:p>
+            <a:pPr indent="0" marL="0">
+              <a:buNone/>
+            </a:pPr>
+            <a:r>
+              <a:rPr lang="en-US" sz="950" dirty="0">
+                <a:solidFill>
+                  <a:srgbClr val="6B7C8A"/>
+                </a:solidFill>
+                <a:latin typeface="Microsoft YaHei" pitchFamily="34" charset="0"/>
+                <a:ea typeface="Microsoft YaHei" pitchFamily="34" charset="-122"/>
+                <a:cs typeface="Microsoft YaHei" pitchFamily="34" charset="-120"/>
+              </a:rPr>
+              <a:t>多批在飞，把击穿余量拿回来——“浅池+深流水+高精度”最后一环</a:t>
+            </a:r>
+            <a:endParaRPr lang="en-US" sz="950" dirty="0"/>
+          </a:p>
+        </p:txBody>
+      </p:sp>
+      <p:sp>
+        <p:nvSpPr>
+          <p:cNvPr id="11" name="Shape 9"/>
+          <p:cNvSpPr/>
+          <p:nvPr/>
+        </p:nvSpPr>
+        <p:spPr>
+          <a:xfrm>
+            <a:off x="548640" y="1645920"/>
+            <a:ext cx="8046720" cy="530352"/>
+          </a:xfrm>
+          <a:prstGeom prst="rect">
+            <a:avLst/>
+          </a:prstGeom>
+          <a:solidFill>
+            <a:srgbClr val="FFFFFF"/>
+          </a:solidFill>
+          <a:ln/>
+          <a:effectLst>
+            <a:outerShdw sx="100000" sy="100000" kx="0" ky="0" algn="bl" rotWithShape="0" blurRad="76200" dist="25400" dir="8100000">
+              <a:srgbClr val="000000">
+                <a:alpha val="12000"/>
+              </a:srgbClr>
+            </a:outerShdw>
+          </a:effectLst>
+        </p:spPr>
+      </p:sp>
+      <p:sp>
+        <p:nvSpPr>
+          <p:cNvPr id="12" name="Shape 10"/>
+          <p:cNvSpPr/>
+          <p:nvPr/>
+        </p:nvSpPr>
+        <p:spPr>
+          <a:xfrm>
+            <a:off x="548640" y="1645920"/>
+            <a:ext cx="91440" cy="530352"/>
+          </a:xfrm>
+          <a:prstGeom prst="rect">
+            <a:avLst/>
+          </a:prstGeom>
+          <a:solidFill>
+            <a:srgbClr val="0E4C6E"/>
+          </a:solidFill>
+          <a:ln/>
+        </p:spPr>
+      </p:sp>
+      <p:sp>
+        <p:nvSpPr>
+          <p:cNvPr id="13" name="Shape 11"/>
+          <p:cNvSpPr/>
+          <p:nvPr/>
+        </p:nvSpPr>
+        <p:spPr>
+          <a:xfrm>
+            <a:off x="777240" y="1728216"/>
+            <a:ext cx="365760" cy="365760"/>
+          </a:xfrm>
+          <a:prstGeom prst="ellipse">
+            <a:avLst/>
+          </a:prstGeom>
+          <a:solidFill>
+            <a:srgbClr val="0E4C6E"/>
+          </a:solidFill>
+          <a:ln/>
+        </p:spPr>
+      </p:sp>
+      <p:sp>
+        <p:nvSpPr>
+          <p:cNvPr id="14" name="Text 12"/>
+          <p:cNvSpPr/>
+          <p:nvPr/>
+        </p:nvSpPr>
+        <p:spPr>
+          <a:xfrm>
+            <a:off x="777240" y="1737360"/>
+            <a:ext cx="365760" cy="347472"/>
+          </a:xfrm>
+          <a:prstGeom prst="rect">
+            <a:avLst/>
+          </a:prstGeom>
+          <a:noFill/>
+          <a:ln/>
+        </p:spPr>
+        <p:txBody>
+          <a:bodyPr wrap="square" lIns="0" tIns="0" rIns="0" bIns="0" rtlCol="0" anchor="ctr"/>
+          <a:lstStyle/>
+          <a:p>
+            <a:pPr algn="ctr" indent="0" marL="0">
+              <a:buNone/>
+            </a:pPr>
+            <a:r>
+              <a:rPr lang="en-US" sz="1250" b="1" dirty="0">
+                <a:solidFill>
+                  <a:srgbClr val="FFFFFF"/>
+                </a:solidFill>
+                <a:latin typeface="Microsoft YaHei" pitchFamily="34" charset="0"/>
+                <a:ea typeface="Microsoft YaHei" pitchFamily="34" charset="-122"/>
+                <a:cs typeface="Microsoft YaHei" pitchFamily="34" charset="-120"/>
+              </a:rPr>
+              <a:t>2</a:t>
+            </a:r>
+            <a:endParaRPr lang="en-US" sz="1250" dirty="0"/>
+          </a:p>
+        </p:txBody>
+      </p:sp>
+      <p:sp>
+        <p:nvSpPr>
+          <p:cNvPr id="15" name="Text 13"/>
+          <p:cNvSpPr/>
+          <p:nvPr/>
+        </p:nvSpPr>
+        <p:spPr>
+          <a:xfrm>
+            <a:off x="1325880" y="1691640"/>
+            <a:ext cx="2103120" cy="438912"/>
+          </a:xfrm>
+          <a:prstGeom prst="rect">
+            <a:avLst/>
+          </a:prstGeom>
+          <a:noFill/>
+          <a:ln/>
+        </p:spPr>
+        <p:txBody>
+          <a:bodyPr wrap="square" lIns="0" tIns="0" rIns="0" bIns="0" rtlCol="0" anchor="ctr"/>
+          <a:lstStyle/>
+          <a:p>
+            <a:pPr indent="0" marL="0">
+              <a:buNone/>
+            </a:pPr>
+            <a:r>
+              <a:rPr lang="en-US" sz="1200" b="1" dirty="0">
+                <a:solidFill>
+                  <a:srgbClr val="22303C"/>
+                </a:solidFill>
+                <a:latin typeface="Microsoft YaHei" pitchFamily="34" charset="0"/>
+                <a:ea typeface="Microsoft YaHei" pitchFamily="34" charset="-122"/>
+                <a:cs typeface="Microsoft YaHei" pitchFamily="34" charset="-120"/>
+              </a:rPr>
+              <a:t>所有权移动</a:t>
+            </a:r>
+            <a:endParaRPr lang="en-US" sz="1200" dirty="0"/>
+          </a:p>
+        </p:txBody>
+      </p:sp>
+      <p:sp>
+        <p:nvSpPr>
+          <p:cNvPr id="16" name="Text 14"/>
+          <p:cNvSpPr/>
+          <p:nvPr/>
+        </p:nvSpPr>
+        <p:spPr>
+          <a:xfrm>
+            <a:off x="3474720" y="1691640"/>
+            <a:ext cx="4983480" cy="438912"/>
+          </a:xfrm>
+          <a:prstGeom prst="rect">
+            <a:avLst/>
+          </a:prstGeom>
+          <a:noFill/>
+          <a:ln/>
+        </p:spPr>
+        <p:txBody>
+          <a:bodyPr wrap="square" lIns="0" tIns="0" rIns="0" bIns="0" rtlCol="0" anchor="ctr"/>
+          <a:lstStyle/>
+          <a:p>
+            <a:pPr indent="0" marL="0">
+              <a:buNone/>
+            </a:pPr>
+            <a:r>
+              <a:rPr lang="en-US" sz="950" dirty="0">
+                <a:solidFill>
+                  <a:srgbClr val="6B7C8A"/>
+                </a:solidFill>
+                <a:latin typeface="Microsoft YaHei" pitchFamily="34" charset="0"/>
+                <a:ea typeface="Microsoft YaHei" pitchFamily="34" charset="-122"/>
+                <a:cs typeface="Microsoft YaHei" pitchFamily="34" charset="-120"/>
+              </a:rPr>
+              <a:t>向原作者语义看齐：搬运不复制、恢复零快照</a:t>
+            </a:r>
+            <a:endParaRPr lang="en-US" sz="950" dirty="0"/>
+          </a:p>
+        </p:txBody>
+      </p:sp>
+      <p:sp>
+        <p:nvSpPr>
+          <p:cNvPr id="17" name="Shape 15"/>
+          <p:cNvSpPr/>
+          <p:nvPr/>
+        </p:nvSpPr>
+        <p:spPr>
+          <a:xfrm>
+            <a:off x="548640" y="2267712"/>
+            <a:ext cx="8046720" cy="530352"/>
+          </a:xfrm>
+          <a:prstGeom prst="rect">
+            <a:avLst/>
+          </a:prstGeom>
+          <a:solidFill>
+            <a:srgbClr val="FFFFFF"/>
+          </a:solidFill>
+          <a:ln/>
+          <a:effectLst>
+            <a:outerShdw sx="100000" sy="100000" kx="0" ky="0" algn="bl" rotWithShape="0" blurRad="76200" dist="25400" dir="8100000">
+              <a:srgbClr val="000000">
+                <a:alpha val="12000"/>
+              </a:srgbClr>
+            </a:outerShdw>
+          </a:effectLst>
+        </p:spPr>
+      </p:sp>
+      <p:sp>
+        <p:nvSpPr>
+          <p:cNvPr id="18" name="Shape 16"/>
+          <p:cNvSpPr/>
+          <p:nvPr/>
+        </p:nvSpPr>
+        <p:spPr>
+          <a:xfrm>
+            <a:off x="548640" y="2267712"/>
+            <a:ext cx="91440" cy="530352"/>
+          </a:xfrm>
+          <a:prstGeom prst="rect">
+            <a:avLst/>
+          </a:prstGeom>
+          <a:solidFill>
+            <a:srgbClr val="0E4C6E"/>
+          </a:solidFill>
+          <a:ln/>
+        </p:spPr>
+      </p:sp>
+      <p:sp>
+        <p:nvSpPr>
+          <p:cNvPr id="19" name="Shape 17"/>
+          <p:cNvSpPr/>
+          <p:nvPr/>
+        </p:nvSpPr>
+        <p:spPr>
+          <a:xfrm>
+            <a:off x="777240" y="2350008"/>
+            <a:ext cx="365760" cy="365760"/>
+          </a:xfrm>
+          <a:prstGeom prst="ellipse">
+            <a:avLst/>
+          </a:prstGeom>
+          <a:solidFill>
+            <a:srgbClr val="0E4C6E"/>
+          </a:solidFill>
+          <a:ln/>
+        </p:spPr>
+      </p:sp>
+      <p:sp>
+        <p:nvSpPr>
+          <p:cNvPr id="20" name="Text 18"/>
+          <p:cNvSpPr/>
+          <p:nvPr/>
+        </p:nvSpPr>
+        <p:spPr>
+          <a:xfrm>
+            <a:off x="777240" y="2359152"/>
+            <a:ext cx="365760" cy="347472"/>
+          </a:xfrm>
+          <a:prstGeom prst="rect">
+            <a:avLst/>
+          </a:prstGeom>
+          <a:noFill/>
+          <a:ln/>
+        </p:spPr>
+        <p:txBody>
+          <a:bodyPr wrap="square" lIns="0" tIns="0" rIns="0" bIns="0" rtlCol="0" anchor="ctr"/>
+          <a:lstStyle/>
+          <a:p>
+            <a:pPr algn="ctr" indent="0" marL="0">
+              <a:buNone/>
+            </a:pPr>
+            <a:r>
+              <a:rPr lang="en-US" sz="1250" b="1" dirty="0">
+                <a:solidFill>
+                  <a:srgbClr val="FFFFFF"/>
+                </a:solidFill>
+                <a:latin typeface="Microsoft YaHei" pitchFamily="34" charset="0"/>
+                <a:ea typeface="Microsoft YaHei" pitchFamily="34" charset="-122"/>
+                <a:cs typeface="Microsoft YaHei" pitchFamily="34" charset="-120"/>
+              </a:rPr>
+              <a:t>3</a:t>
+            </a:r>
+            <a:endParaRPr lang="en-US" sz="1250" dirty="0"/>
+          </a:p>
+        </p:txBody>
+      </p:sp>
+      <p:sp>
+        <p:nvSpPr>
+          <p:cNvPr id="21" name="Text 19"/>
+          <p:cNvSpPr/>
+          <p:nvPr/>
+        </p:nvSpPr>
+        <p:spPr>
+          <a:xfrm>
+            <a:off x="1325880" y="2313432"/>
+            <a:ext cx="2103120" cy="438912"/>
+          </a:xfrm>
+          <a:prstGeom prst="rect">
+            <a:avLst/>
+          </a:prstGeom>
+          <a:noFill/>
+          <a:ln/>
+        </p:spPr>
+        <p:txBody>
+          <a:bodyPr wrap="square" lIns="0" tIns="0" rIns="0" bIns="0" rtlCol="0" anchor="ctr"/>
+          <a:lstStyle/>
+          <a:p>
+            <a:pPr indent="0" marL="0">
+              <a:buNone/>
+            </a:pPr>
+            <a:r>
+              <a:rPr lang="en-US" sz="1200" b="1" dirty="0">
+                <a:solidFill>
+                  <a:srgbClr val="22303C"/>
+                </a:solidFill>
+                <a:latin typeface="Microsoft YaHei" pitchFamily="34" charset="0"/>
+                <a:ea typeface="Microsoft YaHei" pitchFamily="34" charset="-122"/>
+                <a:cs typeface="Microsoft YaHei" pitchFamily="34" charset="-120"/>
+              </a:rPr>
+              <a:t>Host 层深化</a:t>
+            </a:r>
+            <a:endParaRPr lang="en-US" sz="1200" dirty="0"/>
+          </a:p>
+        </p:txBody>
+      </p:sp>
+      <p:sp>
+        <p:nvSpPr>
+          <p:cNvPr id="22" name="Text 20"/>
+          <p:cNvSpPr/>
+          <p:nvPr/>
+        </p:nvSpPr>
+        <p:spPr>
+          <a:xfrm>
+            <a:off x="3474720" y="2313432"/>
+            <a:ext cx="4983480" cy="438912"/>
+          </a:xfrm>
+          <a:prstGeom prst="rect">
+            <a:avLst/>
+          </a:prstGeom>
+          <a:noFill/>
+          <a:ln/>
+        </p:spPr>
+        <p:txBody>
+          <a:bodyPr wrap="square" lIns="0" tIns="0" rIns="0" bIns="0" rtlCol="0" anchor="ctr"/>
+          <a:lstStyle/>
+          <a:p>
+            <a:pPr indent="0" marL="0">
+              <a:buNone/>
+            </a:pPr>
+            <a:r>
+              <a:rPr lang="en-US" sz="950" dirty="0">
+                <a:solidFill>
+                  <a:srgbClr val="6B7C8A"/>
+                </a:solidFill>
+                <a:latin typeface="Microsoft YaHei" pitchFamily="34" charset="0"/>
+                <a:ea typeface="Microsoft YaHei" pitchFamily="34" charset="-122"/>
+                <a:cs typeface="Microsoft YaHei" pitchFamily="34" charset="-120"/>
+              </a:rPr>
+              <a:t>扩大 Host 配额 + 优化 RAM↔显存搬运；SSD 按需再评估（非跟随项）</a:t>
+            </a:r>
+            <a:endParaRPr lang="en-US" sz="950" dirty="0"/>
+          </a:p>
+        </p:txBody>
+      </p:sp>
+      <p:sp>
+        <p:nvSpPr>
+          <p:cNvPr id="23" name="Shape 21"/>
+          <p:cNvSpPr/>
+          <p:nvPr/>
+        </p:nvSpPr>
+        <p:spPr>
+          <a:xfrm>
+            <a:off x="548640" y="2889504"/>
+            <a:ext cx="8046720" cy="530352"/>
+          </a:xfrm>
+          <a:prstGeom prst="rect">
+            <a:avLst/>
+          </a:prstGeom>
+          <a:solidFill>
+            <a:srgbClr val="FFFFFF"/>
+          </a:solidFill>
+          <a:ln/>
+          <a:effectLst>
+            <a:outerShdw sx="100000" sy="100000" kx="0" ky="0" algn="bl" rotWithShape="0" blurRad="76200" dist="25400" dir="8100000">
+              <a:srgbClr val="000000">
+                <a:alpha val="12000"/>
+              </a:srgbClr>
+            </a:outerShdw>
+          </a:effectLst>
+        </p:spPr>
+      </p:sp>
+      <p:sp>
+        <p:nvSpPr>
+          <p:cNvPr id="24" name="Shape 22"/>
+          <p:cNvSpPr/>
+          <p:nvPr/>
+        </p:nvSpPr>
+        <p:spPr>
+          <a:xfrm>
+            <a:off x="548640" y="2889504"/>
+            <a:ext cx="91440" cy="530352"/>
+          </a:xfrm>
+          <a:prstGeom prst="rect">
+            <a:avLst/>
+          </a:prstGeom>
+          <a:solidFill>
+            <a:srgbClr val="B07A00"/>
+          </a:solidFill>
+          <a:ln/>
+        </p:spPr>
+      </p:sp>
+      <p:sp>
+        <p:nvSpPr>
+          <p:cNvPr id="25" name="Shape 23"/>
+          <p:cNvSpPr/>
+          <p:nvPr/>
+        </p:nvSpPr>
+        <p:spPr>
+          <a:xfrm>
+            <a:off x="777240" y="2971800"/>
+            <a:ext cx="365760" cy="365760"/>
+          </a:xfrm>
+          <a:prstGeom prst="ellipse">
+            <a:avLst/>
+          </a:prstGeom>
+          <a:solidFill>
+            <a:srgbClr val="B07A00"/>
+          </a:solidFill>
+          <a:ln/>
+        </p:spPr>
+      </p:sp>
+      <p:sp>
+        <p:nvSpPr>
+          <p:cNvPr id="26" name="Text 24"/>
+          <p:cNvSpPr/>
+          <p:nvPr/>
+        </p:nvSpPr>
+        <p:spPr>
+          <a:xfrm>
+            <a:off x="777240" y="2980944"/>
+            <a:ext cx="365760" cy="347472"/>
+          </a:xfrm>
+          <a:prstGeom prst="rect">
+            <a:avLst/>
+          </a:prstGeom>
+          <a:noFill/>
+          <a:ln/>
+        </p:spPr>
+        <p:txBody>
+          <a:bodyPr wrap="square" lIns="0" tIns="0" rIns="0" bIns="0" rtlCol="0" anchor="ctr"/>
+          <a:lstStyle/>
+          <a:p>
+            <a:pPr algn="ctr" indent="0" marL="0">
+              <a:buNone/>
+            </a:pPr>
+            <a:r>
+              <a:rPr lang="en-US" sz="1250" b="1" dirty="0">
+                <a:solidFill>
+                  <a:srgbClr val="FFFFFF"/>
+                </a:solidFill>
+                <a:latin typeface="Microsoft YaHei" pitchFamily="34" charset="0"/>
+                <a:ea typeface="Microsoft YaHei" pitchFamily="34" charset="-122"/>
+                <a:cs typeface="Microsoft YaHei" pitchFamily="34" charset="-120"/>
+              </a:rPr>
+              <a:t>4</a:t>
+            </a:r>
+            <a:endParaRPr lang="en-US" sz="1250" dirty="0"/>
+          </a:p>
+        </p:txBody>
+      </p:sp>
+      <p:sp>
+        <p:nvSpPr>
+          <p:cNvPr id="27" name="Text 25"/>
+          <p:cNvSpPr/>
+          <p:nvPr/>
+        </p:nvSpPr>
+        <p:spPr>
+          <a:xfrm>
+            <a:off x="1325880" y="2935224"/>
+            <a:ext cx="2103120" cy="438912"/>
+          </a:xfrm>
+          <a:prstGeom prst="rect">
+            <a:avLst/>
+          </a:prstGeom>
+          <a:noFill/>
+          <a:ln/>
+        </p:spPr>
+        <p:txBody>
+          <a:bodyPr wrap="square" lIns="0" tIns="0" rIns="0" bIns="0" rtlCol="0" anchor="ctr"/>
+          <a:lstStyle/>
+          <a:p>
+            <a:pPr indent="0" marL="0">
+              <a:buNone/>
+            </a:pPr>
+            <a:r>
+              <a:rPr lang="en-US" sz="1200" b="1" dirty="0">
+                <a:solidFill>
+                  <a:srgbClr val="22303C"/>
+                </a:solidFill>
+                <a:latin typeface="Microsoft YaHei" pitchFamily="34" charset="0"/>
+                <a:ea typeface="Microsoft YaHei" pitchFamily="34" charset="-122"/>
+                <a:cs typeface="Microsoft YaHei" pitchFamily="34" charset="-120"/>
+              </a:rPr>
+              <a:t>慢态收口</a:t>
+            </a:r>
+            <a:endParaRPr lang="en-US" sz="1200" dirty="0"/>
+          </a:p>
+        </p:txBody>
+      </p:sp>
+      <p:sp>
+        <p:nvSpPr>
+          <p:cNvPr id="28" name="Text 26"/>
+          <p:cNvSpPr/>
+          <p:nvPr/>
+        </p:nvSpPr>
+        <p:spPr>
+          <a:xfrm>
+            <a:off x="3474720" y="2935224"/>
+            <a:ext cx="4983480" cy="438912"/>
+          </a:xfrm>
+          <a:prstGeom prst="rect">
+            <a:avLst/>
+          </a:prstGeom>
+          <a:noFill/>
+          <a:ln/>
+        </p:spPr>
+        <p:txBody>
+          <a:bodyPr wrap="square" lIns="0" tIns="0" rIns="0" bIns="0" rtlCol="0" anchor="ctr"/>
+          <a:lstStyle/>
+          <a:p>
+            <a:pPr indent="0" marL="0">
+              <a:buNone/>
+            </a:pPr>
+            <a:r>
+              <a:rPr lang="en-US" sz="950" dirty="0">
+                <a:solidFill>
+                  <a:srgbClr val="6B7C8A"/>
+                </a:solidFill>
+                <a:latin typeface="Microsoft YaHei" pitchFamily="34" charset="0"/>
+                <a:ea typeface="Microsoft YaHei" pitchFamily="34" charset="-122"/>
+                <a:cs typeface="Microsoft YaHei" pitchFamily="34" charset="-120"/>
+              </a:rPr>
+              <a:t>驱动提交阻塞的上游定位（3 步最小复现已备）；自然触发源追查</a:t>
+            </a:r>
+            <a:endParaRPr lang="en-US" sz="950" dirty="0"/>
+          </a:p>
+        </p:txBody>
+      </p:sp>
+      <p:sp>
+        <p:nvSpPr>
+          <p:cNvPr id="29" name="Shape 27"/>
+          <p:cNvSpPr/>
+          <p:nvPr/>
+        </p:nvSpPr>
+        <p:spPr>
+          <a:xfrm>
+            <a:off x="548640" y="3511296"/>
+            <a:ext cx="8046720" cy="530352"/>
+          </a:xfrm>
+          <a:prstGeom prst="rect">
+            <a:avLst/>
+          </a:prstGeom>
+          <a:solidFill>
+            <a:srgbClr val="FFFFFF"/>
+          </a:solidFill>
+          <a:ln/>
+          <a:effectLst>
+            <a:outerShdw sx="100000" sy="100000" kx="0" ky="0" algn="bl" rotWithShape="0" blurRad="76200" dist="25400" dir="8100000">
+              <a:srgbClr val="000000">
+                <a:alpha val="12000"/>
+              </a:srgbClr>
+            </a:outerShdw>
+          </a:effectLst>
+        </p:spPr>
+      </p:sp>
+      <p:sp>
+        <p:nvSpPr>
+          <p:cNvPr id="30" name="Shape 28"/>
+          <p:cNvSpPr/>
+          <p:nvPr/>
+        </p:nvSpPr>
+        <p:spPr>
+          <a:xfrm>
+            <a:off x="548640" y="3511296"/>
+            <a:ext cx="91440" cy="530352"/>
+          </a:xfrm>
+          <a:prstGeom prst="rect">
+            <a:avLst/>
+          </a:prstGeom>
+          <a:solidFill>
+            <a:srgbClr val="0FA3A8"/>
+          </a:solidFill>
+          <a:ln/>
+        </p:spPr>
+      </p:sp>
+      <p:sp>
+        <p:nvSpPr>
+          <p:cNvPr id="31" name="Shape 29"/>
+          <p:cNvSpPr/>
+          <p:nvPr/>
+        </p:nvSpPr>
+        <p:spPr>
+          <a:xfrm>
+            <a:off x="777240" y="3593592"/>
+            <a:ext cx="365760" cy="365760"/>
+          </a:xfrm>
+          <a:prstGeom prst="ellipse">
+            <a:avLst/>
+          </a:prstGeom>
+          <a:solidFill>
+            <a:srgbClr val="0FA3A8"/>
+          </a:solidFill>
+          <a:ln/>
+        </p:spPr>
+      </p:sp>
+      <p:sp>
+        <p:nvSpPr>
+          <p:cNvPr id="32" name="Text 30"/>
+          <p:cNvSpPr/>
+          <p:nvPr/>
+        </p:nvSpPr>
+        <p:spPr>
+          <a:xfrm>
+            <a:off x="777240" y="3602736"/>
+            <a:ext cx="365760" cy="347472"/>
+          </a:xfrm>
+          <a:prstGeom prst="rect">
+            <a:avLst/>
+          </a:prstGeom>
+          <a:noFill/>
+          <a:ln/>
+        </p:spPr>
+        <p:txBody>
+          <a:bodyPr wrap="square" lIns="0" tIns="0" rIns="0" bIns="0" rtlCol="0" anchor="ctr"/>
+          <a:lstStyle/>
+          <a:p>
+            <a:pPr algn="ctr" indent="0" marL="0">
+              <a:buNone/>
+            </a:pPr>
+            <a:r>
+              <a:rPr lang="en-US" sz="1250" b="1" dirty="0">
+                <a:solidFill>
+                  <a:srgbClr val="FFFFFF"/>
+                </a:solidFill>
+                <a:latin typeface="Microsoft YaHei" pitchFamily="34" charset="0"/>
+                <a:ea typeface="Microsoft YaHei" pitchFamily="34" charset="-122"/>
+                <a:cs typeface="Microsoft YaHei" pitchFamily="34" charset="-120"/>
+              </a:rPr>
+              <a:t>5</a:t>
+            </a:r>
+            <a:endParaRPr lang="en-US" sz="1250" dirty="0"/>
+          </a:p>
+        </p:txBody>
+      </p:sp>
+      <p:sp>
+        <p:nvSpPr>
+          <p:cNvPr id="33" name="Text 31"/>
+          <p:cNvSpPr/>
+          <p:nvPr/>
+        </p:nvSpPr>
+        <p:spPr>
+          <a:xfrm>
+            <a:off x="1325880" y="3557016"/>
+            <a:ext cx="2103120" cy="438912"/>
+          </a:xfrm>
+          <a:prstGeom prst="rect">
+            <a:avLst/>
+          </a:prstGeom>
+          <a:noFill/>
+          <a:ln/>
+        </p:spPr>
+        <p:txBody>
+          <a:bodyPr wrap="square" lIns="0" tIns="0" rIns="0" bIns="0" rtlCol="0" anchor="ctr"/>
+          <a:lstStyle/>
+          <a:p>
+            <a:pPr indent="0" marL="0">
+              <a:buNone/>
+            </a:pPr>
+            <a:r>
+              <a:rPr lang="en-US" sz="1200" b="1" dirty="0">
+                <a:solidFill>
+                  <a:srgbClr val="22303C"/>
+                </a:solidFill>
+                <a:latin typeface="Microsoft YaHei" pitchFamily="34" charset="0"/>
+                <a:ea typeface="Microsoft YaHei" pitchFamily="34" charset="-122"/>
+                <a:cs typeface="Microsoft YaHei" pitchFamily="34" charset="-120"/>
+              </a:rPr>
+              <a:t>误搬率观测</a:t>
+            </a:r>
+            <a:endParaRPr lang="en-US" sz="1200" dirty="0"/>
+          </a:p>
+        </p:txBody>
+      </p:sp>
+      <p:sp>
+        <p:nvSpPr>
+          <p:cNvPr id="34" name="Text 32"/>
+          <p:cNvSpPr/>
+          <p:nvPr/>
+        </p:nvSpPr>
+        <p:spPr>
+          <a:xfrm>
+            <a:off x="3474720" y="3557016"/>
+            <a:ext cx="4983480" cy="438912"/>
+          </a:xfrm>
+          <a:prstGeom prst="rect">
+            <a:avLst/>
+          </a:prstGeom>
+          <a:noFill/>
+          <a:ln/>
+        </p:spPr>
+        <p:txBody>
+          <a:bodyPr wrap="square" lIns="0" tIns="0" rIns="0" bIns="0" rtlCol="0" anchor="ctr"/>
+          <a:lstStyle/>
+          <a:p>
+            <a:pPr indent="0" marL="0">
+              <a:buNone/>
+            </a:pPr>
+            <a:r>
+              <a:rPr lang="en-US" sz="950" dirty="0">
+                <a:solidFill>
+                  <a:srgbClr val="6B7C8A"/>
+                </a:solidFill>
+                <a:latin typeface="Microsoft YaHei" pitchFamily="34" charset="0"/>
+                <a:ea typeface="Microsoft YaHei" pitchFamily="34" charset="-122"/>
+                <a:cs typeface="Microsoft YaHei" pitchFamily="34" charset="-120"/>
+              </a:rPr>
+              <a:t>统计“搬出后又快速搬回”的比率——让决策质量从猜变成量</a:t>
+            </a:r>
+            <a:endParaRPr lang="en-US" sz="950" dirty="0"/>
+          </a:p>
+        </p:txBody>
+      </p:sp>
+      <p:sp>
+        <p:nvSpPr>
+          <p:cNvPr id="35" name="Shape 33"/>
+          <p:cNvSpPr/>
+          <p:nvPr/>
+        </p:nvSpPr>
+        <p:spPr>
+          <a:xfrm>
+            <a:off x="548640" y="4133088"/>
+            <a:ext cx="8046720" cy="530352"/>
+          </a:xfrm>
+          <a:prstGeom prst="rect">
+            <a:avLst/>
+          </a:prstGeom>
+          <a:solidFill>
+            <a:srgbClr val="FFFFFF"/>
+          </a:solidFill>
+          <a:ln/>
+          <a:effectLst>
+            <a:outerShdw sx="100000" sy="100000" kx="0" ky="0" algn="bl" rotWithShape="0" blurRad="76200" dist="25400" dir="8100000">
+              <a:srgbClr val="000000">
+                <a:alpha val="12000"/>
+              </a:srgbClr>
+            </a:outerShdw>
+          </a:effectLst>
+        </p:spPr>
+      </p:sp>
+      <p:sp>
+        <p:nvSpPr>
+          <p:cNvPr id="36" name="Shape 34"/>
+          <p:cNvSpPr/>
+          <p:nvPr/>
+        </p:nvSpPr>
+        <p:spPr>
+          <a:xfrm>
+            <a:off x="548640" y="4133088"/>
+            <a:ext cx="91440" cy="530352"/>
+          </a:xfrm>
+          <a:prstGeom prst="rect">
+            <a:avLst/>
+          </a:prstGeom>
+          <a:solidFill>
+            <a:srgbClr val="F59E0B"/>
+          </a:solidFill>
+          <a:ln/>
+        </p:spPr>
+      </p:sp>
+      <p:sp>
+        <p:nvSpPr>
+          <p:cNvPr id="37" name="Shape 35"/>
+          <p:cNvSpPr/>
+          <p:nvPr/>
+        </p:nvSpPr>
+        <p:spPr>
+          <a:xfrm>
+            <a:off x="777240" y="4215384"/>
+            <a:ext cx="365760" cy="365760"/>
+          </a:xfrm>
+          <a:prstGeom prst="ellipse">
+            <a:avLst/>
+          </a:prstGeom>
+          <a:solidFill>
+            <a:srgbClr val="F59E0B"/>
+          </a:solidFill>
+          <a:ln/>
+        </p:spPr>
+      </p:sp>
+      <p:sp>
+        <p:nvSpPr>
+          <p:cNvPr id="38" name="Text 36"/>
+          <p:cNvSpPr/>
+          <p:nvPr/>
+        </p:nvSpPr>
+        <p:spPr>
+          <a:xfrm>
+            <a:off x="777240" y="4224528"/>
+            <a:ext cx="365760" cy="347472"/>
+          </a:xfrm>
+          <a:prstGeom prst="rect">
+            <a:avLst/>
+          </a:prstGeom>
+          <a:noFill/>
+          <a:ln/>
+        </p:spPr>
+        <p:txBody>
+          <a:bodyPr wrap="square" lIns="0" tIns="0" rIns="0" bIns="0" rtlCol="0" anchor="ctr"/>
+          <a:lstStyle/>
+          <a:p>
+            <a:pPr algn="ctr" indent="0" marL="0">
+              <a:buNone/>
+            </a:pPr>
+            <a:r>
+              <a:rPr lang="en-US" sz="1250" b="1" dirty="0">
+                <a:solidFill>
+                  <a:srgbClr val="FFFFFF"/>
+                </a:solidFill>
+                <a:latin typeface="Microsoft YaHei" pitchFamily="34" charset="0"/>
+                <a:ea typeface="Microsoft YaHei" pitchFamily="34" charset="-122"/>
+                <a:cs typeface="Microsoft YaHei" pitchFamily="34" charset="-120"/>
+              </a:rPr>
+              <a:t>6</a:t>
+            </a:r>
+            <a:endParaRPr lang="en-US" sz="1250" dirty="0"/>
+          </a:p>
+        </p:txBody>
+      </p:sp>
+      <p:sp>
+        <p:nvSpPr>
+          <p:cNvPr id="39" name="Text 37"/>
+          <p:cNvSpPr/>
+          <p:nvPr/>
+        </p:nvSpPr>
+        <p:spPr>
+          <a:xfrm>
+            <a:off x="1325880" y="4178808"/>
+            <a:ext cx="2103120" cy="438912"/>
+          </a:xfrm>
+          <a:prstGeom prst="rect">
+            <a:avLst/>
+          </a:prstGeom>
+          <a:noFill/>
+          <a:ln/>
+        </p:spPr>
+        <p:txBody>
+          <a:bodyPr wrap="square" lIns="0" tIns="0" rIns="0" bIns="0" rtlCol="0" anchor="ctr"/>
+          <a:lstStyle/>
+          <a:p>
+            <a:pPr indent="0" marL="0">
+              <a:buNone/>
+            </a:pPr>
+            <a:r>
+              <a:rPr lang="en-US" sz="1200" b="1" dirty="0">
+                <a:solidFill>
+                  <a:srgbClr val="22303C"/>
+                </a:solidFill>
+                <a:latin typeface="Microsoft YaHei" pitchFamily="34" charset="0"/>
+                <a:ea typeface="Microsoft YaHei" pitchFamily="34" charset="-122"/>
+                <a:cs typeface="Microsoft YaHei" pitchFamily="34" charset="-120"/>
+              </a:rPr>
+              <a:t>向上游回馈</a:t>
+            </a:r>
+            <a:endParaRPr lang="en-US" sz="1200" dirty="0"/>
+          </a:p>
+        </p:txBody>
+      </p:sp>
+      <p:sp>
+        <p:nvSpPr>
+          <p:cNvPr id="40" name="Text 38"/>
+          <p:cNvSpPr/>
+          <p:nvPr/>
+        </p:nvSpPr>
+        <p:spPr>
+          <a:xfrm>
+            <a:off x="3474720" y="4178808"/>
+            <a:ext cx="4983480" cy="438912"/>
+          </a:xfrm>
+          <a:prstGeom prst="rect">
+            <a:avLst/>
+          </a:prstGeom>
+          <a:noFill/>
+          <a:ln/>
+        </p:spPr>
+        <p:txBody>
+          <a:bodyPr wrap="square" lIns="0" tIns="0" rIns="0" bIns="0" rtlCol="0" anchor="ctr"/>
+          <a:lstStyle/>
+          <a:p>
+            <a:pPr indent="0" marL="0">
+              <a:buNone/>
+            </a:pPr>
+            <a:r>
+              <a:rPr lang="en-US" sz="950" dirty="0">
+                <a:solidFill>
+                  <a:srgbClr val="6B7C8A"/>
+                </a:solidFill>
+                <a:latin typeface="Microsoft YaHei" pitchFamily="34" charset="0"/>
+                <a:ea typeface="Microsoft YaHei" pitchFamily="34" charset="-122"/>
+                <a:cs typeface="Microsoft YaHei" pitchFamily="34" charset="-120"/>
+              </a:rPr>
+              <a:t>修复与实测数据贡献回社区（含与 KVMem 官方后端的收敛对接）</a:t>
+            </a:r>
+            <a:endParaRPr lang="en-US" sz="950" dirty="0"/>
+          </a:p>
+        </p:txBody>
+      </p:sp>
+      <p:sp>
+        <p:nvSpPr>
+          <p:cNvPr id="41" name="Text 39"/>
+          <p:cNvSpPr/>
+          <p:nvPr/>
+        </p:nvSpPr>
+        <p:spPr>
+          <a:xfrm>
+            <a:off x="8549640" y="4800600"/>
+            <a:ext cx="457200" cy="274320"/>
+          </a:xfrm>
+          <a:prstGeom prst="rect">
+            <a:avLst/>
+          </a:prstGeom>
+          <a:noFill/>
+          <a:ln/>
+        </p:spPr>
+        <p:txBody>
+          <a:bodyPr wrap="square" lIns="0" tIns="0" rIns="0" bIns="0" rtlCol="0" anchor="ctr"/>
+          <a:lstStyle/>
+          <a:p>
+            <a:pPr algn="r" indent="0" marL="0">
+              <a:buNone/>
+            </a:pPr>
+            <a:r>
+              <a:rPr lang="en-US" sz="1000" dirty="0">
+                <a:solidFill>
+                  <a:srgbClr val="6B7C8A"/>
+                </a:solidFill>
+                <a:latin typeface="Microsoft YaHei" pitchFamily="34" charset="0"/>
+                <a:ea typeface="Microsoft YaHei" pitchFamily="34" charset="-122"/>
+                <a:cs typeface="Microsoft YaHei" pitchFamily="34" charset="-120"/>
+              </a:rPr>
+              <a:t>16</a:t>
+            </a:r>
+            <a:endParaRPr lang="en-US" sz="1000" dirty="0"/>
+          </a:p>
+        </p:txBody>
+      </p:sp>
+      <p:sp>
+        <p:nvSpPr>
+          <p:cNvPr id="42" name="Text 40"/>
+          <p:cNvSpPr/>
+          <p:nvPr/>
+        </p:nvSpPr>
+        <p:spPr>
+          <a:xfrm>
+            <a:off x="457200" y="4828032"/>
+            <a:ext cx="5486400" cy="228600"/>
+          </a:xfrm>
+          <a:prstGeom prst="rect">
+            <a:avLst/>
+          </a:prstGeom>
+          <a:noFill/>
+          <a:ln/>
+        </p:spPr>
+        <p:txBody>
+          <a:bodyPr wrap="square" lIns="0" tIns="0" rIns="0" bIns="0" rtlCol="0" anchor="ctr"/>
+          <a:lstStyle/>
+          <a:p>
+            <a:pPr indent="0" marL="0">
+              <a:buNone/>
+            </a:pPr>
+            <a:r>
+              <a:rPr lang="en-US" sz="900" dirty="0">
+                <a:solidFill>
+                  <a:srgbClr val="6B7C8A"/>
+                </a:solidFill>
+                <a:latin typeface="Microsoft YaHei" pitchFamily="34" charset="0"/>
+                <a:ea typeface="Microsoft YaHei" pitchFamily="34" charset="-122"/>
+                <a:cs typeface="Microsoft YaHei" pitchFamily="34" charset="-120"/>
+              </a:rPr>
+              <a:t>站在 KVMem 的肩膀上 · 异步页流水</a:t>
+            </a:r>
+            <a:endParaRPr lang="en-US" sz="900" dirty="0"/>
+          </a:p>
+        </p:txBody>
+      </p:sp>
+    </p:spTree>
+  </p:cSld>
+  <p:clrMapOvr>
+    <a:masterClrMapping/>
+  </p:clrMapOvr>
+</p:sld>
+</file>
+
+<file path=ppt/slides/slide17.xml><?xml version="1.0" encoding="utf-8"?>
+<p:sld xmlns:a="http://schemas.openxmlformats.org/drawingml/2006/main" xmlns:r="http://schemas.openxmlformats.org/officeDocument/2006/relationships" xmlns:p="http://schemas.openxmlformats.org/presentationml/2006/main">
+  <p:cSld name="Slide 17">
     <p:bg>
       <p:bgPr>
         <a:solidFill>
@@ -14339,7 +18696,7 @@
                 <a:ea typeface="Microsoft YaHei" pitchFamily="34" charset="-122"/>
                 <a:cs typeface="Microsoft YaHei" pitchFamily="34" charset="-120"/>
               </a:rPr>
-              <a:t>正确性工程：异步的代价要自己扛住</a:t>
+              <a:t>正确性工程：给“跑腿”立三条规矩</a:t>
             </a:r>
             <a:endParaRPr lang="en-US" sz="2400" dirty="0"/>
           </a:p>
@@ -14353,7 +18710,46 @@
         </p:nvSpPr>
         <p:spPr>
           <a:xfrm>
-            <a:off x="548640" y="1188720"/>
+            <a:off x="548640" y="1060704"/>
+            <a:ext cx="8046720" cy="365760"/>
+          </a:xfrm>
+          <a:prstGeom prst="rect">
+            <a:avLst/>
+          </a:prstGeom>
+          <a:noFill/>
+          <a:ln/>
+        </p:spPr>
+        <p:txBody>
+          <a:bodyPr wrap="square" lIns="0" tIns="0" rIns="0" bIns="0" rtlCol="0" anchor="ctr"/>
+          <a:lstStyle/>
+          <a:p>
+            <a:pPr indent="0" marL="0">
+              <a:buNone/>
+            </a:pPr>
+            <a:r>
+              <a:rPr lang="en-US" sz="1200" dirty="0">
+                <a:solidFill>
+                  <a:srgbClr val="22303C"/>
+                </a:solidFill>
+                <a:latin typeface="Microsoft YaHei" pitchFamily="34" charset="0"/>
+                <a:ea typeface="Microsoft YaHei" pitchFamily="34" charset="-122"/>
+                <a:cs typeface="Microsoft YaHei" pitchFamily="34" charset="-120"/>
+              </a:rPr>
+              <a:t>异步 = 请了跑腿小哥（见第 7 页）。规矩立不好会丢件、会搬错——所以我们给他立三条规矩，外加一张“考卷”：</a:t>
+            </a:r>
+            <a:endParaRPr lang="en-US" sz="1200" dirty="0"/>
+          </a:p>
+        </p:txBody>
+      </p:sp>
+      <p:sp>
+        <p:nvSpPr>
+          <p:cNvPr id="6" name="Text 4"/>
+          <p:cNvSpPr/>
+          <p:nvPr/>
+        </p:nvSpPr>
+        <p:spPr>
+          <a:xfrm>
+            <a:off x="548640" y="1517904"/>
             <a:ext cx="8046720" cy="530352"/>
           </a:xfrm>
           <a:prstGeom prst="rect">
@@ -14366,12 +18762,25 @@
           <a:bodyPr wrap="square" lIns="0" tIns="0" rIns="0" bIns="0" rtlCol="0" anchor="ctr"/>
           <a:lstStyle/>
           <a:p>
-            <a:pPr marL="342900" indent="-342900">
-              <a:buSzPct val="100000"/>
-              <a:buChar char="▪"/>
-            </a:pPr>
-            <a:r>
-              <a:rPr lang="en-US" sz="1200" dirty="0">
+            <a:pPr indent="0" marL="0">
+              <a:buNone/>
+            </a:pPr>
+            <a:r>
+              <a:rPr lang="en-US" sz="1150" b="1" dirty="0">
+                <a:solidFill>
+                  <a:srgbClr val="0E4C6E"/>
+                </a:solidFill>
+                <a:latin typeface="Microsoft YaHei" pitchFamily="34" charset="0"/>
+                <a:ea typeface="Microsoft YaHei" pitchFamily="34" charset="-122"/>
+                <a:cs typeface="Microsoft YaHei" pitchFamily="34" charset="-120"/>
+              </a:rPr>
+              <a:t>规矩一：正在用的书不能搬：</a:t>
+            </a:r>
+            <a:pPr indent="0" marL="0">
+              <a:buNone/>
+            </a:pPr>
+            <a:r>
+              <a:rPr lang="en-US" sz="1150" dirty="0">
                 <a:solidFill>
                   <a:srgbClr val="22303C"/>
                 </a:solidFill>
@@ -14379,21 +18788,21 @@
                 <a:ea typeface="Microsoft YaHei" pitchFamily="34" charset="-122"/>
                 <a:cs typeface="Microsoft YaHei" pitchFamily="34" charset="-120"/>
               </a:rPr>
-              <a:t>捕获期 / 运行期分离：部分属性在“捕获”阶段固化，切换通过重启完成——操作边界明确</a:t>
-            </a:r>
-            <a:endParaRPr lang="en-US" sz="1200" dirty="0"/>
-          </a:p>
-        </p:txBody>
-      </p:sp>
-      <p:sp>
-        <p:nvSpPr>
-          <p:cNvPr id="6" name="Text 4"/>
-          <p:cNvSpPr/>
-          <p:nvPr/>
-        </p:nvSpPr>
-        <p:spPr>
-          <a:xfrm>
-            <a:off x="548640" y="1737360"/>
+              <a:t>引擎的“施工图”在启动时就画定（捕获期），运行中不许改——要改就重启，边界清清楚楚</a:t>
+            </a:r>
+            <a:endParaRPr lang="en-US" sz="1150" dirty="0"/>
+          </a:p>
+        </p:txBody>
+      </p:sp>
+      <p:sp>
+        <p:nvSpPr>
+          <p:cNvPr id="7" name="Text 5"/>
+          <p:cNvSpPr/>
+          <p:nvPr/>
+        </p:nvSpPr>
+        <p:spPr>
+          <a:xfrm>
+            <a:off x="548640" y="2084832"/>
             <a:ext cx="8046720" cy="530352"/>
           </a:xfrm>
           <a:prstGeom prst="rect">
@@ -14406,12 +18815,25 @@
           <a:bodyPr wrap="square" lIns="0" tIns="0" rIns="0" bIns="0" rtlCol="0" anchor="ctr"/>
           <a:lstStyle/>
           <a:p>
-            <a:pPr marL="342900" indent="-342900">
-              <a:buSzPct val="100000"/>
-              <a:buChar char="▪"/>
-            </a:pPr>
-            <a:r>
-              <a:rPr lang="en-US" sz="1200" dirty="0">
+            <a:pPr indent="0" marL="0">
+              <a:buNone/>
+            </a:pPr>
+            <a:r>
+              <a:rPr lang="en-US" sz="1150" b="1" dirty="0">
+                <a:solidFill>
+                  <a:srgbClr val="0E4C6E"/>
+                </a:solidFill>
+                <a:latin typeface="Microsoft YaHei" pitchFamily="34" charset="0"/>
+                <a:ea typeface="Microsoft YaHei" pitchFamily="34" charset="-122"/>
+                <a:cs typeface="Microsoft YaHei" pitchFamily="34" charset="-120"/>
+              </a:rPr>
+              <a:t>规矩二：货没交稳，旧的不扔：</a:t>
+            </a:r>
+            <a:pPr indent="0" marL="0">
+              <a:buNone/>
+            </a:pPr>
+            <a:r>
+              <a:rPr lang="en-US" sz="1150" dirty="0">
                 <a:solidFill>
                   <a:srgbClr val="22303C"/>
                 </a:solidFill>
@@ -14419,21 +18841,21 @@
                 <a:ea typeface="Microsoft YaHei" pitchFamily="34" charset="-122"/>
                 <a:cs typeface="Microsoft YaHei" pitchFamily="34" charset="-120"/>
               </a:rPr>
-              <a:t>publish 前不可丢弃：任何“唯一有效副本”在发布新副本前不得释放</a:t>
-            </a:r>
-            <a:endParaRPr lang="en-US" sz="1200" dirty="0"/>
-          </a:p>
-        </p:txBody>
-      </p:sp>
-      <p:sp>
-        <p:nvSpPr>
-          <p:cNvPr id="7" name="Text 5"/>
-          <p:cNvSpPr/>
-          <p:nvPr/>
-        </p:nvSpPr>
-        <p:spPr>
-          <a:xfrm>
-            <a:off x="548640" y="2286000"/>
+              <a:t>新副本发布之前，旧的那一份永远不许丢——任何时候都有一份“唯一有效”的数据在手</a:t>
+            </a:r>
+            <a:endParaRPr lang="en-US" sz="1150" dirty="0"/>
+          </a:p>
+        </p:txBody>
+      </p:sp>
+      <p:sp>
+        <p:nvSpPr>
+          <p:cNvPr id="8" name="Text 6"/>
+          <p:cNvSpPr/>
+          <p:nvPr/>
+        </p:nvSpPr>
+        <p:spPr>
+          <a:xfrm>
+            <a:off x="548640" y="2651760"/>
             <a:ext cx="8046720" cy="530352"/>
           </a:xfrm>
           <a:prstGeom prst="rect">
@@ -14446,12 +18868,25 @@
           <a:bodyPr wrap="square" lIns="0" tIns="0" rIns="0" bIns="0" rtlCol="0" anchor="ctr"/>
           <a:lstStyle/>
           <a:p>
-            <a:pPr marL="342900" indent="-342900">
-              <a:buSzPct val="100000"/>
-              <a:buChar char="▪"/>
-            </a:pPr>
-            <a:r>
-              <a:rPr lang="en-US" sz="1200" dirty="0">
+            <a:pPr indent="0" marL="0">
+              <a:buNone/>
+            </a:pPr>
+            <a:r>
+              <a:rPr lang="en-US" sz="1150" b="1" dirty="0">
+                <a:solidFill>
+                  <a:srgbClr val="0E4C6E"/>
+                </a:solidFill>
+                <a:latin typeface="Microsoft YaHei" pitchFamily="34" charset="0"/>
+                <a:ea typeface="Microsoft YaHei" pitchFamily="34" charset="-122"/>
+                <a:cs typeface="Microsoft YaHei" pitchFamily="34" charset="-120"/>
+              </a:rPr>
+              <a:t>规矩三：订单取消，已出发的必须跑完：</a:t>
+            </a:r>
+            <a:pPr indent="0" marL="0">
+              <a:buNone/>
+            </a:pPr>
+            <a:r>
+              <a:rPr lang="en-US" sz="1150" dirty="0">
                 <a:solidFill>
                   <a:srgbClr val="22303C"/>
                 </a:solidFill>
@@ -14459,22 +18894,22 @@
                 <a:ea typeface="Microsoft YaHei" pitchFamily="34" charset="-122"/>
                 <a:cs typeface="Microsoft YaHei" pitchFamily="34" charset="-120"/>
               </a:rPr>
-              <a:t>取消可回滚：取消是可撤销的排队事件；已开始的 I/O 排空后才回收配额</a:t>
-            </a:r>
-            <a:endParaRPr lang="en-US" sz="1200" dirty="0"/>
-          </a:p>
-        </p:txBody>
-      </p:sp>
-      <p:sp>
-        <p:nvSpPr>
-          <p:cNvPr id="8" name="Shape 6"/>
-          <p:cNvSpPr/>
-          <p:nvPr/>
-        </p:nvSpPr>
-        <p:spPr>
-          <a:xfrm>
-            <a:off x="548640" y="2880360"/>
-            <a:ext cx="8046720" cy="777240"/>
+              <a:t>请求可以取消，但已经在路上的搬运必须排空才能收账——不收“半路失踪”的账</a:t>
+            </a:r>
+            <a:endParaRPr lang="en-US" sz="1150" dirty="0"/>
+          </a:p>
+        </p:txBody>
+      </p:sp>
+      <p:sp>
+        <p:nvSpPr>
+          <p:cNvPr id="9" name="Shape 7"/>
+          <p:cNvSpPr/>
+          <p:nvPr/>
+        </p:nvSpPr>
+        <p:spPr>
+          <a:xfrm>
+            <a:off x="548640" y="3291840"/>
+            <a:ext cx="8046720" cy="658368"/>
           </a:xfrm>
           <a:prstGeom prst="rect">
             <a:avLst/>
@@ -14487,30 +18922,30 @@
       </p:sp>
       <p:sp>
         <p:nvSpPr>
-          <p:cNvPr id="9" name="Text 7"/>
-          <p:cNvSpPr/>
-          <p:nvPr/>
-        </p:nvSpPr>
-        <p:spPr>
-          <a:xfrm>
-            <a:off x="777240" y="2999232"/>
-            <a:ext cx="7589520" cy="548640"/>
-          </a:xfrm>
-          <a:prstGeom prst="rect">
-            <a:avLst/>
-          </a:prstGeom>
-          <a:noFill/>
-          <a:ln/>
-        </p:spPr>
-        <p:txBody>
-          <a:bodyPr wrap="square" lIns="0" tIns="0" rIns="0" bIns="0" rtlCol="0" anchor="ctr"/>
-          <a:lstStyle/>
-          <a:p>
-            <a:pPr indent="0" marL="0">
-              <a:buNone/>
-            </a:pPr>
-            <a:r>
-              <a:rPr lang="en-US" sz="1200" b="1" dirty="0">
+          <p:cNvPr id="10" name="Text 8"/>
+          <p:cNvSpPr/>
+          <p:nvPr/>
+        </p:nvSpPr>
+        <p:spPr>
+          <a:xfrm>
+            <a:off x="777240" y="3364992"/>
+            <a:ext cx="7589520" cy="512064"/>
+          </a:xfrm>
+          <a:prstGeom prst="rect">
+            <a:avLst/>
+          </a:prstGeom>
+          <a:noFill/>
+          <a:ln/>
+        </p:spPr>
+        <p:txBody>
+          <a:bodyPr wrap="square" lIns="0" tIns="0" rIns="0" bIns="0" rtlCol="0" anchor="ctr"/>
+          <a:lstStyle/>
+          <a:p>
+            <a:pPr indent="0" marL="0">
+              <a:buNone/>
+            </a:pPr>
+            <a:r>
+              <a:rPr lang="en-US" sz="1150" b="1" dirty="0">
                 <a:solidFill>
                   <a:srgbClr val="0E4C6E"/>
                 </a:solidFill>
@@ -14518,13 +18953,13 @@
                 <a:ea typeface="Microsoft YaHei" pitchFamily="34" charset="-122"/>
                 <a:cs typeface="Microsoft YaHei" pitchFamily="34" charset="-120"/>
               </a:rPr>
-              <a:t>无损门（A2）：</a:t>
-            </a:r>
-            <a:pPr indent="0" marL="0">
-              <a:buNone/>
-            </a:pPr>
-            <a:r>
-              <a:rPr lang="en-US" sz="1200" dirty="0">
+              <a:t>那张“考卷”（无损门 A2）：</a:t>
+            </a:r>
+            <a:pPr indent="0" marL="0">
+              <a:buNone/>
+            </a:pPr>
+            <a:r>
+              <a:rPr lang="en-US" sz="1150" dirty="0">
                 <a:solidFill>
                   <a:srgbClr val="22303C"/>
                 </a:solidFill>
@@ -14532,13 +18967,13 @@
                 <a:ea typeface="Microsoft YaHei" pitchFamily="34" charset="-122"/>
                 <a:cs typeface="Microsoft YaHei" pitchFamily="34" charset="-120"/>
               </a:rPr>
-              <a:t>同一 prompt 在“池内”与“首次超池”两条路径下——输出</a:t>
-            </a:r>
-            <a:pPr indent="0" marL="0">
-              <a:buNone/>
-            </a:pPr>
-            <a:r>
-              <a:rPr lang="en-US" sz="1200" b="1" dirty="0">
+              <a:t>同一道题，“池内”与“首次超池”两条路径的答卷</a:t>
+            </a:r>
+            <a:pPr indent="0" marL="0">
+              <a:buNone/>
+            </a:pPr>
+            <a:r>
+              <a:rPr lang="en-US" sz="1150" b="1" dirty="0">
                 <a:solidFill>
                   <a:srgbClr val="22303C"/>
                 </a:solidFill>
@@ -14546,13 +18981,13 @@
                 <a:ea typeface="Microsoft YaHei" pitchFamily="34" charset="-122"/>
                 <a:cs typeface="Microsoft YaHei" pitchFamily="34" charset="-120"/>
               </a:rPr>
-              <a:t>逐字完全相同</a:t>
-            </a:r>
-            <a:pPr indent="0" marL="0">
-              <a:buNone/>
-            </a:pPr>
-            <a:r>
-              <a:rPr lang="en-US" sz="1200" dirty="0">
+              <a:t>逐字相同</a:t>
+            </a:r>
+            <a:pPr indent="0" marL="0">
+              <a:buNone/>
+            </a:pPr>
+            <a:r>
+              <a:rPr lang="en-US" sz="1150" dirty="0">
                 <a:solidFill>
                   <a:srgbClr val="22303C"/>
                 </a:solidFill>
@@ -14560,38 +18995,38 @@
                 <a:ea typeface="Microsoft YaHei" pitchFamily="34" charset="-122"/>
                 <a:cs typeface="Microsoft YaHei" pitchFamily="34" charset="-120"/>
               </a:rPr>
-              <a:t>。异步不改变模型输出，只改变搬运时机。</a:t>
-            </a:r>
-            <a:endParaRPr lang="en-US" sz="1200" dirty="0"/>
-          </a:p>
-        </p:txBody>
-      </p:sp>
-      <p:sp>
-        <p:nvSpPr>
-          <p:cNvPr id="10" name="Text 8"/>
-          <p:cNvSpPr/>
-          <p:nvPr/>
-        </p:nvSpPr>
-        <p:spPr>
-          <a:xfrm>
-            <a:off x="548640" y="3794760"/>
-            <a:ext cx="8046720" cy="502920"/>
-          </a:xfrm>
-          <a:prstGeom prst="rect">
-            <a:avLst/>
-          </a:prstGeom>
-          <a:noFill/>
-          <a:ln/>
-        </p:spPr>
-        <p:txBody>
-          <a:bodyPr wrap="square" lIns="0" tIns="0" rIns="0" bIns="0" rtlCol="0" anchor="ctr"/>
-          <a:lstStyle/>
-          <a:p>
-            <a:pPr indent="0" marL="0">
-              <a:buNone/>
-            </a:pPr>
-            <a:r>
-              <a:rPr lang="en-US" sz="1150" b="1" dirty="0">
+              <a:t>——异步只改变搬运时机，不改变模型输出。</a:t>
+            </a:r>
+            <a:endParaRPr lang="en-US" sz="1150" dirty="0"/>
+          </a:p>
+        </p:txBody>
+      </p:sp>
+      <p:sp>
+        <p:nvSpPr>
+          <p:cNvPr id="11" name="Text 9"/>
+          <p:cNvSpPr/>
+          <p:nvPr/>
+        </p:nvSpPr>
+        <p:spPr>
+          <a:xfrm>
+            <a:off x="548640" y="4096512"/>
+            <a:ext cx="8046720" cy="457200"/>
+          </a:xfrm>
+          <a:prstGeom prst="rect">
+            <a:avLst/>
+          </a:prstGeom>
+          <a:noFill/>
+          <a:ln/>
+        </p:spPr>
+        <p:txBody>
+          <a:bodyPr wrap="square" lIns="0" tIns="0" rIns="0" bIns="0" rtlCol="0" anchor="ctr"/>
+          <a:lstStyle/>
+          <a:p>
+            <a:pPr indent="0" marL="0">
+              <a:buNone/>
+            </a:pPr>
+            <a:r>
+              <a:rPr lang="en-US" sz="1100" b="1" dirty="0">
                 <a:solidFill>
                   <a:srgbClr val="C0504D"/>
                 </a:solidFill>
@@ -14605,7 +19040,7 @@
               <a:buNone/>
             </a:pPr>
             <a:r>
-              <a:rPr lang="en-US" sz="1150" dirty="0">
+              <a:rPr lang="en-US" sz="1100" dirty="0">
                 <a:solidFill>
                   <a:srgbClr val="6B7C8A"/>
                 </a:solidFill>
@@ -14613,15 +19048,15 @@
                 <a:ea typeface="Microsoft YaHei" pitchFamily="34" charset="-122"/>
                 <a:cs typeface="Microsoft YaHei" pitchFamily="34" charset="-120"/>
               </a:rPr>
-              <a:t>流水也有击穿条件——慢峰单批搬运 11.5-33.7 ms 接近步窗时会暴露（详见后文“问题”页）。</a:t>
-            </a:r>
-            <a:endParaRPr lang="en-US" sz="1150" dirty="0"/>
-          </a:p>
-        </p:txBody>
-      </p:sp>
-      <p:sp>
-        <p:nvSpPr>
-          <p:cNvPr id="11" name="Text 9"/>
+              <a:t>慢峰时搬运会“藏不住”（单批接近步窗）——这就是流水的击穿边界，解法是深流水（见问题页）。</a:t>
+            </a:r>
+            <a:endParaRPr lang="en-US" sz="1100" dirty="0"/>
+          </a:p>
+        </p:txBody>
+      </p:sp>
+      <p:sp>
+        <p:nvSpPr>
+          <p:cNvPr id="12" name="Text 10"/>
           <p:cNvSpPr/>
           <p:nvPr/>
         </p:nvSpPr>
@@ -14660,7 +19095,7 @@
       </p:sp>
       <p:sp>
         <p:nvSpPr>
-          <p:cNvPr id="12" name="Text 10"/>
+          <p:cNvPr id="13" name="Text 11"/>
           <p:cNvSpPr/>
           <p:nvPr/>
         </p:nvSpPr>

--- a/docs/异步页流水-技术说明.pptx
+++ b/docs/异步页流水-技术说明.pptx
@@ -22,9 +22,10 @@
     <p:sldId id="270" r:id="rId16"/>
     <p:sldId id="271" r:id="rId17"/>
     <p:sldId id="272" r:id="rId18"/>
+    <p:sldId id="273" r:id="rId19"/>
   </p:sldIdLst>
   <p:notesMasterIdLst>
-    <p:notesMasterId r:id="rId19"/>
+    <p:notesMasterId r:id="rId20"/>
   </p:notesMasterIdLst>
   <p:sldSz cx="9144000" cy="5143500"/>
   <p:notesSz cx="5143500" cy="9144000"/>
@@ -1246,6 +1247,94 @@
             <a:fld id="{F7021451-1387-4CA6-816F-3879F97B5CBC}" type="slidenum">
               <a:rPr lang="en-US"/>
               <a:t>17</a:t>
+            </a:fld>
+            <a:endParaRPr lang="en-US"/>
+          </a:p>
+        </p:txBody>
+      </p:sp>
+    </p:spTree>
+    <p:extLst>
+      <p:ext uri="{BB962C8B-B14F-4D97-AF65-F5344CB8AC3E}">
+        <p14:creationId xmlns:p14="http://schemas.microsoft.com/office/powerpoint/2010/main" val="1024086991"/>
+      </p:ext>
+    </p:extLst>
+  </p:cSld>
+  <p:clrMapOvr>
+    <a:masterClrMapping/>
+  </p:clrMapOvr>
+</p:notes>
+</file>
+
+<file path=ppt/notesSlides/notesSlide18.xml><?xml version="1.0" encoding="utf-8"?>
+<p:notes xmlns:a="http://schemas.openxmlformats.org/drawingml/2006/main" xmlns:r="http://schemas.openxmlformats.org/officeDocument/2006/relationships" xmlns:p="http://schemas.openxmlformats.org/presentationml/2006/main">
+  <p:cSld>
+    <p:spTree>
+      <p:nvGrpSpPr>
+        <p:cNvPr id="1" name=""/>
+        <p:cNvGrpSpPr/>
+        <p:nvPr/>
+      </p:nvGrpSpPr>
+      <p:grpSpPr>
+        <a:xfrm>
+          <a:off x="0" y="0"/>
+          <a:ext cx="0" cy="0"/>
+          <a:chOff x="0" y="0"/>
+          <a:chExt cx="0" cy="0"/>
+        </a:xfrm>
+      </p:grpSpPr>
+      <p:sp>
+        <p:nvSpPr>
+          <p:cNvPr id="2" name="Slide Image Placeholder 1"/>
+          <p:cNvSpPr>
+            <a:spLocks noGrp="1" noRot="1" noChangeAspect="1"/>
+          </p:cNvSpPr>
+          <p:nvPr>
+            <p:ph type="sldImg"/>
+          </p:nvPr>
+        </p:nvSpPr>
+        <p:spPr/>
+      </p:sp>
+      <p:sp>
+        <p:nvSpPr>
+          <p:cNvPr id="3" name="Notes Placeholder 2"/>
+          <p:cNvSpPr>
+            <a:spLocks noGrp="1"/>
+          </p:cNvSpPr>
+          <p:nvPr>
+            <p:ph type="body" idx="1"/>
+          </p:nvPr>
+        </p:nvSpPr>
+        <p:spPr/>
+        <p:txBody>
+          <a:bodyPr/>
+          <a:lstStyle/>
+          <a:p>
+            <a:r>
+              <a:rPr lang="en-US" dirty="0"/>
+              <a:t/>
+            </a:r>
+            <a:endParaRPr lang="en-US" dirty="0"/>
+          </a:p>
+        </p:txBody>
+      </p:sp>
+      <p:sp>
+        <p:nvSpPr>
+          <p:cNvPr id="4" name="Slide Number Placeholder 3"/>
+          <p:cNvSpPr>
+            <a:spLocks noGrp="1"/>
+          </p:cNvSpPr>
+          <p:nvPr>
+            <p:ph type="sldNum" sz="quarter" idx="10"/>
+          </p:nvPr>
+        </p:nvSpPr>
+        <p:spPr/>
+        <p:txBody>
+          <a:bodyPr/>
+          <a:lstStyle/>
+          <a:p>
+            <a:fld id="{F7021451-1387-4CA6-816F-3879F97B5CBC}" type="slidenum">
+              <a:rPr lang="en-US"/>
+              <a:t>18</a:t>
             </a:fld>
             <a:endParaRPr lang="en-US"/>
           </a:p>
@@ -2947,7 +3036,7 @@
                 <a:ea typeface="Microsoft YaHei" pitchFamily="34" charset="-122"/>
                 <a:cs typeface="Microsoft YaHei" pitchFamily="34" charset="-120"/>
               </a:rPr>
-              <a:t>目前实现的阶段（截至 2026-10-13 · v2 转正时点）</a:t>
+              <a:t>已实现的阶段：V2 上线初期的成果快照（2026-10-11~14）</a:t>
             </a:r>
             <a:endParaRPr lang="en-US" sz="2400" dirty="0"/>
           </a:p>
@@ -3982,7 +4071,7 @@
                 <a:ea typeface="Microsoft YaHei" pitchFamily="34" charset="-122"/>
                 <a:cs typeface="Microsoft YaHei" pitchFamily="34" charset="-120"/>
               </a:rPr>
-              <a:t>↑ 以上为 v2 转正时点（2026-10-13）的快照；其后的进展（按需复现 / 机制定位 / 深轮 AB 铁证）见第 13-14 页。</a:t>
+              <a:t>↑ V2 上线初期的成果（10-11 上线当天：首战峰值 333、超池 103-195 tok/s；随后数日陆续补全上表数字）——**不是最新状态**；最新进展（死亡谷攻关 / 深轮 AB 铁证）见第 13-14 页。</a:t>
             </a:r>
             <a:endParaRPr lang="en-US" sz="1000" dirty="0"/>
           </a:p>
@@ -9573,7 +9662,7 @@
                 <a:ea typeface="Microsoft YaHei" pitchFamily="34" charset="-122"/>
                 <a:cs typeface="Microsoft YaHei" pitchFamily="34" charset="-120"/>
               </a:rPr>
-              <a:t>decode（tok/s，a2gate 口径）；负载 = 3 轮同会话递进 + 轮间前缀缓存部分复用 + 每轮长输出（max 2000 token）；两臂仅差 NINFER_ASYNC_DEMOTE 开关</a:t>
+              <a:t>实验数据：上下文 ~75.3K → ~152K → ~229K token（池 65,536 ⇒ 超池 1.15× / 2.3× / 3.5×）；每轮长输出 max 2000 token；轮间前缀缓存部分复用（49.3% / 66.4%）；两臂仅差 NINFER_ASYNC_DEMOTE 开关</a:t>
             </a:r>
             <a:endParaRPr lang="en-US" sz="900" dirty="0"/>
           </a:p>
@@ -9771,7 +9860,7 @@
                 <a:ea typeface="Microsoft YaHei" pitchFamily="34" charset="-122"/>
                 <a:cs typeface="Microsoft YaHei" pitchFamily="34" charset="-120"/>
               </a:rPr>
-              <a:t>诚实备注：n=3/臂、单机、健康期；同步臂未“死”（历史“v2 前多轮必死”的更强主张未复现——观测为“可用但慢”）。</a:t>
+              <a:t>诚实备注：n=3/臂、单机、健康期；同步臂未“死”——历史“v2 前多轮必死”的更强主张未复现（观测为“可用但慢”）；**且本次未现死亡谷，可能因前序多轮修复已碰巧缓解了该状态**（未在对照中复现，待后续验证）。</a:t>
             </a:r>
             <a:endParaRPr lang="en-US" sz="900" dirty="0"/>
           </a:p>
@@ -12053,6 +12142,758 @@
     <p:bg>
       <p:bgPr>
         <a:solidFill>
+          <a:srgbClr val="F6F9FB"/>
+        </a:solidFill>
+      </p:bgPr>
+    </p:bg>
+    <p:spTree>
+      <p:nvGrpSpPr>
+        <p:cNvPr id="1" name=""/>
+        <p:cNvGrpSpPr/>
+        <p:nvPr/>
+      </p:nvGrpSpPr>
+      <p:grpSpPr>
+        <a:xfrm>
+          <a:off x="0" y="0"/>
+          <a:ext cx="0" cy="0"/>
+          <a:chOff x="0" y="0"/>
+          <a:chExt cx="0" cy="0"/>
+        </a:xfrm>
+      </p:grpSpPr>
+      <p:sp>
+        <p:nvSpPr>
+          <p:cNvPr id="2" name="Shape 0"/>
+          <p:cNvSpPr/>
+          <p:nvPr/>
+        </p:nvSpPr>
+        <p:spPr>
+          <a:xfrm>
+            <a:off x="457200" y="384048"/>
+            <a:ext cx="109728" cy="457200"/>
+          </a:xfrm>
+          <a:prstGeom prst="rect">
+            <a:avLst/>
+          </a:prstGeom>
+          <a:solidFill>
+            <a:srgbClr val="0FA3A8"/>
+          </a:solidFill>
+          <a:ln/>
+        </p:spPr>
+      </p:sp>
+      <p:sp>
+        <p:nvSpPr>
+          <p:cNvPr id="3" name="Text 1"/>
+          <p:cNvSpPr/>
+          <p:nvPr/>
+        </p:nvSpPr>
+        <p:spPr>
+          <a:xfrm>
+            <a:off x="713232" y="310896"/>
+            <a:ext cx="7955280" cy="228600"/>
+          </a:xfrm>
+          <a:prstGeom prst="rect">
+            <a:avLst/>
+          </a:prstGeom>
+          <a:noFill/>
+          <a:ln/>
+        </p:spPr>
+        <p:txBody>
+          <a:bodyPr wrap="square" lIns="0" tIns="0" rIns="0" bIns="0" rtlCol="0" anchor="ctr"/>
+          <a:lstStyle/>
+          <a:p>
+            <a:pPr indent="0" marL="0">
+              <a:buNone/>
+            </a:pPr>
+            <a:r>
+              <a:rPr lang="en-US" sz="1100" b="1" spc="200" kern="0" dirty="0">
+                <a:solidFill>
+                  <a:srgbClr val="0FA3A8"/>
+                </a:solidFill>
+                <a:latin typeface="Microsoft YaHei" pitchFamily="34" charset="0"/>
+                <a:ea typeface="Microsoft YaHei" pitchFamily="34" charset="-122"/>
+                <a:cs typeface="Microsoft YaHei" pitchFamily="34" charset="-120"/>
+              </a:rPr>
+              <a:t>WHY OPEN SOURCE</a:t>
+            </a:r>
+            <a:endParaRPr lang="en-US" sz="1100" dirty="0"/>
+          </a:p>
+        </p:txBody>
+      </p:sp>
+      <p:sp>
+        <p:nvSpPr>
+          <p:cNvPr id="4" name="Text 2"/>
+          <p:cNvSpPr/>
+          <p:nvPr/>
+        </p:nvSpPr>
+        <p:spPr>
+          <a:xfrm>
+            <a:off x="713232" y="548640"/>
+            <a:ext cx="8138160" cy="457200"/>
+          </a:xfrm>
+          <a:prstGeom prst="rect">
+            <a:avLst/>
+          </a:prstGeom>
+          <a:noFill/>
+          <a:ln/>
+        </p:spPr>
+        <p:txBody>
+          <a:bodyPr wrap="square" lIns="0" tIns="0" rIns="0" bIns="0" rtlCol="0" anchor="ctr"/>
+          <a:lstStyle/>
+          <a:p>
+            <a:pPr indent="0" marL="0">
+              <a:buNone/>
+            </a:pPr>
+            <a:r>
+              <a:rPr lang="en-US" sz="2400" b="1" dirty="0">
+                <a:solidFill>
+                  <a:srgbClr val="22303C"/>
+                </a:solidFill>
+                <a:latin typeface="Microsoft YaHei" pitchFamily="34" charset="0"/>
+                <a:ea typeface="Microsoft YaHei" pitchFamily="34" charset="-122"/>
+                <a:cs typeface="Microsoft YaHei" pitchFamily="34" charset="-120"/>
+              </a:rPr>
+              <a:t>为什么要开源这份工作</a:t>
+            </a:r>
+            <a:endParaRPr lang="en-US" sz="2400" dirty="0"/>
+          </a:p>
+        </p:txBody>
+      </p:sp>
+      <p:sp>
+        <p:nvSpPr>
+          <p:cNvPr id="5" name="Shape 3"/>
+          <p:cNvSpPr/>
+          <p:nvPr/>
+        </p:nvSpPr>
+        <p:spPr>
+          <a:xfrm>
+            <a:off x="548640" y="1097280"/>
+            <a:ext cx="3886200" cy="2377440"/>
+          </a:xfrm>
+          <a:prstGeom prst="rect">
+            <a:avLst/>
+          </a:prstGeom>
+          <a:solidFill>
+            <a:srgbClr val="FFFFFF"/>
+          </a:solidFill>
+          <a:ln/>
+          <a:effectLst>
+            <a:outerShdw sx="100000" sy="100000" kx="0" ky="0" algn="bl" rotWithShape="0" blurRad="76200" dist="25400" dir="8100000">
+              <a:srgbClr val="000000">
+                <a:alpha val="12000"/>
+              </a:srgbClr>
+            </a:outerShdw>
+          </a:effectLst>
+        </p:spPr>
+      </p:sp>
+      <p:sp>
+        <p:nvSpPr>
+          <p:cNvPr id="6" name="Shape 4"/>
+          <p:cNvSpPr/>
+          <p:nvPr/>
+        </p:nvSpPr>
+        <p:spPr>
+          <a:xfrm>
+            <a:off x="548640" y="1097280"/>
+            <a:ext cx="3886200" cy="73152"/>
+          </a:xfrm>
+          <a:prstGeom prst="rect">
+            <a:avLst/>
+          </a:prstGeom>
+          <a:solidFill>
+            <a:srgbClr val="0FA3A8"/>
+          </a:solidFill>
+          <a:ln/>
+        </p:spPr>
+      </p:sp>
+      <p:sp>
+        <p:nvSpPr>
+          <p:cNvPr id="7" name="Text 5"/>
+          <p:cNvSpPr/>
+          <p:nvPr/>
+        </p:nvSpPr>
+        <p:spPr>
+          <a:xfrm>
+            <a:off x="777240" y="1243584"/>
+            <a:ext cx="3474720" cy="292608"/>
+          </a:xfrm>
+          <a:prstGeom prst="rect">
+            <a:avLst/>
+          </a:prstGeom>
+          <a:noFill/>
+          <a:ln/>
+        </p:spPr>
+        <p:txBody>
+          <a:bodyPr wrap="square" lIns="0" tIns="0" rIns="0" bIns="0" rtlCol="0" anchor="ctr"/>
+          <a:lstStyle/>
+          <a:p>
+            <a:pPr indent="0" marL="0">
+              <a:buNone/>
+            </a:pPr>
+            <a:r>
+              <a:rPr lang="en-US" sz="1300" b="1" dirty="0">
+                <a:solidFill>
+                  <a:srgbClr val="22303C"/>
+                </a:solidFill>
+                <a:latin typeface="Microsoft YaHei" pitchFamily="34" charset="0"/>
+                <a:ea typeface="Microsoft YaHei" pitchFamily="34" charset="-122"/>
+                <a:cs typeface="Microsoft YaHei" pitchFamily="34" charset="-120"/>
+              </a:rPr>
+              <a:t>缘起：到火候了就开门</a:t>
+            </a:r>
+            <a:endParaRPr lang="en-US" sz="1300" dirty="0"/>
+          </a:p>
+        </p:txBody>
+      </p:sp>
+      <p:sp>
+        <p:nvSpPr>
+          <p:cNvPr id="8" name="Text 6"/>
+          <p:cNvSpPr/>
+          <p:nvPr/>
+        </p:nvSpPr>
+        <p:spPr>
+          <a:xfrm>
+            <a:off x="777240" y="1591056"/>
+            <a:ext cx="3520440" cy="1783080"/>
+          </a:xfrm>
+          <a:prstGeom prst="rect">
+            <a:avLst/>
+          </a:prstGeom>
+          <a:noFill/>
+          <a:ln/>
+        </p:spPr>
+        <p:txBody>
+          <a:bodyPr wrap="square" lIns="0" tIns="0" rIns="0" bIns="0" rtlCol="0" anchor="ctr"/>
+          <a:lstStyle/>
+          <a:p>
+            <a:pPr marL="342900" indent="-342900">
+              <a:spcAft>
+                <a:spcPts val="600"/>
+              </a:spcAft>
+              <a:buSzPct val="100000"/>
+              <a:buChar char="▪"/>
+            </a:pPr>
+            <a:r>
+              <a:rPr lang="en-US" sz="950" dirty="0">
+                <a:solidFill>
+                  <a:srgbClr val="6B7C8A"/>
+                </a:solidFill>
+                <a:latin typeface="Microsoft YaHei" pitchFamily="34" charset="0"/>
+                <a:ea typeface="Microsoft YaHei" pitchFamily="34" charset="-122"/>
+                <a:cs typeface="Microsoft YaHei" pitchFamily="34" charset="-120"/>
+              </a:rPr>
+              <a:t>技术已达“限定场景生产可用”：单路长上下文 Agent 会话（显存独占）实跑验证通过</a:t>
+            </a:r>
+            <a:endParaRPr lang="en-US" sz="950" dirty="0"/>
+          </a:p>
+          <a:p>
+            <a:pPr marL="342900" indent="-342900">
+              <a:spcAft>
+                <a:spcPts val="600"/>
+              </a:spcAft>
+              <a:buSzPct val="100000"/>
+              <a:buChar char="▪"/>
+            </a:pPr>
+            <a:r>
+              <a:rPr lang="en-US" sz="950" dirty="0">
+                <a:solidFill>
+                  <a:srgbClr val="6B7C8A"/>
+                </a:solidFill>
+                <a:latin typeface="Microsoft YaHei" pitchFamily="34" charset="0"/>
+                <a:ea typeface="Microsoft YaHei" pitchFamily="34" charset="-122"/>
+                <a:cs typeface="Microsoft YaHei" pitchFamily="34" charset="-120"/>
+              </a:rPr>
+              <a:t>但最大未解课题（时段性慢态）已超出单线攻关的带宽——</a:t>
+            </a:r>
+            <a:endParaRPr lang="en-US" sz="950" dirty="0"/>
+          </a:p>
+          <a:p>
+            <a:pPr marL="342900" indent="-342900">
+              <a:spcAft>
+                <a:spcPts val="600"/>
+              </a:spcAft>
+              <a:buSzPct val="100000"/>
+              <a:buChar char="▪"/>
+            </a:pPr>
+            <a:r>
+              <a:rPr lang="en-US" sz="950" b="1" dirty="0">
+                <a:solidFill>
+                  <a:srgbClr val="0FA3A8"/>
+                </a:solidFill>
+                <a:latin typeface="Microsoft YaHei" pitchFamily="34" charset="0"/>
+                <a:ea typeface="Microsoft YaHei" pitchFamily="34" charset="-122"/>
+                <a:cs typeface="Microsoft YaHei" pitchFamily="34" charset="-120"/>
+              </a:rPr>
+              <a:t>开源 = 借社区 / 上游 / 驱动侧协同攻关</a:t>
+            </a:r>
+            <a:endParaRPr lang="en-US" sz="950" dirty="0"/>
+          </a:p>
+          <a:p>
+            <a:pPr marL="342900" indent="-342900">
+              <a:spcAft>
+                <a:spcPts val="600"/>
+              </a:spcAft>
+              <a:buSzPct val="100000"/>
+              <a:buChar char="▪"/>
+            </a:pPr>
+            <a:r>
+              <a:rPr lang="en-US" sz="950" dirty="0">
+                <a:solidFill>
+                  <a:srgbClr val="6B7C8A"/>
+                </a:solidFill>
+                <a:latin typeface="Microsoft YaHei" pitchFamily="34" charset="0"/>
+                <a:ea typeface="Microsoft YaHei" pitchFamily="34" charset="-122"/>
+                <a:cs typeface="Microsoft YaHei" pitchFamily="34" charset="-120"/>
+              </a:rPr>
+              <a:t>我们已备好”换帮助”的钥匙：约 2 分钟的最小复现协议（可随时造出该状态）</a:t>
+            </a:r>
+            <a:endParaRPr lang="en-US" sz="950" dirty="0"/>
+          </a:p>
+        </p:txBody>
+      </p:sp>
+      <p:sp>
+        <p:nvSpPr>
+          <p:cNvPr id="9" name="Shape 7"/>
+          <p:cNvSpPr/>
+          <p:nvPr/>
+        </p:nvSpPr>
+        <p:spPr>
+          <a:xfrm>
+            <a:off x="4709160" y="1097280"/>
+            <a:ext cx="3886200" cy="2377440"/>
+          </a:xfrm>
+          <a:prstGeom prst="rect">
+            <a:avLst/>
+          </a:prstGeom>
+          <a:solidFill>
+            <a:srgbClr val="FFFFFF"/>
+          </a:solidFill>
+          <a:ln/>
+          <a:effectLst>
+            <a:outerShdw sx="100000" sy="100000" kx="0" ky="0" algn="bl" rotWithShape="0" blurRad="76200" dist="25400" dir="8100000">
+              <a:srgbClr val="000000">
+                <a:alpha val="12000"/>
+              </a:srgbClr>
+            </a:outerShdw>
+          </a:effectLst>
+        </p:spPr>
+      </p:sp>
+      <p:sp>
+        <p:nvSpPr>
+          <p:cNvPr id="10" name="Shape 8"/>
+          <p:cNvSpPr/>
+          <p:nvPr/>
+        </p:nvSpPr>
+        <p:spPr>
+          <a:xfrm>
+            <a:off x="4709160" y="1097280"/>
+            <a:ext cx="3886200" cy="73152"/>
+          </a:xfrm>
+          <a:prstGeom prst="rect">
+            <a:avLst/>
+          </a:prstGeom>
+          <a:solidFill>
+            <a:srgbClr val="0E4C6E"/>
+          </a:solidFill>
+          <a:ln/>
+        </p:spPr>
+      </p:sp>
+      <p:sp>
+        <p:nvSpPr>
+          <p:cNvPr id="11" name="Text 9"/>
+          <p:cNvSpPr/>
+          <p:nvPr/>
+        </p:nvSpPr>
+        <p:spPr>
+          <a:xfrm>
+            <a:off x="4937760" y="1243584"/>
+            <a:ext cx="3474720" cy="292608"/>
+          </a:xfrm>
+          <a:prstGeom prst="rect">
+            <a:avLst/>
+          </a:prstGeom>
+          <a:noFill/>
+          <a:ln/>
+        </p:spPr>
+        <p:txBody>
+          <a:bodyPr wrap="square" lIns="0" tIns="0" rIns="0" bIns="0" rtlCol="0" anchor="ctr"/>
+          <a:lstStyle/>
+          <a:p>
+            <a:pPr indent="0" marL="0">
+              <a:buNone/>
+            </a:pPr>
+            <a:r>
+              <a:rPr lang="en-US" sz="1300" b="1" dirty="0">
+                <a:solidFill>
+                  <a:srgbClr val="22303C"/>
+                </a:solidFill>
+                <a:latin typeface="Microsoft YaHei" pitchFamily="34" charset="0"/>
+                <a:ea typeface="Microsoft YaHei" pitchFamily="34" charset="-122"/>
+                <a:cs typeface="Microsoft YaHei" pitchFamily="34" charset="-120"/>
+              </a:rPr>
+              <a:t>定位与承诺（口径先行）</a:t>
+            </a:r>
+            <a:endParaRPr lang="en-US" sz="1300" dirty="0"/>
+          </a:p>
+        </p:txBody>
+      </p:sp>
+      <p:sp>
+        <p:nvSpPr>
+          <p:cNvPr id="12" name="Text 10"/>
+          <p:cNvSpPr/>
+          <p:nvPr/>
+        </p:nvSpPr>
+        <p:spPr>
+          <a:xfrm>
+            <a:off x="4937760" y="1591056"/>
+            <a:ext cx="3520440" cy="1783080"/>
+          </a:xfrm>
+          <a:prstGeom prst="rect">
+            <a:avLst/>
+          </a:prstGeom>
+          <a:noFill/>
+          <a:ln/>
+        </p:spPr>
+        <p:txBody>
+          <a:bodyPr wrap="square" lIns="0" tIns="0" rIns="0" bIns="0" rtlCol="0" anchor="ctr"/>
+          <a:lstStyle/>
+          <a:p>
+            <a:pPr marL="342900" indent="-342900">
+              <a:spcAft>
+                <a:spcPts val="600"/>
+              </a:spcAft>
+              <a:buSzPct val="100000"/>
+              <a:buChar char="▪"/>
+            </a:pPr>
+            <a:r>
+              <a:rPr lang="en-US" sz="950" dirty="0">
+                <a:solidFill>
+                  <a:srgbClr val="6B7C8A"/>
+                </a:solidFill>
+                <a:latin typeface="Microsoft YaHei" pitchFamily="34" charset="0"/>
+                <a:ea typeface="Microsoft YaHei" pitchFamily="34" charset="-122"/>
+                <a:cs typeface="Microsoft YaHei" pitchFamily="34" charset="-120"/>
+              </a:rPr>
+              <a:t>定位：“研究性工程 + 限定场景生产可用”；多路并发未覆盖</a:t>
+            </a:r>
+            <a:endParaRPr lang="en-US" sz="950" dirty="0"/>
+          </a:p>
+          <a:p>
+            <a:pPr marL="342900" indent="-342900">
+              <a:spcAft>
+                <a:spcPts val="600"/>
+              </a:spcAft>
+              <a:buSzPct val="100000"/>
+              <a:buChar char="▪"/>
+            </a:pPr>
+            <a:r>
+              <a:rPr lang="en-US" sz="950" dirty="0">
+                <a:solidFill>
+                  <a:srgbClr val="0FA3A8"/>
+                </a:solidFill>
+                <a:latin typeface="Microsoft YaHei" pitchFamily="34" charset="0"/>
+                <a:ea typeface="Microsoft YaHei" pitchFamily="34" charset="-122"/>
+                <a:cs typeface="Microsoft YaHei" pitchFamily="34" charset="-120"/>
+              </a:rPr>
+              <a:t>承诺 ① 进谷可控：指纹可检测 / 分钟级自愈 / 回避手段已确证</a:t>
+            </a:r>
+            <a:endParaRPr lang="en-US" sz="950" dirty="0"/>
+          </a:p>
+          <a:p>
+            <a:pPr marL="342900" indent="-342900">
+              <a:spcAft>
+                <a:spcPts val="600"/>
+              </a:spcAft>
+              <a:buSzPct val="100000"/>
+              <a:buChar char="▪"/>
+            </a:pPr>
+            <a:r>
+              <a:rPr lang="en-US" sz="950" dirty="0">
+                <a:solidFill>
+                  <a:srgbClr val="0FA3A8"/>
+                </a:solidFill>
+                <a:latin typeface="Microsoft YaHei" pitchFamily="34" charset="0"/>
+                <a:ea typeface="Microsoft YaHei" pitchFamily="34" charset="-122"/>
+                <a:cs typeface="Microsoft YaHei" pitchFamily="34" charset="-120"/>
+              </a:rPr>
+              <a:t>承诺 ② 输出无损：池内 vs 超池逐字相同（A2 门）</a:t>
+            </a:r>
+            <a:endParaRPr lang="en-US" sz="950" dirty="0"/>
+          </a:p>
+          <a:p>
+            <a:pPr marL="342900" indent="-342900">
+              <a:spcAft>
+                <a:spcPts val="600"/>
+              </a:spcAft>
+              <a:buSzPct val="100000"/>
+              <a:buChar char="▪"/>
+            </a:pPr>
+            <a:r>
+              <a:rPr lang="en-US" sz="950" dirty="0">
+                <a:solidFill>
+                  <a:srgbClr val="C0504D"/>
+                </a:solidFill>
+                <a:latin typeface="Microsoft YaHei" pitchFamily="34" charset="0"/>
+                <a:ea typeface="Microsoft YaHei" pitchFamily="34" charset="-122"/>
+                <a:cs typeface="Microsoft YaHei" pitchFamily="34" charset="-120"/>
+              </a:rPr>
+              <a:t>不承诺：永不进谷（触发源未解）；通用生产级</a:t>
+            </a:r>
+            <a:endParaRPr lang="en-US" sz="950" dirty="0"/>
+          </a:p>
+        </p:txBody>
+      </p:sp>
+      <p:sp>
+        <p:nvSpPr>
+          <p:cNvPr id="13" name="Shape 11"/>
+          <p:cNvSpPr/>
+          <p:nvPr/>
+        </p:nvSpPr>
+        <p:spPr>
+          <a:xfrm>
+            <a:off x="548640" y="3657600"/>
+            <a:ext cx="8046720" cy="713232"/>
+          </a:xfrm>
+          <a:prstGeom prst="rect">
+            <a:avLst/>
+          </a:prstGeom>
+          <a:solidFill>
+            <a:srgbClr val="FFF4DC"/>
+          </a:solidFill>
+          <a:ln/>
+        </p:spPr>
+      </p:sp>
+      <p:sp>
+        <p:nvSpPr>
+          <p:cNvPr id="14" name="Shape 12"/>
+          <p:cNvSpPr/>
+          <p:nvPr/>
+        </p:nvSpPr>
+        <p:spPr>
+          <a:xfrm>
+            <a:off x="548640" y="3657600"/>
+            <a:ext cx="109728" cy="713232"/>
+          </a:xfrm>
+          <a:prstGeom prst="rect">
+            <a:avLst/>
+          </a:prstGeom>
+          <a:solidFill>
+            <a:srgbClr val="F59E0B"/>
+          </a:solidFill>
+          <a:ln/>
+        </p:spPr>
+      </p:sp>
+      <p:sp>
+        <p:nvSpPr>
+          <p:cNvPr id="15" name="Text 13"/>
+          <p:cNvSpPr/>
+          <p:nvPr/>
+        </p:nvSpPr>
+        <p:spPr>
+          <a:xfrm>
+            <a:off x="777240" y="3712464"/>
+            <a:ext cx="7680960" cy="621792"/>
+          </a:xfrm>
+          <a:prstGeom prst="rect">
+            <a:avLst/>
+          </a:prstGeom>
+          <a:noFill/>
+          <a:ln/>
+        </p:spPr>
+        <p:txBody>
+          <a:bodyPr wrap="square" lIns="0" tIns="0" rIns="0" bIns="0" rtlCol="0" anchor="ctr"/>
+          <a:lstStyle/>
+          <a:p>
+            <a:pPr indent="0" marL="0">
+              <a:buNone/>
+            </a:pPr>
+            <a:r>
+              <a:rPr lang="en-US" sz="1100" b="1" dirty="0">
+                <a:solidFill>
+                  <a:srgbClr val="B07A00"/>
+                </a:solidFill>
+                <a:latin typeface="Microsoft YaHei" pitchFamily="34" charset="0"/>
+                <a:ea typeface="Microsoft YaHei" pitchFamily="34" charset="-122"/>
+                <a:cs typeface="Microsoft YaHei" pitchFamily="34" charset="-120"/>
+              </a:rPr>
+              <a:t>我们希望换到的：</a:t>
+            </a:r>
+            <a:pPr indent="0" marL="0">
+              <a:buNone/>
+            </a:pPr>
+            <a:r>
+              <a:rPr lang="en-US" sz="1100" dirty="0">
+                <a:solidFill>
+                  <a:srgbClr val="22303C"/>
+                </a:solidFill>
+                <a:latin typeface="Microsoft YaHei" pitchFamily="34" charset="0"/>
+                <a:ea typeface="Microsoft YaHei" pitchFamily="34" charset="-122"/>
+                <a:cs typeface="Microsoft YaHei" pitchFamily="34" charset="-120"/>
+              </a:rPr>
+              <a:t>不是“夸赞”，而是</a:t>
+            </a:r>
+            <a:pPr indent="0" marL="0">
+              <a:buNone/>
+            </a:pPr>
+            <a:r>
+              <a:rPr lang="en-US" sz="1100" b="1" dirty="0">
+                <a:solidFill>
+                  <a:srgbClr val="22303C"/>
+                </a:solidFill>
+                <a:latin typeface="Microsoft YaHei" pitchFamily="34" charset="0"/>
+                <a:ea typeface="Microsoft YaHei" pitchFamily="34" charset="-122"/>
+                <a:cs typeface="Microsoft YaHei" pitchFamily="34" charset="-120"/>
+              </a:rPr>
+              <a:t>同路人的线索与判决</a:t>
+            </a:r>
+            <a:pPr indent="0" marL="0">
+              <a:buNone/>
+            </a:pPr>
+            <a:r>
+              <a:rPr lang="en-US" sz="1100" dirty="0">
+                <a:solidFill>
+                  <a:srgbClr val="22303C"/>
+                </a:solidFill>
+                <a:latin typeface="Microsoft YaHei" pitchFamily="34" charset="0"/>
+                <a:ea typeface="Microsoft YaHei" pitchFamily="34" charset="-122"/>
+                <a:cs typeface="Microsoft YaHei" pitchFamily="34" charset="-120"/>
+              </a:rPr>
+              <a:t>——谁在驱动侧见过提交阻塞、谁复现过同样的慢态、谁能一起把行号级的根因钉死。</a:t>
+            </a:r>
+            <a:endParaRPr lang="en-US" sz="1100" dirty="0"/>
+          </a:p>
+        </p:txBody>
+      </p:sp>
+      <p:sp>
+        <p:nvSpPr>
+          <p:cNvPr id="16" name="Text 14"/>
+          <p:cNvSpPr/>
+          <p:nvPr/>
+        </p:nvSpPr>
+        <p:spPr>
+          <a:xfrm>
+            <a:off x="548640" y="4498848"/>
+            <a:ext cx="8046720" cy="274320"/>
+          </a:xfrm>
+          <a:prstGeom prst="rect">
+            <a:avLst/>
+          </a:prstGeom>
+          <a:noFill/>
+          <a:ln/>
+        </p:spPr>
+        <p:txBody>
+          <a:bodyPr wrap="square" lIns="0" tIns="0" rIns="0" bIns="0" rtlCol="0" anchor="ctr"/>
+          <a:lstStyle/>
+          <a:p>
+            <a:pPr indent="0" marL="0">
+              <a:buNone/>
+            </a:pPr>
+            <a:r>
+              <a:rPr lang="en-US" sz="900" dirty="0">
+                <a:solidFill>
+                  <a:srgbClr val="6B7C8A"/>
+                </a:solidFill>
+                <a:latin typeface="Microsoft YaHei" pitchFamily="34" charset="0"/>
+                <a:ea typeface="Microsoft YaHei" pitchFamily="34" charset="-122"/>
+                <a:cs typeface="Microsoft YaHei" pitchFamily="34" charset="-120"/>
+              </a:rPr>
+              <a:t>说明：本页口径来自发布前检查清单（docs/发布前事项-…-20261016.md）§0 与缘起段。</a:t>
+            </a:r>
+            <a:endParaRPr lang="en-US" sz="900" dirty="0"/>
+          </a:p>
+        </p:txBody>
+      </p:sp>
+      <p:sp>
+        <p:nvSpPr>
+          <p:cNvPr id="17" name="Text 15"/>
+          <p:cNvSpPr/>
+          <p:nvPr/>
+        </p:nvSpPr>
+        <p:spPr>
+          <a:xfrm>
+            <a:off x="8549640" y="4800600"/>
+            <a:ext cx="457200" cy="274320"/>
+          </a:xfrm>
+          <a:prstGeom prst="rect">
+            <a:avLst/>
+          </a:prstGeom>
+          <a:noFill/>
+          <a:ln/>
+        </p:spPr>
+        <p:txBody>
+          <a:bodyPr wrap="square" lIns="0" tIns="0" rIns="0" bIns="0" rtlCol="0" anchor="ctr"/>
+          <a:lstStyle/>
+          <a:p>
+            <a:pPr algn="r" indent="0" marL="0">
+              <a:buNone/>
+            </a:pPr>
+            <a:r>
+              <a:rPr lang="en-US" sz="1000" dirty="0">
+                <a:solidFill>
+                  <a:srgbClr val="6B7C8A"/>
+                </a:solidFill>
+                <a:latin typeface="Microsoft YaHei" pitchFamily="34" charset="0"/>
+                <a:ea typeface="Microsoft YaHei" pitchFamily="34" charset="-122"/>
+                <a:cs typeface="Microsoft YaHei" pitchFamily="34" charset="-120"/>
+              </a:rPr>
+              <a:t>17</a:t>
+            </a:r>
+            <a:endParaRPr lang="en-US" sz="1000" dirty="0"/>
+          </a:p>
+        </p:txBody>
+      </p:sp>
+      <p:sp>
+        <p:nvSpPr>
+          <p:cNvPr id="18" name="Text 16"/>
+          <p:cNvSpPr/>
+          <p:nvPr/>
+        </p:nvSpPr>
+        <p:spPr>
+          <a:xfrm>
+            <a:off x="457200" y="4828032"/>
+            <a:ext cx="5486400" cy="228600"/>
+          </a:xfrm>
+          <a:prstGeom prst="rect">
+            <a:avLst/>
+          </a:prstGeom>
+          <a:noFill/>
+          <a:ln/>
+        </p:spPr>
+        <p:txBody>
+          <a:bodyPr wrap="square" lIns="0" tIns="0" rIns="0" bIns="0" rtlCol="0" anchor="ctr"/>
+          <a:lstStyle/>
+          <a:p>
+            <a:pPr indent="0" marL="0">
+              <a:buNone/>
+            </a:pPr>
+            <a:r>
+              <a:rPr lang="en-US" sz="900" dirty="0">
+                <a:solidFill>
+                  <a:srgbClr val="6B7C8A"/>
+                </a:solidFill>
+                <a:latin typeface="Microsoft YaHei" pitchFamily="34" charset="0"/>
+                <a:ea typeface="Microsoft YaHei" pitchFamily="34" charset="-122"/>
+                <a:cs typeface="Microsoft YaHei" pitchFamily="34" charset="-120"/>
+              </a:rPr>
+              <a:t>站在 KVMem 的肩膀上 · 异步页流水</a:t>
+            </a:r>
+            <a:endParaRPr lang="en-US" sz="900" dirty="0"/>
+          </a:p>
+        </p:txBody>
+      </p:sp>
+    </p:spTree>
+  </p:cSld>
+  <p:clrMapOvr>
+    <a:masterClrMapping/>
+  </p:clrMapOvr>
+</p:sld>
+</file>
+
+<file path=ppt/slides/slide18.xml><?xml version="1.0" encoding="utf-8"?>
+<p:sld xmlns:a="http://schemas.openxmlformats.org/drawingml/2006/main" xmlns:r="http://schemas.openxmlformats.org/officeDocument/2006/relationships" xmlns:p="http://schemas.openxmlformats.org/presentationml/2006/main">
+  <p:cSld name="Slide 18">
+    <p:bg>
+      <p:bgPr>
+        <a:solidFill>
           <a:srgbClr val="0B1F33"/>
         </a:solidFill>
       </p:bgPr>
@@ -15973,7 +16814,7 @@
                 <a:ea typeface="Microsoft YaHei" pitchFamily="34" charset="-122"/>
                 <a:cs typeface="Microsoft YaHei" pitchFamily="34" charset="-120"/>
               </a:rPr>
-              <a:t>异步页流水：让搬运和计算同时发生</a:t>
+              <a:t>异步页流水（Async Page Pipeline）：让搬运和计算同时发生</a:t>
             </a:r>
             <a:endParaRPr lang="en-US" sz="2400" dirty="0"/>
           </a:p>

--- a/docs/异步页流水-技术说明.pptx
+++ b/docs/异步页流水-技术说明.pptx
@@ -5497,13 +5497,13 @@
           <a:p>
             <a:pPr marL="342900" indent="-342900">
               <a:spcAft>
-                <a:spcPts val="500"/>
+                <a:spcPts val="300"/>
               </a:spcAft>
               <a:buSzPct val="100000"/>
               <a:buChar char="▪"/>
             </a:pPr>
             <a:r>
-              <a:rPr lang="en-US" sz="950" dirty="0">
+              <a:rPr lang="en-US" sz="900" dirty="0">
                 <a:solidFill>
                   <a:srgbClr val="6B7C8A"/>
                 </a:solidFill>
@@ -5511,20 +5511,20 @@
                 <a:ea typeface="Microsoft YaHei" pitchFamily="34" charset="-122"/>
                 <a:cs typeface="Microsoft YaHei" pitchFamily="34" charset="-120"/>
               </a:rPr>
-              <a:t>按需复现：外部显存压力（约 1.2 GiB）⇒ 施加即入谷（速度降至 1/25）、释放即恢复、可重复</a:t>
-            </a:r>
-            <a:endParaRPr lang="en-US" sz="950" dirty="0"/>
+              <a:t>按需复现：外部显存压力（约 1.2 GiB）⇒ 谷档（1/25）稳定可造、释放即恢复</a:t>
+            </a:r>
+            <a:endParaRPr lang="en-US" sz="900" dirty="0"/>
           </a:p>
           <a:p>
             <a:pPr marL="342900" indent="-342900">
               <a:spcAft>
-                <a:spcPts val="500"/>
+                <a:spcPts val="300"/>
               </a:spcAft>
               <a:buSzPct val="100000"/>
               <a:buChar char="▪"/>
             </a:pPr>
             <a:r>
-              <a:rPr lang="en-US" sz="950" dirty="0">
+              <a:rPr lang="en-US" sz="900" dirty="0">
                 <a:solidFill>
                   <a:srgbClr val="6B7C8A"/>
                 </a:solidFill>
@@ -5532,20 +5532,20 @@
                 <a:ea typeface="Microsoft YaHei" pitchFamily="34" charset="-122"/>
                 <a:cs typeface="Microsoft YaHei" pitchFamily="34" charset="-120"/>
               </a:rPr>
-              <a:t>机制定位：时间全在 host 侧提交调用（submit≈wall、wait=sync≈0）⇒ 驱动内部阻塞</a:t>
-            </a:r>
-            <a:endParaRPr lang="en-US" sz="950" dirty="0"/>
+              <a:t>深档（≈1/100）也已造出：引擎首受压窗口内 1.2/2.4 GiB 长持 2/2 命中；同剂量复验不中 ⇒ 假说：高压常驻态首次释放</a:t>
+            </a:r>
+            <a:endParaRPr lang="en-US" sz="900" dirty="0"/>
           </a:p>
           <a:p>
             <a:pPr marL="342900" indent="-342900">
               <a:spcAft>
-                <a:spcPts val="500"/>
+                <a:spcPts val="300"/>
               </a:spcAft>
               <a:buSzPct val="100000"/>
               <a:buChar char="▪"/>
             </a:pPr>
             <a:r>
-              <a:rPr lang="en-US" sz="950" dirty="0">
+              <a:rPr lang="en-US" sz="900" dirty="0">
                 <a:solidFill>
                   <a:srgbClr val="6B7C8A"/>
                 </a:solidFill>
@@ -5553,20 +5553,20 @@
                 <a:ea typeface="Microsoft YaHei" pitchFamily="34" charset="-122"/>
                 <a:cs typeface="Microsoft YaHei" pitchFamily="34" charset="-120"/>
               </a:rPr>
-              <a:t>排除清单：PDL ❌ 出局（原最大嫌疑）· 页中转 ❌ · 宿主路径 ❌ · 页档位 ❌ · 池大小 ❌ · 节流 ❌</a:t>
-            </a:r>
-            <a:endParaRPr lang="en-US" sz="950" dirty="0"/>
+              <a:t>机制定位：时间全在 host 侧提交调用（submit≈wall、wait=sync≈0）⇒ 驱动内部阻塞</a:t>
+            </a:r>
+            <a:endParaRPr lang="en-US" sz="900" dirty="0"/>
           </a:p>
           <a:p>
             <a:pPr marL="342900" indent="-342900">
               <a:spcAft>
-                <a:spcPts val="500"/>
+                <a:spcPts val="300"/>
               </a:spcAft>
               <a:buSzPct val="100000"/>
               <a:buChar char="▪"/>
             </a:pPr>
             <a:r>
-              <a:rPr lang="en-US" sz="950" dirty="0">
+              <a:rPr lang="en-US" sz="900" dirty="0">
                 <a:solidFill>
                   <a:srgbClr val="6B7C8A"/>
                 </a:solidFill>
@@ -5574,9 +5574,30 @@
                 <a:ea typeface="Microsoft YaHei" pitchFamily="34" charset="-122"/>
                 <a:cs typeface="Microsoft YaHei" pitchFamily="34" charset="-120"/>
               </a:rPr>
+              <a:t>排除清单：PDL ❌ 出局（原最大嫌疑）· 页中转 ❌ · 宿主路径 ❌ · 页档位 ❌ · 池大小 ❌ · 节流 ❌</a:t>
+            </a:r>
+            <a:endParaRPr lang="en-US" sz="900" dirty="0"/>
+          </a:p>
+          <a:p>
+            <a:pPr marL="342900" indent="-342900">
+              <a:spcAft>
+                <a:spcPts val="300"/>
+              </a:spcAft>
+              <a:buSzPct val="100000"/>
+              <a:buChar char="▪"/>
+            </a:pPr>
+            <a:r>
+              <a:rPr lang="en-US" sz="900" dirty="0">
+                <a:solidFill>
+                  <a:srgbClr val="6B7C8A"/>
+                </a:solidFill>
+                <a:latin typeface="Microsoft YaHei" pitchFamily="34" charset="0"/>
+                <a:ea typeface="Microsoft YaHei" pitchFamily="34" charset="-122"/>
+                <a:cs typeface="Microsoft YaHei" pitchFamily="34" charset="-120"/>
+              </a:rPr>
               <a:t>应对：避免与引擎争抢显存（唯一确证有效）；最小复现协议已备（供上游）</a:t>
             </a:r>
-            <a:endParaRPr lang="en-US" sz="950" dirty="0"/>
+            <a:endParaRPr lang="en-US" sz="900" dirty="0"/>
           </a:p>
         </p:txBody>
       </p:sp>
@@ -5720,7 +5741,7 @@
                 <a:ea typeface="Microsoft YaHei" pitchFamily="34" charset="-122"/>
                 <a:cs typeface="Microsoft YaHei" pitchFamily="34" charset="-120"/>
               </a:rPr>
-              <a:t>里程碑：可按需复现（约 1.2 GiB 外部显存压力）；3 步、约 2 分钟的最小复现协议已备好供上游 / 驱动侧研判。仍待解：自然状态下的触发源。</a:t>
+              <a:t>里程碑：谷档可按需复现（约 1.2 GiB 外部显存压力）、深档首持窗口 2/2（条件解析中）；3 步、约 2 分钟的最小复现协议已备好供上游 / 驱动侧研判。仍待解：自然状态下的触发源。</a:t>
             </a:r>
             <a:endParaRPr lang="en-US" sz="1050" dirty="0"/>
           </a:p>

--- a/docs/异步页流水-技术说明.pptx
+++ b/docs/异步页流水-技术说明.pptx
@@ -5532,7 +5532,7 @@
                 <a:ea typeface="Microsoft YaHei" pitchFamily="34" charset="-122"/>
                 <a:cs typeface="Microsoft YaHei" pitchFamily="34" charset="-120"/>
               </a:rPr>
-              <a:t>深档（≈1/100）也已造出：引擎首受压窗口内 1.2/2.4 GiB 长持 2/2 命中；同剂量复验不中 ⇒ 假说：高压常驻态首次释放</a:t>
+              <a:t>深档（≈1/100）受时窗支配：窗内 4/4 命中（含重启首持）；窗外 8/8 谷档——“重启即复现”被证伪，时窗开合未知</a:t>
             </a:r>
             <a:endParaRPr lang="en-US" sz="900" dirty="0"/>
           </a:p>
@@ -5741,7 +5741,7 @@
                 <a:ea typeface="Microsoft YaHei" pitchFamily="34" charset="-122"/>
                 <a:cs typeface="Microsoft YaHei" pitchFamily="34" charset="-120"/>
               </a:rPr>
-              <a:t>里程碑：谷档可按需复现（约 1.2 GiB 外部显存压力）、深档首持窗口 2/2（条件解析中）；3 步、约 2 分钟的最小复现协议已备好供上游 / 驱动侧研判。仍待解：自然状态下的触发源。</a:t>
+              <a:t>里程碑：谷档可按需复现（约 1.2 GiB 外部显存压力）；深档受机器态时窗支配（窗内 4/4、窗外 8/8，开合条件解析中）；3 步、约 2 分钟的最小复现协议已备好供上游 / 驱动侧研判。仍待解：自然状态下的触发源。</a:t>
             </a:r>
             <a:endParaRPr lang="en-US" sz="1050" dirty="0"/>
           </a:p>

--- a/docs/异步页流水-技术说明.pptx
+++ b/docs/异步页流水-技术说明.pptx
@@ -2599,12 +2599,14 @@
             </a:pPr>
             <a:r>
               <a:rPr lang="en-US" sz="1100" dirty="0">
+                <a:u ln="dash"/>
                 <a:solidFill>
                   <a:srgbClr val="7E97A8"/>
                 </a:solidFill>
                 <a:latin typeface="Microsoft YaHei" pitchFamily="34" charset="0"/>
                 <a:ea typeface="Microsoft YaHei" pitchFamily="34" charset="-122"/>
                 <a:cs typeface="Microsoft YaHei" pitchFamily="34" charset="-120"/>
+                <a:hlinkClick r:id="rIdLINK0_paper"/>
               </a:rPr>
               <a:t>（arXiv 2609.04852）</a:t>
             </a:r>
@@ -13787,12 +13789,14 @@
             </a:pPr>
             <a:r>
               <a:rPr lang="en-US" sz="950" dirty="0">
+                <a:u ln="dash"/>
                 <a:solidFill>
                   <a:srgbClr val="9FB8C8"/>
                 </a:solidFill>
                 <a:latin typeface="Microsoft YaHei" pitchFamily="34" charset="0"/>
                 <a:ea typeface="Microsoft YaHei" pitchFamily="34" charset="-122"/>
                 <a:cs typeface="Microsoft YaHei" pitchFamily="34" charset="-120"/>
+                <a:hlinkClick r:id="rIdLINK0_paper"/>
               </a:rPr>
               <a:t>(arXiv 2609.04852 · B 站 FirePKU)</a:t>
             </a:r>
@@ -13905,12 +13909,14 @@
             </a:pPr>
             <a:r>
               <a:rPr lang="en-US" sz="950" dirty="0">
+                <a:u ln="dash"/>
                 <a:solidFill>
                   <a:srgbClr val="9FB8C8"/>
                 </a:solidFill>
                 <a:latin typeface="Microsoft YaHei" pitchFamily="34" charset="0"/>
                 <a:ea typeface="Microsoft YaHei" pitchFamily="34" charset="-122"/>
                 <a:cs typeface="Microsoft YaHei" pitchFamily="34" charset="-120"/>
+                <a:hlinkClick r:id="rIdLINK1_kvmem"/>
               </a:rPr>
               <a:t>kvmem/kvmem：</a:t>
             </a:r>
@@ -13963,7 +13969,7 @@
                 <a:ea typeface="Microsoft YaHei" pitchFamily="34" charset="-122"/>
                 <a:cs typeface="Microsoft YaHei" pitchFamily="34" charset="-120"/>
               </a:rPr>
-              <a:t>完整的验收与失败记录</a:t>
+              <a:t>成体系的验收与回归记录</a:t>
             </a:r>
             <a:endParaRPr lang="en-US" sz="950" dirty="0"/>
           </a:p>
@@ -14074,12 +14080,14 @@
             </a:pPr>
             <a:r>
               <a:rPr lang="en-US" sz="950" dirty="0">
+                <a:u ln="dash"/>
                 <a:solidFill>
                   <a:srgbClr val="9FB8C8"/>
                 </a:solidFill>
                 <a:latin typeface="Microsoft YaHei" pitchFamily="34" charset="0"/>
                 <a:ea typeface="Microsoft YaHei" pitchFamily="34" charset="-122"/>
                 <a:cs typeface="Microsoft YaHei" pitchFamily="34" charset="-120"/>
+                <a:hlinkClick r:id="rIdLINK2_shensanshu"/>
               </a:rPr>
               <a:t>沈三殊——最早把 NInfer × KVMem 结合</a:t>
             </a:r>
@@ -14091,12 +14099,14 @@
             </a:pPr>
             <a:r>
               <a:rPr lang="en-US" sz="950" dirty="0">
+                <a:u ln="dash"/>
                 <a:solidFill>
                   <a:srgbClr val="9FB8C8"/>
                 </a:solidFill>
                 <a:latin typeface="Microsoft YaHei" pitchFamily="34" charset="0"/>
                 <a:ea typeface="Microsoft YaHei" pitchFamily="34" charset="-122"/>
                 <a:cs typeface="Microsoft YaHei" pitchFamily="34" charset="-120"/>
+                <a:hlinkClick r:id="rIdLINK3_tancau"/>
               </a:rPr>
               <a:t>tancau——Ring 环实现 · 直接讨论</a:t>
             </a:r>
@@ -14108,12 +14118,14 @@
             </a:pPr>
             <a:r>
               <a:rPr lang="en-US" sz="950" dirty="0">
+                <a:u ln="dash"/>
                 <a:solidFill>
                   <a:srgbClr val="9FB8C8"/>
                 </a:solidFill>
                 <a:latin typeface="Microsoft YaHei" pitchFamily="34" charset="0"/>
                 <a:ea typeface="Microsoft YaHei" pitchFamily="34" charset="-122"/>
                 <a:cs typeface="Microsoft YaHei" pitchFamily="34" charset="-120"/>
+                <a:hlinkClick r:id="rIdLINK4_zxz"/>
               </a:rPr>
               <a:t>帅气的 zxz——5060Ti 线 · 融合计划</a:t>
             </a:r>

--- a/docs/异步页流水-技术说明.pptx
+++ b/docs/异步页流水-技术说明.pptx
@@ -13789,10 +13789,10 @@
             </a:pPr>
             <a:r>
               <a:rPr lang="en-US" sz="950" dirty="0">
+                <a:solidFill>
+                  <a:srgbClr val="9FB8C8"/>
+                </a:solidFill>
                 <a:u ln="dash"/>
-                <a:solidFill>
-                  <a:srgbClr val="9FB8C8"/>
-                </a:solidFill>
                 <a:latin typeface="Microsoft YaHei" pitchFamily="34" charset="0"/>
                 <a:ea typeface="Microsoft YaHei" pitchFamily="34" charset="-122"/>
                 <a:cs typeface="Microsoft YaHei" pitchFamily="34" charset="-120"/>
@@ -13909,10 +13909,10 @@
             </a:pPr>
             <a:r>
               <a:rPr lang="en-US" sz="950" dirty="0">
+                <a:solidFill>
+                  <a:srgbClr val="9FB8C8"/>
+                </a:solidFill>
                 <a:u ln="dash"/>
-                <a:solidFill>
-                  <a:srgbClr val="9FB8C8"/>
-                </a:solidFill>
                 <a:latin typeface="Microsoft YaHei" pitchFamily="34" charset="0"/>
                 <a:ea typeface="Microsoft YaHei" pitchFamily="34" charset="-122"/>
                 <a:cs typeface="Microsoft YaHei" pitchFamily="34" charset="-120"/>
@@ -14080,16 +14080,35 @@
             </a:pPr>
             <a:r>
               <a:rPr lang="en-US" sz="950" dirty="0">
+                <a:solidFill>
+                  <a:srgbClr val="9FB8C8"/>
+                </a:solidFill>
                 <a:u ln="dash"/>
+                <a:latin typeface="Microsoft YaHei" pitchFamily="34" charset="0"/>
+                <a:ea typeface="Microsoft YaHei" pitchFamily="34" charset="-122"/>
+                <a:cs typeface="Microsoft YaHei" pitchFamily="34" charset="-120"/>
+                <a:hlinkClick r:id="rIdLINK2_shensanshu"/>
+              </a:rPr>
+              <a:t>沈三殊——最早把 NInfer × KVMem 结合</a:t>
+            </a:r>
+            <a:endParaRPr lang="en-US" sz="950" dirty="0"/>
+          </a:p>
+          <a:p>
+            <a:pPr indent="0" marL="0">
+              <a:buNone/>
+            </a:pPr>
+            <a:r>
+              <a:rPr lang="en-US" sz="950" dirty="0">
                 <a:solidFill>
                   <a:srgbClr val="9FB8C8"/>
                 </a:solidFill>
-                <a:latin typeface="Microsoft YaHei" pitchFamily="34" charset="0"/>
-                <a:ea typeface="Microsoft YaHei" pitchFamily="34" charset="-122"/>
-                <a:cs typeface="Microsoft YaHei" pitchFamily="34" charset="-120"/>
-                <a:hlinkClick r:id="rIdLINK2_shensanshu"/>
-              </a:rPr>
-              <a:t>沈三殊——最早把 NInfer × KVMem 结合</a:t>
+                <a:u ln="dash"/>
+                <a:latin typeface="Microsoft YaHei" pitchFamily="34" charset="0"/>
+                <a:ea typeface="Microsoft YaHei" pitchFamily="34" charset="-122"/>
+                <a:cs typeface="Microsoft YaHei" pitchFamily="34" charset="-120"/>
+                <a:hlinkClick r:id="rIdLINK3_tancau"/>
+              </a:rPr>
+              <a:t>tancau——Ring 环实现 · 直接讨论</a:t>
             </a:r>
             <a:endParaRPr lang="en-US" sz="950" dirty="0"/>
           </a:p>
@@ -14099,52 +14118,83 @@
             </a:pPr>
             <a:r>
               <a:rPr lang="en-US" sz="950" dirty="0">
+                <a:solidFill>
+                  <a:srgbClr val="9FB8C8"/>
+                </a:solidFill>
                 <a:u ln="dash"/>
+                <a:latin typeface="Microsoft YaHei" pitchFamily="34" charset="0"/>
+                <a:ea typeface="Microsoft YaHei" pitchFamily="34" charset="-122"/>
+                <a:cs typeface="Microsoft YaHei" pitchFamily="34" charset="-120"/>
+                <a:hlinkClick r:id="rIdLINK4_zxz"/>
+              </a:rPr>
+              <a:t>帅气的 zxz——5060Ti 线 · 融合计划</a:t>
+            </a:r>
+            <a:endParaRPr lang="en-US" sz="950" dirty="0"/>
+          </a:p>
+          <a:p>
+            <a:pPr indent="0" marL="0">
+              <a:buNone/>
+            </a:pPr>
+            <a:r>
+              <a:rPr lang="en-US" sz="950" dirty="0">
                 <a:solidFill>
                   <a:srgbClr val="9FB8C8"/>
                 </a:solidFill>
-                <a:latin typeface="Microsoft YaHei" pitchFamily="34" charset="0"/>
-                <a:ea typeface="Microsoft YaHei" pitchFamily="34" charset="-122"/>
-                <a:cs typeface="Microsoft YaHei" pitchFamily="34" charset="-120"/>
-                <a:hlinkClick r:id="rIdLINK3_tancau"/>
-              </a:rPr>
-              <a:t>tancau——Ring 环实现 · 直接讨论</a:t>
-            </a:r>
-            <a:endParaRPr lang="en-US" sz="950" dirty="0"/>
-          </a:p>
-          <a:p>
-            <a:pPr indent="0" marL="0">
-              <a:buNone/>
-            </a:pPr>
+                <a:u ln="dash"/>
+                <a:latin typeface="Microsoft YaHei" pitchFamily="34" charset="0"/>
+                <a:ea typeface="Microsoft YaHei" pitchFamily="34" charset="-122"/>
+                <a:cs typeface="Microsoft YaHei" pitchFamily="34" charset="-120"/>
+                <a:hlinkClick r:id="rIdECO3"/>
+              </a:rPr>
+              <a:t>llama.cpp</a:t>
+            </a:r>
             <a:r>
               <a:rPr lang="en-US" sz="950" dirty="0">
+                <a:solidFill>
+                  <a:srgbClr val="9FB8C8"/>
+                </a:solidFill>
+                <a:latin typeface="Microsoft YaHei" pitchFamily="34" charset="0"/>
+                <a:ea typeface="Microsoft YaHei" pitchFamily="34" charset="-122"/>
+                <a:cs typeface="Microsoft YaHei" pitchFamily="34" charset="-120"/>
+              </a:rPr>
+              <a:t> · </a:t>
+            </a:r>
+            <a:r>
+              <a:rPr lang="en-US" sz="950" dirty="0">
+                <a:solidFill>
+                  <a:srgbClr val="9FB8C8"/>
+                </a:solidFill>
                 <a:u ln="dash"/>
+                <a:latin typeface="Microsoft YaHei" pitchFamily="34" charset="0"/>
+                <a:ea typeface="Microsoft YaHei" pitchFamily="34" charset="-122"/>
+                <a:cs typeface="Microsoft YaHei" pitchFamily="34" charset="-120"/>
+                <a:hlinkClick r:id="rIdECO4"/>
+              </a:rPr>
+              <a:t>Neroued/ninfer</a:t>
+            </a:r>
+            <a:r>
+              <a:rPr lang="en-US" sz="950" dirty="0">
                 <a:solidFill>
                   <a:srgbClr val="9FB8C8"/>
                 </a:solidFill>
                 <a:latin typeface="Microsoft YaHei" pitchFamily="34" charset="0"/>
                 <a:ea typeface="Microsoft YaHei" pitchFamily="34" charset="-122"/>
                 <a:cs typeface="Microsoft YaHei" pitchFamily="34" charset="-120"/>
-                <a:hlinkClick r:id="rIdLINK4_zxz"/>
-              </a:rPr>
-              <a:t>帅气的 zxz——5060Ti 线 · 融合计划</a:t>
-            </a:r>
-            <a:endParaRPr lang="en-US" sz="950" dirty="0"/>
-          </a:p>
-          <a:p>
-            <a:pPr indent="0" marL="0">
-              <a:buNone/>
-            </a:pPr>
+              </a:rPr>
+              <a:t> · </a:t>
+            </a:r>
             <a:r>
               <a:rPr lang="en-US" sz="950" dirty="0">
                 <a:solidFill>
                   <a:srgbClr val="9FB8C8"/>
                 </a:solidFill>
-                <a:latin typeface="Microsoft YaHei" pitchFamily="34" charset="0"/>
-                <a:ea typeface="Microsoft YaHei" pitchFamily="34" charset="-122"/>
-                <a:cs typeface="Microsoft YaHei" pitchFamily="34" charset="-120"/>
-              </a:rPr>
-              <a:t>llama.cpp · Neroued/ninfer · iamwavecut/ninfer-all</a:t>
+                <a:u ln="dash"/>
+                <a:latin typeface="Microsoft YaHei" pitchFamily="34" charset="0"/>
+                <a:ea typeface="Microsoft YaHei" pitchFamily="34" charset="-122"/>
+                <a:cs typeface="Microsoft YaHei" pitchFamily="34" charset="-120"/>
+                <a:hlinkClick r:id="rIdECO5"/>
+              </a:rPr>
+              <a:t>iamwavecut/ninfer-all</a:t>
             </a:r>
             <a:endParaRPr lang="en-US" sz="950" dirty="0"/>
           </a:p>

--- a/docs/异步页流水-技术说明.pptx
+++ b/docs/异步页流水-技术说明.pptx
@@ -15,6 +15,8 @@
     <p:sldId id="260" r:id="rId5"/>
     <p:sldId id="261" r:id="rId6"/>
     <p:sldId id="262" r:id="rId7"/>
+    <p:sldId id="274" r:id="rId24"/>
+    <p:sldId id="275" r:id="rId25"/>
     <p:sldId id="263" r:id="rId8"/>
     <p:sldId id="264" r:id="rId9"/>
     <p:sldId id="265" r:id="rId10"/>
@@ -14622,6 +14624,247 @@
 </p:sld>
 </file>
 
+<file path=ppt/slides/slide19.xml><?xml version="1.0" encoding="utf-8"?>
+<p:sld xmlns:a="http://schemas.openxmlformats.org/drawingml/2006/main" xmlns:p="http://schemas.openxmlformats.org/presentationml/2006/main" xmlns:r="http://schemas.openxmlformats.org/officeDocument/2006/relationships">
+  <p:cSld>
+    <p:spTree>
+      <p:nvGrpSpPr>
+        <p:cNvPr id="1" name=""/>
+        <p:cNvGrpSpPr/>
+        <p:nvPr/>
+      </p:nvGrpSpPr>
+      <p:grpSpPr/>
+      <p:sp>
+        <p:nvSpPr>
+          <p:cNvPr id="2" name="TextBox 1"/>
+          <p:cNvSpPr txBox="1"/>
+          <p:nvPr/>
+        </p:nvSpPr>
+        <p:spPr>
+          <a:xfrm>
+            <a:off x="548640" y="256032"/>
+            <a:ext cx="8046720" cy="292608"/>
+          </a:xfrm>
+          <a:prstGeom prst="rect">
+            <a:avLst/>
+          </a:prstGeom>
+          <a:noFill/>
+        </p:spPr>
+        <p:txBody>
+          <a:bodyPr wrap="none">
+            <a:spAutoFit/>
+          </a:bodyPr>
+          <a:lstStyle/>
+          <a:p>
+            <a:r>
+              <a:rPr sz="1200" b="1">
+                <a:solidFill>
+                  <a:srgbClr val="0E7E86"/>
+                </a:solidFill>
+                <a:latin typeface="Microsoft YaHei"/>
+              </a:rPr>
+              <a:t>WHERE PAGES LIVE</a:t>
+            </a:r>
+          </a:p>
+        </p:txBody>
+      </p:sp>
+      <p:sp>
+        <p:nvSpPr>
+          <p:cNvPr id="3" name="TextBox 2"/>
+          <p:cNvSpPr txBox="1"/>
+          <p:nvPr/>
+        </p:nvSpPr>
+        <p:spPr>
+          <a:xfrm>
+            <a:off x="548640" y="548640"/>
+            <a:ext cx="8046720" cy="566928"/>
+          </a:xfrm>
+          <a:prstGeom prst="rect">
+            <a:avLst/>
+          </a:prstGeom>
+          <a:noFill/>
+        </p:spPr>
+        <p:txBody>
+          <a:bodyPr wrap="none">
+            <a:spAutoFit/>
+          </a:bodyPr>
+          <a:lstStyle/>
+          <a:p>
+            <a:r>
+              <a:rPr sz="2300" b="1">
+                <a:solidFill>
+                  <a:srgbClr val="13314D"/>
+                </a:solidFill>
+                <a:latin typeface="Microsoft YaHei"/>
+              </a:rPr>
+              <a:t>提前搬运的页放在哪？——池页数恒定，搬运只换内容</a:t>
+            </a:r>
+          </a:p>
+        </p:txBody>
+      </p:sp>
+      <p:sp>
+        <p:nvSpPr>
+          <p:cNvPr id="4" name="TextBox 3"/>
+          <p:cNvSpPr txBox="1"/>
+          <p:nvPr/>
+        </p:nvSpPr>
+        <p:spPr>
+          <a:xfrm>
+            <a:off x="548640" y="1261872"/>
+            <a:ext cx="8046720" cy="3127248"/>
+          </a:xfrm>
+          <a:prstGeom prst="rect">
+            <a:avLst/>
+          </a:prstGeom>
+          <a:noFill/>
+        </p:spPr>
+        <p:txBody>
+          <a:bodyPr wrap="square">
+            <a:spAutoFit/>
+          </a:bodyPr>
+          <a:lstStyle/>
+          <a:p>
+            <a:pPr>
+              <a:spcAft>
+                <a:spcPts val="700"/>
+              </a:spcAft>
+            </a:pPr>
+            <a:r>
+              <a:rPr sz="1050">
+                <a:solidFill>
+                  <a:srgbClr val="23465C"/>
+                </a:solidFill>
+                <a:latin typeface="Microsoft YaHei"/>
+              </a:rPr>
+              <a:t>▪ 设备池 = 1,024 个页槽（65,536 tok ÷ 64），启动时一次分配、永不增减——搬运不是“加空间”，是“换槽里的内容”（同 OS 物理页帧）</a:t>
+            </a:r>
+          </a:p>
+          <a:p>
+            <a:pPr>
+              <a:spcAft>
+                <a:spcPts val="700"/>
+              </a:spcAft>
+            </a:pPr>
+            <a:r>
+              <a:rPr sz="1050">
+                <a:solidFill>
+                  <a:srgbClr val="23465C"/>
+                </a:solidFill>
+                <a:latin typeface="Microsoft YaHei"/>
+              </a:rPr>
+              <a:t>▪ restore（搬回）的落点 = 设备池的 free 槽；demote（搬出）的落点 = Host RAM 配额槽（写前取配额：host 没空槽就不发起）</a:t>
+            </a:r>
+          </a:p>
+          <a:p>
+            <a:pPr>
+              <a:spcAft>
+                <a:spcPts val="700"/>
+              </a:spcAft>
+            </a:pPr>
+            <a:r>
+              <a:rPr sz="1050">
+                <a:solidFill>
+                  <a:srgbClr val="23465C"/>
+                </a:solidFill>
+                <a:latin typeface="Microsoft YaHei"/>
+              </a:rPr>
+              <a:t>▪ 空间守恒律：restore 进来的每页 = demote 出去的一页的槽；每步新增 N 页 = 每步腾出 N 槽——稳态流水平衡</a:t>
+            </a:r>
+          </a:p>
+          <a:p>
+            <a:pPr>
+              <a:spcAft>
+                <a:spcPts val="700"/>
+              </a:spcAft>
+            </a:pPr>
+            <a:r>
+              <a:rPr sz="1050">
+                <a:solidFill>
+                  <a:srgbClr val="23465C"/>
+                </a:solidFill>
+                <a:latin typeface="Microsoft YaHei"/>
+              </a:rPr>
+              <a:t>▪ 唯一的瞬时额外 = 在飞批次的双份副本 ≈ 26 MiB（publish 前旧副本不丢——账本保证任何时刻至少一份有效）</a:t>
+            </a:r>
+          </a:p>
+          <a:p>
+            <a:pPr>
+              <a:spcAft>
+                <a:spcPts val="700"/>
+              </a:spcAft>
+            </a:pPr>
+            <a:r>
+              <a:rPr sz="1050">
+                <a:solidFill>
+                  <a:srgbClr val="23465C"/>
+                </a:solidFill>
+                <a:latin typeface="Microsoft YaHei"/>
+              </a:rPr>
+              <a:t>▪ 池满 = 换页体系的设计工况：池满不回退，池浅才等价（浅载无搬运需求，两条路自然一样快）</a:t>
+            </a:r>
+          </a:p>
+        </p:txBody>
+      </p:sp>
+      <p:sp>
+        <p:nvSpPr>
+          <p:cNvPr id="5" name="Rectangle 4"/>
+          <p:cNvSpPr/>
+          <p:nvPr/>
+        </p:nvSpPr>
+        <p:spPr>
+          <a:xfrm>
+            <a:off x="548640" y="4498848"/>
+            <a:ext cx="8046720" cy="438912"/>
+          </a:xfrm>
+          <a:prstGeom prst="rect">
+            <a:avLst/>
+          </a:prstGeom>
+          <a:solidFill>
+            <a:srgbClr val="3FC6D6"/>
+          </a:solidFill>
+          <a:ln>
+            <a:noFill/>
+          </a:ln>
+        </p:spPr>
+        <p:style>
+          <a:lnRef idx="1">
+            <a:schemeClr val="accent1"/>
+          </a:lnRef>
+          <a:fillRef idx="3">
+            <a:schemeClr val="accent1"/>
+          </a:fillRef>
+          <a:effectRef idx="2">
+            <a:schemeClr val="accent1"/>
+          </a:effectRef>
+          <a:fontRef idx="minor">
+            <a:schemeClr val="lt1"/>
+          </a:fontRef>
+        </p:style>
+        <p:txBody>
+          <a:bodyPr rtlCol="0" anchor="ctr" wrap="square"/>
+          <a:lstStyle/>
+          <a:p>
+            <a:pPr algn="l"/>
+            <a:r>
+              <a:rPr sz="1150" b="1">
+                <a:solidFill>
+                  <a:srgbClr val="13314D"/>
+                </a:solidFill>
+                <a:latin typeface="Microsoft YaHei"/>
+              </a:rPr>
+              <a:t>真边界只有两条：Host 配额耗尽（=原作者 SSD 层场景，128 GB 下远不可达）与瞬时涌入超流水深度（=深流水的主战场）</a:t>
+            </a:r>
+          </a:p>
+        </p:txBody>
+      </p:sp>
+    </p:spTree>
+  </p:cSld>
+  <p:clrMapOvr>
+    <a:masterClrMapping/>
+  </p:clrMapOvr>
+</p:sld>
+</file>
+
 <file path=ppt/slides/slide2.xml><?xml version="1.0" encoding="utf-8"?>
 <p:sld xmlns:p="http://schemas.openxmlformats.org/presentationml/2006/main" xmlns:a="http://schemas.openxmlformats.org/drawingml/2006/main">
   <p:cSld name="Slide 2">
@@ -15594,6 +15837,247 @@
           <a:lstStyle/>
           <a:p>
             <a:pPr algn="ctr"/>
+          </a:p>
+        </p:txBody>
+      </p:sp>
+    </p:spTree>
+  </p:cSld>
+  <p:clrMapOvr>
+    <a:masterClrMapping/>
+  </p:clrMapOvr>
+</p:sld>
+</file>
+
+<file path=ppt/slides/slide20.xml><?xml version="1.0" encoding="utf-8"?>
+<p:sld xmlns:a="http://schemas.openxmlformats.org/drawingml/2006/main" xmlns:p="http://schemas.openxmlformats.org/presentationml/2006/main" xmlns:r="http://schemas.openxmlformats.org/officeDocument/2006/relationships">
+  <p:cSld>
+    <p:spTree>
+      <p:nvGrpSpPr>
+        <p:cNvPr id="1" name=""/>
+        <p:cNvGrpSpPr/>
+        <p:nvPr/>
+      </p:nvGrpSpPr>
+      <p:grpSpPr/>
+      <p:sp>
+        <p:nvSpPr>
+          <p:cNvPr id="2" name="TextBox 1"/>
+          <p:cNvSpPr txBox="1"/>
+          <p:nvPr/>
+        </p:nvSpPr>
+        <p:spPr>
+          <a:xfrm>
+            <a:off x="548640" y="256032"/>
+            <a:ext cx="8046720" cy="292608"/>
+          </a:xfrm>
+          <a:prstGeom prst="rect">
+            <a:avLst/>
+          </a:prstGeom>
+          <a:noFill/>
+        </p:spPr>
+        <p:txBody>
+          <a:bodyPr wrap="none">
+            <a:spAutoFit/>
+          </a:bodyPr>
+          <a:lstStyle/>
+          <a:p>
+            <a:r>
+              <a:rPr sz="1200" b="1">
+                <a:solidFill>
+                  <a:srgbClr val="0E7E86"/>
+                </a:solidFill>
+                <a:latin typeface="Microsoft YaHei"/>
+              </a:rPr>
+              <a:t>THEORY CHECK</a:t>
+            </a:r>
+          </a:p>
+        </p:txBody>
+      </p:sp>
+      <p:sp>
+        <p:nvSpPr>
+          <p:cNvPr id="3" name="TextBox 2"/>
+          <p:cNvSpPr txBox="1"/>
+          <p:nvPr/>
+        </p:nvSpPr>
+        <p:spPr>
+          <a:xfrm>
+            <a:off x="548640" y="548640"/>
+            <a:ext cx="8046720" cy="566928"/>
+          </a:xfrm>
+          <a:prstGeom prst="rect">
+            <a:avLst/>
+          </a:prstGeom>
+          <a:noFill/>
+        </p:spPr>
+        <p:txBody>
+          <a:bodyPr wrap="none">
+            <a:spAutoFit/>
+          </a:bodyPr>
+          <a:lstStyle/>
+          <a:p>
+            <a:r>
+              <a:rPr sz="2300" b="1">
+                <a:solidFill>
+                  <a:srgbClr val="13314D"/>
+                </a:solidFill>
+                <a:latin typeface="Microsoft YaHei"/>
+              </a:rPr>
+              <a:t>原理自检：异步到底有没有优化作用？</a:t>
+            </a:r>
+          </a:p>
+        </p:txBody>
+      </p:sp>
+      <p:sp>
+        <p:nvSpPr>
+          <p:cNvPr id="4" name="TextBox 3"/>
+          <p:cNvSpPr txBox="1"/>
+          <p:nvPr/>
+        </p:nvSpPr>
+        <p:spPr>
+          <a:xfrm>
+            <a:off x="548640" y="1261872"/>
+            <a:ext cx="8046720" cy="3127248"/>
+          </a:xfrm>
+          <a:prstGeom prst="rect">
+            <a:avLst/>
+          </a:prstGeom>
+          <a:noFill/>
+        </p:spPr>
+        <p:txBody>
+          <a:bodyPr wrap="square">
+            <a:spAutoFit/>
+          </a:bodyPr>
+          <a:lstStyle/>
+          <a:p>
+            <a:pPr>
+              <a:spcAft>
+                <a:spcPts val="700"/>
+              </a:spcAft>
+            </a:pPr>
+            <a:r>
+              <a:rPr sz="1050">
+                <a:solidFill>
+                  <a:srgbClr val="23465C"/>
+                </a:solidFill>
+                <a:latin typeface="Microsoft YaHei"/>
+              </a:rPr>
+              <a:t>▪ 两条公式：同步 = 计算 + 搬运（串行）；异步 = max(计算, 搬运)（重叠）——收益条件全部可测量</a:t>
+            </a:r>
+          </a:p>
+          <a:p>
+            <a:pPr>
+              <a:spcAft>
+                <a:spcPts val="700"/>
+              </a:spcAft>
+            </a:pPr>
+            <a:r>
+              <a:rPr sz="1050">
+                <a:solidFill>
+                  <a:srgbClr val="23465C"/>
+                </a:solidFill>
+                <a:latin typeface="Microsoft YaHei"/>
+              </a:rPr>
+              <a:t>▪ 三个充要条件：可隐藏（1-3 ms vs 27-32 ms，10 倍余量）/ 需求不超吞吐 / 无隐藏同步点——模式签名证明真异步（retire wait ON=1195 vs OFF=0；ring STALL 33 vs 2）</a:t>
+            </a:r>
+          </a:p>
+          <a:p>
+            <a:pPr>
+              <a:spcAft>
+                <a:spcPts val="700"/>
+              </a:spcAft>
+            </a:pPr>
+            <a:r>
+              <a:rPr sz="1050">
+                <a:solidFill>
+                  <a:srgbClr val="23465C"/>
+                </a:solidFill>
+                <a:latin typeface="Microsoft YaHei"/>
+              </a:rPr>
+              <a:t>▪ 三个理论反例如实列出：伪异步 · 开销主导 · 带宽饱和（DMA 与计算共享显存带宽）</a:t>
+            </a:r>
+          </a:p>
+          <a:p>
+            <a:pPr>
+              <a:spcAft>
+                <a:spcPts val="700"/>
+              </a:spcAft>
+            </a:pPr>
+            <a:r>
+              <a:rPr sz="1050">
+                <a:solidFill>
+                  <a:srgbClr val="23465C"/>
+                </a:solidFill>
+                <a:latin typeface="Microsoft YaHei"/>
+              </a:rPr>
+              <a:t>▪ 两实验合出理论曲线：深轮（持续需求）r=0.80；单发（无持续需求）r=1.13 = 理论边界命中——“连边界都预测对，就不是幻觉”</a:t>
+            </a:r>
+          </a:p>
+          <a:p>
+            <a:pPr>
+              <a:spcAft>
+                <a:spcPts val="700"/>
+              </a:spcAft>
+            </a:pPr>
+            <a:r>
+              <a:rPr sz="1050">
+                <a:solidFill>
+                  <a:srgbClr val="23465C"/>
+                </a:solidFill>
+                <a:latin typeface="Microsoft YaHei"/>
+              </a:rPr>
+              <a:t>▪ 待堵的洞：n=3 置信区间宽 · 带宽竞争未单独计量 · 判决实验 = r 随超池深度单调下降（1.0×→3.5×，曲线平了才拆）</a:t>
+            </a:r>
+          </a:p>
+        </p:txBody>
+      </p:sp>
+      <p:sp>
+        <p:nvSpPr>
+          <p:cNvPr id="5" name="Rectangle 4"/>
+          <p:cNvSpPr/>
+          <p:nvPr/>
+        </p:nvSpPr>
+        <p:spPr>
+          <a:xfrm>
+            <a:off x="548640" y="4498848"/>
+            <a:ext cx="8046720" cy="438912"/>
+          </a:xfrm>
+          <a:prstGeom prst="rect">
+            <a:avLst/>
+          </a:prstGeom>
+          <a:solidFill>
+            <a:srgbClr val="3FC6D6"/>
+          </a:solidFill>
+          <a:ln>
+            <a:noFill/>
+          </a:ln>
+        </p:spPr>
+        <p:style>
+          <a:lnRef idx="1">
+            <a:schemeClr val="accent1"/>
+          </a:lnRef>
+          <a:fillRef idx="3">
+            <a:schemeClr val="accent1"/>
+          </a:fillRef>
+          <a:effectRef idx="2">
+            <a:schemeClr val="accent1"/>
+          </a:effectRef>
+          <a:fontRef idx="minor">
+            <a:schemeClr val="lt1"/>
+          </a:fontRef>
+        </p:style>
+        <p:txBody>
+          <a:bodyPr rtlCol="0" anchor="ctr" wrap="square"/>
+          <a:lstStyle/>
+          <a:p>
+            <a:pPr algn="l"/>
+            <a:r>
+              <a:rPr sz="1150" b="1">
+                <a:solidFill>
+                  <a:srgbClr val="13314D"/>
+                </a:solidFill>
+                <a:latin typeface="Microsoft YaHei"/>
+              </a:rPr>
+              <a:t>这不是信念，是带边界条件的工程定理——两个工况的观测都落在理论预测的位置上</a:t>
+            </a:r>
           </a:p>
         </p:txBody>
       </p:sp>

--- a/docs/异步页流水-技术说明.pptx
+++ b/docs/异步页流水-技术说明.pptx
@@ -17,6 +17,7 @@
     <p:sldId id="262" r:id="rId7"/>
     <p:sldId id="274" r:id="rId24"/>
     <p:sldId id="275" r:id="rId25"/>
+    <p:sldId id="276" r:id="rId26"/>
     <p:sldId id="263" r:id="rId8"/>
     <p:sldId id="264" r:id="rId9"/>
     <p:sldId id="265" r:id="rId10"/>
@@ -3087,6 +3088,1690 @@
 </file>
 
 <file path=ppt/slides/slide10.xml><?xml version="1.0" encoding="utf-8"?>
+<p:sld xmlns:a="http://schemas.openxmlformats.org/drawingml/2006/main" xmlns:p="http://schemas.openxmlformats.org/presentationml/2006/main" xmlns:r="http://schemas.openxmlformats.org/officeDocument/2006/relationships">
+  <p:cSld>
+    <p:spTree>
+      <p:nvGrpSpPr>
+        <p:cNvPr id="1" name=""/>
+        <p:cNvGrpSpPr/>
+        <p:nvPr/>
+      </p:nvGrpSpPr>
+      <p:grpSpPr/>
+      <p:sp>
+        <p:nvSpPr>
+          <p:cNvPr id="2" name="TextBox 1"/>
+          <p:cNvSpPr txBox="1"/>
+          <p:nvPr/>
+        </p:nvSpPr>
+        <p:spPr>
+          <a:xfrm>
+            <a:off x="548640" y="256032"/>
+            <a:ext cx="8046720" cy="292608"/>
+          </a:xfrm>
+          <a:prstGeom prst="rect">
+            <a:avLst/>
+          </a:prstGeom>
+          <a:noFill/>
+        </p:spPr>
+        <p:txBody>
+          <a:bodyPr wrap="none">
+            <a:spAutoFit/>
+          </a:bodyPr>
+          <a:lstStyle/>
+          <a:p>
+            <a:r>
+              <a:rPr sz="1200" b="1">
+                <a:solidFill>
+                  <a:srgbClr val="0E7E86"/>
+                </a:solidFill>
+                <a:latin typeface="Microsoft YaHei"/>
+              </a:rPr>
+              <a:t>DEPTH LIMITS</a:t>
+            </a:r>
+          </a:p>
+        </p:txBody>
+      </p:sp>
+      <p:sp>
+        <p:nvSpPr>
+          <p:cNvPr id="3" name="TextBox 2"/>
+          <p:cNvSpPr txBox="1"/>
+          <p:nvPr/>
+        </p:nvSpPr>
+        <p:spPr>
+          <a:xfrm>
+            <a:off x="548640" y="548640"/>
+            <a:ext cx="8046720" cy="566928"/>
+          </a:xfrm>
+          <a:prstGeom prst="rect">
+            <a:avLst/>
+          </a:prstGeom>
+          <a:noFill/>
+        </p:spPr>
+        <p:txBody>
+          <a:bodyPr wrap="none">
+            <a:spAutoFit/>
+          </a:bodyPr>
+          <a:lstStyle/>
+          <a:p>
+            <a:r>
+              <a:rPr sz="2300" b="1">
+                <a:solidFill>
+                  <a:srgbClr val="13314D"/>
+                </a:solidFill>
+                <a:latin typeface="Microsoft YaHei"/>
+              </a:rPr>
+              <a:t>流水深度的理论上限：最多几批同时在飞？</a:t>
+            </a:r>
+          </a:p>
+        </p:txBody>
+      </p:sp>
+      <p:sp>
+        <p:nvSpPr>
+          <p:cNvPr id="4" name="TextBox 3"/>
+          <p:cNvSpPr txBox="1"/>
+          <p:nvPr/>
+        </p:nvSpPr>
+        <p:spPr>
+          <a:xfrm>
+            <a:off x="548640" y="1261872"/>
+            <a:ext cx="8046720" cy="3127248"/>
+          </a:xfrm>
+          <a:prstGeom prst="rect">
+            <a:avLst/>
+          </a:prstGeom>
+          <a:noFill/>
+        </p:spPr>
+        <p:txBody>
+          <a:bodyPr wrap="square">
+            <a:spAutoFit/>
+          </a:bodyPr>
+          <a:lstStyle/>
+          <a:p>
+            <a:pPr>
+              <a:spcAft>
+                <a:spcPts val="700"/>
+              </a:spcAft>
+            </a:pPr>
+            <a:r>
+              <a:rPr sz="1050">
+                <a:solidFill>
+                  <a:srgbClr val="23465C"/>
+                </a:solidFill>
+                <a:latin typeface="Microsoft YaHei"/>
+              </a:rPr>
+              <a:t>▪ 需求侧：稳态义务 0.09 页/步 ⇒ 1 批（8 页）覆盖约 11 步；深度需求的真正来源 = 轮首召回爆发（爆发页数 ÷ 8 = 有意义批数）</a:t>
+            </a:r>
+          </a:p>
+          <a:p>
+            <a:pPr>
+              <a:spcAft>
+                <a:spcPts val="700"/>
+              </a:spcAft>
+            </a:pPr>
+            <a:r>
+              <a:rPr sz="1050">
+                <a:solidFill>
+                  <a:srgbClr val="23465C"/>
+                </a:solidFill>
+                <a:latin typeface="Microsoft YaHei"/>
+              </a:rPr>
+              <a:t>▪ 供给侧硬上限：设备 free 槽 ≤1,024 · Host 配额数千页 · 双份缓冲每批 ≈26 MiB——理论上几十批可行</a:t>
+            </a:r>
+          </a:p>
+          <a:p>
+            <a:pPr>
+              <a:spcAft>
+                <a:spcPts val="700"/>
+              </a:spcAft>
+            </a:pPr>
+            <a:r>
+              <a:rPr sz="1050">
+                <a:solidFill>
+                  <a:srgbClr val="23465C"/>
+                </a:solidFill>
+                <a:latin typeface="Microsoft YaHei"/>
+              </a:rPr>
+              <a:t>▪ 实践甜蜜点 2-4 批：超过峰值义务深度的档位是闲置——排队批次不会让 DMA 更快，只是把同一笔义务摊得更平</a:t>
+            </a:r>
+          </a:p>
+          <a:p>
+            <a:pPr>
+              <a:spcAft>
+                <a:spcPts val="700"/>
+              </a:spcAft>
+            </a:pPr>
+            <a:r>
+              <a:rPr sz="1050">
+                <a:solidFill>
+                  <a:srgbClr val="23465C"/>
+                </a:solidFill>
+                <a:latin typeface="Microsoft YaHei"/>
+              </a:rPr>
+              <a:t>▪ DEPTH=1 是最差配置（实测 D1 182.6 &lt; D0 183.6）：付半流水管理开销、无摊薄收益——要么 0（纯同步）要么 ≥2</a:t>
+            </a:r>
+          </a:p>
+          <a:p>
+            <a:pPr>
+              <a:spcAft>
+                <a:spcPts val="700"/>
+              </a:spcAft>
+            </a:pPr>
+            <a:r>
+              <a:rPr sz="1050">
+                <a:solidFill>
+                  <a:srgbClr val="23465C"/>
+                </a:solidFill>
+                <a:latin typeface="Microsoft YaHei"/>
+              </a:rPr>
+              <a:t>▪ 决胜测量：深载长跑（深超池堆积 + 轮首爆发密集）ON/OFF 对照——理论预测收益落在“爆发规模 / 步窗”区间</a:t>
+            </a:r>
+          </a:p>
+        </p:txBody>
+      </p:sp>
+      <p:sp>
+        <p:nvSpPr>
+          <p:cNvPr id="5" name="Rectangle 4"/>
+          <p:cNvSpPr/>
+          <p:nvPr/>
+        </p:nvSpPr>
+        <p:spPr>
+          <a:xfrm>
+            <a:off x="548640" y="4498848"/>
+            <a:ext cx="8046720" cy="438912"/>
+          </a:xfrm>
+          <a:prstGeom prst="rect">
+            <a:avLst/>
+          </a:prstGeom>
+          <a:solidFill>
+            <a:srgbClr val="3FC6D6"/>
+          </a:solidFill>
+          <a:ln>
+            <a:noFill/>
+          </a:ln>
+        </p:spPr>
+        <p:style>
+          <a:lnRef idx="1">
+            <a:schemeClr val="accent1"/>
+          </a:lnRef>
+          <a:fillRef idx="3">
+            <a:schemeClr val="accent1"/>
+          </a:fillRef>
+          <a:effectRef idx="2">
+            <a:schemeClr val="accent1"/>
+          </a:effectRef>
+          <a:fontRef idx="minor">
+            <a:schemeClr val="lt1"/>
+          </a:fontRef>
+        </p:style>
+        <p:txBody>
+          <a:bodyPr rtlCol="0" anchor="ctr" wrap="square"/>
+          <a:lstStyle/>
+          <a:p>
+            <a:pPr algn="ctr"/>
+            <a:r>
+              <a:rPr sz="1150" b="1">
+                <a:solidFill>
+                  <a:srgbClr val="13314D"/>
+                </a:solidFill>
+                <a:latin typeface="Microsoft YaHei"/>
+              </a:rPr>
+              <a:t>深度不是越大越好：最优 DEPTH = ⌈峰值义务页数 ÷ 8⌉，通常 ≤ 4——超过即闲置</a:t>
+            </a:r>
+          </a:p>
+        </p:txBody>
+      </p:sp>
+    </p:spTree>
+  </p:cSld>
+  <p:clrMapOvr>
+    <a:masterClrMapping/>
+  </p:clrMapOvr>
+</p:sld>
+</file>
+
+<file path=ppt/slides/slide11.xml><?xml version="1.0" encoding="utf-8"?>
+<p:sld xmlns:p="http://schemas.openxmlformats.org/presentationml/2006/main" xmlns:a="http://schemas.openxmlformats.org/drawingml/2006/main">
+  <p:cSld name="Slide 8">
+    <p:bg>
+      <p:bgPr>
+        <a:solidFill>
+          <a:srgbClr val="0B1F33"/>
+        </a:solidFill>
+      </p:bgPr>
+    </p:bg>
+    <p:spTree>
+      <p:nvGrpSpPr>
+        <p:cNvPr id="348" name=""/>
+        <p:cNvGrpSpPr/>
+        <p:nvPr/>
+      </p:nvGrpSpPr>
+      <p:grpSpPr>
+        <a:xfrm>
+          <a:off x="0" y="0"/>
+          <a:ext cx="0" cy="0"/>
+          <a:chOff x="0" y="0"/>
+          <a:chExt cx="0" cy="0"/>
+        </a:xfrm>
+      </p:grpSpPr>
+      <p:sp>
+        <p:nvSpPr>
+          <p:cNvPr id="349" name="Shape 0"/>
+          <p:cNvSpPr/>
+          <p:nvPr/>
+        </p:nvSpPr>
+        <p:spPr>
+          <a:xfrm>
+            <a:off x="457200" y="384048"/>
+            <a:ext cx="109728" cy="457200"/>
+          </a:xfrm>
+          <a:prstGeom prst="roundRect">
+            <a:avLst>
+              <a:gd name="adj" fmla="val 50000"/>
+            </a:avLst>
+          </a:prstGeom>
+          <a:solidFill>
+            <a:srgbClr val="0E7E86"/>
+          </a:solidFill>
+          <a:ln/>
+        </p:spPr>
+        <p:txBody>
+          <a:bodyPr/>
+          <a:p/>
+        </p:txBody>
+      </p:sp>
+      <p:sp>
+        <p:nvSpPr>
+          <p:cNvPr id="350" name="Text 1"/>
+          <p:cNvSpPr/>
+          <p:nvPr/>
+        </p:nvSpPr>
+        <p:spPr>
+          <a:xfrm>
+            <a:off x="713232" y="310896"/>
+            <a:ext cx="7955280" cy="228600"/>
+          </a:xfrm>
+          <a:prstGeom prst="rect">
+            <a:avLst/>
+          </a:prstGeom>
+          <a:noFill/>
+          <a:ln/>
+        </p:spPr>
+        <p:txBody>
+          <a:bodyPr wrap="square" lIns="0" tIns="0" rIns="0" bIns="0" rtlCol="0" anchor="ctr"/>
+          <a:lstStyle/>
+          <a:p>
+            <a:pPr marL="0" indent="0">
+              <a:buNone/>
+            </a:pPr>
+            <a:r>
+              <a:rPr lang="en-US" sz="1100" b="1" kern="0" spc="200" dirty="0">
+                <a:solidFill>
+                  <a:srgbClr val="3FC6D6"/>
+                </a:solidFill>
+                <a:latin typeface="Microsoft YaHei" pitchFamily="34" charset="0"/>
+                <a:ea typeface="Microsoft YaHei" pitchFamily="34" charset="-122"/>
+                <a:cs typeface="Microsoft YaHei" pitchFamily="34" charset="-120"/>
+              </a:rPr>
+              <a:t>OUR EXPLORATION ②</a:t>
+            </a:r>
+            <a:endParaRPr lang="en-US" sz="1100" dirty="0"/>
+          </a:p>
+        </p:txBody>
+      </p:sp>
+      <p:sp>
+        <p:nvSpPr>
+          <p:cNvPr id="351" name="Text 2"/>
+          <p:cNvSpPr/>
+          <p:nvPr/>
+        </p:nvSpPr>
+        <p:spPr>
+          <a:xfrm>
+            <a:off x="713232" y="548640"/>
+            <a:ext cx="8138160" cy="457200"/>
+          </a:xfrm>
+          <a:prstGeom prst="rect">
+            <a:avLst/>
+          </a:prstGeom>
+          <a:noFill/>
+          <a:ln/>
+        </p:spPr>
+        <p:txBody>
+          <a:bodyPr wrap="square" lIns="0" tIns="0" rIns="0" bIns="0" rtlCol="0" anchor="ctr"/>
+          <a:lstStyle/>
+          <a:p>
+            <a:pPr marL="0" indent="0">
+              <a:buNone/>
+            </a:pPr>
+            <a:r>
+              <a:rPr lang="en-US" sz="2400" b="1" dirty="0">
+                <a:solidFill>
+                  <a:srgbClr val="FFFFFF"/>
+                </a:solidFill>
+                <a:latin typeface="Microsoft YaHei" pitchFamily="34" charset="0"/>
+                <a:ea typeface="Microsoft YaHei" pitchFamily="34" charset="-122"/>
+                <a:cs typeface="Microsoft YaHei" pitchFamily="34" charset="-120"/>
+              </a:rPr>
+              <a:t>目标函数修正：池从“容量门槛”变成“旋钮”</a:t>
+            </a:r>
+            <a:endParaRPr lang="en-US" sz="2400" dirty="0"/>
+          </a:p>
+        </p:txBody>
+      </p:sp>
+      <p:sp>
+        <p:nvSpPr>
+          <p:cNvPr id="352" name="Text 3"/>
+          <p:cNvSpPr/>
+          <p:nvPr/>
+        </p:nvSpPr>
+        <p:spPr>
+          <a:xfrm>
+            <a:off x="548640" y="1170432"/>
+            <a:ext cx="8046720" cy="320040"/>
+          </a:xfrm>
+          <a:prstGeom prst="rect">
+            <a:avLst/>
+          </a:prstGeom>
+          <a:noFill/>
+          <a:ln/>
+        </p:spPr>
+        <p:txBody>
+          <a:bodyPr wrap="square" lIns="0" tIns="0" rIns="0" bIns="0" rtlCol="0" anchor="ctr"/>
+          <a:lstStyle/>
+          <a:p>
+            <a:pPr marL="0" indent="0">
+              <a:buNone/>
+            </a:pPr>
+            <a:r>
+              <a:rPr lang="en-US" sz="1300" dirty="0">
+                <a:solidFill>
+                  <a:srgbClr val="FFFFFF"/>
+                </a:solidFill>
+                <a:latin typeface="Microsoft YaHei" pitchFamily="34" charset="0"/>
+                <a:ea typeface="Microsoft YaHei" pitchFamily="34" charset="-122"/>
+                <a:cs typeface="Microsoft YaHei" pitchFamily="34" charset="-120"/>
+              </a:rPr>
+              <a:t>异步之后，池的收益曲线出现三段结构（200K 上下文场景）：</a:t>
+            </a:r>
+            <a:endParaRPr lang="en-US" sz="1300" dirty="0"/>
+          </a:p>
+        </p:txBody>
+      </p:sp>
+      <p:sp>
+        <p:nvSpPr>
+          <p:cNvPr id="353" name="Shape 4"/>
+          <p:cNvSpPr/>
+          <p:nvPr/>
+        </p:nvSpPr>
+        <p:spPr>
+          <a:xfrm>
+            <a:off x="548640" y="1600200"/>
+            <a:ext cx="2468880" cy="457200"/>
+          </a:xfrm>
+          <a:prstGeom prst="roundRect">
+            <a:avLst>
+              <a:gd name="adj" fmla="val 50000"/>
+            </a:avLst>
+          </a:prstGeom>
+          <a:solidFill>
+            <a:srgbClr val="D9A82C"/>
+          </a:solidFill>
+          <a:ln/>
+        </p:spPr>
+        <p:txBody>
+          <a:bodyPr/>
+          <a:p/>
+        </p:txBody>
+      </p:sp>
+      <p:sp>
+        <p:nvSpPr>
+          <p:cNvPr id="354" name="Text 5"/>
+          <p:cNvSpPr/>
+          <p:nvPr/>
+        </p:nvSpPr>
+        <p:spPr>
+          <a:xfrm>
+            <a:off x="621792" y="1618488"/>
+            <a:ext cx="2322576" cy="420624"/>
+          </a:xfrm>
+          <a:prstGeom prst="rect">
+            <a:avLst/>
+          </a:prstGeom>
+          <a:noFill/>
+          <a:ln/>
+        </p:spPr>
+        <p:txBody>
+          <a:bodyPr wrap="square" lIns="0" tIns="0" rIns="0" bIns="0" rtlCol="0" anchor="ctr"/>
+          <a:lstStyle/>
+          <a:p>
+            <a:pPr marL="0" indent="0" algn="ctr">
+              <a:buNone/>
+            </a:pPr>
+            <a:r>
+              <a:rPr lang="en-US" sz="950" b="1" dirty="0">
+                <a:solidFill>
+                  <a:srgbClr val="FFFFFF"/>
+                </a:solidFill>
+                <a:latin typeface="Microsoft YaHei" pitchFamily="34" charset="0"/>
+                <a:ea typeface="Microsoft YaHei" pitchFamily="34" charset="-122"/>
+                <a:cs typeface="Microsoft YaHei" pitchFamily="34" charset="-120"/>
+              </a:rPr>
+              <a:t>池 &lt; 工作集（~42K）</a:t>
+            </a:r>
+            <a:endParaRPr lang="en-US" sz="950" dirty="0"/>
+          </a:p>
+        </p:txBody>
+      </p:sp>
+      <p:sp>
+        <p:nvSpPr>
+          <p:cNvPr id="355" name="Text 6"/>
+          <p:cNvSpPr/>
+          <p:nvPr/>
+        </p:nvSpPr>
+        <p:spPr>
+          <a:xfrm>
+            <a:off x="548640" y="2121408"/>
+            <a:ext cx="2468880" cy="640080"/>
+          </a:xfrm>
+          <a:prstGeom prst="rect">
+            <a:avLst/>
+          </a:prstGeom>
+          <a:noFill/>
+          <a:ln/>
+        </p:spPr>
+        <p:txBody>
+          <a:bodyPr wrap="square" lIns="0" tIns="0" rIns="0" bIns="0" rtlCol="0" anchor="ctr"/>
+          <a:lstStyle/>
+          <a:p>
+            <a:pPr marL="0" indent="0">
+              <a:buNone/>
+            </a:pPr>
+            <a:r>
+              <a:rPr lang="en-US" sz="900" dirty="0">
+                <a:solidFill>
+                  <a:srgbClr val="A9BECC"/>
+                </a:solidFill>
+                <a:latin typeface="Microsoft YaHei" pitchFamily="34" charset="0"/>
+                <a:ea typeface="Microsoft YaHei" pitchFamily="34" charset="-122"/>
+                <a:cs typeface="Microsoft YaHei" pitchFamily="34" charset="-120"/>
+              </a:rPr>
+              <a:t>每步都在搬运——全靠流水硬扛</a:t>
+            </a:r>
+            <a:endParaRPr lang="en-US" sz="900" dirty="0"/>
+          </a:p>
+        </p:txBody>
+      </p:sp>
+      <p:sp>
+        <p:nvSpPr>
+          <p:cNvPr id="356" name="Shape 7"/>
+          <p:cNvSpPr/>
+          <p:nvPr/>
+        </p:nvSpPr>
+        <p:spPr>
+          <a:xfrm>
+            <a:off x="3063240" y="1600200"/>
+            <a:ext cx="1600200" cy="457200"/>
+          </a:xfrm>
+          <a:prstGeom prst="roundRect">
+            <a:avLst>
+              <a:gd name="adj" fmla="val 50000"/>
+            </a:avLst>
+          </a:prstGeom>
+          <a:solidFill>
+            <a:srgbClr val="0E7E86"/>
+          </a:solidFill>
+          <a:ln/>
+        </p:spPr>
+        <p:txBody>
+          <a:bodyPr/>
+          <a:p/>
+        </p:txBody>
+      </p:sp>
+      <p:sp>
+        <p:nvSpPr>
+          <p:cNvPr id="357" name="Text 8"/>
+          <p:cNvSpPr/>
+          <p:nvPr/>
+        </p:nvSpPr>
+        <p:spPr>
+          <a:xfrm>
+            <a:off x="3136392" y="1618488"/>
+            <a:ext cx="1453896" cy="420624"/>
+          </a:xfrm>
+          <a:prstGeom prst="rect">
+            <a:avLst/>
+          </a:prstGeom>
+          <a:noFill/>
+          <a:ln/>
+        </p:spPr>
+        <p:txBody>
+          <a:bodyPr wrap="square" lIns="0" tIns="0" rIns="0" bIns="0" rtlCol="0" anchor="ctr"/>
+          <a:lstStyle/>
+          <a:p>
+            <a:pPr marL="0" indent="0" algn="ctr">
+              <a:buNone/>
+            </a:pPr>
+            <a:r>
+              <a:rPr lang="en-US" sz="950" b="1" dirty="0">
+                <a:solidFill>
+                  <a:srgbClr val="FFFFFF"/>
+                </a:solidFill>
+                <a:latin typeface="Microsoft YaHei" pitchFamily="34" charset="0"/>
+                <a:ea typeface="Microsoft YaHei" pitchFamily="34" charset="-122"/>
+                <a:cs typeface="Microsoft YaHei" pitchFamily="34" charset="-120"/>
+              </a:rPr>
+              <a:t>甜点区 42K-56K</a:t>
+            </a:r>
+            <a:endParaRPr lang="en-US" sz="950" dirty="0"/>
+          </a:p>
+        </p:txBody>
+      </p:sp>
+      <p:sp>
+        <p:nvSpPr>
+          <p:cNvPr id="358" name="Text 9"/>
+          <p:cNvSpPr/>
+          <p:nvPr/>
+        </p:nvSpPr>
+        <p:spPr>
+          <a:xfrm>
+            <a:off x="3063240" y="2121408"/>
+            <a:ext cx="1600200" cy="640080"/>
+          </a:xfrm>
+          <a:prstGeom prst="rect">
+            <a:avLst/>
+          </a:prstGeom>
+          <a:noFill/>
+          <a:ln/>
+        </p:spPr>
+        <p:txBody>
+          <a:bodyPr wrap="square" lIns="0" tIns="0" rIns="0" bIns="0" rtlCol="0" anchor="ctr"/>
+          <a:lstStyle/>
+          <a:p>
+            <a:pPr marL="0" indent="0">
+              <a:buNone/>
+            </a:pPr>
+            <a:r>
+              <a:rPr lang="en-US" sz="900" dirty="0">
+                <a:solidFill>
+                  <a:srgbClr val="A9BECC"/>
+                </a:solidFill>
+                <a:latin typeface="Microsoft YaHei" pitchFamily="34" charset="0"/>
+                <a:ea typeface="Microsoft YaHei" pitchFamily="34" charset="-122"/>
+                <a:cs typeface="Microsoft YaHei" pitchFamily="34" charset="-120"/>
+              </a:rPr>
+              <a:t>常规轮次零搬运</a:t>
+            </a:r>
+            <a:endParaRPr lang="en-US" sz="900" dirty="0"/>
+          </a:p>
+        </p:txBody>
+      </p:sp>
+      <p:sp>
+        <p:nvSpPr>
+          <p:cNvPr id="359" name="Shape 10"/>
+          <p:cNvSpPr/>
+          <p:nvPr/>
+        </p:nvSpPr>
+        <p:spPr>
+          <a:xfrm>
+            <a:off x="4709160" y="1600200"/>
+            <a:ext cx="1600200" cy="457200"/>
+          </a:xfrm>
+          <a:prstGeom prst="roundRect">
+            <a:avLst>
+              <a:gd name="adj" fmla="val 50000"/>
+            </a:avLst>
+          </a:prstGeom>
+          <a:solidFill>
+            <a:srgbClr val="0E7E86">
+              <a:alpha val="100000"/>
+            </a:srgbClr>
+          </a:solidFill>
+          <a:ln/>
+        </p:spPr>
+        <p:txBody>
+          <a:bodyPr/>
+          <a:p/>
+        </p:txBody>
+      </p:sp>
+      <p:sp>
+        <p:nvSpPr>
+          <p:cNvPr id="360" name="Text 11"/>
+          <p:cNvSpPr/>
+          <p:nvPr/>
+        </p:nvSpPr>
+        <p:spPr>
+          <a:xfrm>
+            <a:off x="4782312" y="1618488"/>
+            <a:ext cx="1453896" cy="420624"/>
+          </a:xfrm>
+          <a:prstGeom prst="rect">
+            <a:avLst/>
+          </a:prstGeom>
+          <a:noFill/>
+          <a:ln/>
+        </p:spPr>
+        <p:txBody>
+          <a:bodyPr wrap="square" lIns="0" tIns="0" rIns="0" bIns="0" rtlCol="0" anchor="ctr"/>
+          <a:lstStyle/>
+          <a:p>
+            <a:pPr marL="0" indent="0" algn="ctr">
+              <a:buNone/>
+            </a:pPr>
+            <a:r>
+              <a:rPr lang="en-US" sz="950" b="1" dirty="0">
+                <a:solidFill>
+                  <a:srgbClr val="FFFFFF"/>
+                </a:solidFill>
+                <a:latin typeface="Microsoft YaHei" pitchFamily="34" charset="0"/>
+                <a:ea typeface="Microsoft YaHei" pitchFamily="34" charset="-122"/>
+                <a:cs typeface="Microsoft YaHei" pitchFamily="34" charset="-120"/>
+              </a:rPr>
+              <a:t>优选段 56K-96K</a:t>
+            </a:r>
+            <a:endParaRPr lang="en-US" sz="950" dirty="0"/>
+          </a:p>
+        </p:txBody>
+      </p:sp>
+      <p:sp>
+        <p:nvSpPr>
+          <p:cNvPr id="361" name="Text 12"/>
+          <p:cNvSpPr/>
+          <p:nvPr/>
+        </p:nvSpPr>
+        <p:spPr>
+          <a:xfrm>
+            <a:off x="4709160" y="2121408"/>
+            <a:ext cx="1600200" cy="640080"/>
+          </a:xfrm>
+          <a:prstGeom prst="rect">
+            <a:avLst/>
+          </a:prstGeom>
+          <a:noFill/>
+          <a:ln/>
+        </p:spPr>
+        <p:txBody>
+          <a:bodyPr wrap="square" lIns="0" tIns="0" rIns="0" bIns="0" rtlCol="0" anchor="ctr"/>
+          <a:lstStyle/>
+          <a:p>
+            <a:pPr marL="0" indent="0">
+              <a:buNone/>
+            </a:pPr>
+            <a:r>
+              <a:rPr lang="en-US" sz="900" dirty="0">
+                <a:solidFill>
+                  <a:srgbClr val="A9BECC"/>
+                </a:solidFill>
+                <a:latin typeface="Microsoft YaHei" pitchFamily="34" charset="0"/>
+                <a:ea typeface="Microsoft YaHei" pitchFamily="34" charset="-122"/>
+                <a:cs typeface="Microsoft YaHei" pitchFamily="34" charset="-120"/>
+              </a:rPr>
+              <a:t>覆盖大多数会话</a:t>
+            </a:r>
+            <a:endParaRPr lang="en-US" sz="900" dirty="0"/>
+          </a:p>
+        </p:txBody>
+      </p:sp>
+      <p:sp>
+        <p:nvSpPr>
+          <p:cNvPr id="362" name="Shape 13"/>
+          <p:cNvSpPr/>
+          <p:nvPr/>
+        </p:nvSpPr>
+        <p:spPr>
+          <a:xfrm>
+            <a:off x="6355080" y="1600200"/>
+            <a:ext cx="2240280" cy="457200"/>
+          </a:xfrm>
+          <a:prstGeom prst="roundRect">
+            <a:avLst>
+              <a:gd name="adj" fmla="val 50000"/>
+            </a:avLst>
+          </a:prstGeom>
+          <a:solidFill>
+            <a:srgbClr val="5A7789"/>
+          </a:solidFill>
+          <a:ln/>
+        </p:spPr>
+        <p:txBody>
+          <a:bodyPr/>
+          <a:p/>
+        </p:txBody>
+      </p:sp>
+      <p:sp>
+        <p:nvSpPr>
+          <p:cNvPr id="363" name="Text 14"/>
+          <p:cNvSpPr/>
+          <p:nvPr/>
+        </p:nvSpPr>
+        <p:spPr>
+          <a:xfrm>
+            <a:off x="6428232" y="1618488"/>
+            <a:ext cx="2093976" cy="420624"/>
+          </a:xfrm>
+          <a:prstGeom prst="rect">
+            <a:avLst/>
+          </a:prstGeom>
+          <a:noFill/>
+          <a:ln/>
+        </p:spPr>
+        <p:txBody>
+          <a:bodyPr wrap="square" lIns="0" tIns="0" rIns="0" bIns="0" rtlCol="0" anchor="ctr"/>
+          <a:lstStyle/>
+          <a:p>
+            <a:pPr marL="0" indent="0" algn="ctr">
+              <a:buNone/>
+            </a:pPr>
+            <a:r>
+              <a:rPr lang="en-US" sz="950" b="1" dirty="0">
+                <a:solidFill>
+                  <a:srgbClr val="FFFFFF"/>
+                </a:solidFill>
+                <a:latin typeface="Microsoft YaHei" pitchFamily="34" charset="0"/>
+                <a:ea typeface="Microsoft YaHei" pitchFamily="34" charset="-122"/>
+                <a:cs typeface="Microsoft YaHei" pitchFamily="34" charset="-120"/>
+              </a:rPr>
+              <a:t>&gt; 96K（请求线上）</a:t>
+            </a:r>
+            <a:endParaRPr lang="en-US" sz="950" dirty="0"/>
+          </a:p>
+        </p:txBody>
+      </p:sp>
+      <p:sp>
+        <p:nvSpPr>
+          <p:cNvPr id="364" name="Text 15"/>
+          <p:cNvSpPr/>
+          <p:nvPr/>
+        </p:nvSpPr>
+        <p:spPr>
+          <a:xfrm>
+            <a:off x="6355080" y="2121408"/>
+            <a:ext cx="2240280" cy="640080"/>
+          </a:xfrm>
+          <a:prstGeom prst="rect">
+            <a:avLst/>
+          </a:prstGeom>
+          <a:noFill/>
+          <a:ln/>
+        </p:spPr>
+        <p:txBody>
+          <a:bodyPr wrap="square" lIns="0" tIns="0" rIns="0" bIns="0" rtlCol="0" anchor="ctr"/>
+          <a:lstStyle/>
+          <a:p>
+            <a:pPr marL="0" indent="0">
+              <a:buNone/>
+            </a:pPr>
+            <a:r>
+              <a:rPr lang="en-US" sz="900" dirty="0">
+                <a:solidFill>
+                  <a:srgbClr val="A9BECC"/>
+                </a:solidFill>
+                <a:latin typeface="Microsoft YaHei" pitchFamily="34" charset="0"/>
+                <a:ea typeface="Microsoft YaHei" pitchFamily="34" charset="-122"/>
+                <a:cs typeface="Microsoft YaHei" pitchFamily="34" charset="-120"/>
+              </a:rPr>
+              <a:t>边际收益骤降</a:t>
+            </a:r>
+            <a:endParaRPr lang="en-US" sz="900" dirty="0"/>
+          </a:p>
+        </p:txBody>
+      </p:sp>
+      <p:sp>
+        <p:nvSpPr>
+          <p:cNvPr id="365" name="Text 16"/>
+          <p:cNvSpPr/>
+          <p:nvPr/>
+        </p:nvSpPr>
+        <p:spPr>
+          <a:xfrm>
+            <a:off x="548640" y="2926080"/>
+            <a:ext cx="8046720" cy="502920"/>
+          </a:xfrm>
+          <a:prstGeom prst="rect">
+            <a:avLst/>
+          </a:prstGeom>
+          <a:noFill/>
+          <a:ln/>
+        </p:spPr>
+        <p:txBody>
+          <a:bodyPr wrap="square" lIns="0" tIns="0" rIns="0" bIns="0" rtlCol="0" anchor="ctr"/>
+          <a:lstStyle/>
+          <a:p>
+            <a:pPr marL="0" indent="0">
+              <a:buNone/>
+            </a:pPr>
+            <a:r>
+              <a:rPr lang="en-US" sz="1250" b="1" dirty="0">
+                <a:solidFill>
+                  <a:srgbClr val="8FD0F0"/>
+                </a:solidFill>
+                <a:latin typeface="Microsoft YaHei" pitchFamily="34" charset="0"/>
+                <a:ea typeface="Microsoft YaHei" pitchFamily="34" charset="-122"/>
+                <a:cs typeface="Microsoft YaHei" pitchFamily="34" charset="-120"/>
+              </a:rPr>
+              <a:t>实测：</a:t>
+            </a:r>
+            <a:r>
+              <a:rPr lang="en-US" sz="1250" dirty="0">
+                <a:solidFill>
+                  <a:srgbClr val="FFFFFF"/>
+                </a:solidFill>
+                <a:latin typeface="Microsoft YaHei" pitchFamily="34" charset="0"/>
+                <a:ea typeface="Microsoft YaHei" pitchFamily="34" charset="-122"/>
+                <a:cs typeface="Microsoft YaHei" pitchFamily="34" charset="-120"/>
+              </a:rPr>
+              <a:t>池 64K vs 51K 仅多撑约 8 轮会话——过了工作集线后，多买的池主要是“防深堆积”，而深堆积有流水兜底。</a:t>
+            </a:r>
+            <a:endParaRPr lang="en-US" sz="1250" dirty="0"/>
+          </a:p>
+        </p:txBody>
+      </p:sp>
+      <p:sp>
+        <p:nvSpPr>
+          <p:cNvPr id="366" name="Shape 17"/>
+          <p:cNvSpPr/>
+          <p:nvPr/>
+        </p:nvSpPr>
+        <p:spPr>
+          <a:xfrm>
+            <a:off x="548640" y="3566160"/>
+            <a:ext cx="8046720" cy="621792"/>
+          </a:xfrm>
+          <a:prstGeom prst="roundRect">
+            <a:avLst>
+              <a:gd name="adj" fmla="val 6100"/>
+            </a:avLst>
+          </a:prstGeom>
+          <a:solidFill>
+            <a:srgbClr val="23465C"/>
+          </a:solidFill>
+          <a:ln/>
+        </p:spPr>
+        <p:txBody>
+          <a:bodyPr/>
+          <a:p/>
+        </p:txBody>
+      </p:sp>
+      <p:sp>
+        <p:nvSpPr>
+          <p:cNvPr id="367" name="Text 18"/>
+          <p:cNvSpPr/>
+          <p:nvPr/>
+        </p:nvSpPr>
+        <p:spPr>
+          <a:xfrm>
+            <a:off x="777240" y="3611880"/>
+            <a:ext cx="7589520" cy="530352"/>
+          </a:xfrm>
+          <a:prstGeom prst="rect">
+            <a:avLst/>
+          </a:prstGeom>
+          <a:noFill/>
+          <a:ln/>
+        </p:spPr>
+        <p:txBody>
+          <a:bodyPr wrap="square" lIns="0" tIns="0" rIns="0" bIns="0" rtlCol="0" anchor="ctr"/>
+          <a:lstStyle/>
+          <a:p>
+            <a:pPr marL="0" indent="0">
+              <a:buNone/>
+            </a:pPr>
+            <a:r>
+              <a:rPr lang="en-US" sz="1200" dirty="0">
+                <a:solidFill>
+                  <a:srgbClr val="FFFFFF"/>
+                </a:solidFill>
+                <a:latin typeface="Microsoft YaHei" pitchFamily="34" charset="0"/>
+                <a:ea typeface="Microsoft YaHei" pitchFamily="34" charset="-122"/>
+                <a:cs typeface="Microsoft YaHei" pitchFamily="34" charset="-120"/>
+              </a:rPr>
+              <a:t>16GB 显存是零和的：每 1 GiB 给池，就少 1 GiB 给 KV 精度或权重档位——而精度影响每一轮。→ 浅池 + 深流水 + 高精度。</a:t>
+            </a:r>
+            <a:endParaRPr lang="en-US" sz="1200" dirty="0"/>
+          </a:p>
+        </p:txBody>
+      </p:sp>
+      <p:sp>
+        <p:nvSpPr>
+          <p:cNvPr id="368" name="Text 19"/>
+          <p:cNvSpPr/>
+          <p:nvPr/>
+        </p:nvSpPr>
+        <p:spPr>
+          <a:xfrm>
+            <a:off x="7874000" y="4826000"/>
+            <a:ext cx="1130300" cy="274320"/>
+          </a:xfrm>
+          <a:prstGeom prst="rect">
+            <a:avLst/>
+          </a:prstGeom>
+          <a:noFill/>
+          <a:ln/>
+        </p:spPr>
+        <p:txBody>
+          <a:bodyPr wrap="none" lIns="0" tIns="0" rIns="0" bIns="0" rtlCol="0" anchor="ctr"/>
+          <a:lstStyle/>
+          <a:p>
+            <a:pPr marL="0" indent="0" algn="r">
+              <a:buNone/>
+            </a:pPr>
+            <a:r>
+              <a:rPr b="1" sz="1000">
+                <a:solidFill>
+                  <a:srgbClr val="3FC6D6"/>
+                </a:solidFill>
+                <a:latin typeface="Microsoft YaHei"/>
+                <a:ea typeface="Microsoft YaHei"/>
+              </a:rPr>
+              <a:t>08</a:t>
+            </a:r>
+            <a:r>
+              <a:rPr sz="900">
+                <a:solidFill>
+                  <a:srgbClr val="8FA6B5"/>
+                </a:solidFill>
+                <a:latin typeface="Microsoft YaHei"/>
+                <a:ea typeface="Microsoft YaHei"/>
+              </a:rPr>
+              <a:t> / 18</a:t>
+            </a:r>
+            <a:endParaRPr lang="en-US" sz="1000" dirty="0"/>
+          </a:p>
+        </p:txBody>
+      </p:sp>
+      <p:sp>
+        <p:nvSpPr>
+          <p:cNvPr id="369" name="Text 20"/>
+          <p:cNvSpPr/>
+          <p:nvPr/>
+        </p:nvSpPr>
+        <p:spPr>
+          <a:xfrm>
+            <a:off x="457200" y="4828032"/>
+            <a:ext cx="5486400" cy="228600"/>
+          </a:xfrm>
+          <a:prstGeom prst="rect">
+            <a:avLst/>
+          </a:prstGeom>
+          <a:noFill/>
+          <a:ln/>
+        </p:spPr>
+        <p:txBody>
+          <a:bodyPr wrap="square" lIns="0" tIns="0" rIns="0" bIns="0" rtlCol="0" anchor="ctr"/>
+          <a:lstStyle/>
+          <a:p>
+            <a:pPr marL="0" indent="0">
+              <a:buNone/>
+            </a:pPr>
+            <a:r>
+              <a:rPr lang="en-US" sz="900" dirty="0">
+                <a:solidFill>
+                  <a:srgbClr val="A9BECC"/>
+                </a:solidFill>
+                <a:latin typeface="Microsoft YaHei" pitchFamily="34" charset="0"/>
+                <a:ea typeface="Microsoft YaHei" pitchFamily="34" charset="-122"/>
+                <a:cs typeface="Microsoft YaHei" pitchFamily="34" charset="-120"/>
+              </a:rPr>
+              <a:t>站在 KVMem 的肩膀上 · 异步页流水</a:t>
+            </a:r>
+            <a:endParaRPr lang="en-US" sz="900" dirty="0"/>
+          </a:p>
+        </p:txBody>
+      </p:sp>
+      <p:sp>
+        <p:nvSpPr>
+          <p:cNvPr id="370" name="Rectangle 369"/>
+          <p:cNvSpPr/>
+          <p:nvPr/>
+        </p:nvSpPr>
+        <p:spPr>
+          <a:xfrm>
+            <a:off x="457200" y="4711700"/>
+            <a:ext cx="8547100" cy="9525"/>
+          </a:xfrm>
+          <a:prstGeom prst="rect">
+            <a:avLst/>
+          </a:prstGeom>
+          <a:solidFill>
+            <a:srgbClr val="23465C"/>
+          </a:solidFill>
+          <a:ln>
+            <a:noFill/>
+          </a:ln>
+          <a:effectLst/>
+        </p:spPr>
+        <p:style>
+          <a:lnRef idx="1">
+            <a:schemeClr val="accent1"/>
+          </a:lnRef>
+          <a:fillRef idx="3">
+            <a:schemeClr val="accent1"/>
+          </a:fillRef>
+          <a:effectRef idx="2">
+            <a:schemeClr val="accent1"/>
+          </a:effectRef>
+          <a:fontRef idx="minor">
+            <a:schemeClr val="lt1"/>
+          </a:fontRef>
+        </p:style>
+        <p:txBody>
+          <a:bodyPr rtlCol="0" anchor="ctr"/>
+          <a:lstStyle/>
+          <a:p>
+            <a:pPr algn="ctr"/>
+          </a:p>
+        </p:txBody>
+      </p:sp>
+    </p:spTree>
+  </p:cSld>
+  <p:clrMapOvr>
+    <a:masterClrMapping/>
+  </p:clrMapOvr>
+</p:sld>
+</file>
+
+<file path=ppt/slides/slide12.xml><?xml version="1.0" encoding="utf-8"?>
+<p:sld xmlns:p="http://schemas.openxmlformats.org/presentationml/2006/main" xmlns:a="http://schemas.openxmlformats.org/drawingml/2006/main">
+  <p:cSld name="Slide 9">
+    <p:bg>
+      <p:bgPr>
+        <a:solidFill>
+          <a:srgbClr val="0B1F33"/>
+        </a:solidFill>
+      </p:bgPr>
+    </p:bg>
+    <p:spTree>
+      <p:nvGrpSpPr>
+        <p:cNvPr id="370" name=""/>
+        <p:cNvGrpSpPr/>
+        <p:nvPr/>
+      </p:nvGrpSpPr>
+      <p:grpSpPr>
+        <a:xfrm>
+          <a:off x="0" y="0"/>
+          <a:ext cx="0" cy="0"/>
+          <a:chOff x="0" y="0"/>
+          <a:chExt cx="0" cy="0"/>
+        </a:xfrm>
+      </p:grpSpPr>
+      <p:sp>
+        <p:nvSpPr>
+          <p:cNvPr id="371" name="Shape 0"/>
+          <p:cNvSpPr/>
+          <p:nvPr/>
+        </p:nvSpPr>
+        <p:spPr>
+          <a:xfrm>
+            <a:off x="457200" y="384048"/>
+            <a:ext cx="109728" cy="457200"/>
+          </a:xfrm>
+          <a:prstGeom prst="roundRect">
+            <a:avLst>
+              <a:gd name="adj" fmla="val 50000"/>
+            </a:avLst>
+          </a:prstGeom>
+          <a:solidFill>
+            <a:srgbClr val="0E7E86"/>
+          </a:solidFill>
+          <a:ln/>
+        </p:spPr>
+        <p:txBody>
+          <a:bodyPr/>
+          <a:p/>
+        </p:txBody>
+      </p:sp>
+      <p:sp>
+        <p:nvSpPr>
+          <p:cNvPr id="372" name="Text 1"/>
+          <p:cNvSpPr/>
+          <p:nvPr/>
+        </p:nvSpPr>
+        <p:spPr>
+          <a:xfrm>
+            <a:off x="713232" y="310896"/>
+            <a:ext cx="7955280" cy="228600"/>
+          </a:xfrm>
+          <a:prstGeom prst="rect">
+            <a:avLst/>
+          </a:prstGeom>
+          <a:noFill/>
+          <a:ln/>
+        </p:spPr>
+        <p:txBody>
+          <a:bodyPr wrap="square" lIns="0" tIns="0" rIns="0" bIns="0" rtlCol="0" anchor="ctr"/>
+          <a:lstStyle/>
+          <a:p>
+            <a:pPr marL="0" indent="0">
+              <a:buNone/>
+            </a:pPr>
+            <a:r>
+              <a:rPr lang="en-US" sz="1100" b="1" kern="0" spc="200" dirty="0">
+                <a:solidFill>
+                  <a:srgbClr val="3FC6D6"/>
+                </a:solidFill>
+                <a:latin typeface="Microsoft YaHei" pitchFamily="34" charset="0"/>
+                <a:ea typeface="Microsoft YaHei" pitchFamily="34" charset="-122"/>
+                <a:cs typeface="Microsoft YaHei" pitchFamily="34" charset="-120"/>
+              </a:rPr>
+              <a:t>OUR EXPLORATION ③</a:t>
+            </a:r>
+            <a:endParaRPr lang="en-US" sz="1100" dirty="0"/>
+          </a:p>
+        </p:txBody>
+      </p:sp>
+      <p:sp>
+        <p:nvSpPr>
+          <p:cNvPr id="373" name="Text 2"/>
+          <p:cNvSpPr/>
+          <p:nvPr/>
+        </p:nvSpPr>
+        <p:spPr>
+          <a:xfrm>
+            <a:off x="713232" y="548640"/>
+            <a:ext cx="8138160" cy="457200"/>
+          </a:xfrm>
+          <a:prstGeom prst="rect">
+            <a:avLst/>
+          </a:prstGeom>
+          <a:noFill/>
+          <a:ln/>
+        </p:spPr>
+        <p:txBody>
+          <a:bodyPr wrap="square" lIns="0" tIns="0" rIns="0" bIns="0" rtlCol="0" anchor="ctr"/>
+          <a:lstStyle/>
+          <a:p>
+            <a:pPr marL="0" indent="0">
+              <a:buNone/>
+            </a:pPr>
+            <a:r>
+              <a:rPr lang="en-US" sz="2400" b="1" dirty="0">
+                <a:solidFill>
+                  <a:srgbClr val="FFFFFF"/>
+                </a:solidFill>
+                <a:latin typeface="Microsoft YaHei" pitchFamily="34" charset="0"/>
+                <a:ea typeface="Microsoft YaHei" pitchFamily="34" charset="-122"/>
+                <a:cs typeface="Microsoft YaHei" pitchFamily="34" charset="-120"/>
+              </a:rPr>
+              <a:t>正确性工程：给“跑腿”立三条规矩</a:t>
+            </a:r>
+            <a:endParaRPr lang="en-US" sz="2400" dirty="0"/>
+          </a:p>
+        </p:txBody>
+      </p:sp>
+      <p:sp>
+        <p:nvSpPr>
+          <p:cNvPr id="374" name="Text 3"/>
+          <p:cNvSpPr/>
+          <p:nvPr/>
+        </p:nvSpPr>
+        <p:spPr>
+          <a:xfrm>
+            <a:off x="548640" y="1060704"/>
+            <a:ext cx="8046720" cy="365760"/>
+          </a:xfrm>
+          <a:prstGeom prst="rect">
+            <a:avLst/>
+          </a:prstGeom>
+          <a:noFill/>
+          <a:ln/>
+        </p:spPr>
+        <p:txBody>
+          <a:bodyPr wrap="square" lIns="0" tIns="0" rIns="0" bIns="0" rtlCol="0" anchor="ctr"/>
+          <a:lstStyle/>
+          <a:p>
+            <a:pPr marL="0" indent="0">
+              <a:buNone/>
+            </a:pPr>
+            <a:r>
+              <a:rPr lang="en-US" sz="1200" dirty="0">
+                <a:solidFill>
+                  <a:srgbClr val="FFFFFF"/>
+                </a:solidFill>
+                <a:latin typeface="Microsoft YaHei" pitchFamily="34" charset="0"/>
+                <a:ea typeface="Microsoft YaHei" pitchFamily="34" charset="-122"/>
+                <a:cs typeface="Microsoft YaHei" pitchFamily="34" charset="-120"/>
+              </a:rPr>
+              <a:t>异步 = 请了跑腿小哥（见第 7 页）。规矩立不好会丢件、会搬错——所以我们给他立三条规矩，外加一张“考卷”：</a:t>
+            </a:r>
+            <a:endParaRPr lang="en-US" sz="1200" dirty="0"/>
+          </a:p>
+        </p:txBody>
+      </p:sp>
+      <p:sp>
+        <p:nvSpPr>
+          <p:cNvPr id="375" name="Text 4"/>
+          <p:cNvSpPr/>
+          <p:nvPr/>
+        </p:nvSpPr>
+        <p:spPr>
+          <a:xfrm>
+            <a:off x="548640" y="1517904"/>
+            <a:ext cx="8046720" cy="530352"/>
+          </a:xfrm>
+          <a:prstGeom prst="rect">
+            <a:avLst/>
+          </a:prstGeom>
+          <a:noFill/>
+          <a:ln/>
+        </p:spPr>
+        <p:txBody>
+          <a:bodyPr wrap="square" lIns="0" tIns="0" rIns="0" bIns="0" rtlCol="0" anchor="ctr"/>
+          <a:lstStyle/>
+          <a:p>
+            <a:pPr marL="0" indent="0">
+              <a:buNone/>
+            </a:pPr>
+            <a:r>
+              <a:rPr lang="en-US" sz="1150" b="1" dirty="0">
+                <a:solidFill>
+                  <a:srgbClr val="8FD0F0"/>
+                </a:solidFill>
+                <a:latin typeface="Microsoft YaHei" pitchFamily="34" charset="0"/>
+                <a:ea typeface="Microsoft YaHei" pitchFamily="34" charset="-122"/>
+                <a:cs typeface="Microsoft YaHei" pitchFamily="34" charset="-120"/>
+              </a:rPr>
+              <a:t>规矩一：正在用的书不能搬：</a:t>
+            </a:r>
+            <a:r>
+              <a:rPr lang="en-US" sz="1150" dirty="0">
+                <a:solidFill>
+                  <a:srgbClr val="FFFFFF"/>
+                </a:solidFill>
+                <a:latin typeface="Microsoft YaHei" pitchFamily="34" charset="0"/>
+                <a:ea typeface="Microsoft YaHei" pitchFamily="34" charset="-122"/>
+                <a:cs typeface="Microsoft YaHei" pitchFamily="34" charset="-120"/>
+              </a:rPr>
+              <a:t>引擎的“施工图”在启动时就画定（捕获期），运行中不许改——要改就重启，边界清清楚楚</a:t>
+            </a:r>
+            <a:endParaRPr lang="en-US" sz="1150" dirty="0"/>
+          </a:p>
+        </p:txBody>
+      </p:sp>
+      <p:sp>
+        <p:nvSpPr>
+          <p:cNvPr id="376" name="Text 5"/>
+          <p:cNvSpPr/>
+          <p:nvPr/>
+        </p:nvSpPr>
+        <p:spPr>
+          <a:xfrm>
+            <a:off x="548640" y="2084832"/>
+            <a:ext cx="8046720" cy="530352"/>
+          </a:xfrm>
+          <a:prstGeom prst="rect">
+            <a:avLst/>
+          </a:prstGeom>
+          <a:noFill/>
+          <a:ln/>
+        </p:spPr>
+        <p:txBody>
+          <a:bodyPr wrap="square" lIns="0" tIns="0" rIns="0" bIns="0" rtlCol="0" anchor="ctr"/>
+          <a:lstStyle/>
+          <a:p>
+            <a:pPr marL="0" indent="0">
+              <a:buNone/>
+            </a:pPr>
+            <a:r>
+              <a:rPr lang="en-US" sz="1150" b="1" dirty="0">
+                <a:solidFill>
+                  <a:srgbClr val="8FD0F0"/>
+                </a:solidFill>
+                <a:latin typeface="Microsoft YaHei" pitchFamily="34" charset="0"/>
+                <a:ea typeface="Microsoft YaHei" pitchFamily="34" charset="-122"/>
+                <a:cs typeface="Microsoft YaHei" pitchFamily="34" charset="-120"/>
+              </a:rPr>
+              <a:t>规矩二：货没交稳，旧的不扔：</a:t>
+            </a:r>
+            <a:r>
+              <a:rPr lang="en-US" sz="1150" dirty="0">
+                <a:solidFill>
+                  <a:srgbClr val="FFFFFF"/>
+                </a:solidFill>
+                <a:latin typeface="Microsoft YaHei" pitchFamily="34" charset="0"/>
+                <a:ea typeface="Microsoft YaHei" pitchFamily="34" charset="-122"/>
+                <a:cs typeface="Microsoft YaHei" pitchFamily="34" charset="-120"/>
+              </a:rPr>
+              <a:t>新副本发布之前，旧的那一份永远不许丢——任何时候都有一份“唯一有效”的数据在手</a:t>
+            </a:r>
+            <a:endParaRPr lang="en-US" sz="1150" dirty="0"/>
+          </a:p>
+        </p:txBody>
+      </p:sp>
+      <p:sp>
+        <p:nvSpPr>
+          <p:cNvPr id="377" name="Text 6"/>
+          <p:cNvSpPr/>
+          <p:nvPr/>
+        </p:nvSpPr>
+        <p:spPr>
+          <a:xfrm>
+            <a:off x="548640" y="2651760"/>
+            <a:ext cx="8046720" cy="530352"/>
+          </a:xfrm>
+          <a:prstGeom prst="rect">
+            <a:avLst/>
+          </a:prstGeom>
+          <a:noFill/>
+          <a:ln/>
+        </p:spPr>
+        <p:txBody>
+          <a:bodyPr wrap="square" lIns="0" tIns="0" rIns="0" bIns="0" rtlCol="0" anchor="ctr"/>
+          <a:lstStyle/>
+          <a:p>
+            <a:pPr marL="0" indent="0">
+              <a:buNone/>
+            </a:pPr>
+            <a:r>
+              <a:rPr lang="en-US" sz="1150" b="1" dirty="0">
+                <a:solidFill>
+                  <a:srgbClr val="8FD0F0"/>
+                </a:solidFill>
+                <a:latin typeface="Microsoft YaHei" pitchFamily="34" charset="0"/>
+                <a:ea typeface="Microsoft YaHei" pitchFamily="34" charset="-122"/>
+                <a:cs typeface="Microsoft YaHei" pitchFamily="34" charset="-120"/>
+              </a:rPr>
+              <a:t>规矩三：订单取消，已出发的必须跑完：</a:t>
+            </a:r>
+            <a:r>
+              <a:rPr lang="en-US" sz="1150" dirty="0">
+                <a:solidFill>
+                  <a:srgbClr val="FFFFFF"/>
+                </a:solidFill>
+                <a:latin typeface="Microsoft YaHei" pitchFamily="34" charset="0"/>
+                <a:ea typeface="Microsoft YaHei" pitchFamily="34" charset="-122"/>
+                <a:cs typeface="Microsoft YaHei" pitchFamily="34" charset="-120"/>
+              </a:rPr>
+              <a:t>请求可以取消，但已经在路上的搬运必须排空才能收账——不收“半路失踪”的账</a:t>
+            </a:r>
+            <a:endParaRPr lang="en-US" sz="1150" dirty="0"/>
+          </a:p>
+        </p:txBody>
+      </p:sp>
+      <p:sp>
+        <p:nvSpPr>
+          <p:cNvPr id="378" name="Shape 7"/>
+          <p:cNvSpPr/>
+          <p:nvPr/>
+        </p:nvSpPr>
+        <p:spPr>
+          <a:xfrm>
+            <a:off x="548640" y="3291840"/>
+            <a:ext cx="8046720" cy="658368"/>
+          </a:xfrm>
+          <a:prstGeom prst="roundRect">
+            <a:avLst>
+              <a:gd name="adj" fmla="val 5800"/>
+            </a:avLst>
+          </a:prstGeom>
+          <a:solidFill>
+            <a:srgbClr val="16324A"/>
+          </a:solidFill>
+          <a:ln/>
+        </p:spPr>
+        <p:txBody>
+          <a:bodyPr/>
+          <a:p/>
+        </p:txBody>
+      </p:sp>
+      <p:sp>
+        <p:nvSpPr>
+          <p:cNvPr id="379" name="Text 8"/>
+          <p:cNvSpPr/>
+          <p:nvPr/>
+        </p:nvSpPr>
+        <p:spPr>
+          <a:xfrm>
+            <a:off x="777240" y="3364992"/>
+            <a:ext cx="7589520" cy="512064"/>
+          </a:xfrm>
+          <a:prstGeom prst="rect">
+            <a:avLst/>
+          </a:prstGeom>
+          <a:noFill/>
+          <a:ln/>
+        </p:spPr>
+        <p:txBody>
+          <a:bodyPr wrap="square" lIns="0" tIns="0" rIns="0" bIns="0" rtlCol="0" anchor="ctr"/>
+          <a:lstStyle/>
+          <a:p>
+            <a:pPr marL="0" indent="0">
+              <a:buNone/>
+            </a:pPr>
+            <a:r>
+              <a:rPr lang="en-US" sz="1150" b="1" dirty="0">
+                <a:solidFill>
+                  <a:srgbClr val="8FD0F0"/>
+                </a:solidFill>
+                <a:latin typeface="Microsoft YaHei" pitchFamily="34" charset="0"/>
+                <a:ea typeface="Microsoft YaHei" pitchFamily="34" charset="-122"/>
+                <a:cs typeface="Microsoft YaHei" pitchFamily="34" charset="-120"/>
+              </a:rPr>
+              <a:t>那张“考卷”（无损门 A2）：</a:t>
+            </a:r>
+            <a:r>
+              <a:rPr lang="en-US" sz="1150" dirty="0">
+                <a:solidFill>
+                  <a:srgbClr val="FFFFFF"/>
+                </a:solidFill>
+                <a:latin typeface="Microsoft YaHei" pitchFamily="34" charset="0"/>
+                <a:ea typeface="Microsoft YaHei" pitchFamily="34" charset="-122"/>
+                <a:cs typeface="Microsoft YaHei" pitchFamily="34" charset="-120"/>
+              </a:rPr>
+              <a:t>同一道题，“池内”与“首次超池”两条路径的答卷</a:t>
+            </a:r>
+            <a:r>
+              <a:rPr lang="en-US" sz="1150" b="1" dirty="0">
+                <a:solidFill>
+                  <a:srgbClr val="FFFFFF"/>
+                </a:solidFill>
+                <a:latin typeface="Microsoft YaHei" pitchFamily="34" charset="0"/>
+                <a:ea typeface="Microsoft YaHei" pitchFamily="34" charset="-122"/>
+                <a:cs typeface="Microsoft YaHei" pitchFamily="34" charset="-120"/>
+              </a:rPr>
+              <a:t>逐字相同</a:t>
+            </a:r>
+            <a:r>
+              <a:rPr lang="en-US" sz="1150" dirty="0">
+                <a:solidFill>
+                  <a:srgbClr val="FFFFFF"/>
+                </a:solidFill>
+                <a:latin typeface="Microsoft YaHei" pitchFamily="34" charset="0"/>
+                <a:ea typeface="Microsoft YaHei" pitchFamily="34" charset="-122"/>
+                <a:cs typeface="Microsoft YaHei" pitchFamily="34" charset="-120"/>
+              </a:rPr>
+              <a:t>——异步只改变搬运时机，不改变模型输出。</a:t>
+            </a:r>
+            <a:endParaRPr lang="en-US" sz="1150" dirty="0"/>
+          </a:p>
+        </p:txBody>
+      </p:sp>
+      <p:sp>
+        <p:nvSpPr>
+          <p:cNvPr id="380" name="Text 9"/>
+          <p:cNvSpPr/>
+          <p:nvPr/>
+        </p:nvSpPr>
+        <p:spPr>
+          <a:xfrm>
+            <a:off x="548640" y="4096512"/>
+            <a:ext cx="8046720" cy="457200"/>
+          </a:xfrm>
+          <a:prstGeom prst="rect">
+            <a:avLst/>
+          </a:prstGeom>
+          <a:noFill/>
+          <a:ln/>
+        </p:spPr>
+        <p:txBody>
+          <a:bodyPr wrap="square" lIns="0" tIns="0" rIns="0" bIns="0" rtlCol="0" anchor="ctr"/>
+          <a:lstStyle/>
+          <a:p>
+            <a:pPr marL="0" indent="0">
+              <a:buNone/>
+            </a:pPr>
+            <a:r>
+              <a:rPr lang="en-US" sz="1100" b="1" dirty="0">
+                <a:solidFill>
+                  <a:srgbClr val="FF8A75"/>
+                </a:solidFill>
+                <a:latin typeface="Microsoft YaHei" pitchFamily="34" charset="0"/>
+                <a:ea typeface="Microsoft YaHei" pitchFamily="34" charset="-122"/>
+                <a:cs typeface="Microsoft YaHei" pitchFamily="34" charset="-120"/>
+              </a:rPr>
+              <a:t>诚实披露：</a:t>
+            </a:r>
+            <a:r>
+              <a:rPr lang="en-US" sz="1100" dirty="0">
+                <a:solidFill>
+                  <a:srgbClr val="A9BECC"/>
+                </a:solidFill>
+                <a:latin typeface="Microsoft YaHei" pitchFamily="34" charset="0"/>
+                <a:ea typeface="Microsoft YaHei" pitchFamily="34" charset="-122"/>
+                <a:cs typeface="Microsoft YaHei" pitchFamily="34" charset="-120"/>
+              </a:rPr>
+              <a:t>慢峰时搬运会“藏不住”（单批接近步窗）——这就是流水的击穿边界，解法是深流水（见问题页）。</a:t>
+            </a:r>
+            <a:endParaRPr lang="en-US" sz="1100" dirty="0"/>
+          </a:p>
+        </p:txBody>
+      </p:sp>
+      <p:sp>
+        <p:nvSpPr>
+          <p:cNvPr id="381" name="Text 10"/>
+          <p:cNvSpPr/>
+          <p:nvPr/>
+        </p:nvSpPr>
+        <p:spPr>
+          <a:xfrm>
+            <a:off x="7874000" y="4826000"/>
+            <a:ext cx="1130300" cy="274320"/>
+          </a:xfrm>
+          <a:prstGeom prst="rect">
+            <a:avLst/>
+          </a:prstGeom>
+          <a:noFill/>
+          <a:ln/>
+        </p:spPr>
+        <p:txBody>
+          <a:bodyPr wrap="none" lIns="0" tIns="0" rIns="0" bIns="0" rtlCol="0" anchor="ctr"/>
+          <a:lstStyle/>
+          <a:p>
+            <a:pPr marL="0" indent="0" algn="r">
+              <a:buNone/>
+            </a:pPr>
+            <a:r>
+              <a:rPr b="1" sz="1000">
+                <a:solidFill>
+                  <a:srgbClr val="3FC6D6"/>
+                </a:solidFill>
+                <a:latin typeface="Microsoft YaHei"/>
+                <a:ea typeface="Microsoft YaHei"/>
+              </a:rPr>
+              <a:t>09</a:t>
+            </a:r>
+            <a:r>
+              <a:rPr sz="900">
+                <a:solidFill>
+                  <a:srgbClr val="8FA6B5"/>
+                </a:solidFill>
+                <a:latin typeface="Microsoft YaHei"/>
+                <a:ea typeface="Microsoft YaHei"/>
+              </a:rPr>
+              <a:t> / 18</a:t>
+            </a:r>
+            <a:endParaRPr lang="en-US" sz="1000" dirty="0"/>
+          </a:p>
+        </p:txBody>
+      </p:sp>
+      <p:sp>
+        <p:nvSpPr>
+          <p:cNvPr id="382" name="Text 11"/>
+          <p:cNvSpPr/>
+          <p:nvPr/>
+        </p:nvSpPr>
+        <p:spPr>
+          <a:xfrm>
+            <a:off x="457200" y="4828032"/>
+            <a:ext cx="5486400" cy="228600"/>
+          </a:xfrm>
+          <a:prstGeom prst="rect">
+            <a:avLst/>
+          </a:prstGeom>
+          <a:noFill/>
+          <a:ln/>
+        </p:spPr>
+        <p:txBody>
+          <a:bodyPr wrap="square" lIns="0" tIns="0" rIns="0" bIns="0" rtlCol="0" anchor="ctr"/>
+          <a:lstStyle/>
+          <a:p>
+            <a:pPr marL="0" indent="0">
+              <a:buNone/>
+            </a:pPr>
+            <a:r>
+              <a:rPr lang="en-US" sz="900" dirty="0">
+                <a:solidFill>
+                  <a:srgbClr val="A9BECC"/>
+                </a:solidFill>
+                <a:latin typeface="Microsoft YaHei" pitchFamily="34" charset="0"/>
+                <a:ea typeface="Microsoft YaHei" pitchFamily="34" charset="-122"/>
+                <a:cs typeface="Microsoft YaHei" pitchFamily="34" charset="-120"/>
+              </a:rPr>
+              <a:t>站在 KVMem 的肩膀上 · 异步页流水</a:t>
+            </a:r>
+            <a:endParaRPr lang="en-US" sz="900" dirty="0"/>
+          </a:p>
+        </p:txBody>
+      </p:sp>
+      <p:sp>
+        <p:nvSpPr>
+          <p:cNvPr id="383" name="Rectangle 382"/>
+          <p:cNvSpPr/>
+          <p:nvPr/>
+        </p:nvSpPr>
+        <p:spPr>
+          <a:xfrm>
+            <a:off x="457200" y="4711700"/>
+            <a:ext cx="8547100" cy="9525"/>
+          </a:xfrm>
+          <a:prstGeom prst="rect">
+            <a:avLst/>
+          </a:prstGeom>
+          <a:solidFill>
+            <a:srgbClr val="23465C"/>
+          </a:solidFill>
+          <a:ln>
+            <a:noFill/>
+          </a:ln>
+          <a:effectLst/>
+        </p:spPr>
+        <p:style>
+          <a:lnRef idx="1">
+            <a:schemeClr val="accent1"/>
+          </a:lnRef>
+          <a:fillRef idx="3">
+            <a:schemeClr val="accent1"/>
+          </a:fillRef>
+          <a:effectRef idx="2">
+            <a:schemeClr val="accent1"/>
+          </a:effectRef>
+          <a:fontRef idx="minor">
+            <a:schemeClr val="lt1"/>
+          </a:fontRef>
+        </p:style>
+        <p:txBody>
+          <a:bodyPr rtlCol="0" anchor="ctr"/>
+          <a:lstStyle/>
+          <a:p>
+            <a:pPr algn="ctr"/>
+          </a:p>
+        </p:txBody>
+      </p:sp>
+    </p:spTree>
+  </p:cSld>
+  <p:clrMapOvr>
+    <a:masterClrMapping/>
+  </p:clrMapOvr>
+</p:sld>
+</file>
+
+<file path=ppt/slides/slide13.xml><?xml version="1.0" encoding="utf-8"?>
 <p:sld xmlns:p="http://schemas.openxmlformats.org/presentationml/2006/main" xmlns:a="http://schemas.openxmlformats.org/drawingml/2006/main" xmlns:a16="http://schemas.microsoft.com/office/drawing/2014/main" xmlns:mc="http://schemas.openxmlformats.org/markup-compatibility/2006" mc:Ignorable="a16">
   <p:cSld name="Slide 10">
     <p:bg>
@@ -4468,7 +6153,7 @@
 </p:sld>
 </file>
 
-<file path=ppt/slides/slide11.xml><?xml version="1.0" encoding="utf-8"?>
+<file path=ppt/slides/slide14.xml><?xml version="1.0" encoding="utf-8"?>
 <p:sld xmlns:p="http://schemas.openxmlformats.org/presentationml/2006/main" xmlns:a="http://schemas.openxmlformats.org/drawingml/2006/main">
   <p:cSld name="Slide 11">
     <p:bg>
@@ -5489,7 +7174,7 @@
 </p:sld>
 </file>
 
-<file path=ppt/slides/slide12.xml><?xml version="1.0" encoding="utf-8"?>
+<file path=ppt/slides/slide15.xml><?xml version="1.0" encoding="utf-8"?>
 <p:sld xmlns:p="http://schemas.openxmlformats.org/presentationml/2006/main" xmlns:a="http://schemas.openxmlformats.org/drawingml/2006/main">
   <p:cSld name="Slide 12">
     <p:bg>
@@ -6349,7 +8034,7 @@
 </p:sld>
 </file>
 
-<file path=ppt/slides/slide13.xml><?xml version="1.0" encoding="utf-8"?>
+<file path=ppt/slides/slide16.xml><?xml version="1.0" encoding="utf-8"?>
 <p:sld xmlns:p="http://schemas.openxmlformats.org/presentationml/2006/main" xmlns:a="http://schemas.openxmlformats.org/drawingml/2006/main">
   <p:cSld name="Slide 13">
     <p:bg>
@@ -7238,7 +8923,7 @@
 </p:sld>
 </file>
 
-<file path=ppt/slides/slide14.xml><?xml version="1.0" encoding="utf-8"?>
+<file path=ppt/slides/slide17.xml><?xml version="1.0" encoding="utf-8"?>
 <p:sld xmlns:p="http://schemas.openxmlformats.org/presentationml/2006/main" xmlns:a="http://schemas.openxmlformats.org/drawingml/2006/main" xmlns:a16="http://schemas.microsoft.com/office/drawing/2014/main" xmlns:mc="http://schemas.openxmlformats.org/markup-compatibility/2006" mc:Ignorable="a16">
   <p:cSld name="Slide 14">
     <p:bg>
@@ -10702,7 +12387,7 @@
 </p:sld>
 </file>
 
-<file path=ppt/slides/slide15.xml><?xml version="1.0" encoding="utf-8"?>
+<file path=ppt/slides/slide18.xml><?xml version="1.0" encoding="utf-8"?>
 <p:sld xmlns:p="http://schemas.openxmlformats.org/presentationml/2006/main" xmlns:a="http://schemas.openxmlformats.org/drawingml/2006/main">
   <p:cSld name="Slide 15">
     <p:bg>
@@ -11723,7 +13408,7 @@
 </p:sld>
 </file>
 
-<file path=ppt/slides/slide16.xml><?xml version="1.0" encoding="utf-8"?>
+<file path=ppt/slides/slide19.xml><?xml version="1.0" encoding="utf-8"?>
 <p:sld xmlns:p="http://schemas.openxmlformats.org/presentationml/2006/main" xmlns:a="http://schemas.openxmlformats.org/drawingml/2006/main">
   <p:cSld name="Slide 16">
     <p:bg>
@@ -13217,1643 +14902,6 @@
           <a:lstStyle/>
           <a:p>
             <a:pPr algn="ctr"/>
-          </a:p>
-        </p:txBody>
-      </p:sp>
-    </p:spTree>
-  </p:cSld>
-  <p:clrMapOvr>
-    <a:masterClrMapping/>
-  </p:clrMapOvr>
-</p:sld>
-</file>
-
-<file path=ppt/slides/slide17.xml><?xml version="1.0" encoding="utf-8"?>
-<p:sld xmlns:p="http://schemas.openxmlformats.org/presentationml/2006/main" xmlns:a="http://schemas.openxmlformats.org/drawingml/2006/main">
-  <p:cSld name="Slide 17">
-    <p:bg>
-      <p:bgPr>
-        <a:solidFill>
-          <a:srgbClr val="0B1F33"/>
-        </a:solidFill>
-      </p:bgPr>
-    </p:bg>
-    <p:spTree>
-      <p:nvGrpSpPr>
-        <p:cNvPr id="171" name=""/>
-        <p:cNvGrpSpPr/>
-        <p:nvPr/>
-      </p:nvGrpSpPr>
-      <p:grpSpPr>
-        <a:xfrm>
-          <a:off x="0" y="0"/>
-          <a:ext cx="0" cy="0"/>
-          <a:chOff x="0" y="0"/>
-          <a:chExt cx="0" cy="0"/>
-        </a:xfrm>
-      </p:grpSpPr>
-      <p:sp>
-        <p:nvSpPr>
-          <p:cNvPr id="172" name="Shape 0"/>
-          <p:cNvSpPr/>
-          <p:nvPr/>
-        </p:nvSpPr>
-        <p:spPr>
-          <a:xfrm>
-            <a:off x="457200" y="384048"/>
-            <a:ext cx="109728" cy="457200"/>
-          </a:xfrm>
-          <a:prstGeom prst="roundRect">
-            <a:avLst>
-              <a:gd name="adj" fmla="val 50000"/>
-            </a:avLst>
-          </a:prstGeom>
-          <a:solidFill>
-            <a:srgbClr val="0E7E86"/>
-          </a:solidFill>
-          <a:ln/>
-        </p:spPr>
-        <p:txBody>
-          <a:bodyPr/>
-          <a:p/>
-        </p:txBody>
-      </p:sp>
-      <p:sp>
-        <p:nvSpPr>
-          <p:cNvPr id="173" name="Text 1"/>
-          <p:cNvSpPr/>
-          <p:nvPr/>
-        </p:nvSpPr>
-        <p:spPr>
-          <a:xfrm>
-            <a:off x="713232" y="310896"/>
-            <a:ext cx="7955280" cy="228600"/>
-          </a:xfrm>
-          <a:prstGeom prst="rect">
-            <a:avLst/>
-          </a:prstGeom>
-          <a:noFill/>
-          <a:ln/>
-        </p:spPr>
-        <p:txBody>
-          <a:bodyPr wrap="square" lIns="0" tIns="0" rIns="0" bIns="0" rtlCol="0" anchor="ctr"/>
-          <a:lstStyle/>
-          <a:p>
-            <a:pPr marL="0" indent="0">
-              <a:buNone/>
-            </a:pPr>
-            <a:r>
-              <a:rPr lang="en-US" sz="1100" b="1" kern="0" spc="200" dirty="0">
-                <a:solidFill>
-                  <a:srgbClr val="3FC6D6"/>
-                </a:solidFill>
-                <a:latin typeface="Microsoft YaHei" pitchFamily="34" charset="0"/>
-                <a:ea typeface="Microsoft YaHei" pitchFamily="34" charset="-122"/>
-                <a:cs typeface="Microsoft YaHei" pitchFamily="34" charset="-120"/>
-              </a:rPr>
-              <a:t>WHY OPEN SOURCE</a:t>
-            </a:r>
-            <a:endParaRPr lang="en-US" sz="1100" dirty="0"/>
-          </a:p>
-        </p:txBody>
-      </p:sp>
-      <p:sp>
-        <p:nvSpPr>
-          <p:cNvPr id="174" name="Text 2"/>
-          <p:cNvSpPr/>
-          <p:nvPr/>
-        </p:nvSpPr>
-        <p:spPr>
-          <a:xfrm>
-            <a:off x="713232" y="548640"/>
-            <a:ext cx="8138160" cy="457200"/>
-          </a:xfrm>
-          <a:prstGeom prst="rect">
-            <a:avLst/>
-          </a:prstGeom>
-          <a:noFill/>
-          <a:ln/>
-        </p:spPr>
-        <p:txBody>
-          <a:bodyPr wrap="square" lIns="0" tIns="0" rIns="0" bIns="0" rtlCol="0" anchor="ctr"/>
-          <a:lstStyle/>
-          <a:p>
-            <a:pPr marL="0" indent="0">
-              <a:buNone/>
-            </a:pPr>
-            <a:r>
-              <a:rPr lang="en-US" sz="2400" b="1" dirty="0">
-                <a:solidFill>
-                  <a:srgbClr val="FFFFFF"/>
-                </a:solidFill>
-                <a:latin typeface="Microsoft YaHei" pitchFamily="34" charset="0"/>
-                <a:ea typeface="Microsoft YaHei" pitchFamily="34" charset="-122"/>
-                <a:cs typeface="Microsoft YaHei" pitchFamily="34" charset="-120"/>
-              </a:rPr>
-              <a:t>为什么要开源这份工作</a:t>
-            </a:r>
-            <a:endParaRPr lang="en-US" sz="2400" dirty="0"/>
-          </a:p>
-        </p:txBody>
-      </p:sp>
-      <p:sp>
-        <p:nvSpPr>
-          <p:cNvPr id="175" name="Shape 3"/>
-          <p:cNvSpPr/>
-          <p:nvPr/>
-        </p:nvSpPr>
-        <p:spPr>
-          <a:xfrm>
-            <a:off x="548640" y="1097280"/>
-            <a:ext cx="3886200" cy="2377440"/>
-          </a:xfrm>
-          <a:prstGeom prst="roundRect">
-            <a:avLst>
-              <a:gd name="adj" fmla="val 1600"/>
-            </a:avLst>
-          </a:prstGeom>
-          <a:solidFill>
-            <a:srgbClr val="13314D"/>
-          </a:solidFill>
-          <a:ln w="9525">
-            <a:solidFill>
-              <a:srgbClr val="23465C">
-                <a:alpha val="100000"/>
-              </a:srgbClr>
-            </a:solidFill>
-          </a:ln>
-          <a:effectLst>
-            <a:outerShdw blurRad="76200" dist="25400" dir="8100000" sx="100000" sy="100000" kx="0" ky="0" algn="bl" rotWithShape="0">
-              <a:srgbClr val="000000">
-                <a:alpha val="12000"/>
-              </a:srgbClr>
-            </a:outerShdw>
-          </a:effectLst>
-        </p:spPr>
-        <p:txBody>
-          <a:bodyPr/>
-          <a:p/>
-        </p:txBody>
-      </p:sp>
-      <p:sp>
-        <p:nvSpPr>
-          <p:cNvPr id="176" name="Shape 4"/>
-          <p:cNvSpPr/>
-          <p:nvPr/>
-        </p:nvSpPr>
-        <p:spPr>
-          <a:xfrm>
-            <a:off x="548640" y="1097280"/>
-            <a:ext cx="3886200" cy="73152"/>
-          </a:xfrm>
-          <a:prstGeom prst="roundRect">
-            <a:avLst>
-              <a:gd name="adj" fmla="val 50000"/>
-            </a:avLst>
-          </a:prstGeom>
-          <a:solidFill>
-            <a:srgbClr val="0E7E86"/>
-          </a:solidFill>
-          <a:ln/>
-        </p:spPr>
-        <p:txBody>
-          <a:bodyPr/>
-          <a:p/>
-        </p:txBody>
-      </p:sp>
-      <p:sp>
-        <p:nvSpPr>
-          <p:cNvPr id="177" name="Text 5"/>
-          <p:cNvSpPr/>
-          <p:nvPr/>
-        </p:nvSpPr>
-        <p:spPr>
-          <a:xfrm>
-            <a:off x="777240" y="1243584"/>
-            <a:ext cx="3474720" cy="292608"/>
-          </a:xfrm>
-          <a:prstGeom prst="rect">
-            <a:avLst/>
-          </a:prstGeom>
-          <a:noFill/>
-          <a:ln/>
-        </p:spPr>
-        <p:txBody>
-          <a:bodyPr wrap="square" lIns="0" tIns="0" rIns="0" bIns="0" rtlCol="0" anchor="ctr"/>
-          <a:lstStyle/>
-          <a:p>
-            <a:pPr marL="0" indent="0">
-              <a:buNone/>
-            </a:pPr>
-            <a:r>
-              <a:rPr lang="en-US" sz="1300" b="1" dirty="0">
-                <a:solidFill>
-                  <a:srgbClr val="FFFFFF"/>
-                </a:solidFill>
-                <a:latin typeface="Microsoft YaHei" pitchFamily="34" charset="0"/>
-                <a:ea typeface="Microsoft YaHei" pitchFamily="34" charset="-122"/>
-                <a:cs typeface="Microsoft YaHei" pitchFamily="34" charset="-120"/>
-              </a:rPr>
-              <a:t>缘起：到火候了就开门</a:t>
-            </a:r>
-            <a:endParaRPr lang="en-US" sz="1300" dirty="0"/>
-          </a:p>
-        </p:txBody>
-      </p:sp>
-      <p:sp>
-        <p:nvSpPr>
-          <p:cNvPr id="178" name="Text 6"/>
-          <p:cNvSpPr/>
-          <p:nvPr/>
-        </p:nvSpPr>
-        <p:spPr>
-          <a:xfrm>
-            <a:off x="777240" y="1591056"/>
-            <a:ext cx="3520440" cy="1783080"/>
-          </a:xfrm>
-          <a:prstGeom prst="rect">
-            <a:avLst/>
-          </a:prstGeom>
-          <a:noFill/>
-          <a:ln/>
-        </p:spPr>
-        <p:txBody>
-          <a:bodyPr wrap="square" lIns="0" tIns="0" rIns="0" bIns="0" rtlCol="0" anchor="ctr"/>
-          <a:lstStyle/>
-          <a:p>
-            <a:pPr marL="342900" indent="-342900">
-              <a:spcAft>
-                <a:spcPts val="600"/>
-              </a:spcAft>
-              <a:buSzPct val="100000"/>
-              <a:buChar char="▪"/>
-            </a:pPr>
-            <a:r>
-              <a:rPr lang="en-US" sz="950" dirty="0">
-                <a:solidFill>
-                  <a:srgbClr val="A9BECC"/>
-                </a:solidFill>
-                <a:latin typeface="Microsoft YaHei" pitchFamily="34" charset="0"/>
-                <a:ea typeface="Microsoft YaHei" pitchFamily="34" charset="-122"/>
-                <a:cs typeface="Microsoft YaHei" pitchFamily="34" charset="-120"/>
-              </a:rPr>
-              <a:t>技术已达“限定场景生产可用”：单路长上下文 Agent 会话（显存独占）实跑验证通过</a:t>
-            </a:r>
-            <a:endParaRPr lang="en-US" sz="950" dirty="0"/>
-          </a:p>
-          <a:p>
-            <a:pPr marL="342900" indent="-342900">
-              <a:spcAft>
-                <a:spcPts val="600"/>
-              </a:spcAft>
-              <a:buSzPct val="100000"/>
-              <a:buChar char="▪"/>
-            </a:pPr>
-            <a:r>
-              <a:rPr lang="en-US" sz="950" dirty="0">
-                <a:solidFill>
-                  <a:srgbClr val="A9BECC"/>
-                </a:solidFill>
-                <a:latin typeface="Microsoft YaHei" pitchFamily="34" charset="0"/>
-                <a:ea typeface="Microsoft YaHei" pitchFamily="34" charset="-122"/>
-                <a:cs typeface="Microsoft YaHei" pitchFamily="34" charset="-120"/>
-              </a:rPr>
-              <a:t>但最大未解课题（时段性慢态）已超出单线攻关的带宽——</a:t>
-            </a:r>
-            <a:endParaRPr lang="en-US" sz="950" dirty="0"/>
-          </a:p>
-          <a:p>
-            <a:pPr marL="342900" indent="-342900">
-              <a:spcAft>
-                <a:spcPts val="600"/>
-              </a:spcAft>
-              <a:buSzPct val="100000"/>
-              <a:buChar char="▪"/>
-            </a:pPr>
-            <a:r>
-              <a:rPr lang="en-US" sz="950" b="1" dirty="0">
-                <a:solidFill>
-                  <a:srgbClr val="3FC6D6"/>
-                </a:solidFill>
-                <a:latin typeface="Microsoft YaHei" pitchFamily="34" charset="0"/>
-                <a:ea typeface="Microsoft YaHei" pitchFamily="34" charset="-122"/>
-                <a:cs typeface="Microsoft YaHei" pitchFamily="34" charset="-120"/>
-              </a:rPr>
-              <a:t>开源 = 借社区 / 上游 / 驱动侧协同攻关</a:t>
-            </a:r>
-            <a:endParaRPr lang="en-US" sz="950" dirty="0"/>
-          </a:p>
-          <a:p>
-            <a:pPr marL="342900" indent="-342900">
-              <a:spcAft>
-                <a:spcPts val="600"/>
-              </a:spcAft>
-              <a:buSzPct val="100000"/>
-              <a:buChar char="▪"/>
-            </a:pPr>
-            <a:r>
-              <a:rPr lang="en-US" sz="950" dirty="0">
-                <a:solidFill>
-                  <a:srgbClr val="A9BECC"/>
-                </a:solidFill>
-                <a:latin typeface="Microsoft YaHei" pitchFamily="34" charset="0"/>
-                <a:ea typeface="Microsoft YaHei" pitchFamily="34" charset="-122"/>
-                <a:cs typeface="Microsoft YaHei" pitchFamily="34" charset="-120"/>
-              </a:rPr>
-              <a:t>我们已备好”换帮助”的钥匙：约 2 分钟的最小复现协议（可随时造出该状态）</a:t>
-            </a:r>
-            <a:endParaRPr lang="en-US" sz="950" dirty="0"/>
-          </a:p>
-        </p:txBody>
-      </p:sp>
-      <p:sp>
-        <p:nvSpPr>
-          <p:cNvPr id="179" name="Shape 7"/>
-          <p:cNvSpPr/>
-          <p:nvPr/>
-        </p:nvSpPr>
-        <p:spPr>
-          <a:xfrm>
-            <a:off x="4709160" y="1097280"/>
-            <a:ext cx="3886200" cy="2377440"/>
-          </a:xfrm>
-          <a:prstGeom prst="roundRect">
-            <a:avLst>
-              <a:gd name="adj" fmla="val 1600"/>
-            </a:avLst>
-          </a:prstGeom>
-          <a:solidFill>
-            <a:srgbClr val="13314D"/>
-          </a:solidFill>
-          <a:ln w="9525">
-            <a:solidFill>
-              <a:srgbClr val="23465C">
-                <a:alpha val="100000"/>
-              </a:srgbClr>
-            </a:solidFill>
-          </a:ln>
-          <a:effectLst>
-            <a:outerShdw blurRad="76200" dist="25400" dir="8100000" sx="100000" sy="100000" kx="0" ky="0" algn="bl" rotWithShape="0">
-              <a:srgbClr val="000000">
-                <a:alpha val="12000"/>
-              </a:srgbClr>
-            </a:outerShdw>
-          </a:effectLst>
-        </p:spPr>
-        <p:txBody>
-          <a:bodyPr/>
-          <a:p/>
-        </p:txBody>
-      </p:sp>
-      <p:sp>
-        <p:nvSpPr>
-          <p:cNvPr id="180" name="Shape 8"/>
-          <p:cNvSpPr/>
-          <p:nvPr/>
-        </p:nvSpPr>
-        <p:spPr>
-          <a:xfrm>
-            <a:off x="4709160" y="1097280"/>
-            <a:ext cx="3886200" cy="73152"/>
-          </a:xfrm>
-          <a:prstGeom prst="roundRect">
-            <a:avLst>
-              <a:gd name="adj" fmla="val 50000"/>
-            </a:avLst>
-          </a:prstGeom>
-          <a:solidFill>
-            <a:srgbClr val="1A5F84"/>
-          </a:solidFill>
-          <a:ln/>
-        </p:spPr>
-        <p:txBody>
-          <a:bodyPr/>
-          <a:p/>
-        </p:txBody>
-      </p:sp>
-      <p:sp>
-        <p:nvSpPr>
-          <p:cNvPr id="181" name="Text 9"/>
-          <p:cNvSpPr/>
-          <p:nvPr/>
-        </p:nvSpPr>
-        <p:spPr>
-          <a:xfrm>
-            <a:off x="4937760" y="1243584"/>
-            <a:ext cx="3474720" cy="292608"/>
-          </a:xfrm>
-          <a:prstGeom prst="rect">
-            <a:avLst/>
-          </a:prstGeom>
-          <a:noFill/>
-          <a:ln/>
-        </p:spPr>
-        <p:txBody>
-          <a:bodyPr wrap="square" lIns="0" tIns="0" rIns="0" bIns="0" rtlCol="0" anchor="ctr"/>
-          <a:lstStyle/>
-          <a:p>
-            <a:pPr marL="0" indent="0">
-              <a:buNone/>
-            </a:pPr>
-            <a:r>
-              <a:rPr lang="en-US" sz="1300" b="1" dirty="0">
-                <a:solidFill>
-                  <a:srgbClr val="FFFFFF"/>
-                </a:solidFill>
-                <a:latin typeface="Microsoft YaHei" pitchFamily="34" charset="0"/>
-                <a:ea typeface="Microsoft YaHei" pitchFamily="34" charset="-122"/>
-                <a:cs typeface="Microsoft YaHei" pitchFamily="34" charset="-120"/>
-              </a:rPr>
-              <a:t>定位与承诺（口径先行）</a:t>
-            </a:r>
-            <a:endParaRPr lang="en-US" sz="1300" dirty="0"/>
-          </a:p>
-        </p:txBody>
-      </p:sp>
-      <p:sp>
-        <p:nvSpPr>
-          <p:cNvPr id="182" name="Text 10"/>
-          <p:cNvSpPr/>
-          <p:nvPr/>
-        </p:nvSpPr>
-        <p:spPr>
-          <a:xfrm>
-            <a:off x="4937760" y="1591056"/>
-            <a:ext cx="3520440" cy="1783080"/>
-          </a:xfrm>
-          <a:prstGeom prst="rect">
-            <a:avLst/>
-          </a:prstGeom>
-          <a:noFill/>
-          <a:ln/>
-        </p:spPr>
-        <p:txBody>
-          <a:bodyPr wrap="square" lIns="0" tIns="0" rIns="0" bIns="0" rtlCol="0" anchor="ctr"/>
-          <a:lstStyle/>
-          <a:p>
-            <a:pPr marL="342900" indent="-342900">
-              <a:spcAft>
-                <a:spcPts val="600"/>
-              </a:spcAft>
-              <a:buSzPct val="100000"/>
-              <a:buChar char="▪"/>
-            </a:pPr>
-            <a:r>
-              <a:rPr lang="en-US" sz="950" dirty="0">
-                <a:solidFill>
-                  <a:srgbClr val="A9BECC"/>
-                </a:solidFill>
-                <a:latin typeface="Microsoft YaHei" pitchFamily="34" charset="0"/>
-                <a:ea typeface="Microsoft YaHei" pitchFamily="34" charset="-122"/>
-                <a:cs typeface="Microsoft YaHei" pitchFamily="34" charset="-120"/>
-              </a:rPr>
-              <a:t>定位：“研究性工程 + 限定场景生产可用”；多路并发未覆盖</a:t>
-            </a:r>
-            <a:endParaRPr lang="en-US" sz="950" dirty="0"/>
-          </a:p>
-          <a:p>
-            <a:pPr marL="342900" indent="-342900">
-              <a:spcAft>
-                <a:spcPts val="600"/>
-              </a:spcAft>
-              <a:buSzPct val="100000"/>
-              <a:buChar char="▪"/>
-            </a:pPr>
-            <a:r>
-              <a:rPr lang="en-US" sz="950" dirty="0">
-                <a:solidFill>
-                  <a:srgbClr val="3FC6D6"/>
-                </a:solidFill>
-                <a:latin typeface="Microsoft YaHei" pitchFamily="34" charset="0"/>
-                <a:ea typeface="Microsoft YaHei" pitchFamily="34" charset="-122"/>
-                <a:cs typeface="Microsoft YaHei" pitchFamily="34" charset="-120"/>
-              </a:rPr>
-              <a:t>承诺 ① 进谷可控：指纹可检测 / 分钟级自愈 / 回避手段已确证</a:t>
-            </a:r>
-            <a:endParaRPr lang="en-US" sz="950" dirty="0"/>
-          </a:p>
-          <a:p>
-            <a:pPr marL="342900" indent="-342900">
-              <a:spcAft>
-                <a:spcPts val="600"/>
-              </a:spcAft>
-              <a:buSzPct val="100000"/>
-              <a:buChar char="▪"/>
-            </a:pPr>
-            <a:r>
-              <a:rPr lang="en-US" sz="950" dirty="0">
-                <a:solidFill>
-                  <a:srgbClr val="3FC6D6"/>
-                </a:solidFill>
-                <a:latin typeface="Microsoft YaHei" pitchFamily="34" charset="0"/>
-                <a:ea typeface="Microsoft YaHei" pitchFamily="34" charset="-122"/>
-                <a:cs typeface="Microsoft YaHei" pitchFamily="34" charset="-120"/>
-              </a:rPr>
-              <a:t>承诺 ② 输出无损：池内 vs 超池逐字相同（A2 门）</a:t>
-            </a:r>
-            <a:endParaRPr lang="en-US" sz="950" dirty="0"/>
-          </a:p>
-          <a:p>
-            <a:pPr marL="342900" indent="-342900">
-              <a:spcAft>
-                <a:spcPts val="600"/>
-              </a:spcAft>
-              <a:buSzPct val="100000"/>
-              <a:buChar char="▪"/>
-            </a:pPr>
-            <a:r>
-              <a:rPr lang="en-US" sz="950" dirty="0">
-                <a:solidFill>
-                  <a:srgbClr val="FF8A75"/>
-                </a:solidFill>
-                <a:latin typeface="Microsoft YaHei" pitchFamily="34" charset="0"/>
-                <a:ea typeface="Microsoft YaHei" pitchFamily="34" charset="-122"/>
-                <a:cs typeface="Microsoft YaHei" pitchFamily="34" charset="-120"/>
-              </a:rPr>
-              <a:t>不承诺：永不进谷（触发源未解）；通用生产级</a:t>
-            </a:r>
-            <a:endParaRPr lang="en-US" sz="950" dirty="0"/>
-          </a:p>
-        </p:txBody>
-      </p:sp>
-      <p:sp>
-        <p:nvSpPr>
-          <p:cNvPr id="183" name="Shape 11"/>
-          <p:cNvSpPr/>
-          <p:nvPr/>
-        </p:nvSpPr>
-        <p:spPr>
-          <a:xfrm>
-            <a:off x="548640" y="3657600"/>
-            <a:ext cx="8046720" cy="713232"/>
-          </a:xfrm>
-          <a:prstGeom prst="roundRect">
-            <a:avLst>
-              <a:gd name="adj" fmla="val 5400"/>
-            </a:avLst>
-          </a:prstGeom>
-          <a:solidFill>
-            <a:srgbClr val="3A2E12"/>
-          </a:solidFill>
-          <a:ln/>
-        </p:spPr>
-        <p:txBody>
-          <a:bodyPr/>
-          <a:p/>
-        </p:txBody>
-      </p:sp>
-      <p:sp>
-        <p:nvSpPr>
-          <p:cNvPr id="184" name="Shape 12"/>
-          <p:cNvSpPr/>
-          <p:nvPr/>
-        </p:nvSpPr>
-        <p:spPr>
-          <a:xfrm>
-            <a:off x="548640" y="3657600"/>
-            <a:ext cx="109728" cy="713232"/>
-          </a:xfrm>
-          <a:prstGeom prst="roundRect">
-            <a:avLst>
-              <a:gd name="adj" fmla="val 50000"/>
-            </a:avLst>
-          </a:prstGeom>
-          <a:solidFill>
-            <a:srgbClr val="D98E1F"/>
-          </a:solidFill>
-          <a:ln/>
-        </p:spPr>
-        <p:txBody>
-          <a:bodyPr/>
-          <a:p/>
-        </p:txBody>
-      </p:sp>
-      <p:sp>
-        <p:nvSpPr>
-          <p:cNvPr id="185" name="Text 13"/>
-          <p:cNvSpPr/>
-          <p:nvPr/>
-        </p:nvSpPr>
-        <p:spPr>
-          <a:xfrm>
-            <a:off x="777240" y="3712464"/>
-            <a:ext cx="7680960" cy="621792"/>
-          </a:xfrm>
-          <a:prstGeom prst="rect">
-            <a:avLst/>
-          </a:prstGeom>
-          <a:noFill/>
-          <a:ln/>
-        </p:spPr>
-        <p:txBody>
-          <a:bodyPr wrap="square" lIns="0" tIns="0" rIns="0" bIns="0" rtlCol="0" anchor="ctr"/>
-          <a:lstStyle/>
-          <a:p>
-            <a:pPr marL="0" indent="0">
-              <a:buNone/>
-            </a:pPr>
-            <a:r>
-              <a:rPr lang="en-US" sz="1100" b="1" dirty="0">
-                <a:solidFill>
-                  <a:srgbClr val="F5A623"/>
-                </a:solidFill>
-                <a:latin typeface="Microsoft YaHei" pitchFamily="34" charset="0"/>
-                <a:ea typeface="Microsoft YaHei" pitchFamily="34" charset="-122"/>
-                <a:cs typeface="Microsoft YaHei" pitchFamily="34" charset="-120"/>
-              </a:rPr>
-              <a:t>我们希望换到的：</a:t>
-            </a:r>
-            <a:r>
-              <a:rPr lang="en-US" sz="1100" dirty="0">
-                <a:solidFill>
-                  <a:srgbClr val="FFFFFF"/>
-                </a:solidFill>
-                <a:latin typeface="Microsoft YaHei" pitchFamily="34" charset="0"/>
-                <a:ea typeface="Microsoft YaHei" pitchFamily="34" charset="-122"/>
-                <a:cs typeface="Microsoft YaHei" pitchFamily="34" charset="-120"/>
-              </a:rPr>
-              <a:t>不是“夸赞”，而是</a:t>
-            </a:r>
-            <a:r>
-              <a:rPr lang="en-US" sz="1100" b="1" dirty="0">
-                <a:solidFill>
-                  <a:srgbClr val="FFFFFF"/>
-                </a:solidFill>
-                <a:latin typeface="Microsoft YaHei" pitchFamily="34" charset="0"/>
-                <a:ea typeface="Microsoft YaHei" pitchFamily="34" charset="-122"/>
-                <a:cs typeface="Microsoft YaHei" pitchFamily="34" charset="-120"/>
-              </a:rPr>
-              <a:t>同路人的线索与判决</a:t>
-            </a:r>
-            <a:r>
-              <a:rPr lang="en-US" sz="1100" dirty="0">
-                <a:solidFill>
-                  <a:srgbClr val="FFFFFF"/>
-                </a:solidFill>
-                <a:latin typeface="Microsoft YaHei" pitchFamily="34" charset="0"/>
-                <a:ea typeface="Microsoft YaHei" pitchFamily="34" charset="-122"/>
-                <a:cs typeface="Microsoft YaHei" pitchFamily="34" charset="-120"/>
-              </a:rPr>
-              <a:t>——谁在驱动侧见过提交阻塞、谁复现过同样的慢态、谁能一起把行号级的根因钉死。</a:t>
-            </a:r>
-            <a:endParaRPr lang="en-US" sz="1100" dirty="0"/>
-          </a:p>
-        </p:txBody>
-      </p:sp>
-      <p:sp>
-        <p:nvSpPr>
-          <p:cNvPr id="186" name="Text 14"/>
-          <p:cNvSpPr/>
-          <p:nvPr/>
-        </p:nvSpPr>
-        <p:spPr>
-          <a:xfrm>
-            <a:off x="548640" y="4498848"/>
-            <a:ext cx="8046720" cy="274320"/>
-          </a:xfrm>
-          <a:prstGeom prst="rect">
-            <a:avLst/>
-          </a:prstGeom>
-          <a:noFill/>
-          <a:ln/>
-        </p:spPr>
-        <p:txBody>
-          <a:bodyPr wrap="square" lIns="0" tIns="0" rIns="0" bIns="0" rtlCol="0" anchor="ctr"/>
-          <a:lstStyle/>
-          <a:p>
-            <a:pPr marL="0" indent="0">
-              <a:buNone/>
-            </a:pPr>
-            <a:r>
-              <a:rPr lang="en-US" sz="900" dirty="0">
-                <a:solidFill>
-                  <a:srgbClr val="A9BECC"/>
-                </a:solidFill>
-                <a:latin typeface="Microsoft YaHei" pitchFamily="34" charset="0"/>
-                <a:ea typeface="Microsoft YaHei" pitchFamily="34" charset="-122"/>
-                <a:cs typeface="Microsoft YaHei" pitchFamily="34" charset="-120"/>
-              </a:rPr>
-              <a:t>说明：本页口径来自发布前检查清单（docs/发布前事项-…-20261016.md）§0 与缘起段。</a:t>
-            </a:r>
-            <a:endParaRPr lang="en-US" sz="900" dirty="0"/>
-          </a:p>
-        </p:txBody>
-      </p:sp>
-      <p:sp>
-        <p:nvSpPr>
-          <p:cNvPr id="187" name="Text 15"/>
-          <p:cNvSpPr/>
-          <p:nvPr/>
-        </p:nvSpPr>
-        <p:spPr>
-          <a:xfrm>
-            <a:off x="7874000" y="4826000"/>
-            <a:ext cx="1130300" cy="274320"/>
-          </a:xfrm>
-          <a:prstGeom prst="rect">
-            <a:avLst/>
-          </a:prstGeom>
-          <a:noFill/>
-          <a:ln/>
-        </p:spPr>
-        <p:txBody>
-          <a:bodyPr wrap="none" lIns="0" tIns="0" rIns="0" bIns="0" rtlCol="0" anchor="ctr"/>
-          <a:lstStyle/>
-          <a:p>
-            <a:pPr marL="0" indent="0" algn="r">
-              <a:buNone/>
-            </a:pPr>
-            <a:r>
-              <a:rPr b="1" sz="1000">
-                <a:solidFill>
-                  <a:srgbClr val="3FC6D6"/>
-                </a:solidFill>
-                <a:latin typeface="Microsoft YaHei"/>
-                <a:ea typeface="Microsoft YaHei"/>
-              </a:rPr>
-              <a:t>17</a:t>
-            </a:r>
-            <a:r>
-              <a:rPr sz="900">
-                <a:solidFill>
-                  <a:srgbClr val="8FA6B5"/>
-                </a:solidFill>
-                <a:latin typeface="Microsoft YaHei"/>
-                <a:ea typeface="Microsoft YaHei"/>
-              </a:rPr>
-              <a:t> / 18</a:t>
-            </a:r>
-            <a:endParaRPr lang="en-US" sz="1000" dirty="0"/>
-          </a:p>
-        </p:txBody>
-      </p:sp>
-      <p:sp>
-        <p:nvSpPr>
-          <p:cNvPr id="188" name="Text 16"/>
-          <p:cNvSpPr/>
-          <p:nvPr/>
-        </p:nvSpPr>
-        <p:spPr>
-          <a:xfrm>
-            <a:off x="457200" y="4828032"/>
-            <a:ext cx="5486400" cy="228600"/>
-          </a:xfrm>
-          <a:prstGeom prst="rect">
-            <a:avLst/>
-          </a:prstGeom>
-          <a:noFill/>
-          <a:ln/>
-        </p:spPr>
-        <p:txBody>
-          <a:bodyPr wrap="square" lIns="0" tIns="0" rIns="0" bIns="0" rtlCol="0" anchor="ctr"/>
-          <a:lstStyle/>
-          <a:p>
-            <a:pPr marL="0" indent="0">
-              <a:buNone/>
-            </a:pPr>
-            <a:r>
-              <a:rPr lang="en-US" sz="900" dirty="0">
-                <a:solidFill>
-                  <a:srgbClr val="A9BECC"/>
-                </a:solidFill>
-                <a:latin typeface="Microsoft YaHei" pitchFamily="34" charset="0"/>
-                <a:ea typeface="Microsoft YaHei" pitchFamily="34" charset="-122"/>
-                <a:cs typeface="Microsoft YaHei" pitchFamily="34" charset="-120"/>
-              </a:rPr>
-              <a:t>站在 KVMem 的肩膀上 · 异步页流水</a:t>
-            </a:r>
-            <a:endParaRPr lang="en-US" sz="900" dirty="0"/>
-          </a:p>
-        </p:txBody>
-      </p:sp>
-      <p:sp>
-        <p:nvSpPr>
-          <p:cNvPr id="189" name="Rectangle 188"/>
-          <p:cNvSpPr/>
-          <p:nvPr/>
-        </p:nvSpPr>
-        <p:spPr>
-          <a:xfrm>
-            <a:off x="457200" y="4711700"/>
-            <a:ext cx="8547100" cy="9525"/>
-          </a:xfrm>
-          <a:prstGeom prst="rect">
-            <a:avLst/>
-          </a:prstGeom>
-          <a:solidFill>
-            <a:srgbClr val="23465C"/>
-          </a:solidFill>
-          <a:ln>
-            <a:noFill/>
-          </a:ln>
-          <a:effectLst/>
-        </p:spPr>
-        <p:style>
-          <a:lnRef idx="1">
-            <a:schemeClr val="accent1"/>
-          </a:lnRef>
-          <a:fillRef idx="3">
-            <a:schemeClr val="accent1"/>
-          </a:fillRef>
-          <a:effectRef idx="2">
-            <a:schemeClr val="accent1"/>
-          </a:effectRef>
-          <a:fontRef idx="minor">
-            <a:schemeClr val="lt1"/>
-          </a:fontRef>
-        </p:style>
-        <p:txBody>
-          <a:bodyPr rtlCol="0" anchor="ctr"/>
-          <a:lstStyle/>
-          <a:p>
-            <a:pPr algn="ctr"/>
-          </a:p>
-        </p:txBody>
-      </p:sp>
-    </p:spTree>
-  </p:cSld>
-  <p:clrMapOvr>
-    <a:masterClrMapping/>
-  </p:clrMapOvr>
-</p:sld>
-</file>
-
-<file path=ppt/slides/slide18.xml><?xml version="1.0" encoding="utf-8"?>
-<p:sld xmlns:p="http://schemas.openxmlformats.org/presentationml/2006/main" xmlns:a="http://schemas.openxmlformats.org/drawingml/2006/main">
-  <p:cSld name="Slide 18">
-    <p:bg>
-      <p:bgPr>
-        <a:solidFill>
-          <a:srgbClr val="0B1F33"/>
-        </a:solidFill>
-      </p:bgPr>
-    </p:bg>
-    <p:spTree>
-      <p:nvGrpSpPr>
-        <p:cNvPr id="189" name=""/>
-        <p:cNvGrpSpPr/>
-        <p:nvPr/>
-      </p:nvGrpSpPr>
-      <p:grpSpPr>
-        <a:xfrm>
-          <a:off x="0" y="0"/>
-          <a:ext cx="0" cy="0"/>
-          <a:chOff x="0" y="0"/>
-          <a:chExt cx="0" cy="0"/>
-        </a:xfrm>
-      </p:grpSpPr>
-      <p:sp>
-        <p:nvSpPr>
-          <p:cNvPr id="190" name="Shape 0"/>
-          <p:cNvSpPr/>
-          <p:nvPr/>
-        </p:nvSpPr>
-        <p:spPr>
-          <a:xfrm>
-            <a:off x="457200" y="640080"/>
-            <a:ext cx="128016" cy="640080"/>
-          </a:xfrm>
-          <a:prstGeom prst="roundRect">
-            <a:avLst>
-              <a:gd name="adj" fmla="val 50000"/>
-            </a:avLst>
-          </a:prstGeom>
-          <a:solidFill>
-            <a:srgbClr val="0E7E86"/>
-          </a:solidFill>
-          <a:ln/>
-        </p:spPr>
-        <p:txBody>
-          <a:bodyPr/>
-          <a:p/>
-        </p:txBody>
-      </p:sp>
-      <p:sp>
-        <p:nvSpPr>
-          <p:cNvPr id="191" name="Text 1"/>
-          <p:cNvSpPr/>
-          <p:nvPr/>
-        </p:nvSpPr>
-        <p:spPr>
-          <a:xfrm>
-            <a:off x="777240" y="594360"/>
-            <a:ext cx="5943600" cy="274320"/>
-          </a:xfrm>
-          <a:prstGeom prst="rect">
-            <a:avLst/>
-          </a:prstGeom>
-          <a:noFill/>
-          <a:ln/>
-        </p:spPr>
-        <p:txBody>
-          <a:bodyPr wrap="square" lIns="0" tIns="0" rIns="0" bIns="0" rtlCol="0" anchor="ctr"/>
-          <a:lstStyle/>
-          <a:p>
-            <a:pPr marL="0" indent="0">
-              <a:buNone/>
-            </a:pPr>
-            <a:r>
-              <a:rPr lang="en-US" sz="1200" b="1" kern="0" spc="300" dirty="0">
-                <a:solidFill>
-                  <a:srgbClr val="3FC6D6"/>
-                </a:solidFill>
-                <a:latin typeface="Microsoft YaHei" pitchFamily="34" charset="0"/>
-                <a:ea typeface="Microsoft YaHei" pitchFamily="34" charset="-122"/>
-                <a:cs typeface="Microsoft YaHei" pitchFamily="34" charset="-120"/>
-              </a:rPr>
-              <a:t>SUMMARY &amp; THANKS</a:t>
-            </a:r>
-            <a:endParaRPr lang="en-US" sz="1200" dirty="0"/>
-          </a:p>
-        </p:txBody>
-      </p:sp>
-      <p:sp>
-        <p:nvSpPr>
-          <p:cNvPr id="192" name="Text 2"/>
-          <p:cNvSpPr/>
-          <p:nvPr/>
-        </p:nvSpPr>
-        <p:spPr>
-          <a:xfrm>
-            <a:off x="777240" y="868680"/>
-            <a:ext cx="5486400" cy="502920"/>
-          </a:xfrm>
-          <a:prstGeom prst="rect">
-            <a:avLst/>
-          </a:prstGeom>
-          <a:noFill/>
-          <a:ln/>
-        </p:spPr>
-        <p:txBody>
-          <a:bodyPr wrap="square" lIns="0" tIns="0" rIns="0" bIns="0" rtlCol="0" anchor="ctr"/>
-          <a:lstStyle/>
-          <a:p>
-            <a:pPr marL="0" indent="0">
-              <a:buNone/>
-            </a:pPr>
-            <a:r>
-              <a:rPr lang="en-US" sz="2800" b="1" dirty="0">
-                <a:solidFill>
-                  <a:srgbClr val="FFFFFF"/>
-                </a:solidFill>
-                <a:latin typeface="Microsoft YaHei" pitchFamily="34" charset="0"/>
-                <a:ea typeface="Microsoft YaHei" pitchFamily="34" charset="-122"/>
-                <a:cs typeface="Microsoft YaHei" pitchFamily="34" charset="-120"/>
-              </a:rPr>
-              <a:t>三句话</a:t>
-            </a:r>
-            <a:endParaRPr lang="en-US" sz="2800" dirty="0"/>
-          </a:p>
-        </p:txBody>
-      </p:sp>
-      <p:sp>
-        <p:nvSpPr>
-          <p:cNvPr id="193" name="Shape 3"/>
-          <p:cNvSpPr/>
-          <p:nvPr/>
-        </p:nvSpPr>
-        <p:spPr>
-          <a:xfrm>
-            <a:off x="822960" y="1600200"/>
-            <a:ext cx="365760" cy="365760"/>
-          </a:xfrm>
-          <a:prstGeom prst="ellipse">
-            <a:avLst/>
-          </a:prstGeom>
-          <a:solidFill>
-            <a:srgbClr val="0E7E86"/>
-          </a:solidFill>
-          <a:ln/>
-        </p:spPr>
-        <p:txBody>
-          <a:bodyPr/>
-          <a:p/>
-        </p:txBody>
-      </p:sp>
-      <p:sp>
-        <p:nvSpPr>
-          <p:cNvPr id="194" name="Text 4"/>
-          <p:cNvSpPr/>
-          <p:nvPr/>
-        </p:nvSpPr>
-        <p:spPr>
-          <a:xfrm>
-            <a:off x="822960" y="1609344"/>
-            <a:ext cx="365760" cy="347472"/>
-          </a:xfrm>
-          <a:prstGeom prst="rect">
-            <a:avLst/>
-          </a:prstGeom>
-          <a:noFill/>
-          <a:ln/>
-        </p:spPr>
-        <p:txBody>
-          <a:bodyPr wrap="square" lIns="0" tIns="0" rIns="0" bIns="0" rtlCol="0" anchor="ctr"/>
-          <a:lstStyle/>
-          <a:p>
-            <a:pPr marL="0" indent="0" algn="ctr">
-              <a:buNone/>
-            </a:pPr>
-            <a:r>
-              <a:rPr lang="en-US" sz="1300" b="1" dirty="0">
-                <a:solidFill>
-                  <a:srgbClr val="FFFFFF"/>
-                </a:solidFill>
-                <a:latin typeface="Microsoft YaHei" pitchFamily="34" charset="0"/>
-                <a:ea typeface="Microsoft YaHei" pitchFamily="34" charset="-122"/>
-                <a:cs typeface="Microsoft YaHei" pitchFamily="34" charset="-120"/>
-              </a:rPr>
-              <a:t>1</a:t>
-            </a:r>
-            <a:endParaRPr lang="en-US" sz="1300" dirty="0"/>
-          </a:p>
-        </p:txBody>
-      </p:sp>
-      <p:sp>
-        <p:nvSpPr>
-          <p:cNvPr id="195" name="Text 5"/>
-          <p:cNvSpPr/>
-          <p:nvPr/>
-        </p:nvSpPr>
-        <p:spPr>
-          <a:xfrm>
-            <a:off x="1371600" y="1554480"/>
-            <a:ext cx="7223760" cy="566928"/>
-          </a:xfrm>
-          <a:prstGeom prst="rect">
-            <a:avLst/>
-          </a:prstGeom>
-          <a:noFill/>
-          <a:ln/>
-        </p:spPr>
-        <p:txBody>
-          <a:bodyPr wrap="square" lIns="0" tIns="0" rIns="0" bIns="0" rtlCol="0" anchor="ctr"/>
-          <a:lstStyle/>
-          <a:p>
-            <a:pPr marL="0" indent="0">
-              <a:buNone/>
-            </a:pPr>
-            <a:r>
-              <a:rPr lang="en-US" sz="1350" dirty="0">
-                <a:solidFill>
-                  <a:srgbClr val="FFFFFF"/>
-                </a:solidFill>
-                <a:latin typeface="Microsoft YaHei" pitchFamily="34" charset="0"/>
-                <a:ea typeface="Microsoft YaHei" pitchFamily="34" charset="-122"/>
-                <a:cs typeface="Microsoft YaHei" pitchFamily="34" charset="-120"/>
-              </a:rPr>
-              <a:t>原作者把“装不下”变成“装得下”——KV 虚拟化让消费卡承载百万 token 工作区；</a:t>
-            </a:r>
-            <a:endParaRPr lang="en-US" sz="1350" dirty="0"/>
-          </a:p>
-        </p:txBody>
-      </p:sp>
-      <p:sp>
-        <p:nvSpPr>
-          <p:cNvPr id="196" name="Shape 6"/>
-          <p:cNvSpPr/>
-          <p:nvPr/>
-        </p:nvSpPr>
-        <p:spPr>
-          <a:xfrm>
-            <a:off x="822960" y="2377440"/>
-            <a:ext cx="365760" cy="365760"/>
-          </a:xfrm>
-          <a:prstGeom prst="ellipse">
-            <a:avLst/>
-          </a:prstGeom>
-          <a:solidFill>
-            <a:srgbClr val="0E7E86"/>
-          </a:solidFill>
-          <a:ln/>
-        </p:spPr>
-        <p:txBody>
-          <a:bodyPr/>
-          <a:p/>
-        </p:txBody>
-      </p:sp>
-      <p:sp>
-        <p:nvSpPr>
-          <p:cNvPr id="197" name="Text 7"/>
-          <p:cNvSpPr/>
-          <p:nvPr/>
-        </p:nvSpPr>
-        <p:spPr>
-          <a:xfrm>
-            <a:off x="822960" y="2386584"/>
-            <a:ext cx="365760" cy="347472"/>
-          </a:xfrm>
-          <a:prstGeom prst="rect">
-            <a:avLst/>
-          </a:prstGeom>
-          <a:noFill/>
-          <a:ln/>
-        </p:spPr>
-        <p:txBody>
-          <a:bodyPr wrap="square" lIns="0" tIns="0" rIns="0" bIns="0" rtlCol="0" anchor="ctr"/>
-          <a:lstStyle/>
-          <a:p>
-            <a:pPr marL="0" indent="0" algn="ctr">
-              <a:buNone/>
-            </a:pPr>
-            <a:r>
-              <a:rPr lang="en-US" sz="1300" b="1" dirty="0">
-                <a:solidFill>
-                  <a:srgbClr val="FFFFFF"/>
-                </a:solidFill>
-                <a:latin typeface="Microsoft YaHei" pitchFamily="34" charset="0"/>
-                <a:ea typeface="Microsoft YaHei" pitchFamily="34" charset="-122"/>
-                <a:cs typeface="Microsoft YaHei" pitchFamily="34" charset="-120"/>
-              </a:rPr>
-              <a:t>2</a:t>
-            </a:r>
-            <a:endParaRPr lang="en-US" sz="1300" dirty="0"/>
-          </a:p>
-        </p:txBody>
-      </p:sp>
-      <p:sp>
-        <p:nvSpPr>
-          <p:cNvPr id="198" name="Text 8"/>
-          <p:cNvSpPr/>
-          <p:nvPr/>
-        </p:nvSpPr>
-        <p:spPr>
-          <a:xfrm>
-            <a:off x="1371600" y="2331720"/>
-            <a:ext cx="7223760" cy="566928"/>
-          </a:xfrm>
-          <a:prstGeom prst="rect">
-            <a:avLst/>
-          </a:prstGeom>
-          <a:noFill/>
-          <a:ln/>
-        </p:spPr>
-        <p:txBody>
-          <a:bodyPr wrap="square" lIns="0" tIns="0" rIns="0" bIns="0" rtlCol="0" anchor="ctr"/>
-          <a:lstStyle/>
-          <a:p>
-            <a:pPr marL="0" indent="0">
-              <a:buNone/>
-            </a:pPr>
-            <a:r>
-              <a:rPr lang="en-US" sz="1350" dirty="0">
-                <a:solidFill>
-                  <a:srgbClr val="FFFFFF"/>
-                </a:solidFill>
-                <a:latin typeface="Microsoft YaHei" pitchFamily="34" charset="0"/>
-                <a:ea typeface="Microsoft YaHei" pitchFamily="34" charset="-122"/>
-                <a:cs typeface="Microsoft YaHei" pitchFamily="34" charset="-120"/>
-              </a:rPr>
-              <a:t>我们在其基础上把“换页”从同步等待变成异步页流水——搬运与计算重叠，超池不等于减速；</a:t>
-            </a:r>
-            <a:endParaRPr lang="en-US" sz="1350" dirty="0"/>
-          </a:p>
-        </p:txBody>
-      </p:sp>
-      <p:sp>
-        <p:nvSpPr>
-          <p:cNvPr id="199" name="Shape 9"/>
-          <p:cNvSpPr/>
-          <p:nvPr/>
-        </p:nvSpPr>
-        <p:spPr>
-          <a:xfrm>
-            <a:off x="822960" y="3154680"/>
-            <a:ext cx="365760" cy="365760"/>
-          </a:xfrm>
-          <a:prstGeom prst="ellipse">
-            <a:avLst/>
-          </a:prstGeom>
-          <a:solidFill>
-            <a:srgbClr val="0E7E86"/>
-          </a:solidFill>
-          <a:ln/>
-        </p:spPr>
-        <p:txBody>
-          <a:bodyPr/>
-          <a:p/>
-        </p:txBody>
-      </p:sp>
-      <p:sp>
-        <p:nvSpPr>
-          <p:cNvPr id="200" name="Text 10"/>
-          <p:cNvSpPr/>
-          <p:nvPr/>
-        </p:nvSpPr>
-        <p:spPr>
-          <a:xfrm>
-            <a:off x="822960" y="3163824"/>
-            <a:ext cx="365760" cy="347472"/>
-          </a:xfrm>
-          <a:prstGeom prst="rect">
-            <a:avLst/>
-          </a:prstGeom>
-          <a:noFill/>
-          <a:ln/>
-        </p:spPr>
-        <p:txBody>
-          <a:bodyPr wrap="square" lIns="0" tIns="0" rIns="0" bIns="0" rtlCol="0" anchor="ctr"/>
-          <a:lstStyle/>
-          <a:p>
-            <a:pPr marL="0" indent="0" algn="ctr">
-              <a:buNone/>
-            </a:pPr>
-            <a:r>
-              <a:rPr lang="en-US" sz="1300" b="1" dirty="0">
-                <a:solidFill>
-                  <a:srgbClr val="FFFFFF"/>
-                </a:solidFill>
-                <a:latin typeface="Microsoft YaHei" pitchFamily="34" charset="0"/>
-                <a:ea typeface="Microsoft YaHei" pitchFamily="34" charset="-122"/>
-                <a:cs typeface="Microsoft YaHei" pitchFamily="34" charset="-120"/>
-              </a:rPr>
-              <a:t>3</a:t>
-            </a:r>
-            <a:endParaRPr lang="en-US" sz="1300" dirty="0"/>
-          </a:p>
-        </p:txBody>
-      </p:sp>
-      <p:sp>
-        <p:nvSpPr>
-          <p:cNvPr id="201" name="Text 11"/>
-          <p:cNvSpPr/>
-          <p:nvPr/>
-        </p:nvSpPr>
-        <p:spPr>
-          <a:xfrm>
-            <a:off x="1371600" y="3108960"/>
-            <a:ext cx="7223760" cy="566928"/>
-          </a:xfrm>
-          <a:prstGeom prst="rect">
-            <a:avLst/>
-          </a:prstGeom>
-          <a:noFill/>
-          <a:ln/>
-        </p:spPr>
-        <p:txBody>
-          <a:bodyPr wrap="square" lIns="0" tIns="0" rIns="0" bIns="0" rtlCol="0" anchor="ctr"/>
-          <a:lstStyle/>
-          <a:p>
-            <a:pPr marL="0" indent="0">
-              <a:buNone/>
-            </a:pPr>
-            <a:r>
-              <a:rPr lang="en-US" sz="1350" dirty="0">
-                <a:solidFill>
-                  <a:srgbClr val="FFFFFF"/>
-                </a:solidFill>
-                <a:latin typeface="Microsoft YaHei" pitchFamily="34" charset="0"/>
-                <a:ea typeface="Microsoft YaHei" pitchFamily="34" charset="-122"/>
-                <a:cs typeface="Microsoft YaHei" pitchFamily="34" charset="-120"/>
-              </a:rPr>
-              <a:t>第一阶段已交付、慢态攻关在进行——目标：从“持续装得下”到“持续跑得快”。</a:t>
-            </a:r>
-            <a:endParaRPr lang="en-US" sz="1350" dirty="0"/>
-          </a:p>
-        </p:txBody>
-      </p:sp>
-      <p:sp>
-        <p:nvSpPr>
-          <p:cNvPr id="202" name="Shape 12"/>
-          <p:cNvSpPr/>
-          <p:nvPr/>
-        </p:nvSpPr>
-        <p:spPr>
-          <a:xfrm>
-            <a:off x="822960" y="3977640"/>
-            <a:ext cx="7498080" cy="566928"/>
-          </a:xfrm>
-          <a:prstGeom prst="roundRect">
-            <a:avLst>
-              <a:gd name="adj" fmla="val 6700"/>
-            </a:avLst>
-          </a:prstGeom>
-          <a:solidFill>
-            <a:srgbClr val="16324A"/>
-          </a:solidFill>
-          <a:ln/>
-        </p:spPr>
-        <p:txBody>
-          <a:bodyPr/>
-          <a:p/>
-        </p:txBody>
-      </p:sp>
-      <p:sp>
-        <p:nvSpPr>
-          <p:cNvPr id="203" name="Text 13"/>
-          <p:cNvSpPr/>
-          <p:nvPr/>
-        </p:nvSpPr>
-        <p:spPr>
-          <a:xfrm>
-            <a:off x="1005840" y="4023360"/>
-            <a:ext cx="7223760" cy="475488"/>
-          </a:xfrm>
-          <a:prstGeom prst="rect">
-            <a:avLst/>
-          </a:prstGeom>
-          <a:noFill/>
-          <a:ln/>
-        </p:spPr>
-        <p:txBody>
-          <a:bodyPr wrap="square" lIns="0" tIns="0" rIns="0" bIns="0" rtlCol="0" anchor="ctr"/>
-          <a:lstStyle/>
-          <a:p>
-            <a:pPr marL="0" indent="0">
-              <a:buNone/>
-            </a:pPr>
-            <a:r>
-              <a:rPr lang="en-US" sz="900" dirty="0">
-                <a:solidFill>
-                  <a:srgbClr val="A9BECC"/>
-                </a:solidFill>
-                <a:latin typeface="Microsoft YaHei" pitchFamily="34" charset="0"/>
-                <a:ea typeface="Microsoft YaHei" pitchFamily="34" charset="-122"/>
-                <a:cs typeface="Microsoft YaHei" pitchFamily="34" charset="-120"/>
-              </a:rPr>
-              <a:t>再次感谢：KVMem 作者团队（B 站 FirePKU）· 沈三殊 · tancau（Ring 环）· 帅气的 zxz（5060Ti 线），以及 llama.cpp / Neroued/ninfer / iamwavecut/ninfer-all 与社区所有贡献者。</a:t>
-            </a:r>
-            <a:endParaRPr lang="en-US" sz="900" dirty="0"/>
-          </a:p>
-        </p:txBody>
-      </p:sp>
-      <p:sp>
-        <p:nvSpPr>
-          <p:cNvPr id="204" name="Text 14"/>
-          <p:cNvSpPr/>
-          <p:nvPr/>
-        </p:nvSpPr>
-        <p:spPr>
-          <a:xfrm>
-            <a:off x="822960" y="4681728"/>
-            <a:ext cx="7315200" cy="274320"/>
-          </a:xfrm>
-          <a:prstGeom prst="rect">
-            <a:avLst/>
-          </a:prstGeom>
-          <a:noFill/>
-          <a:ln/>
-        </p:spPr>
-        <p:txBody>
-          <a:bodyPr wrap="square" lIns="0" tIns="0" rIns="0" bIns="0" rtlCol="0" anchor="ctr"/>
-          <a:lstStyle/>
-          <a:p>
-            <a:pPr marL="0" indent="0">
-              <a:buNone/>
-            </a:pPr>
-            <a:r>
-              <a:rPr lang="en-US" sz="1000" dirty="0">
-                <a:solidFill>
-                  <a:srgbClr val="A9BECC"/>
-                </a:solidFill>
-                <a:latin typeface="Microsoft YaHei" pitchFamily="34" charset="0"/>
-                <a:ea typeface="Microsoft YaHei" pitchFamily="34" charset="-122"/>
-                <a:cs typeface="Microsoft YaHei" pitchFamily="34" charset="-120"/>
-              </a:rPr>
-              <a:t>Ninfer-KVMem-Async · 2026-10</a:t>
-            </a:r>
-            <a:endParaRPr lang="en-US" sz="1000" dirty="0"/>
-          </a:p>
-        </p:txBody>
-      </p:sp>
-    </p:spTree>
-  </p:cSld>
-  <p:clrMapOvr>
-    <a:masterClrMapping/>
-  </p:clrMapOvr>
-</p:sld>
-</file>
-
-<file path=ppt/slides/slide19.xml><?xml version="1.0" encoding="utf-8"?>
-<p:sld xmlns:a="http://schemas.openxmlformats.org/drawingml/2006/main" xmlns:p="http://schemas.openxmlformats.org/presentationml/2006/main" xmlns:r="http://schemas.openxmlformats.org/officeDocument/2006/relationships">
-  <p:cSld>
-    <p:spTree>
-      <p:nvGrpSpPr>
-        <p:cNvPr id="1" name=""/>
-        <p:cNvGrpSpPr/>
-        <p:nvPr/>
-      </p:nvGrpSpPr>
-      <p:grpSpPr/>
-      <p:sp>
-        <p:nvSpPr>
-          <p:cNvPr id="2" name="TextBox 1"/>
-          <p:cNvSpPr txBox="1"/>
-          <p:nvPr/>
-        </p:nvSpPr>
-        <p:spPr>
-          <a:xfrm>
-            <a:off x="548640" y="256032"/>
-            <a:ext cx="8046720" cy="292608"/>
-          </a:xfrm>
-          <a:prstGeom prst="rect">
-            <a:avLst/>
-          </a:prstGeom>
-          <a:noFill/>
-        </p:spPr>
-        <p:txBody>
-          <a:bodyPr wrap="none">
-            <a:spAutoFit/>
-          </a:bodyPr>
-          <a:lstStyle/>
-          <a:p>
-            <a:r>
-              <a:rPr sz="1200" b="1">
-                <a:solidFill>
-                  <a:srgbClr val="0E7E86"/>
-                </a:solidFill>
-                <a:latin typeface="Microsoft YaHei"/>
-              </a:rPr>
-              <a:t>WHERE PAGES LIVE</a:t>
-            </a:r>
-          </a:p>
-        </p:txBody>
-      </p:sp>
-      <p:sp>
-        <p:nvSpPr>
-          <p:cNvPr id="3" name="TextBox 2"/>
-          <p:cNvSpPr txBox="1"/>
-          <p:nvPr/>
-        </p:nvSpPr>
-        <p:spPr>
-          <a:xfrm>
-            <a:off x="548640" y="548640"/>
-            <a:ext cx="8046720" cy="566928"/>
-          </a:xfrm>
-          <a:prstGeom prst="rect">
-            <a:avLst/>
-          </a:prstGeom>
-          <a:noFill/>
-        </p:spPr>
-        <p:txBody>
-          <a:bodyPr wrap="none">
-            <a:spAutoFit/>
-          </a:bodyPr>
-          <a:lstStyle/>
-          <a:p>
-            <a:r>
-              <a:rPr sz="2300" b="1">
-                <a:solidFill>
-                  <a:srgbClr val="13314D"/>
-                </a:solidFill>
-                <a:latin typeface="Microsoft YaHei"/>
-              </a:rPr>
-              <a:t>提前搬运的页放在哪？——池页数恒定，搬运只换内容</a:t>
-            </a:r>
-          </a:p>
-        </p:txBody>
-      </p:sp>
-      <p:sp>
-        <p:nvSpPr>
-          <p:cNvPr id="4" name="TextBox 3"/>
-          <p:cNvSpPr txBox="1"/>
-          <p:nvPr/>
-        </p:nvSpPr>
-        <p:spPr>
-          <a:xfrm>
-            <a:off x="548640" y="1261872"/>
-            <a:ext cx="8046720" cy="3127248"/>
-          </a:xfrm>
-          <a:prstGeom prst="rect">
-            <a:avLst/>
-          </a:prstGeom>
-          <a:noFill/>
-        </p:spPr>
-        <p:txBody>
-          <a:bodyPr wrap="square">
-            <a:spAutoFit/>
-          </a:bodyPr>
-          <a:lstStyle/>
-          <a:p>
-            <a:pPr>
-              <a:spcAft>
-                <a:spcPts val="700"/>
-              </a:spcAft>
-            </a:pPr>
-            <a:r>
-              <a:rPr sz="1050">
-                <a:solidFill>
-                  <a:srgbClr val="23465C"/>
-                </a:solidFill>
-                <a:latin typeface="Microsoft YaHei"/>
-              </a:rPr>
-              <a:t>▪ 设备池 = 1,024 个页槽（65,536 tok ÷ 64），启动时一次分配、永不增减——搬运不是“加空间”，是“换槽里的内容”（同 OS 物理页帧）</a:t>
-            </a:r>
-          </a:p>
-          <a:p>
-            <a:pPr>
-              <a:spcAft>
-                <a:spcPts val="700"/>
-              </a:spcAft>
-            </a:pPr>
-            <a:r>
-              <a:rPr sz="1050">
-                <a:solidFill>
-                  <a:srgbClr val="23465C"/>
-                </a:solidFill>
-                <a:latin typeface="Microsoft YaHei"/>
-              </a:rPr>
-              <a:t>▪ restore（搬回）的落点 = 设备池的 free 槽；demote（搬出）的落点 = Host RAM 配额槽（写前取配额：host 没空槽就不发起）</a:t>
-            </a:r>
-          </a:p>
-          <a:p>
-            <a:pPr>
-              <a:spcAft>
-                <a:spcPts val="700"/>
-              </a:spcAft>
-            </a:pPr>
-            <a:r>
-              <a:rPr sz="1050">
-                <a:solidFill>
-                  <a:srgbClr val="23465C"/>
-                </a:solidFill>
-                <a:latin typeface="Microsoft YaHei"/>
-              </a:rPr>
-              <a:t>▪ 空间守恒律：restore 进来的每页 = demote 出去的一页的槽；每步新增 N 页 = 每步腾出 N 槽——稳态流水平衡</a:t>
-            </a:r>
-          </a:p>
-          <a:p>
-            <a:pPr>
-              <a:spcAft>
-                <a:spcPts val="700"/>
-              </a:spcAft>
-            </a:pPr>
-            <a:r>
-              <a:rPr sz="1050">
-                <a:solidFill>
-                  <a:srgbClr val="23465C"/>
-                </a:solidFill>
-                <a:latin typeface="Microsoft YaHei"/>
-              </a:rPr>
-              <a:t>▪ 唯一的瞬时额外 = 在飞批次的双份副本 ≈ 26 MiB（publish 前旧副本不丢——账本保证任何时刻至少一份有效）</a:t>
-            </a:r>
-          </a:p>
-          <a:p>
-            <a:pPr>
-              <a:spcAft>
-                <a:spcPts val="700"/>
-              </a:spcAft>
-            </a:pPr>
-            <a:r>
-              <a:rPr sz="1050">
-                <a:solidFill>
-                  <a:srgbClr val="23465C"/>
-                </a:solidFill>
-                <a:latin typeface="Microsoft YaHei"/>
-              </a:rPr>
-              <a:t>▪ 池满 = 换页体系的设计工况：池满不回退，池浅才等价（浅载无搬运需求，两条路自然一样快）</a:t>
-            </a:r>
-          </a:p>
-        </p:txBody>
-      </p:sp>
-      <p:sp>
-        <p:nvSpPr>
-          <p:cNvPr id="5" name="Rectangle 4"/>
-          <p:cNvSpPr/>
-          <p:nvPr/>
-        </p:nvSpPr>
-        <p:spPr>
-          <a:xfrm>
-            <a:off x="548640" y="4498848"/>
-            <a:ext cx="8046720" cy="438912"/>
-          </a:xfrm>
-          <a:prstGeom prst="rect">
-            <a:avLst/>
-          </a:prstGeom>
-          <a:solidFill>
-            <a:srgbClr val="3FC6D6"/>
-          </a:solidFill>
-          <a:ln>
-            <a:noFill/>
-          </a:ln>
-        </p:spPr>
-        <p:style>
-          <a:lnRef idx="1">
-            <a:schemeClr val="accent1"/>
-          </a:lnRef>
-          <a:fillRef idx="3">
-            <a:schemeClr val="accent1"/>
-          </a:fillRef>
-          <a:effectRef idx="2">
-            <a:schemeClr val="accent1"/>
-          </a:effectRef>
-          <a:fontRef idx="minor">
-            <a:schemeClr val="lt1"/>
-          </a:fontRef>
-        </p:style>
-        <p:txBody>
-          <a:bodyPr rtlCol="0" anchor="ctr" wrap="square"/>
-          <a:lstStyle/>
-          <a:p>
-            <a:pPr algn="l"/>
-            <a:r>
-              <a:rPr sz="1150" b="1">
-                <a:solidFill>
-                  <a:srgbClr val="13314D"/>
-                </a:solidFill>
-                <a:latin typeface="Microsoft YaHei"/>
-              </a:rPr>
-              <a:t>真边界只有两条：Host 配额耗尽（=原作者 SSD 层场景，128 GB 下远不可达）与瞬时涌入超流水深度（=深流水的主战场）</a:t>
-            </a:r>
           </a:p>
         </p:txBody>
       </p:sp>
@@ -15849,206 +15897,824 @@
 </file>
 
 <file path=ppt/slides/slide20.xml><?xml version="1.0" encoding="utf-8"?>
-<p:sld xmlns:a="http://schemas.openxmlformats.org/drawingml/2006/main" xmlns:p="http://schemas.openxmlformats.org/presentationml/2006/main" xmlns:r="http://schemas.openxmlformats.org/officeDocument/2006/relationships">
-  <p:cSld>
+<p:sld xmlns:p="http://schemas.openxmlformats.org/presentationml/2006/main" xmlns:a="http://schemas.openxmlformats.org/drawingml/2006/main">
+  <p:cSld name="Slide 17">
+    <p:bg>
+      <p:bgPr>
+        <a:solidFill>
+          <a:srgbClr val="0B1F33"/>
+        </a:solidFill>
+      </p:bgPr>
+    </p:bg>
     <p:spTree>
       <p:nvGrpSpPr>
-        <p:cNvPr id="1" name=""/>
+        <p:cNvPr id="171" name=""/>
         <p:cNvGrpSpPr/>
         <p:nvPr/>
       </p:nvGrpSpPr>
-      <p:grpSpPr/>
-      <p:sp>
-        <p:nvSpPr>
-          <p:cNvPr id="2" name="TextBox 1"/>
-          <p:cNvSpPr txBox="1"/>
-          <p:nvPr/>
-        </p:nvSpPr>
-        <p:spPr>
-          <a:xfrm>
-            <a:off x="548640" y="256032"/>
-            <a:ext cx="8046720" cy="292608"/>
-          </a:xfrm>
-          <a:prstGeom prst="rect">
-            <a:avLst/>
-          </a:prstGeom>
-          <a:noFill/>
-        </p:spPr>
-        <p:txBody>
-          <a:bodyPr wrap="none">
-            <a:spAutoFit/>
-          </a:bodyPr>
-          <a:lstStyle/>
-          <a:p>
-            <a:r>
-              <a:rPr sz="1200" b="1">
-                <a:solidFill>
-                  <a:srgbClr val="0E7E86"/>
+      <p:grpSpPr>
+        <a:xfrm>
+          <a:off x="0" y="0"/>
+          <a:ext cx="0" cy="0"/>
+          <a:chOff x="0" y="0"/>
+          <a:chExt cx="0" cy="0"/>
+        </a:xfrm>
+      </p:grpSpPr>
+      <p:sp>
+        <p:nvSpPr>
+          <p:cNvPr id="172" name="Shape 0"/>
+          <p:cNvSpPr/>
+          <p:nvPr/>
+        </p:nvSpPr>
+        <p:spPr>
+          <a:xfrm>
+            <a:off x="457200" y="384048"/>
+            <a:ext cx="109728" cy="457200"/>
+          </a:xfrm>
+          <a:prstGeom prst="roundRect">
+            <a:avLst>
+              <a:gd name="adj" fmla="val 50000"/>
+            </a:avLst>
+          </a:prstGeom>
+          <a:solidFill>
+            <a:srgbClr val="0E7E86"/>
+          </a:solidFill>
+          <a:ln/>
+        </p:spPr>
+        <p:txBody>
+          <a:bodyPr/>
+          <a:p/>
+        </p:txBody>
+      </p:sp>
+      <p:sp>
+        <p:nvSpPr>
+          <p:cNvPr id="173" name="Text 1"/>
+          <p:cNvSpPr/>
+          <p:nvPr/>
+        </p:nvSpPr>
+        <p:spPr>
+          <a:xfrm>
+            <a:off x="713232" y="310896"/>
+            <a:ext cx="7955280" cy="228600"/>
+          </a:xfrm>
+          <a:prstGeom prst="rect">
+            <a:avLst/>
+          </a:prstGeom>
+          <a:noFill/>
+          <a:ln/>
+        </p:spPr>
+        <p:txBody>
+          <a:bodyPr wrap="square" lIns="0" tIns="0" rIns="0" bIns="0" rtlCol="0" anchor="ctr"/>
+          <a:lstStyle/>
+          <a:p>
+            <a:pPr marL="0" indent="0">
+              <a:buNone/>
+            </a:pPr>
+            <a:r>
+              <a:rPr lang="en-US" sz="1100" b="1" kern="0" spc="200" dirty="0">
+                <a:solidFill>
+                  <a:srgbClr val="3FC6D6"/>
+                </a:solidFill>
+                <a:latin typeface="Microsoft YaHei" pitchFamily="34" charset="0"/>
+                <a:ea typeface="Microsoft YaHei" pitchFamily="34" charset="-122"/>
+                <a:cs typeface="Microsoft YaHei" pitchFamily="34" charset="-120"/>
+              </a:rPr>
+              <a:t>WHY OPEN SOURCE</a:t>
+            </a:r>
+            <a:endParaRPr lang="en-US" sz="1100" dirty="0"/>
+          </a:p>
+        </p:txBody>
+      </p:sp>
+      <p:sp>
+        <p:nvSpPr>
+          <p:cNvPr id="174" name="Text 2"/>
+          <p:cNvSpPr/>
+          <p:nvPr/>
+        </p:nvSpPr>
+        <p:spPr>
+          <a:xfrm>
+            <a:off x="713232" y="548640"/>
+            <a:ext cx="8138160" cy="457200"/>
+          </a:xfrm>
+          <a:prstGeom prst="rect">
+            <a:avLst/>
+          </a:prstGeom>
+          <a:noFill/>
+          <a:ln/>
+        </p:spPr>
+        <p:txBody>
+          <a:bodyPr wrap="square" lIns="0" tIns="0" rIns="0" bIns="0" rtlCol="0" anchor="ctr"/>
+          <a:lstStyle/>
+          <a:p>
+            <a:pPr marL="0" indent="0">
+              <a:buNone/>
+            </a:pPr>
+            <a:r>
+              <a:rPr lang="en-US" sz="2400" b="1" dirty="0">
+                <a:solidFill>
+                  <a:srgbClr val="FFFFFF"/>
+                </a:solidFill>
+                <a:latin typeface="Microsoft YaHei" pitchFamily="34" charset="0"/>
+                <a:ea typeface="Microsoft YaHei" pitchFamily="34" charset="-122"/>
+                <a:cs typeface="Microsoft YaHei" pitchFamily="34" charset="-120"/>
+              </a:rPr>
+              <a:t>为什么要开源这份工作</a:t>
+            </a:r>
+            <a:endParaRPr lang="en-US" sz="2400" dirty="0"/>
+          </a:p>
+        </p:txBody>
+      </p:sp>
+      <p:sp>
+        <p:nvSpPr>
+          <p:cNvPr id="175" name="Shape 3"/>
+          <p:cNvSpPr/>
+          <p:nvPr/>
+        </p:nvSpPr>
+        <p:spPr>
+          <a:xfrm>
+            <a:off x="548640" y="1097280"/>
+            <a:ext cx="3886200" cy="2377440"/>
+          </a:xfrm>
+          <a:prstGeom prst="roundRect">
+            <a:avLst>
+              <a:gd name="adj" fmla="val 1600"/>
+            </a:avLst>
+          </a:prstGeom>
+          <a:solidFill>
+            <a:srgbClr val="13314D"/>
+          </a:solidFill>
+          <a:ln w="9525">
+            <a:solidFill>
+              <a:srgbClr val="23465C">
+                <a:alpha val="100000"/>
+              </a:srgbClr>
+            </a:solidFill>
+          </a:ln>
+          <a:effectLst>
+            <a:outerShdw blurRad="76200" dist="25400" dir="8100000" sx="100000" sy="100000" kx="0" ky="0" algn="bl" rotWithShape="0">
+              <a:srgbClr val="000000">
+                <a:alpha val="12000"/>
+              </a:srgbClr>
+            </a:outerShdw>
+          </a:effectLst>
+        </p:spPr>
+        <p:txBody>
+          <a:bodyPr/>
+          <a:p/>
+        </p:txBody>
+      </p:sp>
+      <p:sp>
+        <p:nvSpPr>
+          <p:cNvPr id="176" name="Shape 4"/>
+          <p:cNvSpPr/>
+          <p:nvPr/>
+        </p:nvSpPr>
+        <p:spPr>
+          <a:xfrm>
+            <a:off x="548640" y="1097280"/>
+            <a:ext cx="3886200" cy="73152"/>
+          </a:xfrm>
+          <a:prstGeom prst="roundRect">
+            <a:avLst>
+              <a:gd name="adj" fmla="val 50000"/>
+            </a:avLst>
+          </a:prstGeom>
+          <a:solidFill>
+            <a:srgbClr val="0E7E86"/>
+          </a:solidFill>
+          <a:ln/>
+        </p:spPr>
+        <p:txBody>
+          <a:bodyPr/>
+          <a:p/>
+        </p:txBody>
+      </p:sp>
+      <p:sp>
+        <p:nvSpPr>
+          <p:cNvPr id="177" name="Text 5"/>
+          <p:cNvSpPr/>
+          <p:nvPr/>
+        </p:nvSpPr>
+        <p:spPr>
+          <a:xfrm>
+            <a:off x="777240" y="1243584"/>
+            <a:ext cx="3474720" cy="292608"/>
+          </a:xfrm>
+          <a:prstGeom prst="rect">
+            <a:avLst/>
+          </a:prstGeom>
+          <a:noFill/>
+          <a:ln/>
+        </p:spPr>
+        <p:txBody>
+          <a:bodyPr wrap="square" lIns="0" tIns="0" rIns="0" bIns="0" rtlCol="0" anchor="ctr"/>
+          <a:lstStyle/>
+          <a:p>
+            <a:pPr marL="0" indent="0">
+              <a:buNone/>
+            </a:pPr>
+            <a:r>
+              <a:rPr lang="en-US" sz="1300" b="1" dirty="0">
+                <a:solidFill>
+                  <a:srgbClr val="FFFFFF"/>
+                </a:solidFill>
+                <a:latin typeface="Microsoft YaHei" pitchFamily="34" charset="0"/>
+                <a:ea typeface="Microsoft YaHei" pitchFamily="34" charset="-122"/>
+                <a:cs typeface="Microsoft YaHei" pitchFamily="34" charset="-120"/>
+              </a:rPr>
+              <a:t>缘起：到火候了就开门</a:t>
+            </a:r>
+            <a:endParaRPr lang="en-US" sz="1300" dirty="0"/>
+          </a:p>
+        </p:txBody>
+      </p:sp>
+      <p:sp>
+        <p:nvSpPr>
+          <p:cNvPr id="178" name="Text 6"/>
+          <p:cNvSpPr/>
+          <p:nvPr/>
+        </p:nvSpPr>
+        <p:spPr>
+          <a:xfrm>
+            <a:off x="777240" y="1591056"/>
+            <a:ext cx="3520440" cy="1783080"/>
+          </a:xfrm>
+          <a:prstGeom prst="rect">
+            <a:avLst/>
+          </a:prstGeom>
+          <a:noFill/>
+          <a:ln/>
+        </p:spPr>
+        <p:txBody>
+          <a:bodyPr wrap="square" lIns="0" tIns="0" rIns="0" bIns="0" rtlCol="0" anchor="ctr"/>
+          <a:lstStyle/>
+          <a:p>
+            <a:pPr marL="342900" indent="-342900">
+              <a:spcAft>
+                <a:spcPts val="600"/>
+              </a:spcAft>
+              <a:buSzPct val="100000"/>
+              <a:buChar char="▪"/>
+            </a:pPr>
+            <a:r>
+              <a:rPr lang="en-US" sz="950" dirty="0">
+                <a:solidFill>
+                  <a:srgbClr val="A9BECC"/>
+                </a:solidFill>
+                <a:latin typeface="Microsoft YaHei" pitchFamily="34" charset="0"/>
+                <a:ea typeface="Microsoft YaHei" pitchFamily="34" charset="-122"/>
+                <a:cs typeface="Microsoft YaHei" pitchFamily="34" charset="-120"/>
+              </a:rPr>
+              <a:t>技术已达“限定场景生产可用”：单路长上下文 Agent 会话（显存独占）实跑验证通过</a:t>
+            </a:r>
+            <a:endParaRPr lang="en-US" sz="950" dirty="0"/>
+          </a:p>
+          <a:p>
+            <a:pPr marL="342900" indent="-342900">
+              <a:spcAft>
+                <a:spcPts val="600"/>
+              </a:spcAft>
+              <a:buSzPct val="100000"/>
+              <a:buChar char="▪"/>
+            </a:pPr>
+            <a:r>
+              <a:rPr lang="en-US" sz="950" dirty="0">
+                <a:solidFill>
+                  <a:srgbClr val="A9BECC"/>
+                </a:solidFill>
+                <a:latin typeface="Microsoft YaHei" pitchFamily="34" charset="0"/>
+                <a:ea typeface="Microsoft YaHei" pitchFamily="34" charset="-122"/>
+                <a:cs typeface="Microsoft YaHei" pitchFamily="34" charset="-120"/>
+              </a:rPr>
+              <a:t>但最大未解课题（时段性慢态）已超出单线攻关的带宽——</a:t>
+            </a:r>
+            <a:endParaRPr lang="en-US" sz="950" dirty="0"/>
+          </a:p>
+          <a:p>
+            <a:pPr marL="342900" indent="-342900">
+              <a:spcAft>
+                <a:spcPts val="600"/>
+              </a:spcAft>
+              <a:buSzPct val="100000"/>
+              <a:buChar char="▪"/>
+            </a:pPr>
+            <a:r>
+              <a:rPr lang="en-US" sz="950" b="1" dirty="0">
+                <a:solidFill>
+                  <a:srgbClr val="3FC6D6"/>
+                </a:solidFill>
+                <a:latin typeface="Microsoft YaHei" pitchFamily="34" charset="0"/>
+                <a:ea typeface="Microsoft YaHei" pitchFamily="34" charset="-122"/>
+                <a:cs typeface="Microsoft YaHei" pitchFamily="34" charset="-120"/>
+              </a:rPr>
+              <a:t>开源 = 借社区 / 上游 / 驱动侧协同攻关</a:t>
+            </a:r>
+            <a:endParaRPr lang="en-US" sz="950" dirty="0"/>
+          </a:p>
+          <a:p>
+            <a:pPr marL="342900" indent="-342900">
+              <a:spcAft>
+                <a:spcPts val="600"/>
+              </a:spcAft>
+              <a:buSzPct val="100000"/>
+              <a:buChar char="▪"/>
+            </a:pPr>
+            <a:r>
+              <a:rPr lang="en-US" sz="950" dirty="0">
+                <a:solidFill>
+                  <a:srgbClr val="A9BECC"/>
+                </a:solidFill>
+                <a:latin typeface="Microsoft YaHei" pitchFamily="34" charset="0"/>
+                <a:ea typeface="Microsoft YaHei" pitchFamily="34" charset="-122"/>
+                <a:cs typeface="Microsoft YaHei" pitchFamily="34" charset="-120"/>
+              </a:rPr>
+              <a:t>我们已备好”换帮助”的钥匙：约 2 分钟的最小复现协议（可随时造出该状态）</a:t>
+            </a:r>
+            <a:endParaRPr lang="en-US" sz="950" dirty="0"/>
+          </a:p>
+        </p:txBody>
+      </p:sp>
+      <p:sp>
+        <p:nvSpPr>
+          <p:cNvPr id="179" name="Shape 7"/>
+          <p:cNvSpPr/>
+          <p:nvPr/>
+        </p:nvSpPr>
+        <p:spPr>
+          <a:xfrm>
+            <a:off x="4709160" y="1097280"/>
+            <a:ext cx="3886200" cy="2377440"/>
+          </a:xfrm>
+          <a:prstGeom prst="roundRect">
+            <a:avLst>
+              <a:gd name="adj" fmla="val 1600"/>
+            </a:avLst>
+          </a:prstGeom>
+          <a:solidFill>
+            <a:srgbClr val="13314D"/>
+          </a:solidFill>
+          <a:ln w="9525">
+            <a:solidFill>
+              <a:srgbClr val="23465C">
+                <a:alpha val="100000"/>
+              </a:srgbClr>
+            </a:solidFill>
+          </a:ln>
+          <a:effectLst>
+            <a:outerShdw blurRad="76200" dist="25400" dir="8100000" sx="100000" sy="100000" kx="0" ky="0" algn="bl" rotWithShape="0">
+              <a:srgbClr val="000000">
+                <a:alpha val="12000"/>
+              </a:srgbClr>
+            </a:outerShdw>
+          </a:effectLst>
+        </p:spPr>
+        <p:txBody>
+          <a:bodyPr/>
+          <a:p/>
+        </p:txBody>
+      </p:sp>
+      <p:sp>
+        <p:nvSpPr>
+          <p:cNvPr id="180" name="Shape 8"/>
+          <p:cNvSpPr/>
+          <p:nvPr/>
+        </p:nvSpPr>
+        <p:spPr>
+          <a:xfrm>
+            <a:off x="4709160" y="1097280"/>
+            <a:ext cx="3886200" cy="73152"/>
+          </a:xfrm>
+          <a:prstGeom prst="roundRect">
+            <a:avLst>
+              <a:gd name="adj" fmla="val 50000"/>
+            </a:avLst>
+          </a:prstGeom>
+          <a:solidFill>
+            <a:srgbClr val="1A5F84"/>
+          </a:solidFill>
+          <a:ln/>
+        </p:spPr>
+        <p:txBody>
+          <a:bodyPr/>
+          <a:p/>
+        </p:txBody>
+      </p:sp>
+      <p:sp>
+        <p:nvSpPr>
+          <p:cNvPr id="181" name="Text 9"/>
+          <p:cNvSpPr/>
+          <p:nvPr/>
+        </p:nvSpPr>
+        <p:spPr>
+          <a:xfrm>
+            <a:off x="4937760" y="1243584"/>
+            <a:ext cx="3474720" cy="292608"/>
+          </a:xfrm>
+          <a:prstGeom prst="rect">
+            <a:avLst/>
+          </a:prstGeom>
+          <a:noFill/>
+          <a:ln/>
+        </p:spPr>
+        <p:txBody>
+          <a:bodyPr wrap="square" lIns="0" tIns="0" rIns="0" bIns="0" rtlCol="0" anchor="ctr"/>
+          <a:lstStyle/>
+          <a:p>
+            <a:pPr marL="0" indent="0">
+              <a:buNone/>
+            </a:pPr>
+            <a:r>
+              <a:rPr lang="en-US" sz="1300" b="1" dirty="0">
+                <a:solidFill>
+                  <a:srgbClr val="FFFFFF"/>
+                </a:solidFill>
+                <a:latin typeface="Microsoft YaHei" pitchFamily="34" charset="0"/>
+                <a:ea typeface="Microsoft YaHei" pitchFamily="34" charset="-122"/>
+                <a:cs typeface="Microsoft YaHei" pitchFamily="34" charset="-120"/>
+              </a:rPr>
+              <a:t>定位与承诺（口径先行）</a:t>
+            </a:r>
+            <a:endParaRPr lang="en-US" sz="1300" dirty="0"/>
+          </a:p>
+        </p:txBody>
+      </p:sp>
+      <p:sp>
+        <p:nvSpPr>
+          <p:cNvPr id="182" name="Text 10"/>
+          <p:cNvSpPr/>
+          <p:nvPr/>
+        </p:nvSpPr>
+        <p:spPr>
+          <a:xfrm>
+            <a:off x="4937760" y="1591056"/>
+            <a:ext cx="3520440" cy="1783080"/>
+          </a:xfrm>
+          <a:prstGeom prst="rect">
+            <a:avLst/>
+          </a:prstGeom>
+          <a:noFill/>
+          <a:ln/>
+        </p:spPr>
+        <p:txBody>
+          <a:bodyPr wrap="square" lIns="0" tIns="0" rIns="0" bIns="0" rtlCol="0" anchor="ctr"/>
+          <a:lstStyle/>
+          <a:p>
+            <a:pPr marL="342900" indent="-342900">
+              <a:spcAft>
+                <a:spcPts val="600"/>
+              </a:spcAft>
+              <a:buSzPct val="100000"/>
+              <a:buChar char="▪"/>
+            </a:pPr>
+            <a:r>
+              <a:rPr lang="en-US" sz="950" dirty="0">
+                <a:solidFill>
+                  <a:srgbClr val="A9BECC"/>
+                </a:solidFill>
+                <a:latin typeface="Microsoft YaHei" pitchFamily="34" charset="0"/>
+                <a:ea typeface="Microsoft YaHei" pitchFamily="34" charset="-122"/>
+                <a:cs typeface="Microsoft YaHei" pitchFamily="34" charset="-120"/>
+              </a:rPr>
+              <a:t>定位：“研究性工程 + 限定场景生产可用”；多路并发未覆盖</a:t>
+            </a:r>
+            <a:endParaRPr lang="en-US" sz="950" dirty="0"/>
+          </a:p>
+          <a:p>
+            <a:pPr marL="342900" indent="-342900">
+              <a:spcAft>
+                <a:spcPts val="600"/>
+              </a:spcAft>
+              <a:buSzPct val="100000"/>
+              <a:buChar char="▪"/>
+            </a:pPr>
+            <a:r>
+              <a:rPr lang="en-US" sz="950" dirty="0">
+                <a:solidFill>
+                  <a:srgbClr val="3FC6D6"/>
+                </a:solidFill>
+                <a:latin typeface="Microsoft YaHei" pitchFamily="34" charset="0"/>
+                <a:ea typeface="Microsoft YaHei" pitchFamily="34" charset="-122"/>
+                <a:cs typeface="Microsoft YaHei" pitchFamily="34" charset="-120"/>
+              </a:rPr>
+              <a:t>承诺 ① 进谷可控：指纹可检测 / 分钟级自愈 / 回避手段已确证</a:t>
+            </a:r>
+            <a:endParaRPr lang="en-US" sz="950" dirty="0"/>
+          </a:p>
+          <a:p>
+            <a:pPr marL="342900" indent="-342900">
+              <a:spcAft>
+                <a:spcPts val="600"/>
+              </a:spcAft>
+              <a:buSzPct val="100000"/>
+              <a:buChar char="▪"/>
+            </a:pPr>
+            <a:r>
+              <a:rPr lang="en-US" sz="950" dirty="0">
+                <a:solidFill>
+                  <a:srgbClr val="3FC6D6"/>
+                </a:solidFill>
+                <a:latin typeface="Microsoft YaHei" pitchFamily="34" charset="0"/>
+                <a:ea typeface="Microsoft YaHei" pitchFamily="34" charset="-122"/>
+                <a:cs typeface="Microsoft YaHei" pitchFamily="34" charset="-120"/>
+              </a:rPr>
+              <a:t>承诺 ② 输出无损：池内 vs 超池逐字相同（A2 门）</a:t>
+            </a:r>
+            <a:endParaRPr lang="en-US" sz="950" dirty="0"/>
+          </a:p>
+          <a:p>
+            <a:pPr marL="342900" indent="-342900">
+              <a:spcAft>
+                <a:spcPts val="600"/>
+              </a:spcAft>
+              <a:buSzPct val="100000"/>
+              <a:buChar char="▪"/>
+            </a:pPr>
+            <a:r>
+              <a:rPr lang="en-US" sz="950" dirty="0">
+                <a:solidFill>
+                  <a:srgbClr val="FF8A75"/>
+                </a:solidFill>
+                <a:latin typeface="Microsoft YaHei" pitchFamily="34" charset="0"/>
+                <a:ea typeface="Microsoft YaHei" pitchFamily="34" charset="-122"/>
+                <a:cs typeface="Microsoft YaHei" pitchFamily="34" charset="-120"/>
+              </a:rPr>
+              <a:t>不承诺：永不进谷（触发源未解）；通用生产级</a:t>
+            </a:r>
+            <a:endParaRPr lang="en-US" sz="950" dirty="0"/>
+          </a:p>
+        </p:txBody>
+      </p:sp>
+      <p:sp>
+        <p:nvSpPr>
+          <p:cNvPr id="183" name="Shape 11"/>
+          <p:cNvSpPr/>
+          <p:nvPr/>
+        </p:nvSpPr>
+        <p:spPr>
+          <a:xfrm>
+            <a:off x="548640" y="3657600"/>
+            <a:ext cx="8046720" cy="713232"/>
+          </a:xfrm>
+          <a:prstGeom prst="roundRect">
+            <a:avLst>
+              <a:gd name="adj" fmla="val 5400"/>
+            </a:avLst>
+          </a:prstGeom>
+          <a:solidFill>
+            <a:srgbClr val="3A2E12"/>
+          </a:solidFill>
+          <a:ln/>
+        </p:spPr>
+        <p:txBody>
+          <a:bodyPr/>
+          <a:p/>
+        </p:txBody>
+      </p:sp>
+      <p:sp>
+        <p:nvSpPr>
+          <p:cNvPr id="184" name="Shape 12"/>
+          <p:cNvSpPr/>
+          <p:nvPr/>
+        </p:nvSpPr>
+        <p:spPr>
+          <a:xfrm>
+            <a:off x="548640" y="3657600"/>
+            <a:ext cx="109728" cy="713232"/>
+          </a:xfrm>
+          <a:prstGeom prst="roundRect">
+            <a:avLst>
+              <a:gd name="adj" fmla="val 50000"/>
+            </a:avLst>
+          </a:prstGeom>
+          <a:solidFill>
+            <a:srgbClr val="D98E1F"/>
+          </a:solidFill>
+          <a:ln/>
+        </p:spPr>
+        <p:txBody>
+          <a:bodyPr/>
+          <a:p/>
+        </p:txBody>
+      </p:sp>
+      <p:sp>
+        <p:nvSpPr>
+          <p:cNvPr id="185" name="Text 13"/>
+          <p:cNvSpPr/>
+          <p:nvPr/>
+        </p:nvSpPr>
+        <p:spPr>
+          <a:xfrm>
+            <a:off x="777240" y="3712464"/>
+            <a:ext cx="7680960" cy="621792"/>
+          </a:xfrm>
+          <a:prstGeom prst="rect">
+            <a:avLst/>
+          </a:prstGeom>
+          <a:noFill/>
+          <a:ln/>
+        </p:spPr>
+        <p:txBody>
+          <a:bodyPr wrap="square" lIns="0" tIns="0" rIns="0" bIns="0" rtlCol="0" anchor="ctr"/>
+          <a:lstStyle/>
+          <a:p>
+            <a:pPr marL="0" indent="0">
+              <a:buNone/>
+            </a:pPr>
+            <a:r>
+              <a:rPr lang="en-US" sz="1100" b="1" dirty="0">
+                <a:solidFill>
+                  <a:srgbClr val="F5A623"/>
+                </a:solidFill>
+                <a:latin typeface="Microsoft YaHei" pitchFamily="34" charset="0"/>
+                <a:ea typeface="Microsoft YaHei" pitchFamily="34" charset="-122"/>
+                <a:cs typeface="Microsoft YaHei" pitchFamily="34" charset="-120"/>
+              </a:rPr>
+              <a:t>我们希望换到的：</a:t>
+            </a:r>
+            <a:r>
+              <a:rPr lang="en-US" sz="1100" dirty="0">
+                <a:solidFill>
+                  <a:srgbClr val="FFFFFF"/>
+                </a:solidFill>
+                <a:latin typeface="Microsoft YaHei" pitchFamily="34" charset="0"/>
+                <a:ea typeface="Microsoft YaHei" pitchFamily="34" charset="-122"/>
+                <a:cs typeface="Microsoft YaHei" pitchFamily="34" charset="-120"/>
+              </a:rPr>
+              <a:t>不是“夸赞”，而是</a:t>
+            </a:r>
+            <a:r>
+              <a:rPr lang="en-US" sz="1100" b="1" dirty="0">
+                <a:solidFill>
+                  <a:srgbClr val="FFFFFF"/>
+                </a:solidFill>
+                <a:latin typeface="Microsoft YaHei" pitchFamily="34" charset="0"/>
+                <a:ea typeface="Microsoft YaHei" pitchFamily="34" charset="-122"/>
+                <a:cs typeface="Microsoft YaHei" pitchFamily="34" charset="-120"/>
+              </a:rPr>
+              <a:t>同路人的线索与判决</a:t>
+            </a:r>
+            <a:r>
+              <a:rPr lang="en-US" sz="1100" dirty="0">
+                <a:solidFill>
+                  <a:srgbClr val="FFFFFF"/>
+                </a:solidFill>
+                <a:latin typeface="Microsoft YaHei" pitchFamily="34" charset="0"/>
+                <a:ea typeface="Microsoft YaHei" pitchFamily="34" charset="-122"/>
+                <a:cs typeface="Microsoft YaHei" pitchFamily="34" charset="-120"/>
+              </a:rPr>
+              <a:t>——谁在驱动侧见过提交阻塞、谁复现过同样的慢态、谁能一起把行号级的根因钉死。</a:t>
+            </a:r>
+            <a:endParaRPr lang="en-US" sz="1100" dirty="0"/>
+          </a:p>
+        </p:txBody>
+      </p:sp>
+      <p:sp>
+        <p:nvSpPr>
+          <p:cNvPr id="186" name="Text 14"/>
+          <p:cNvSpPr/>
+          <p:nvPr/>
+        </p:nvSpPr>
+        <p:spPr>
+          <a:xfrm>
+            <a:off x="548640" y="4498848"/>
+            <a:ext cx="8046720" cy="274320"/>
+          </a:xfrm>
+          <a:prstGeom prst="rect">
+            <a:avLst/>
+          </a:prstGeom>
+          <a:noFill/>
+          <a:ln/>
+        </p:spPr>
+        <p:txBody>
+          <a:bodyPr wrap="square" lIns="0" tIns="0" rIns="0" bIns="0" rtlCol="0" anchor="ctr"/>
+          <a:lstStyle/>
+          <a:p>
+            <a:pPr marL="0" indent="0">
+              <a:buNone/>
+            </a:pPr>
+            <a:r>
+              <a:rPr lang="en-US" sz="900" dirty="0">
+                <a:solidFill>
+                  <a:srgbClr val="A9BECC"/>
+                </a:solidFill>
+                <a:latin typeface="Microsoft YaHei" pitchFamily="34" charset="0"/>
+                <a:ea typeface="Microsoft YaHei" pitchFamily="34" charset="-122"/>
+                <a:cs typeface="Microsoft YaHei" pitchFamily="34" charset="-120"/>
+              </a:rPr>
+              <a:t>说明：本页口径来自发布前检查清单（docs/发布前事项-…-20261016.md）§0 与缘起段。</a:t>
+            </a:r>
+            <a:endParaRPr lang="en-US" sz="900" dirty="0"/>
+          </a:p>
+        </p:txBody>
+      </p:sp>
+      <p:sp>
+        <p:nvSpPr>
+          <p:cNvPr id="187" name="Text 15"/>
+          <p:cNvSpPr/>
+          <p:nvPr/>
+        </p:nvSpPr>
+        <p:spPr>
+          <a:xfrm>
+            <a:off x="7874000" y="4826000"/>
+            <a:ext cx="1130300" cy="274320"/>
+          </a:xfrm>
+          <a:prstGeom prst="rect">
+            <a:avLst/>
+          </a:prstGeom>
+          <a:noFill/>
+          <a:ln/>
+        </p:spPr>
+        <p:txBody>
+          <a:bodyPr wrap="none" lIns="0" tIns="0" rIns="0" bIns="0" rtlCol="0" anchor="ctr"/>
+          <a:lstStyle/>
+          <a:p>
+            <a:pPr marL="0" indent="0" algn="r">
+              <a:buNone/>
+            </a:pPr>
+            <a:r>
+              <a:rPr b="1" sz="1000">
+                <a:solidFill>
+                  <a:srgbClr val="3FC6D6"/>
                 </a:solidFill>
                 <a:latin typeface="Microsoft YaHei"/>
-              </a:rPr>
-              <a:t>THEORY CHECK</a:t>
-            </a:r>
-          </a:p>
-        </p:txBody>
-      </p:sp>
-      <p:sp>
-        <p:nvSpPr>
-          <p:cNvPr id="3" name="TextBox 2"/>
-          <p:cNvSpPr txBox="1"/>
-          <p:nvPr/>
-        </p:nvSpPr>
-        <p:spPr>
-          <a:xfrm>
-            <a:off x="548640" y="548640"/>
-            <a:ext cx="8046720" cy="566928"/>
-          </a:xfrm>
-          <a:prstGeom prst="rect">
-            <a:avLst/>
-          </a:prstGeom>
-          <a:noFill/>
-        </p:spPr>
-        <p:txBody>
-          <a:bodyPr wrap="none">
-            <a:spAutoFit/>
-          </a:bodyPr>
-          <a:lstStyle/>
-          <a:p>
-            <a:r>
-              <a:rPr sz="2300" b="1">
-                <a:solidFill>
-                  <a:srgbClr val="13314D"/>
+                <a:ea typeface="Microsoft YaHei"/>
+              </a:rPr>
+              <a:t>17</a:t>
+            </a:r>
+            <a:r>
+              <a:rPr sz="900">
+                <a:solidFill>
+                  <a:srgbClr val="8FA6B5"/>
                 </a:solidFill>
                 <a:latin typeface="Microsoft YaHei"/>
-              </a:rPr>
-              <a:t>原理自检：异步到底有没有优化作用？</a:t>
-            </a:r>
-          </a:p>
-        </p:txBody>
-      </p:sp>
-      <p:sp>
-        <p:nvSpPr>
-          <p:cNvPr id="4" name="TextBox 3"/>
-          <p:cNvSpPr txBox="1"/>
-          <p:nvPr/>
-        </p:nvSpPr>
-        <p:spPr>
-          <a:xfrm>
-            <a:off x="548640" y="1261872"/>
-            <a:ext cx="8046720" cy="3127248"/>
-          </a:xfrm>
-          <a:prstGeom prst="rect">
-            <a:avLst/>
-          </a:prstGeom>
-          <a:noFill/>
-        </p:spPr>
-        <p:txBody>
-          <a:bodyPr wrap="square">
-            <a:spAutoFit/>
-          </a:bodyPr>
-          <a:lstStyle/>
-          <a:p>
-            <a:pPr>
-              <a:spcAft>
-                <a:spcPts val="700"/>
-              </a:spcAft>
-            </a:pPr>
-            <a:r>
-              <a:rPr sz="1050">
-                <a:solidFill>
-                  <a:srgbClr val="23465C"/>
-                </a:solidFill>
-                <a:latin typeface="Microsoft YaHei"/>
-              </a:rPr>
-              <a:t>▪ 两条公式：同步 = 计算 + 搬运（串行）；异步 = max(计算, 搬运)（重叠）——收益条件全部可测量</a:t>
-            </a:r>
-          </a:p>
-          <a:p>
-            <a:pPr>
-              <a:spcAft>
-                <a:spcPts val="700"/>
-              </a:spcAft>
-            </a:pPr>
-            <a:r>
-              <a:rPr sz="1050">
-                <a:solidFill>
-                  <a:srgbClr val="23465C"/>
-                </a:solidFill>
-                <a:latin typeface="Microsoft YaHei"/>
-              </a:rPr>
-              <a:t>▪ 三个充要条件：可隐藏（1-3 ms vs 27-32 ms，10 倍余量）/ 需求不超吞吐 / 无隐藏同步点——模式签名证明真异步（retire wait ON=1195 vs OFF=0；ring STALL 33 vs 2）</a:t>
-            </a:r>
-          </a:p>
-          <a:p>
-            <a:pPr>
-              <a:spcAft>
-                <a:spcPts val="700"/>
-              </a:spcAft>
-            </a:pPr>
-            <a:r>
-              <a:rPr sz="1050">
-                <a:solidFill>
-                  <a:srgbClr val="23465C"/>
-                </a:solidFill>
-                <a:latin typeface="Microsoft YaHei"/>
-              </a:rPr>
-              <a:t>▪ 三个理论反例如实列出：伪异步 · 开销主导 · 带宽饱和（DMA 与计算共享显存带宽）</a:t>
-            </a:r>
-          </a:p>
-          <a:p>
-            <a:pPr>
-              <a:spcAft>
-                <a:spcPts val="700"/>
-              </a:spcAft>
-            </a:pPr>
-            <a:r>
-              <a:rPr sz="1050">
-                <a:solidFill>
-                  <a:srgbClr val="23465C"/>
-                </a:solidFill>
-                <a:latin typeface="Microsoft YaHei"/>
-              </a:rPr>
-              <a:t>▪ 两实验合出理论曲线：深轮（持续需求）r=0.80；单发（无持续需求）r=1.13 = 理论边界命中——“连边界都预测对，就不是幻觉”</a:t>
-            </a:r>
-          </a:p>
-          <a:p>
-            <a:pPr>
-              <a:spcAft>
-                <a:spcPts val="700"/>
-              </a:spcAft>
-            </a:pPr>
-            <a:r>
-              <a:rPr sz="1050">
-                <a:solidFill>
-                  <a:srgbClr val="23465C"/>
-                </a:solidFill>
-                <a:latin typeface="Microsoft YaHei"/>
-              </a:rPr>
-              <a:t>▪ 待堵的洞：n=3 置信区间宽 · 带宽竞争未单独计量 · 判决实验 = r 随超池深度单调下降（1.0×→3.5×，曲线平了才拆）</a:t>
-            </a:r>
-          </a:p>
-        </p:txBody>
-      </p:sp>
-      <p:sp>
-        <p:nvSpPr>
-          <p:cNvPr id="5" name="Rectangle 4"/>
-          <p:cNvSpPr/>
-          <p:nvPr/>
-        </p:nvSpPr>
-        <p:spPr>
-          <a:xfrm>
-            <a:off x="548640" y="4498848"/>
-            <a:ext cx="8046720" cy="438912"/>
+                <a:ea typeface="Microsoft YaHei"/>
+              </a:rPr>
+              <a:t> / 18</a:t>
+            </a:r>
+            <a:endParaRPr lang="en-US" sz="1000" dirty="0"/>
+          </a:p>
+        </p:txBody>
+      </p:sp>
+      <p:sp>
+        <p:nvSpPr>
+          <p:cNvPr id="188" name="Text 16"/>
+          <p:cNvSpPr/>
+          <p:nvPr/>
+        </p:nvSpPr>
+        <p:spPr>
+          <a:xfrm>
+            <a:off x="457200" y="4828032"/>
+            <a:ext cx="5486400" cy="228600"/>
+          </a:xfrm>
+          <a:prstGeom prst="rect">
+            <a:avLst/>
+          </a:prstGeom>
+          <a:noFill/>
+          <a:ln/>
+        </p:spPr>
+        <p:txBody>
+          <a:bodyPr wrap="square" lIns="0" tIns="0" rIns="0" bIns="0" rtlCol="0" anchor="ctr"/>
+          <a:lstStyle/>
+          <a:p>
+            <a:pPr marL="0" indent="0">
+              <a:buNone/>
+            </a:pPr>
+            <a:r>
+              <a:rPr lang="en-US" sz="900" dirty="0">
+                <a:solidFill>
+                  <a:srgbClr val="A9BECC"/>
+                </a:solidFill>
+                <a:latin typeface="Microsoft YaHei" pitchFamily="34" charset="0"/>
+                <a:ea typeface="Microsoft YaHei" pitchFamily="34" charset="-122"/>
+                <a:cs typeface="Microsoft YaHei" pitchFamily="34" charset="-120"/>
+              </a:rPr>
+              <a:t>站在 KVMem 的肩膀上 · 异步页流水</a:t>
+            </a:r>
+            <a:endParaRPr lang="en-US" sz="900" dirty="0"/>
+          </a:p>
+        </p:txBody>
+      </p:sp>
+      <p:sp>
+        <p:nvSpPr>
+          <p:cNvPr id="189" name="Rectangle 188"/>
+          <p:cNvSpPr/>
+          <p:nvPr/>
+        </p:nvSpPr>
+        <p:spPr>
+          <a:xfrm>
+            <a:off x="457200" y="4711700"/>
+            <a:ext cx="8547100" cy="9525"/>
           </a:xfrm>
           <a:prstGeom prst="rect">
             <a:avLst/>
           </a:prstGeom>
           <a:solidFill>
-            <a:srgbClr val="3FC6D6"/>
+            <a:srgbClr val="23465C"/>
           </a:solidFill>
           <a:ln>
             <a:noFill/>
           </a:ln>
+          <a:effectLst/>
         </p:spPr>
         <p:style>
           <a:lnRef idx="1">
@@ -16065,19 +16731,556 @@
           </a:fontRef>
         </p:style>
         <p:txBody>
-          <a:bodyPr rtlCol="0" anchor="ctr" wrap="square"/>
-          <a:lstStyle/>
-          <a:p>
-            <a:pPr algn="l"/>
-            <a:r>
-              <a:rPr sz="1150" b="1">
-                <a:solidFill>
-                  <a:srgbClr val="13314D"/>
-                </a:solidFill>
-                <a:latin typeface="Microsoft YaHei"/>
-              </a:rPr>
-              <a:t>这不是信念，是带边界条件的工程定理——两个工况的观测都落在理论预测的位置上</a:t>
-            </a:r>
+          <a:bodyPr rtlCol="0" anchor="ctr"/>
+          <a:lstStyle/>
+          <a:p>
+            <a:pPr algn="ctr"/>
+          </a:p>
+        </p:txBody>
+      </p:sp>
+    </p:spTree>
+  </p:cSld>
+  <p:clrMapOvr>
+    <a:masterClrMapping/>
+  </p:clrMapOvr>
+</p:sld>
+</file>
+
+<file path=ppt/slides/slide21.xml><?xml version="1.0" encoding="utf-8"?>
+<p:sld xmlns:p="http://schemas.openxmlformats.org/presentationml/2006/main" xmlns:a="http://schemas.openxmlformats.org/drawingml/2006/main">
+  <p:cSld name="Slide 18">
+    <p:bg>
+      <p:bgPr>
+        <a:solidFill>
+          <a:srgbClr val="0B1F33"/>
+        </a:solidFill>
+      </p:bgPr>
+    </p:bg>
+    <p:spTree>
+      <p:nvGrpSpPr>
+        <p:cNvPr id="189" name=""/>
+        <p:cNvGrpSpPr/>
+        <p:nvPr/>
+      </p:nvGrpSpPr>
+      <p:grpSpPr>
+        <a:xfrm>
+          <a:off x="0" y="0"/>
+          <a:ext cx="0" cy="0"/>
+          <a:chOff x="0" y="0"/>
+          <a:chExt cx="0" cy="0"/>
+        </a:xfrm>
+      </p:grpSpPr>
+      <p:sp>
+        <p:nvSpPr>
+          <p:cNvPr id="190" name="Shape 0"/>
+          <p:cNvSpPr/>
+          <p:nvPr/>
+        </p:nvSpPr>
+        <p:spPr>
+          <a:xfrm>
+            <a:off x="457200" y="640080"/>
+            <a:ext cx="128016" cy="640080"/>
+          </a:xfrm>
+          <a:prstGeom prst="roundRect">
+            <a:avLst>
+              <a:gd name="adj" fmla="val 50000"/>
+            </a:avLst>
+          </a:prstGeom>
+          <a:solidFill>
+            <a:srgbClr val="0E7E86"/>
+          </a:solidFill>
+          <a:ln/>
+        </p:spPr>
+        <p:txBody>
+          <a:bodyPr/>
+          <a:p/>
+        </p:txBody>
+      </p:sp>
+      <p:sp>
+        <p:nvSpPr>
+          <p:cNvPr id="191" name="Text 1"/>
+          <p:cNvSpPr/>
+          <p:nvPr/>
+        </p:nvSpPr>
+        <p:spPr>
+          <a:xfrm>
+            <a:off x="777240" y="594360"/>
+            <a:ext cx="5943600" cy="274320"/>
+          </a:xfrm>
+          <a:prstGeom prst="rect">
+            <a:avLst/>
+          </a:prstGeom>
+          <a:noFill/>
+          <a:ln/>
+        </p:spPr>
+        <p:txBody>
+          <a:bodyPr wrap="square" lIns="0" tIns="0" rIns="0" bIns="0" rtlCol="0" anchor="ctr"/>
+          <a:lstStyle/>
+          <a:p>
+            <a:pPr marL="0" indent="0">
+              <a:buNone/>
+            </a:pPr>
+            <a:r>
+              <a:rPr lang="en-US" sz="1200" b="1" kern="0" spc="300" dirty="0">
+                <a:solidFill>
+                  <a:srgbClr val="3FC6D6"/>
+                </a:solidFill>
+                <a:latin typeface="Microsoft YaHei" pitchFamily="34" charset="0"/>
+                <a:ea typeface="Microsoft YaHei" pitchFamily="34" charset="-122"/>
+                <a:cs typeface="Microsoft YaHei" pitchFamily="34" charset="-120"/>
+              </a:rPr>
+              <a:t>SUMMARY &amp; THANKS</a:t>
+            </a:r>
+            <a:endParaRPr lang="en-US" sz="1200" dirty="0"/>
+          </a:p>
+        </p:txBody>
+      </p:sp>
+      <p:sp>
+        <p:nvSpPr>
+          <p:cNvPr id="192" name="Text 2"/>
+          <p:cNvSpPr/>
+          <p:nvPr/>
+        </p:nvSpPr>
+        <p:spPr>
+          <a:xfrm>
+            <a:off x="777240" y="868680"/>
+            <a:ext cx="5486400" cy="502920"/>
+          </a:xfrm>
+          <a:prstGeom prst="rect">
+            <a:avLst/>
+          </a:prstGeom>
+          <a:noFill/>
+          <a:ln/>
+        </p:spPr>
+        <p:txBody>
+          <a:bodyPr wrap="square" lIns="0" tIns="0" rIns="0" bIns="0" rtlCol="0" anchor="ctr"/>
+          <a:lstStyle/>
+          <a:p>
+            <a:pPr marL="0" indent="0">
+              <a:buNone/>
+            </a:pPr>
+            <a:r>
+              <a:rPr lang="en-US" sz="2800" b="1" dirty="0">
+                <a:solidFill>
+                  <a:srgbClr val="FFFFFF"/>
+                </a:solidFill>
+                <a:latin typeface="Microsoft YaHei" pitchFamily="34" charset="0"/>
+                <a:ea typeface="Microsoft YaHei" pitchFamily="34" charset="-122"/>
+                <a:cs typeface="Microsoft YaHei" pitchFamily="34" charset="-120"/>
+              </a:rPr>
+              <a:t>三句话</a:t>
+            </a:r>
+            <a:endParaRPr lang="en-US" sz="2800" dirty="0"/>
+          </a:p>
+        </p:txBody>
+      </p:sp>
+      <p:sp>
+        <p:nvSpPr>
+          <p:cNvPr id="193" name="Shape 3"/>
+          <p:cNvSpPr/>
+          <p:nvPr/>
+        </p:nvSpPr>
+        <p:spPr>
+          <a:xfrm>
+            <a:off x="822960" y="1600200"/>
+            <a:ext cx="365760" cy="365760"/>
+          </a:xfrm>
+          <a:prstGeom prst="ellipse">
+            <a:avLst/>
+          </a:prstGeom>
+          <a:solidFill>
+            <a:srgbClr val="0E7E86"/>
+          </a:solidFill>
+          <a:ln/>
+        </p:spPr>
+        <p:txBody>
+          <a:bodyPr/>
+          <a:p/>
+        </p:txBody>
+      </p:sp>
+      <p:sp>
+        <p:nvSpPr>
+          <p:cNvPr id="194" name="Text 4"/>
+          <p:cNvSpPr/>
+          <p:nvPr/>
+        </p:nvSpPr>
+        <p:spPr>
+          <a:xfrm>
+            <a:off x="822960" y="1609344"/>
+            <a:ext cx="365760" cy="347472"/>
+          </a:xfrm>
+          <a:prstGeom prst="rect">
+            <a:avLst/>
+          </a:prstGeom>
+          <a:noFill/>
+          <a:ln/>
+        </p:spPr>
+        <p:txBody>
+          <a:bodyPr wrap="square" lIns="0" tIns="0" rIns="0" bIns="0" rtlCol="0" anchor="ctr"/>
+          <a:lstStyle/>
+          <a:p>
+            <a:pPr marL="0" indent="0" algn="ctr">
+              <a:buNone/>
+            </a:pPr>
+            <a:r>
+              <a:rPr lang="en-US" sz="1300" b="1" dirty="0">
+                <a:solidFill>
+                  <a:srgbClr val="FFFFFF"/>
+                </a:solidFill>
+                <a:latin typeface="Microsoft YaHei" pitchFamily="34" charset="0"/>
+                <a:ea typeface="Microsoft YaHei" pitchFamily="34" charset="-122"/>
+                <a:cs typeface="Microsoft YaHei" pitchFamily="34" charset="-120"/>
+              </a:rPr>
+              <a:t>1</a:t>
+            </a:r>
+            <a:endParaRPr lang="en-US" sz="1300" dirty="0"/>
+          </a:p>
+        </p:txBody>
+      </p:sp>
+      <p:sp>
+        <p:nvSpPr>
+          <p:cNvPr id="195" name="Text 5"/>
+          <p:cNvSpPr/>
+          <p:nvPr/>
+        </p:nvSpPr>
+        <p:spPr>
+          <a:xfrm>
+            <a:off x="1371600" y="1554480"/>
+            <a:ext cx="7223760" cy="566928"/>
+          </a:xfrm>
+          <a:prstGeom prst="rect">
+            <a:avLst/>
+          </a:prstGeom>
+          <a:noFill/>
+          <a:ln/>
+        </p:spPr>
+        <p:txBody>
+          <a:bodyPr wrap="square" lIns="0" tIns="0" rIns="0" bIns="0" rtlCol="0" anchor="ctr"/>
+          <a:lstStyle/>
+          <a:p>
+            <a:pPr marL="0" indent="0">
+              <a:buNone/>
+            </a:pPr>
+            <a:r>
+              <a:rPr lang="en-US" sz="1350" dirty="0">
+                <a:solidFill>
+                  <a:srgbClr val="FFFFFF"/>
+                </a:solidFill>
+                <a:latin typeface="Microsoft YaHei" pitchFamily="34" charset="0"/>
+                <a:ea typeface="Microsoft YaHei" pitchFamily="34" charset="-122"/>
+                <a:cs typeface="Microsoft YaHei" pitchFamily="34" charset="-120"/>
+              </a:rPr>
+              <a:t>原作者把“装不下”变成“装得下”——KV 虚拟化让消费卡承载百万 token 工作区；</a:t>
+            </a:r>
+            <a:endParaRPr lang="en-US" sz="1350" dirty="0"/>
+          </a:p>
+        </p:txBody>
+      </p:sp>
+      <p:sp>
+        <p:nvSpPr>
+          <p:cNvPr id="196" name="Shape 6"/>
+          <p:cNvSpPr/>
+          <p:nvPr/>
+        </p:nvSpPr>
+        <p:spPr>
+          <a:xfrm>
+            <a:off x="822960" y="2377440"/>
+            <a:ext cx="365760" cy="365760"/>
+          </a:xfrm>
+          <a:prstGeom prst="ellipse">
+            <a:avLst/>
+          </a:prstGeom>
+          <a:solidFill>
+            <a:srgbClr val="0E7E86"/>
+          </a:solidFill>
+          <a:ln/>
+        </p:spPr>
+        <p:txBody>
+          <a:bodyPr/>
+          <a:p/>
+        </p:txBody>
+      </p:sp>
+      <p:sp>
+        <p:nvSpPr>
+          <p:cNvPr id="197" name="Text 7"/>
+          <p:cNvSpPr/>
+          <p:nvPr/>
+        </p:nvSpPr>
+        <p:spPr>
+          <a:xfrm>
+            <a:off x="822960" y="2386584"/>
+            <a:ext cx="365760" cy="347472"/>
+          </a:xfrm>
+          <a:prstGeom prst="rect">
+            <a:avLst/>
+          </a:prstGeom>
+          <a:noFill/>
+          <a:ln/>
+        </p:spPr>
+        <p:txBody>
+          <a:bodyPr wrap="square" lIns="0" tIns="0" rIns="0" bIns="0" rtlCol="0" anchor="ctr"/>
+          <a:lstStyle/>
+          <a:p>
+            <a:pPr marL="0" indent="0" algn="ctr">
+              <a:buNone/>
+            </a:pPr>
+            <a:r>
+              <a:rPr lang="en-US" sz="1300" b="1" dirty="0">
+                <a:solidFill>
+                  <a:srgbClr val="FFFFFF"/>
+                </a:solidFill>
+                <a:latin typeface="Microsoft YaHei" pitchFamily="34" charset="0"/>
+                <a:ea typeface="Microsoft YaHei" pitchFamily="34" charset="-122"/>
+                <a:cs typeface="Microsoft YaHei" pitchFamily="34" charset="-120"/>
+              </a:rPr>
+              <a:t>2</a:t>
+            </a:r>
+            <a:endParaRPr lang="en-US" sz="1300" dirty="0"/>
+          </a:p>
+        </p:txBody>
+      </p:sp>
+      <p:sp>
+        <p:nvSpPr>
+          <p:cNvPr id="198" name="Text 8"/>
+          <p:cNvSpPr/>
+          <p:nvPr/>
+        </p:nvSpPr>
+        <p:spPr>
+          <a:xfrm>
+            <a:off x="1371600" y="2331720"/>
+            <a:ext cx="7223760" cy="566928"/>
+          </a:xfrm>
+          <a:prstGeom prst="rect">
+            <a:avLst/>
+          </a:prstGeom>
+          <a:noFill/>
+          <a:ln/>
+        </p:spPr>
+        <p:txBody>
+          <a:bodyPr wrap="square" lIns="0" tIns="0" rIns="0" bIns="0" rtlCol="0" anchor="ctr"/>
+          <a:lstStyle/>
+          <a:p>
+            <a:pPr marL="0" indent="0">
+              <a:buNone/>
+            </a:pPr>
+            <a:r>
+              <a:rPr lang="en-US" sz="1350" dirty="0">
+                <a:solidFill>
+                  <a:srgbClr val="FFFFFF"/>
+                </a:solidFill>
+                <a:latin typeface="Microsoft YaHei" pitchFamily="34" charset="0"/>
+                <a:ea typeface="Microsoft YaHei" pitchFamily="34" charset="-122"/>
+                <a:cs typeface="Microsoft YaHei" pitchFamily="34" charset="-120"/>
+              </a:rPr>
+              <a:t>我们在其基础上把“换页”从同步等待变成异步页流水——搬运与计算重叠，超池不等于减速；</a:t>
+            </a:r>
+            <a:endParaRPr lang="en-US" sz="1350" dirty="0"/>
+          </a:p>
+        </p:txBody>
+      </p:sp>
+      <p:sp>
+        <p:nvSpPr>
+          <p:cNvPr id="199" name="Shape 9"/>
+          <p:cNvSpPr/>
+          <p:nvPr/>
+        </p:nvSpPr>
+        <p:spPr>
+          <a:xfrm>
+            <a:off x="822960" y="3154680"/>
+            <a:ext cx="365760" cy="365760"/>
+          </a:xfrm>
+          <a:prstGeom prst="ellipse">
+            <a:avLst/>
+          </a:prstGeom>
+          <a:solidFill>
+            <a:srgbClr val="0E7E86"/>
+          </a:solidFill>
+          <a:ln/>
+        </p:spPr>
+        <p:txBody>
+          <a:bodyPr/>
+          <a:p/>
+        </p:txBody>
+      </p:sp>
+      <p:sp>
+        <p:nvSpPr>
+          <p:cNvPr id="200" name="Text 10"/>
+          <p:cNvSpPr/>
+          <p:nvPr/>
+        </p:nvSpPr>
+        <p:spPr>
+          <a:xfrm>
+            <a:off x="822960" y="3163824"/>
+            <a:ext cx="365760" cy="347472"/>
+          </a:xfrm>
+          <a:prstGeom prst="rect">
+            <a:avLst/>
+          </a:prstGeom>
+          <a:noFill/>
+          <a:ln/>
+        </p:spPr>
+        <p:txBody>
+          <a:bodyPr wrap="square" lIns="0" tIns="0" rIns="0" bIns="0" rtlCol="0" anchor="ctr"/>
+          <a:lstStyle/>
+          <a:p>
+            <a:pPr marL="0" indent="0" algn="ctr">
+              <a:buNone/>
+            </a:pPr>
+            <a:r>
+              <a:rPr lang="en-US" sz="1300" b="1" dirty="0">
+                <a:solidFill>
+                  <a:srgbClr val="FFFFFF"/>
+                </a:solidFill>
+                <a:latin typeface="Microsoft YaHei" pitchFamily="34" charset="0"/>
+                <a:ea typeface="Microsoft YaHei" pitchFamily="34" charset="-122"/>
+                <a:cs typeface="Microsoft YaHei" pitchFamily="34" charset="-120"/>
+              </a:rPr>
+              <a:t>3</a:t>
+            </a:r>
+            <a:endParaRPr lang="en-US" sz="1300" dirty="0"/>
+          </a:p>
+        </p:txBody>
+      </p:sp>
+      <p:sp>
+        <p:nvSpPr>
+          <p:cNvPr id="201" name="Text 11"/>
+          <p:cNvSpPr/>
+          <p:nvPr/>
+        </p:nvSpPr>
+        <p:spPr>
+          <a:xfrm>
+            <a:off x="1371600" y="3108960"/>
+            <a:ext cx="7223760" cy="566928"/>
+          </a:xfrm>
+          <a:prstGeom prst="rect">
+            <a:avLst/>
+          </a:prstGeom>
+          <a:noFill/>
+          <a:ln/>
+        </p:spPr>
+        <p:txBody>
+          <a:bodyPr wrap="square" lIns="0" tIns="0" rIns="0" bIns="0" rtlCol="0" anchor="ctr"/>
+          <a:lstStyle/>
+          <a:p>
+            <a:pPr marL="0" indent="0">
+              <a:buNone/>
+            </a:pPr>
+            <a:r>
+              <a:rPr lang="en-US" sz="1350" dirty="0">
+                <a:solidFill>
+                  <a:srgbClr val="FFFFFF"/>
+                </a:solidFill>
+                <a:latin typeface="Microsoft YaHei" pitchFamily="34" charset="0"/>
+                <a:ea typeface="Microsoft YaHei" pitchFamily="34" charset="-122"/>
+                <a:cs typeface="Microsoft YaHei" pitchFamily="34" charset="-120"/>
+              </a:rPr>
+              <a:t>第一阶段已交付、慢态攻关在进行——目标：从“持续装得下”到“持续跑得快”。</a:t>
+            </a:r>
+            <a:endParaRPr lang="en-US" sz="1350" dirty="0"/>
+          </a:p>
+        </p:txBody>
+      </p:sp>
+      <p:sp>
+        <p:nvSpPr>
+          <p:cNvPr id="202" name="Shape 12"/>
+          <p:cNvSpPr/>
+          <p:nvPr/>
+        </p:nvSpPr>
+        <p:spPr>
+          <a:xfrm>
+            <a:off x="822960" y="3977640"/>
+            <a:ext cx="7498080" cy="566928"/>
+          </a:xfrm>
+          <a:prstGeom prst="roundRect">
+            <a:avLst>
+              <a:gd name="adj" fmla="val 6700"/>
+            </a:avLst>
+          </a:prstGeom>
+          <a:solidFill>
+            <a:srgbClr val="16324A"/>
+          </a:solidFill>
+          <a:ln/>
+        </p:spPr>
+        <p:txBody>
+          <a:bodyPr/>
+          <a:p/>
+        </p:txBody>
+      </p:sp>
+      <p:sp>
+        <p:nvSpPr>
+          <p:cNvPr id="203" name="Text 13"/>
+          <p:cNvSpPr/>
+          <p:nvPr/>
+        </p:nvSpPr>
+        <p:spPr>
+          <a:xfrm>
+            <a:off x="1005840" y="4023360"/>
+            <a:ext cx="7223760" cy="475488"/>
+          </a:xfrm>
+          <a:prstGeom prst="rect">
+            <a:avLst/>
+          </a:prstGeom>
+          <a:noFill/>
+          <a:ln/>
+        </p:spPr>
+        <p:txBody>
+          <a:bodyPr wrap="square" lIns="0" tIns="0" rIns="0" bIns="0" rtlCol="0" anchor="ctr"/>
+          <a:lstStyle/>
+          <a:p>
+            <a:pPr marL="0" indent="0">
+              <a:buNone/>
+            </a:pPr>
+            <a:r>
+              <a:rPr lang="en-US" sz="900" dirty="0">
+                <a:solidFill>
+                  <a:srgbClr val="A9BECC"/>
+                </a:solidFill>
+                <a:latin typeface="Microsoft YaHei" pitchFamily="34" charset="0"/>
+                <a:ea typeface="Microsoft YaHei" pitchFamily="34" charset="-122"/>
+                <a:cs typeface="Microsoft YaHei" pitchFamily="34" charset="-120"/>
+              </a:rPr>
+              <a:t>再次感谢：KVMem 作者团队（B 站 FirePKU）· 沈三殊 · tancau（Ring 环）· 帅气的 zxz（5060Ti 线），以及 llama.cpp / Neroued/ninfer / iamwavecut/ninfer-all 与社区所有贡献者。</a:t>
+            </a:r>
+            <a:endParaRPr lang="en-US" sz="900" dirty="0"/>
+          </a:p>
+        </p:txBody>
+      </p:sp>
+      <p:sp>
+        <p:nvSpPr>
+          <p:cNvPr id="204" name="Text 14"/>
+          <p:cNvSpPr/>
+          <p:nvPr/>
+        </p:nvSpPr>
+        <p:spPr>
+          <a:xfrm>
+            <a:off x="822960" y="4681728"/>
+            <a:ext cx="7315200" cy="274320"/>
+          </a:xfrm>
+          <a:prstGeom prst="rect">
+            <a:avLst/>
+          </a:prstGeom>
+          <a:noFill/>
+          <a:ln/>
+        </p:spPr>
+        <p:txBody>
+          <a:bodyPr wrap="square" lIns="0" tIns="0" rIns="0" bIns="0" rtlCol="0" anchor="ctr"/>
+          <a:lstStyle/>
+          <a:p>
+            <a:pPr marL="0" indent="0">
+              <a:buNone/>
+            </a:pPr>
+            <a:r>
+              <a:rPr lang="en-US" sz="1000" dirty="0">
+                <a:solidFill>
+                  <a:srgbClr val="A9BECC"/>
+                </a:solidFill>
+                <a:latin typeface="Microsoft YaHei" pitchFamily="34" charset="0"/>
+                <a:ea typeface="Microsoft YaHei" pitchFamily="34" charset="-122"/>
+                <a:cs typeface="Microsoft YaHei" pitchFamily="34" charset="-120"/>
+              </a:rPr>
+              <a:t>Ninfer-KVMem-Async · 2026-10</a:t>
+            </a:r>
+            <a:endParaRPr lang="en-US" sz="1000" dirty="0"/>
           </a:p>
         </p:txBody>
       </p:sp>
@@ -21049,813 +22252,206 @@
 </file>
 
 <file path=ppt/slides/slide8.xml><?xml version="1.0" encoding="utf-8"?>
-<p:sld xmlns:p="http://schemas.openxmlformats.org/presentationml/2006/main" xmlns:a="http://schemas.openxmlformats.org/drawingml/2006/main">
-  <p:cSld name="Slide 8">
-    <p:bg>
-      <p:bgPr>
-        <a:solidFill>
-          <a:srgbClr val="0B1F33"/>
-        </a:solidFill>
-      </p:bgPr>
-    </p:bg>
+<p:sld xmlns:a="http://schemas.openxmlformats.org/drawingml/2006/main" xmlns:p="http://schemas.openxmlformats.org/presentationml/2006/main" xmlns:r="http://schemas.openxmlformats.org/officeDocument/2006/relationships">
+  <p:cSld>
     <p:spTree>
       <p:nvGrpSpPr>
-        <p:cNvPr id="348" name=""/>
+        <p:cNvPr id="1" name=""/>
         <p:cNvGrpSpPr/>
         <p:nvPr/>
       </p:nvGrpSpPr>
-      <p:grpSpPr>
-        <a:xfrm>
-          <a:off x="0" y="0"/>
-          <a:ext cx="0" cy="0"/>
-          <a:chOff x="0" y="0"/>
-          <a:chExt cx="0" cy="0"/>
-        </a:xfrm>
-      </p:grpSpPr>
-      <p:sp>
-        <p:nvSpPr>
-          <p:cNvPr id="349" name="Shape 0"/>
-          <p:cNvSpPr/>
-          <p:nvPr/>
-        </p:nvSpPr>
-        <p:spPr>
-          <a:xfrm>
-            <a:off x="457200" y="384048"/>
-            <a:ext cx="109728" cy="457200"/>
-          </a:xfrm>
-          <a:prstGeom prst="roundRect">
-            <a:avLst>
-              <a:gd name="adj" fmla="val 50000"/>
-            </a:avLst>
+      <p:grpSpPr/>
+      <p:sp>
+        <p:nvSpPr>
+          <p:cNvPr id="2" name="TextBox 1"/>
+          <p:cNvSpPr txBox="1"/>
+          <p:nvPr/>
+        </p:nvSpPr>
+        <p:spPr>
+          <a:xfrm>
+            <a:off x="548640" y="256032"/>
+            <a:ext cx="8046720" cy="292608"/>
+          </a:xfrm>
+          <a:prstGeom prst="rect">
+            <a:avLst/>
+          </a:prstGeom>
+          <a:noFill/>
+        </p:spPr>
+        <p:txBody>
+          <a:bodyPr wrap="none">
+            <a:spAutoFit/>
+          </a:bodyPr>
+          <a:lstStyle/>
+          <a:p>
+            <a:r>
+              <a:rPr sz="1200" b="1">
+                <a:solidFill>
+                  <a:srgbClr val="0E7E86"/>
+                </a:solidFill>
+                <a:latin typeface="Microsoft YaHei"/>
+              </a:rPr>
+              <a:t>WHERE PAGES LIVE</a:t>
+            </a:r>
+          </a:p>
+        </p:txBody>
+      </p:sp>
+      <p:sp>
+        <p:nvSpPr>
+          <p:cNvPr id="3" name="TextBox 2"/>
+          <p:cNvSpPr txBox="1"/>
+          <p:nvPr/>
+        </p:nvSpPr>
+        <p:spPr>
+          <a:xfrm>
+            <a:off x="548640" y="548640"/>
+            <a:ext cx="8046720" cy="566928"/>
+          </a:xfrm>
+          <a:prstGeom prst="rect">
+            <a:avLst/>
+          </a:prstGeom>
+          <a:noFill/>
+        </p:spPr>
+        <p:txBody>
+          <a:bodyPr wrap="none">
+            <a:spAutoFit/>
+          </a:bodyPr>
+          <a:lstStyle/>
+          <a:p>
+            <a:r>
+              <a:rPr sz="2300" b="1">
+                <a:solidFill>
+                  <a:srgbClr val="13314D"/>
+                </a:solidFill>
+                <a:latin typeface="Microsoft YaHei"/>
+              </a:rPr>
+              <a:t>提前搬运的页放在哪？——池页数恒定，搬运只换内容</a:t>
+            </a:r>
+          </a:p>
+        </p:txBody>
+      </p:sp>
+      <p:sp>
+        <p:nvSpPr>
+          <p:cNvPr id="4" name="TextBox 3"/>
+          <p:cNvSpPr txBox="1"/>
+          <p:nvPr/>
+        </p:nvSpPr>
+        <p:spPr>
+          <a:xfrm>
+            <a:off x="548640" y="1261872"/>
+            <a:ext cx="8046720" cy="3127248"/>
+          </a:xfrm>
+          <a:prstGeom prst="rect">
+            <a:avLst/>
+          </a:prstGeom>
+          <a:noFill/>
+        </p:spPr>
+        <p:txBody>
+          <a:bodyPr wrap="square">
+            <a:spAutoFit/>
+          </a:bodyPr>
+          <a:lstStyle/>
+          <a:p>
+            <a:pPr>
+              <a:spcAft>
+                <a:spcPts val="700"/>
+              </a:spcAft>
+            </a:pPr>
+            <a:r>
+              <a:rPr sz="1050">
+                <a:solidFill>
+                  <a:srgbClr val="23465C"/>
+                </a:solidFill>
+                <a:latin typeface="Microsoft YaHei"/>
+              </a:rPr>
+              <a:t>▪ 设备池 = 1,024 个页槽（65,536 tok ÷ 64），启动时一次分配、永不增减——搬运不是“加空间”，是“换槽里的内容”（同 OS 物理页帧）</a:t>
+            </a:r>
+          </a:p>
+          <a:p>
+            <a:pPr>
+              <a:spcAft>
+                <a:spcPts val="700"/>
+              </a:spcAft>
+            </a:pPr>
+            <a:r>
+              <a:rPr sz="1050">
+                <a:solidFill>
+                  <a:srgbClr val="23465C"/>
+                </a:solidFill>
+                <a:latin typeface="Microsoft YaHei"/>
+              </a:rPr>
+              <a:t>▪ restore（搬回）的落点 = 设备池的 free 槽；demote（搬出）的落点 = Host RAM 配额槽（写前取配额：host 没空槽就不发起）</a:t>
+            </a:r>
+          </a:p>
+          <a:p>
+            <a:pPr>
+              <a:spcAft>
+                <a:spcPts val="700"/>
+              </a:spcAft>
+            </a:pPr>
+            <a:r>
+              <a:rPr sz="1050">
+                <a:solidFill>
+                  <a:srgbClr val="23465C"/>
+                </a:solidFill>
+                <a:latin typeface="Microsoft YaHei"/>
+              </a:rPr>
+              <a:t>▪ 空间守恒律：restore 进来的每页 = demote 出去的一页的槽；每步新增 N 页 = 每步腾出 N 槽——稳态流水平衡</a:t>
+            </a:r>
+          </a:p>
+          <a:p>
+            <a:pPr>
+              <a:spcAft>
+                <a:spcPts val="700"/>
+              </a:spcAft>
+            </a:pPr>
+            <a:r>
+              <a:rPr sz="1050">
+                <a:solidFill>
+                  <a:srgbClr val="23465C"/>
+                </a:solidFill>
+                <a:latin typeface="Microsoft YaHei"/>
+              </a:rPr>
+              <a:t>▪ 唯一的瞬时额外 = 在飞批次的双份副本 ≈ 26 MiB（publish 前旧副本不丢——账本保证任何时刻至少一份有效）</a:t>
+            </a:r>
+          </a:p>
+          <a:p>
+            <a:pPr>
+              <a:spcAft>
+                <a:spcPts val="700"/>
+              </a:spcAft>
+            </a:pPr>
+            <a:r>
+              <a:rPr sz="1050">
+                <a:solidFill>
+                  <a:srgbClr val="23465C"/>
+                </a:solidFill>
+                <a:latin typeface="Microsoft YaHei"/>
+              </a:rPr>
+              <a:t>▪ 池满 = 换页体系的设计工况：池满不回退，池浅才等价（浅载无搬运需求，两条路自然一样快）</a:t>
+            </a:r>
+          </a:p>
+        </p:txBody>
+      </p:sp>
+      <p:sp>
+        <p:nvSpPr>
+          <p:cNvPr id="5" name="Rectangle 4"/>
+          <p:cNvSpPr/>
+          <p:nvPr/>
+        </p:nvSpPr>
+        <p:spPr>
+          <a:xfrm>
+            <a:off x="548640" y="4498848"/>
+            <a:ext cx="8046720" cy="438912"/>
+          </a:xfrm>
+          <a:prstGeom prst="rect">
+            <a:avLst/>
           </a:prstGeom>
           <a:solidFill>
-            <a:srgbClr val="0E7E86"/>
-          </a:solidFill>
-          <a:ln/>
-        </p:spPr>
-        <p:txBody>
-          <a:bodyPr/>
-          <a:p/>
-        </p:txBody>
-      </p:sp>
-      <p:sp>
-        <p:nvSpPr>
-          <p:cNvPr id="350" name="Text 1"/>
-          <p:cNvSpPr/>
-          <p:nvPr/>
-        </p:nvSpPr>
-        <p:spPr>
-          <a:xfrm>
-            <a:off x="713232" y="310896"/>
-            <a:ext cx="7955280" cy="228600"/>
-          </a:xfrm>
-          <a:prstGeom prst="rect">
-            <a:avLst/>
-          </a:prstGeom>
-          <a:noFill/>
-          <a:ln/>
-        </p:spPr>
-        <p:txBody>
-          <a:bodyPr wrap="square" lIns="0" tIns="0" rIns="0" bIns="0" rtlCol="0" anchor="ctr"/>
-          <a:lstStyle/>
-          <a:p>
-            <a:pPr marL="0" indent="0">
-              <a:buNone/>
-            </a:pPr>
-            <a:r>
-              <a:rPr lang="en-US" sz="1100" b="1" kern="0" spc="200" dirty="0">
-                <a:solidFill>
-                  <a:srgbClr val="3FC6D6"/>
-                </a:solidFill>
-                <a:latin typeface="Microsoft YaHei" pitchFamily="34" charset="0"/>
-                <a:ea typeface="Microsoft YaHei" pitchFamily="34" charset="-122"/>
-                <a:cs typeface="Microsoft YaHei" pitchFamily="34" charset="-120"/>
-              </a:rPr>
-              <a:t>OUR EXPLORATION ②</a:t>
-            </a:r>
-            <a:endParaRPr lang="en-US" sz="1100" dirty="0"/>
-          </a:p>
-        </p:txBody>
-      </p:sp>
-      <p:sp>
-        <p:nvSpPr>
-          <p:cNvPr id="351" name="Text 2"/>
-          <p:cNvSpPr/>
-          <p:nvPr/>
-        </p:nvSpPr>
-        <p:spPr>
-          <a:xfrm>
-            <a:off x="713232" y="548640"/>
-            <a:ext cx="8138160" cy="457200"/>
-          </a:xfrm>
-          <a:prstGeom prst="rect">
-            <a:avLst/>
-          </a:prstGeom>
-          <a:noFill/>
-          <a:ln/>
-        </p:spPr>
-        <p:txBody>
-          <a:bodyPr wrap="square" lIns="0" tIns="0" rIns="0" bIns="0" rtlCol="0" anchor="ctr"/>
-          <a:lstStyle/>
-          <a:p>
-            <a:pPr marL="0" indent="0">
-              <a:buNone/>
-            </a:pPr>
-            <a:r>
-              <a:rPr lang="en-US" sz="2400" b="1" dirty="0">
-                <a:solidFill>
-                  <a:srgbClr val="FFFFFF"/>
-                </a:solidFill>
-                <a:latin typeface="Microsoft YaHei" pitchFamily="34" charset="0"/>
-                <a:ea typeface="Microsoft YaHei" pitchFamily="34" charset="-122"/>
-                <a:cs typeface="Microsoft YaHei" pitchFamily="34" charset="-120"/>
-              </a:rPr>
-              <a:t>目标函数修正：池从“容量门槛”变成“旋钮”</a:t>
-            </a:r>
-            <a:endParaRPr lang="en-US" sz="2400" dirty="0"/>
-          </a:p>
-        </p:txBody>
-      </p:sp>
-      <p:sp>
-        <p:nvSpPr>
-          <p:cNvPr id="352" name="Text 3"/>
-          <p:cNvSpPr/>
-          <p:nvPr/>
-        </p:nvSpPr>
-        <p:spPr>
-          <a:xfrm>
-            <a:off x="548640" y="1170432"/>
-            <a:ext cx="8046720" cy="320040"/>
-          </a:xfrm>
-          <a:prstGeom prst="rect">
-            <a:avLst/>
-          </a:prstGeom>
-          <a:noFill/>
-          <a:ln/>
-        </p:spPr>
-        <p:txBody>
-          <a:bodyPr wrap="square" lIns="0" tIns="0" rIns="0" bIns="0" rtlCol="0" anchor="ctr"/>
-          <a:lstStyle/>
-          <a:p>
-            <a:pPr marL="0" indent="0">
-              <a:buNone/>
-            </a:pPr>
-            <a:r>
-              <a:rPr lang="en-US" sz="1300" dirty="0">
-                <a:solidFill>
-                  <a:srgbClr val="FFFFFF"/>
-                </a:solidFill>
-                <a:latin typeface="Microsoft YaHei" pitchFamily="34" charset="0"/>
-                <a:ea typeface="Microsoft YaHei" pitchFamily="34" charset="-122"/>
-                <a:cs typeface="Microsoft YaHei" pitchFamily="34" charset="-120"/>
-              </a:rPr>
-              <a:t>异步之后，池的收益曲线出现三段结构（200K 上下文场景）：</a:t>
-            </a:r>
-            <a:endParaRPr lang="en-US" sz="1300" dirty="0"/>
-          </a:p>
-        </p:txBody>
-      </p:sp>
-      <p:sp>
-        <p:nvSpPr>
-          <p:cNvPr id="353" name="Shape 4"/>
-          <p:cNvSpPr/>
-          <p:nvPr/>
-        </p:nvSpPr>
-        <p:spPr>
-          <a:xfrm>
-            <a:off x="548640" y="1600200"/>
-            <a:ext cx="2468880" cy="457200"/>
-          </a:xfrm>
-          <a:prstGeom prst="roundRect">
-            <a:avLst>
-              <a:gd name="adj" fmla="val 50000"/>
-            </a:avLst>
-          </a:prstGeom>
-          <a:solidFill>
-            <a:srgbClr val="D9A82C"/>
-          </a:solidFill>
-          <a:ln/>
-        </p:spPr>
-        <p:txBody>
-          <a:bodyPr/>
-          <a:p/>
-        </p:txBody>
-      </p:sp>
-      <p:sp>
-        <p:nvSpPr>
-          <p:cNvPr id="354" name="Text 5"/>
-          <p:cNvSpPr/>
-          <p:nvPr/>
-        </p:nvSpPr>
-        <p:spPr>
-          <a:xfrm>
-            <a:off x="621792" y="1618488"/>
-            <a:ext cx="2322576" cy="420624"/>
-          </a:xfrm>
-          <a:prstGeom prst="rect">
-            <a:avLst/>
-          </a:prstGeom>
-          <a:noFill/>
-          <a:ln/>
-        </p:spPr>
-        <p:txBody>
-          <a:bodyPr wrap="square" lIns="0" tIns="0" rIns="0" bIns="0" rtlCol="0" anchor="ctr"/>
-          <a:lstStyle/>
-          <a:p>
-            <a:pPr marL="0" indent="0" algn="ctr">
-              <a:buNone/>
-            </a:pPr>
-            <a:r>
-              <a:rPr lang="en-US" sz="950" b="1" dirty="0">
-                <a:solidFill>
-                  <a:srgbClr val="FFFFFF"/>
-                </a:solidFill>
-                <a:latin typeface="Microsoft YaHei" pitchFamily="34" charset="0"/>
-                <a:ea typeface="Microsoft YaHei" pitchFamily="34" charset="-122"/>
-                <a:cs typeface="Microsoft YaHei" pitchFamily="34" charset="-120"/>
-              </a:rPr>
-              <a:t>池 &lt; 工作集（~42K）</a:t>
-            </a:r>
-            <a:endParaRPr lang="en-US" sz="950" dirty="0"/>
-          </a:p>
-        </p:txBody>
-      </p:sp>
-      <p:sp>
-        <p:nvSpPr>
-          <p:cNvPr id="355" name="Text 6"/>
-          <p:cNvSpPr/>
-          <p:nvPr/>
-        </p:nvSpPr>
-        <p:spPr>
-          <a:xfrm>
-            <a:off x="548640" y="2121408"/>
-            <a:ext cx="2468880" cy="640080"/>
-          </a:xfrm>
-          <a:prstGeom prst="rect">
-            <a:avLst/>
-          </a:prstGeom>
-          <a:noFill/>
-          <a:ln/>
-        </p:spPr>
-        <p:txBody>
-          <a:bodyPr wrap="square" lIns="0" tIns="0" rIns="0" bIns="0" rtlCol="0" anchor="ctr"/>
-          <a:lstStyle/>
-          <a:p>
-            <a:pPr marL="0" indent="0">
-              <a:buNone/>
-            </a:pPr>
-            <a:r>
-              <a:rPr lang="en-US" sz="900" dirty="0">
-                <a:solidFill>
-                  <a:srgbClr val="A9BECC"/>
-                </a:solidFill>
-                <a:latin typeface="Microsoft YaHei" pitchFamily="34" charset="0"/>
-                <a:ea typeface="Microsoft YaHei" pitchFamily="34" charset="-122"/>
-                <a:cs typeface="Microsoft YaHei" pitchFamily="34" charset="-120"/>
-              </a:rPr>
-              <a:t>每步都在搬运——全靠流水硬扛</a:t>
-            </a:r>
-            <a:endParaRPr lang="en-US" sz="900" dirty="0"/>
-          </a:p>
-        </p:txBody>
-      </p:sp>
-      <p:sp>
-        <p:nvSpPr>
-          <p:cNvPr id="356" name="Shape 7"/>
-          <p:cNvSpPr/>
-          <p:nvPr/>
-        </p:nvSpPr>
-        <p:spPr>
-          <a:xfrm>
-            <a:off x="3063240" y="1600200"/>
-            <a:ext cx="1600200" cy="457200"/>
-          </a:xfrm>
-          <a:prstGeom prst="roundRect">
-            <a:avLst>
-              <a:gd name="adj" fmla="val 50000"/>
-            </a:avLst>
-          </a:prstGeom>
-          <a:solidFill>
-            <a:srgbClr val="0E7E86"/>
-          </a:solidFill>
-          <a:ln/>
-        </p:spPr>
-        <p:txBody>
-          <a:bodyPr/>
-          <a:p/>
-        </p:txBody>
-      </p:sp>
-      <p:sp>
-        <p:nvSpPr>
-          <p:cNvPr id="357" name="Text 8"/>
-          <p:cNvSpPr/>
-          <p:nvPr/>
-        </p:nvSpPr>
-        <p:spPr>
-          <a:xfrm>
-            <a:off x="3136392" y="1618488"/>
-            <a:ext cx="1453896" cy="420624"/>
-          </a:xfrm>
-          <a:prstGeom prst="rect">
-            <a:avLst/>
-          </a:prstGeom>
-          <a:noFill/>
-          <a:ln/>
-        </p:spPr>
-        <p:txBody>
-          <a:bodyPr wrap="square" lIns="0" tIns="0" rIns="0" bIns="0" rtlCol="0" anchor="ctr"/>
-          <a:lstStyle/>
-          <a:p>
-            <a:pPr marL="0" indent="0" algn="ctr">
-              <a:buNone/>
-            </a:pPr>
-            <a:r>
-              <a:rPr lang="en-US" sz="950" b="1" dirty="0">
-                <a:solidFill>
-                  <a:srgbClr val="FFFFFF"/>
-                </a:solidFill>
-                <a:latin typeface="Microsoft YaHei" pitchFamily="34" charset="0"/>
-                <a:ea typeface="Microsoft YaHei" pitchFamily="34" charset="-122"/>
-                <a:cs typeface="Microsoft YaHei" pitchFamily="34" charset="-120"/>
-              </a:rPr>
-              <a:t>甜点区 42K-56K</a:t>
-            </a:r>
-            <a:endParaRPr lang="en-US" sz="950" dirty="0"/>
-          </a:p>
-        </p:txBody>
-      </p:sp>
-      <p:sp>
-        <p:nvSpPr>
-          <p:cNvPr id="358" name="Text 9"/>
-          <p:cNvSpPr/>
-          <p:nvPr/>
-        </p:nvSpPr>
-        <p:spPr>
-          <a:xfrm>
-            <a:off x="3063240" y="2121408"/>
-            <a:ext cx="1600200" cy="640080"/>
-          </a:xfrm>
-          <a:prstGeom prst="rect">
-            <a:avLst/>
-          </a:prstGeom>
-          <a:noFill/>
-          <a:ln/>
-        </p:spPr>
-        <p:txBody>
-          <a:bodyPr wrap="square" lIns="0" tIns="0" rIns="0" bIns="0" rtlCol="0" anchor="ctr"/>
-          <a:lstStyle/>
-          <a:p>
-            <a:pPr marL="0" indent="0">
-              <a:buNone/>
-            </a:pPr>
-            <a:r>
-              <a:rPr lang="en-US" sz="900" dirty="0">
-                <a:solidFill>
-                  <a:srgbClr val="A9BECC"/>
-                </a:solidFill>
-                <a:latin typeface="Microsoft YaHei" pitchFamily="34" charset="0"/>
-                <a:ea typeface="Microsoft YaHei" pitchFamily="34" charset="-122"/>
-                <a:cs typeface="Microsoft YaHei" pitchFamily="34" charset="-120"/>
-              </a:rPr>
-              <a:t>常规轮次零搬运</a:t>
-            </a:r>
-            <a:endParaRPr lang="en-US" sz="900" dirty="0"/>
-          </a:p>
-        </p:txBody>
-      </p:sp>
-      <p:sp>
-        <p:nvSpPr>
-          <p:cNvPr id="359" name="Shape 10"/>
-          <p:cNvSpPr/>
-          <p:nvPr/>
-        </p:nvSpPr>
-        <p:spPr>
-          <a:xfrm>
-            <a:off x="4709160" y="1600200"/>
-            <a:ext cx="1600200" cy="457200"/>
-          </a:xfrm>
-          <a:prstGeom prst="roundRect">
-            <a:avLst>
-              <a:gd name="adj" fmla="val 50000"/>
-            </a:avLst>
-          </a:prstGeom>
-          <a:solidFill>
-            <a:srgbClr val="0E7E86">
-              <a:alpha val="100000"/>
-            </a:srgbClr>
-          </a:solidFill>
-          <a:ln/>
-        </p:spPr>
-        <p:txBody>
-          <a:bodyPr/>
-          <a:p/>
-        </p:txBody>
-      </p:sp>
-      <p:sp>
-        <p:nvSpPr>
-          <p:cNvPr id="360" name="Text 11"/>
-          <p:cNvSpPr/>
-          <p:nvPr/>
-        </p:nvSpPr>
-        <p:spPr>
-          <a:xfrm>
-            <a:off x="4782312" y="1618488"/>
-            <a:ext cx="1453896" cy="420624"/>
-          </a:xfrm>
-          <a:prstGeom prst="rect">
-            <a:avLst/>
-          </a:prstGeom>
-          <a:noFill/>
-          <a:ln/>
-        </p:spPr>
-        <p:txBody>
-          <a:bodyPr wrap="square" lIns="0" tIns="0" rIns="0" bIns="0" rtlCol="0" anchor="ctr"/>
-          <a:lstStyle/>
-          <a:p>
-            <a:pPr marL="0" indent="0" algn="ctr">
-              <a:buNone/>
-            </a:pPr>
-            <a:r>
-              <a:rPr lang="en-US" sz="950" b="1" dirty="0">
-                <a:solidFill>
-                  <a:srgbClr val="FFFFFF"/>
-                </a:solidFill>
-                <a:latin typeface="Microsoft YaHei" pitchFamily="34" charset="0"/>
-                <a:ea typeface="Microsoft YaHei" pitchFamily="34" charset="-122"/>
-                <a:cs typeface="Microsoft YaHei" pitchFamily="34" charset="-120"/>
-              </a:rPr>
-              <a:t>优选段 56K-96K</a:t>
-            </a:r>
-            <a:endParaRPr lang="en-US" sz="950" dirty="0"/>
-          </a:p>
-        </p:txBody>
-      </p:sp>
-      <p:sp>
-        <p:nvSpPr>
-          <p:cNvPr id="361" name="Text 12"/>
-          <p:cNvSpPr/>
-          <p:nvPr/>
-        </p:nvSpPr>
-        <p:spPr>
-          <a:xfrm>
-            <a:off x="4709160" y="2121408"/>
-            <a:ext cx="1600200" cy="640080"/>
-          </a:xfrm>
-          <a:prstGeom prst="rect">
-            <a:avLst/>
-          </a:prstGeom>
-          <a:noFill/>
-          <a:ln/>
-        </p:spPr>
-        <p:txBody>
-          <a:bodyPr wrap="square" lIns="0" tIns="0" rIns="0" bIns="0" rtlCol="0" anchor="ctr"/>
-          <a:lstStyle/>
-          <a:p>
-            <a:pPr marL="0" indent="0">
-              <a:buNone/>
-            </a:pPr>
-            <a:r>
-              <a:rPr lang="en-US" sz="900" dirty="0">
-                <a:solidFill>
-                  <a:srgbClr val="A9BECC"/>
-                </a:solidFill>
-                <a:latin typeface="Microsoft YaHei" pitchFamily="34" charset="0"/>
-                <a:ea typeface="Microsoft YaHei" pitchFamily="34" charset="-122"/>
-                <a:cs typeface="Microsoft YaHei" pitchFamily="34" charset="-120"/>
-              </a:rPr>
-              <a:t>覆盖大多数会话</a:t>
-            </a:r>
-            <a:endParaRPr lang="en-US" sz="900" dirty="0"/>
-          </a:p>
-        </p:txBody>
-      </p:sp>
-      <p:sp>
-        <p:nvSpPr>
-          <p:cNvPr id="362" name="Shape 13"/>
-          <p:cNvSpPr/>
-          <p:nvPr/>
-        </p:nvSpPr>
-        <p:spPr>
-          <a:xfrm>
-            <a:off x="6355080" y="1600200"/>
-            <a:ext cx="2240280" cy="457200"/>
-          </a:xfrm>
-          <a:prstGeom prst="roundRect">
-            <a:avLst>
-              <a:gd name="adj" fmla="val 50000"/>
-            </a:avLst>
-          </a:prstGeom>
-          <a:solidFill>
-            <a:srgbClr val="5A7789"/>
-          </a:solidFill>
-          <a:ln/>
-        </p:spPr>
-        <p:txBody>
-          <a:bodyPr/>
-          <a:p/>
-        </p:txBody>
-      </p:sp>
-      <p:sp>
-        <p:nvSpPr>
-          <p:cNvPr id="363" name="Text 14"/>
-          <p:cNvSpPr/>
-          <p:nvPr/>
-        </p:nvSpPr>
-        <p:spPr>
-          <a:xfrm>
-            <a:off x="6428232" y="1618488"/>
-            <a:ext cx="2093976" cy="420624"/>
-          </a:xfrm>
-          <a:prstGeom prst="rect">
-            <a:avLst/>
-          </a:prstGeom>
-          <a:noFill/>
-          <a:ln/>
-        </p:spPr>
-        <p:txBody>
-          <a:bodyPr wrap="square" lIns="0" tIns="0" rIns="0" bIns="0" rtlCol="0" anchor="ctr"/>
-          <a:lstStyle/>
-          <a:p>
-            <a:pPr marL="0" indent="0" algn="ctr">
-              <a:buNone/>
-            </a:pPr>
-            <a:r>
-              <a:rPr lang="en-US" sz="950" b="1" dirty="0">
-                <a:solidFill>
-                  <a:srgbClr val="FFFFFF"/>
-                </a:solidFill>
-                <a:latin typeface="Microsoft YaHei" pitchFamily="34" charset="0"/>
-                <a:ea typeface="Microsoft YaHei" pitchFamily="34" charset="-122"/>
-                <a:cs typeface="Microsoft YaHei" pitchFamily="34" charset="-120"/>
-              </a:rPr>
-              <a:t>&gt; 96K（请求线上）</a:t>
-            </a:r>
-            <a:endParaRPr lang="en-US" sz="950" dirty="0"/>
-          </a:p>
-        </p:txBody>
-      </p:sp>
-      <p:sp>
-        <p:nvSpPr>
-          <p:cNvPr id="364" name="Text 15"/>
-          <p:cNvSpPr/>
-          <p:nvPr/>
-        </p:nvSpPr>
-        <p:spPr>
-          <a:xfrm>
-            <a:off x="6355080" y="2121408"/>
-            <a:ext cx="2240280" cy="640080"/>
-          </a:xfrm>
-          <a:prstGeom prst="rect">
-            <a:avLst/>
-          </a:prstGeom>
-          <a:noFill/>
-          <a:ln/>
-        </p:spPr>
-        <p:txBody>
-          <a:bodyPr wrap="square" lIns="0" tIns="0" rIns="0" bIns="0" rtlCol="0" anchor="ctr"/>
-          <a:lstStyle/>
-          <a:p>
-            <a:pPr marL="0" indent="0">
-              <a:buNone/>
-            </a:pPr>
-            <a:r>
-              <a:rPr lang="en-US" sz="900" dirty="0">
-                <a:solidFill>
-                  <a:srgbClr val="A9BECC"/>
-                </a:solidFill>
-                <a:latin typeface="Microsoft YaHei" pitchFamily="34" charset="0"/>
-                <a:ea typeface="Microsoft YaHei" pitchFamily="34" charset="-122"/>
-                <a:cs typeface="Microsoft YaHei" pitchFamily="34" charset="-120"/>
-              </a:rPr>
-              <a:t>边际收益骤降</a:t>
-            </a:r>
-            <a:endParaRPr lang="en-US" sz="900" dirty="0"/>
-          </a:p>
-        </p:txBody>
-      </p:sp>
-      <p:sp>
-        <p:nvSpPr>
-          <p:cNvPr id="365" name="Text 16"/>
-          <p:cNvSpPr/>
-          <p:nvPr/>
-        </p:nvSpPr>
-        <p:spPr>
-          <a:xfrm>
-            <a:off x="548640" y="2926080"/>
-            <a:ext cx="8046720" cy="502920"/>
-          </a:xfrm>
-          <a:prstGeom prst="rect">
-            <a:avLst/>
-          </a:prstGeom>
-          <a:noFill/>
-          <a:ln/>
-        </p:spPr>
-        <p:txBody>
-          <a:bodyPr wrap="square" lIns="0" tIns="0" rIns="0" bIns="0" rtlCol="0" anchor="ctr"/>
-          <a:lstStyle/>
-          <a:p>
-            <a:pPr marL="0" indent="0">
-              <a:buNone/>
-            </a:pPr>
-            <a:r>
-              <a:rPr lang="en-US" sz="1250" b="1" dirty="0">
-                <a:solidFill>
-                  <a:srgbClr val="8FD0F0"/>
-                </a:solidFill>
-                <a:latin typeface="Microsoft YaHei" pitchFamily="34" charset="0"/>
-                <a:ea typeface="Microsoft YaHei" pitchFamily="34" charset="-122"/>
-                <a:cs typeface="Microsoft YaHei" pitchFamily="34" charset="-120"/>
-              </a:rPr>
-              <a:t>实测：</a:t>
-            </a:r>
-            <a:r>
-              <a:rPr lang="en-US" sz="1250" dirty="0">
-                <a:solidFill>
-                  <a:srgbClr val="FFFFFF"/>
-                </a:solidFill>
-                <a:latin typeface="Microsoft YaHei" pitchFamily="34" charset="0"/>
-                <a:ea typeface="Microsoft YaHei" pitchFamily="34" charset="-122"/>
-                <a:cs typeface="Microsoft YaHei" pitchFamily="34" charset="-120"/>
-              </a:rPr>
-              <a:t>池 64K vs 51K 仅多撑约 8 轮会话——过了工作集线后，多买的池主要是“防深堆积”，而深堆积有流水兜底。</a:t>
-            </a:r>
-            <a:endParaRPr lang="en-US" sz="1250" dirty="0"/>
-          </a:p>
-        </p:txBody>
-      </p:sp>
-      <p:sp>
-        <p:nvSpPr>
-          <p:cNvPr id="366" name="Shape 17"/>
-          <p:cNvSpPr/>
-          <p:nvPr/>
-        </p:nvSpPr>
-        <p:spPr>
-          <a:xfrm>
-            <a:off x="548640" y="3566160"/>
-            <a:ext cx="8046720" cy="621792"/>
-          </a:xfrm>
-          <a:prstGeom prst="roundRect">
-            <a:avLst>
-              <a:gd name="adj" fmla="val 6100"/>
-            </a:avLst>
-          </a:prstGeom>
-          <a:solidFill>
-            <a:srgbClr val="23465C"/>
-          </a:solidFill>
-          <a:ln/>
-        </p:spPr>
-        <p:txBody>
-          <a:bodyPr/>
-          <a:p/>
-        </p:txBody>
-      </p:sp>
-      <p:sp>
-        <p:nvSpPr>
-          <p:cNvPr id="367" name="Text 18"/>
-          <p:cNvSpPr/>
-          <p:nvPr/>
-        </p:nvSpPr>
-        <p:spPr>
-          <a:xfrm>
-            <a:off x="777240" y="3611880"/>
-            <a:ext cx="7589520" cy="530352"/>
-          </a:xfrm>
-          <a:prstGeom prst="rect">
-            <a:avLst/>
-          </a:prstGeom>
-          <a:noFill/>
-          <a:ln/>
-        </p:spPr>
-        <p:txBody>
-          <a:bodyPr wrap="square" lIns="0" tIns="0" rIns="0" bIns="0" rtlCol="0" anchor="ctr"/>
-          <a:lstStyle/>
-          <a:p>
-            <a:pPr marL="0" indent="0">
-              <a:buNone/>
-            </a:pPr>
-            <a:r>
-              <a:rPr lang="en-US" sz="1200" dirty="0">
-                <a:solidFill>
-                  <a:srgbClr val="FFFFFF"/>
-                </a:solidFill>
-                <a:latin typeface="Microsoft YaHei" pitchFamily="34" charset="0"/>
-                <a:ea typeface="Microsoft YaHei" pitchFamily="34" charset="-122"/>
-                <a:cs typeface="Microsoft YaHei" pitchFamily="34" charset="-120"/>
-              </a:rPr>
-              <a:t>16GB 显存是零和的：每 1 GiB 给池，就少 1 GiB 给 KV 精度或权重档位——而精度影响每一轮。→ 浅池 + 深流水 + 高精度。</a:t>
-            </a:r>
-            <a:endParaRPr lang="en-US" sz="1200" dirty="0"/>
-          </a:p>
-        </p:txBody>
-      </p:sp>
-      <p:sp>
-        <p:nvSpPr>
-          <p:cNvPr id="368" name="Text 19"/>
-          <p:cNvSpPr/>
-          <p:nvPr/>
-        </p:nvSpPr>
-        <p:spPr>
-          <a:xfrm>
-            <a:off x="7874000" y="4826000"/>
-            <a:ext cx="1130300" cy="274320"/>
-          </a:xfrm>
-          <a:prstGeom prst="rect">
-            <a:avLst/>
-          </a:prstGeom>
-          <a:noFill/>
-          <a:ln/>
-        </p:spPr>
-        <p:txBody>
-          <a:bodyPr wrap="none" lIns="0" tIns="0" rIns="0" bIns="0" rtlCol="0" anchor="ctr"/>
-          <a:lstStyle/>
-          <a:p>
-            <a:pPr marL="0" indent="0" algn="r">
-              <a:buNone/>
-            </a:pPr>
-            <a:r>
-              <a:rPr b="1" sz="1000">
-                <a:solidFill>
-                  <a:srgbClr val="3FC6D6"/>
-                </a:solidFill>
-                <a:latin typeface="Microsoft YaHei"/>
-                <a:ea typeface="Microsoft YaHei"/>
-              </a:rPr>
-              <a:t>08</a:t>
-            </a:r>
-            <a:r>
-              <a:rPr sz="900">
-                <a:solidFill>
-                  <a:srgbClr val="8FA6B5"/>
-                </a:solidFill>
-                <a:latin typeface="Microsoft YaHei"/>
-                <a:ea typeface="Microsoft YaHei"/>
-              </a:rPr>
-              <a:t> / 18</a:t>
-            </a:r>
-            <a:endParaRPr lang="en-US" sz="1000" dirty="0"/>
-          </a:p>
-        </p:txBody>
-      </p:sp>
-      <p:sp>
-        <p:nvSpPr>
-          <p:cNvPr id="369" name="Text 20"/>
-          <p:cNvSpPr/>
-          <p:nvPr/>
-        </p:nvSpPr>
-        <p:spPr>
-          <a:xfrm>
-            <a:off x="457200" y="4828032"/>
-            <a:ext cx="5486400" cy="228600"/>
-          </a:xfrm>
-          <a:prstGeom prst="rect">
-            <a:avLst/>
-          </a:prstGeom>
-          <a:noFill/>
-          <a:ln/>
-        </p:spPr>
-        <p:txBody>
-          <a:bodyPr wrap="square" lIns="0" tIns="0" rIns="0" bIns="0" rtlCol="0" anchor="ctr"/>
-          <a:lstStyle/>
-          <a:p>
-            <a:pPr marL="0" indent="0">
-              <a:buNone/>
-            </a:pPr>
-            <a:r>
-              <a:rPr lang="en-US" sz="900" dirty="0">
-                <a:solidFill>
-                  <a:srgbClr val="A9BECC"/>
-                </a:solidFill>
-                <a:latin typeface="Microsoft YaHei" pitchFamily="34" charset="0"/>
-                <a:ea typeface="Microsoft YaHei" pitchFamily="34" charset="-122"/>
-                <a:cs typeface="Microsoft YaHei" pitchFamily="34" charset="-120"/>
-              </a:rPr>
-              <a:t>站在 KVMem 的肩膀上 · 异步页流水</a:t>
-            </a:r>
-            <a:endParaRPr lang="en-US" sz="900" dirty="0"/>
-          </a:p>
-        </p:txBody>
-      </p:sp>
-      <p:sp>
-        <p:nvSpPr>
-          <p:cNvPr id="370" name="Rectangle 369"/>
-          <p:cNvSpPr/>
-          <p:nvPr/>
-        </p:nvSpPr>
-        <p:spPr>
-          <a:xfrm>
-            <a:off x="457200" y="4711700"/>
-            <a:ext cx="8547100" cy="9525"/>
-          </a:xfrm>
-          <a:prstGeom prst="rect">
-            <a:avLst/>
-          </a:prstGeom>
-          <a:solidFill>
-            <a:srgbClr val="23465C"/>
+            <a:srgbClr val="3FC6D6"/>
           </a:solidFill>
           <a:ln>
             <a:noFill/>
           </a:ln>
-          <a:effectLst/>
         </p:spPr>
         <p:style>
           <a:lnRef idx="1">
@@ -21872,10 +22468,19 @@
           </a:fontRef>
         </p:style>
         <p:txBody>
-          <a:bodyPr rtlCol="0" anchor="ctr"/>
-          <a:lstStyle/>
-          <a:p>
-            <a:pPr algn="ctr"/>
+          <a:bodyPr rtlCol="0" anchor="ctr" wrap="square"/>
+          <a:lstStyle/>
+          <a:p>
+            <a:pPr algn="l"/>
+            <a:r>
+              <a:rPr sz="1150" b="1">
+                <a:solidFill>
+                  <a:srgbClr val="13314D"/>
+                </a:solidFill>
+                <a:latin typeface="Microsoft YaHei"/>
+              </a:rPr>
+              <a:t>真边界只有两条：Host 配额耗尽（=原作者 SSD 层场景，128 GB 下远不可达）与瞬时涌入超流水深度（=深流水的主战场）</a:t>
+            </a:r>
           </a:p>
         </p:txBody>
       </p:sp>
@@ -21888,578 +22493,211 @@
 </file>
 
 <file path=ppt/slides/slide9.xml><?xml version="1.0" encoding="utf-8"?>
-<p:sld xmlns:p="http://schemas.openxmlformats.org/presentationml/2006/main" xmlns:a="http://schemas.openxmlformats.org/drawingml/2006/main">
-  <p:cSld name="Slide 9">
-    <p:bg>
-      <p:bgPr>
-        <a:solidFill>
-          <a:srgbClr val="0B1F33"/>
-        </a:solidFill>
-      </p:bgPr>
-    </p:bg>
+<p:sld xmlns:a="http://schemas.openxmlformats.org/drawingml/2006/main" xmlns:p="http://schemas.openxmlformats.org/presentationml/2006/main" xmlns:r="http://schemas.openxmlformats.org/officeDocument/2006/relationships">
+  <p:cSld>
     <p:spTree>
       <p:nvGrpSpPr>
-        <p:cNvPr id="370" name=""/>
+        <p:cNvPr id="1" name=""/>
         <p:cNvGrpSpPr/>
         <p:nvPr/>
       </p:nvGrpSpPr>
-      <p:grpSpPr>
-        <a:xfrm>
-          <a:off x="0" y="0"/>
-          <a:ext cx="0" cy="0"/>
-          <a:chOff x="0" y="0"/>
-          <a:chExt cx="0" cy="0"/>
-        </a:xfrm>
-      </p:grpSpPr>
-      <p:sp>
-        <p:nvSpPr>
-          <p:cNvPr id="371" name="Shape 0"/>
-          <p:cNvSpPr/>
-          <p:nvPr/>
-        </p:nvSpPr>
-        <p:spPr>
-          <a:xfrm>
-            <a:off x="457200" y="384048"/>
-            <a:ext cx="109728" cy="457200"/>
-          </a:xfrm>
-          <a:prstGeom prst="roundRect">
-            <a:avLst>
-              <a:gd name="adj" fmla="val 50000"/>
-            </a:avLst>
+      <p:grpSpPr/>
+      <p:sp>
+        <p:nvSpPr>
+          <p:cNvPr id="2" name="TextBox 1"/>
+          <p:cNvSpPr txBox="1"/>
+          <p:nvPr/>
+        </p:nvSpPr>
+        <p:spPr>
+          <a:xfrm>
+            <a:off x="548640" y="256032"/>
+            <a:ext cx="8046720" cy="292608"/>
+          </a:xfrm>
+          <a:prstGeom prst="rect">
+            <a:avLst/>
+          </a:prstGeom>
+          <a:noFill/>
+        </p:spPr>
+        <p:txBody>
+          <a:bodyPr wrap="none">
+            <a:spAutoFit/>
+          </a:bodyPr>
+          <a:lstStyle/>
+          <a:p>
+            <a:r>
+              <a:rPr sz="1200" b="1">
+                <a:solidFill>
+                  <a:srgbClr val="0E7E86"/>
+                </a:solidFill>
+                <a:latin typeface="Microsoft YaHei"/>
+              </a:rPr>
+              <a:t>THEORY CHECK</a:t>
+            </a:r>
+          </a:p>
+        </p:txBody>
+      </p:sp>
+      <p:sp>
+        <p:nvSpPr>
+          <p:cNvPr id="3" name="TextBox 2"/>
+          <p:cNvSpPr txBox="1"/>
+          <p:nvPr/>
+        </p:nvSpPr>
+        <p:spPr>
+          <a:xfrm>
+            <a:off x="548640" y="548640"/>
+            <a:ext cx="8046720" cy="566928"/>
+          </a:xfrm>
+          <a:prstGeom prst="rect">
+            <a:avLst/>
+          </a:prstGeom>
+          <a:noFill/>
+        </p:spPr>
+        <p:txBody>
+          <a:bodyPr wrap="square">
+            <a:spAutoFit/>
+          </a:bodyPr>
+          <a:lstStyle/>
+          <a:p>
+            <a:pPr>
+              <a:spcAft>
+                <a:spcPts val="700"/>
+              </a:spcAft>
+            </a:pPr>
+            <a:r>
+              <a:rPr sz="2300" b="1">
+                <a:solidFill>
+                  <a:srgbClr val="13314D"/>
+                </a:solidFill>
+                <a:latin typeface="Microsoft YaHei"/>
+              </a:rPr>
+              <a:t>数学基础：收益是一条不等式，不是一句口号</a:t>
+            </a:r>
+          </a:p>
+        </p:txBody>
+      </p:sp>
+      <p:sp>
+        <p:nvSpPr>
+          <p:cNvPr id="4" name="TextBox 3"/>
+          <p:cNvSpPr txBox="1"/>
+          <p:nvPr/>
+        </p:nvSpPr>
+        <p:spPr>
+          <a:xfrm>
+            <a:off x="548640" y="1261872"/>
+            <a:ext cx="8046720" cy="3127248"/>
+          </a:xfrm>
+          <a:prstGeom prst="rect">
+            <a:avLst/>
+          </a:prstGeom>
+          <a:noFill/>
+        </p:spPr>
+        <p:txBody>
+          <a:bodyPr wrap="square">
+            <a:spAutoFit/>
+          </a:bodyPr>
+          <a:lstStyle/>
+          <a:p>
+            <a:pPr>
+              <a:spcAft>
+                <a:spcPts val="700"/>
+              </a:spcAft>
+            </a:pPr>
+            <a:r>
+              <a:rPr sz="1050">
+                <a:solidFill>
+                  <a:srgbClr val="23465C"/>
+                </a:solidFill>
+                <a:latin typeface="Microsoft YaHei"/>
+              </a:rPr>
+              <a:t>▪ 守恒律：工作集 &gt; 池 ⇒ 每步新增页必须换出等量页——搬运义务的总量由工作集/池比决定，与开关无关</a:t>
+            </a:r>
+          </a:p>
+          <a:p>
+            <a:pPr>
+              <a:spcAft>
+                <a:spcPts val="700"/>
+              </a:spcAft>
+            </a:pPr>
+            <a:r>
+              <a:rPr sz="1050">
+                <a:solidFill>
+                  <a:srgbClr val="23465C"/>
+                </a:solidFill>
+                <a:latin typeface="Microsoft YaHei"/>
+              </a:rPr>
+              <a:t>▪ 支付位置：同步把义务 100% 放在关键路径（解码等 DMA）；异步把义务放进影子时间 ⇒ T异步 ≤ T同步 恒成立，相等仅当义务为零</a:t>
+            </a:r>
+          </a:p>
+          <a:p>
+            <a:pPr>
+              <a:spcAft>
+                <a:spcPts val="700"/>
+              </a:spcAft>
+            </a:pPr>
+            <a:r>
+              <a:rPr sz="1050">
+                <a:solidFill>
+                  <a:srgbClr val="23465C"/>
+                </a:solidFill>
+                <a:latin typeface="Microsoft YaHei"/>
+              </a:rPr>
+              <a:t>▪ 三参数公式：收益% =（义务率 × 单位成本）/ 步窗 =（0.09 页/步 × 1.6 MiB）/ 30 ms ≈ 0.05%（稳态换页义务微不足道）</a:t>
+            </a:r>
+          </a:p>
+          <a:p>
+            <a:pPr>
+              <a:spcAft>
+                <a:spcPts val="700"/>
+              </a:spcAft>
+            </a:pPr>
+            <a:r>
+              <a:rPr sz="1050">
+                <a:solidFill>
+                  <a:srgbClr val="23465C"/>
+                </a:solidFill>
+                <a:latin typeface="Microsoft YaHei"/>
+              </a:rPr>
+              <a:t>▪ 主战场 = 召回爆发：轮首 turn closure 集中召回数十 MiB——工作集越超池、轮次越长，爆发越大收益越大——这解释全部实测（浅载 r≈1 / 深轮 r=0.80）</a:t>
+            </a:r>
+          </a:p>
+          <a:p>
+            <a:pPr>
+              <a:spcAft>
+                <a:spcPts val="700"/>
+              </a:spcAft>
+            </a:pPr>
+            <a:r>
+              <a:rPr sz="1050">
+                <a:solidFill>
+                  <a:srgbClr val="23465C"/>
+                </a:solidFill>
+                <a:latin typeface="Microsoft YaHei"/>
+              </a:rPr>
+              <a:t>▪ 实测对照（10-19 三档浅载）：D2 187.1 &gt; D0 183.6 &gt; D1 182.6——方向与不等式一致；D1 反常（半流水开销）已立挂账复查</a:t>
+            </a:r>
+          </a:p>
+        </p:txBody>
+      </p:sp>
+      <p:sp>
+        <p:nvSpPr>
+          <p:cNvPr id="5" name="Rectangle 4"/>
+          <p:cNvSpPr/>
+          <p:nvPr/>
+        </p:nvSpPr>
+        <p:spPr>
+          <a:xfrm>
+            <a:off x="548640" y="4498848"/>
+            <a:ext cx="8046720" cy="438912"/>
+          </a:xfrm>
+          <a:prstGeom prst="rect">
+            <a:avLst/>
           </a:prstGeom>
           <a:solidFill>
-            <a:srgbClr val="0E7E86"/>
-          </a:solidFill>
-          <a:ln/>
-        </p:spPr>
-        <p:txBody>
-          <a:bodyPr/>
-          <a:p/>
-        </p:txBody>
-      </p:sp>
-      <p:sp>
-        <p:nvSpPr>
-          <p:cNvPr id="372" name="Text 1"/>
-          <p:cNvSpPr/>
-          <p:nvPr/>
-        </p:nvSpPr>
-        <p:spPr>
-          <a:xfrm>
-            <a:off x="713232" y="310896"/>
-            <a:ext cx="7955280" cy="228600"/>
-          </a:xfrm>
-          <a:prstGeom prst="rect">
-            <a:avLst/>
-          </a:prstGeom>
-          <a:noFill/>
-          <a:ln/>
-        </p:spPr>
-        <p:txBody>
-          <a:bodyPr wrap="square" lIns="0" tIns="0" rIns="0" bIns="0" rtlCol="0" anchor="ctr"/>
-          <a:lstStyle/>
-          <a:p>
-            <a:pPr marL="0" indent="0">
-              <a:buNone/>
-            </a:pPr>
-            <a:r>
-              <a:rPr lang="en-US" sz="1100" b="1" kern="0" spc="200" dirty="0">
-                <a:solidFill>
-                  <a:srgbClr val="3FC6D6"/>
-                </a:solidFill>
-                <a:latin typeface="Microsoft YaHei" pitchFamily="34" charset="0"/>
-                <a:ea typeface="Microsoft YaHei" pitchFamily="34" charset="-122"/>
-                <a:cs typeface="Microsoft YaHei" pitchFamily="34" charset="-120"/>
-              </a:rPr>
-              <a:t>OUR EXPLORATION ③</a:t>
-            </a:r>
-            <a:endParaRPr lang="en-US" sz="1100" dirty="0"/>
-          </a:p>
-        </p:txBody>
-      </p:sp>
-      <p:sp>
-        <p:nvSpPr>
-          <p:cNvPr id="373" name="Text 2"/>
-          <p:cNvSpPr/>
-          <p:nvPr/>
-        </p:nvSpPr>
-        <p:spPr>
-          <a:xfrm>
-            <a:off x="713232" y="548640"/>
-            <a:ext cx="8138160" cy="457200"/>
-          </a:xfrm>
-          <a:prstGeom prst="rect">
-            <a:avLst/>
-          </a:prstGeom>
-          <a:noFill/>
-          <a:ln/>
-        </p:spPr>
-        <p:txBody>
-          <a:bodyPr wrap="square" lIns="0" tIns="0" rIns="0" bIns="0" rtlCol="0" anchor="ctr"/>
-          <a:lstStyle/>
-          <a:p>
-            <a:pPr marL="0" indent="0">
-              <a:buNone/>
-            </a:pPr>
-            <a:r>
-              <a:rPr lang="en-US" sz="2400" b="1" dirty="0">
-                <a:solidFill>
-                  <a:srgbClr val="FFFFFF"/>
-                </a:solidFill>
-                <a:latin typeface="Microsoft YaHei" pitchFamily="34" charset="0"/>
-                <a:ea typeface="Microsoft YaHei" pitchFamily="34" charset="-122"/>
-                <a:cs typeface="Microsoft YaHei" pitchFamily="34" charset="-120"/>
-              </a:rPr>
-              <a:t>正确性工程：给“跑腿”立三条规矩</a:t>
-            </a:r>
-            <a:endParaRPr lang="en-US" sz="2400" dirty="0"/>
-          </a:p>
-        </p:txBody>
-      </p:sp>
-      <p:sp>
-        <p:nvSpPr>
-          <p:cNvPr id="374" name="Text 3"/>
-          <p:cNvSpPr/>
-          <p:nvPr/>
-        </p:nvSpPr>
-        <p:spPr>
-          <a:xfrm>
-            <a:off x="548640" y="1060704"/>
-            <a:ext cx="8046720" cy="365760"/>
-          </a:xfrm>
-          <a:prstGeom prst="rect">
-            <a:avLst/>
-          </a:prstGeom>
-          <a:noFill/>
-          <a:ln/>
-        </p:spPr>
-        <p:txBody>
-          <a:bodyPr wrap="square" lIns="0" tIns="0" rIns="0" bIns="0" rtlCol="0" anchor="ctr"/>
-          <a:lstStyle/>
-          <a:p>
-            <a:pPr marL="0" indent="0">
-              <a:buNone/>
-            </a:pPr>
-            <a:r>
-              <a:rPr lang="en-US" sz="1200" dirty="0">
-                <a:solidFill>
-                  <a:srgbClr val="FFFFFF"/>
-                </a:solidFill>
-                <a:latin typeface="Microsoft YaHei" pitchFamily="34" charset="0"/>
-                <a:ea typeface="Microsoft YaHei" pitchFamily="34" charset="-122"/>
-                <a:cs typeface="Microsoft YaHei" pitchFamily="34" charset="-120"/>
-              </a:rPr>
-              <a:t>异步 = 请了跑腿小哥（见第 7 页）。规矩立不好会丢件、会搬错——所以我们给他立三条规矩，外加一张“考卷”：</a:t>
-            </a:r>
-            <a:endParaRPr lang="en-US" sz="1200" dirty="0"/>
-          </a:p>
-        </p:txBody>
-      </p:sp>
-      <p:sp>
-        <p:nvSpPr>
-          <p:cNvPr id="375" name="Text 4"/>
-          <p:cNvSpPr/>
-          <p:nvPr/>
-        </p:nvSpPr>
-        <p:spPr>
-          <a:xfrm>
-            <a:off x="548640" y="1517904"/>
-            <a:ext cx="8046720" cy="530352"/>
-          </a:xfrm>
-          <a:prstGeom prst="rect">
-            <a:avLst/>
-          </a:prstGeom>
-          <a:noFill/>
-          <a:ln/>
-        </p:spPr>
-        <p:txBody>
-          <a:bodyPr wrap="square" lIns="0" tIns="0" rIns="0" bIns="0" rtlCol="0" anchor="ctr"/>
-          <a:lstStyle/>
-          <a:p>
-            <a:pPr marL="0" indent="0">
-              <a:buNone/>
-            </a:pPr>
-            <a:r>
-              <a:rPr lang="en-US" sz="1150" b="1" dirty="0">
-                <a:solidFill>
-                  <a:srgbClr val="8FD0F0"/>
-                </a:solidFill>
-                <a:latin typeface="Microsoft YaHei" pitchFamily="34" charset="0"/>
-                <a:ea typeface="Microsoft YaHei" pitchFamily="34" charset="-122"/>
-                <a:cs typeface="Microsoft YaHei" pitchFamily="34" charset="-120"/>
-              </a:rPr>
-              <a:t>规矩一：正在用的书不能搬：</a:t>
-            </a:r>
-            <a:r>
-              <a:rPr lang="en-US" sz="1150" dirty="0">
-                <a:solidFill>
-                  <a:srgbClr val="FFFFFF"/>
-                </a:solidFill>
-                <a:latin typeface="Microsoft YaHei" pitchFamily="34" charset="0"/>
-                <a:ea typeface="Microsoft YaHei" pitchFamily="34" charset="-122"/>
-                <a:cs typeface="Microsoft YaHei" pitchFamily="34" charset="-120"/>
-              </a:rPr>
-              <a:t>引擎的“施工图”在启动时就画定（捕获期），运行中不许改——要改就重启，边界清清楚楚</a:t>
-            </a:r>
-            <a:endParaRPr lang="en-US" sz="1150" dirty="0"/>
-          </a:p>
-        </p:txBody>
-      </p:sp>
-      <p:sp>
-        <p:nvSpPr>
-          <p:cNvPr id="376" name="Text 5"/>
-          <p:cNvSpPr/>
-          <p:nvPr/>
-        </p:nvSpPr>
-        <p:spPr>
-          <a:xfrm>
-            <a:off x="548640" y="2084832"/>
-            <a:ext cx="8046720" cy="530352"/>
-          </a:xfrm>
-          <a:prstGeom prst="rect">
-            <a:avLst/>
-          </a:prstGeom>
-          <a:noFill/>
-          <a:ln/>
-        </p:spPr>
-        <p:txBody>
-          <a:bodyPr wrap="square" lIns="0" tIns="0" rIns="0" bIns="0" rtlCol="0" anchor="ctr"/>
-          <a:lstStyle/>
-          <a:p>
-            <a:pPr marL="0" indent="0">
-              <a:buNone/>
-            </a:pPr>
-            <a:r>
-              <a:rPr lang="en-US" sz="1150" b="1" dirty="0">
-                <a:solidFill>
-                  <a:srgbClr val="8FD0F0"/>
-                </a:solidFill>
-                <a:latin typeface="Microsoft YaHei" pitchFamily="34" charset="0"/>
-                <a:ea typeface="Microsoft YaHei" pitchFamily="34" charset="-122"/>
-                <a:cs typeface="Microsoft YaHei" pitchFamily="34" charset="-120"/>
-              </a:rPr>
-              <a:t>规矩二：货没交稳，旧的不扔：</a:t>
-            </a:r>
-            <a:r>
-              <a:rPr lang="en-US" sz="1150" dirty="0">
-                <a:solidFill>
-                  <a:srgbClr val="FFFFFF"/>
-                </a:solidFill>
-                <a:latin typeface="Microsoft YaHei" pitchFamily="34" charset="0"/>
-                <a:ea typeface="Microsoft YaHei" pitchFamily="34" charset="-122"/>
-                <a:cs typeface="Microsoft YaHei" pitchFamily="34" charset="-120"/>
-              </a:rPr>
-              <a:t>新副本发布之前，旧的那一份永远不许丢——任何时候都有一份“唯一有效”的数据在手</a:t>
-            </a:r>
-            <a:endParaRPr lang="en-US" sz="1150" dirty="0"/>
-          </a:p>
-        </p:txBody>
-      </p:sp>
-      <p:sp>
-        <p:nvSpPr>
-          <p:cNvPr id="377" name="Text 6"/>
-          <p:cNvSpPr/>
-          <p:nvPr/>
-        </p:nvSpPr>
-        <p:spPr>
-          <a:xfrm>
-            <a:off x="548640" y="2651760"/>
-            <a:ext cx="8046720" cy="530352"/>
-          </a:xfrm>
-          <a:prstGeom prst="rect">
-            <a:avLst/>
-          </a:prstGeom>
-          <a:noFill/>
-          <a:ln/>
-        </p:spPr>
-        <p:txBody>
-          <a:bodyPr wrap="square" lIns="0" tIns="0" rIns="0" bIns="0" rtlCol="0" anchor="ctr"/>
-          <a:lstStyle/>
-          <a:p>
-            <a:pPr marL="0" indent="0">
-              <a:buNone/>
-            </a:pPr>
-            <a:r>
-              <a:rPr lang="en-US" sz="1150" b="1" dirty="0">
-                <a:solidFill>
-                  <a:srgbClr val="8FD0F0"/>
-                </a:solidFill>
-                <a:latin typeface="Microsoft YaHei" pitchFamily="34" charset="0"/>
-                <a:ea typeface="Microsoft YaHei" pitchFamily="34" charset="-122"/>
-                <a:cs typeface="Microsoft YaHei" pitchFamily="34" charset="-120"/>
-              </a:rPr>
-              <a:t>规矩三：订单取消，已出发的必须跑完：</a:t>
-            </a:r>
-            <a:r>
-              <a:rPr lang="en-US" sz="1150" dirty="0">
-                <a:solidFill>
-                  <a:srgbClr val="FFFFFF"/>
-                </a:solidFill>
-                <a:latin typeface="Microsoft YaHei" pitchFamily="34" charset="0"/>
-                <a:ea typeface="Microsoft YaHei" pitchFamily="34" charset="-122"/>
-                <a:cs typeface="Microsoft YaHei" pitchFamily="34" charset="-120"/>
-              </a:rPr>
-              <a:t>请求可以取消，但已经在路上的搬运必须排空才能收账——不收“半路失踪”的账</a:t>
-            </a:r>
-            <a:endParaRPr lang="en-US" sz="1150" dirty="0"/>
-          </a:p>
-        </p:txBody>
-      </p:sp>
-      <p:sp>
-        <p:nvSpPr>
-          <p:cNvPr id="378" name="Shape 7"/>
-          <p:cNvSpPr/>
-          <p:nvPr/>
-        </p:nvSpPr>
-        <p:spPr>
-          <a:xfrm>
-            <a:off x="548640" y="3291840"/>
-            <a:ext cx="8046720" cy="658368"/>
-          </a:xfrm>
-          <a:prstGeom prst="roundRect">
-            <a:avLst>
-              <a:gd name="adj" fmla="val 5800"/>
-            </a:avLst>
-          </a:prstGeom>
-          <a:solidFill>
-            <a:srgbClr val="16324A"/>
-          </a:solidFill>
-          <a:ln/>
-        </p:spPr>
-        <p:txBody>
-          <a:bodyPr/>
-          <a:p/>
-        </p:txBody>
-      </p:sp>
-      <p:sp>
-        <p:nvSpPr>
-          <p:cNvPr id="379" name="Text 8"/>
-          <p:cNvSpPr/>
-          <p:nvPr/>
-        </p:nvSpPr>
-        <p:spPr>
-          <a:xfrm>
-            <a:off x="777240" y="3364992"/>
-            <a:ext cx="7589520" cy="512064"/>
-          </a:xfrm>
-          <a:prstGeom prst="rect">
-            <a:avLst/>
-          </a:prstGeom>
-          <a:noFill/>
-          <a:ln/>
-        </p:spPr>
-        <p:txBody>
-          <a:bodyPr wrap="square" lIns="0" tIns="0" rIns="0" bIns="0" rtlCol="0" anchor="ctr"/>
-          <a:lstStyle/>
-          <a:p>
-            <a:pPr marL="0" indent="0">
-              <a:buNone/>
-            </a:pPr>
-            <a:r>
-              <a:rPr lang="en-US" sz="1150" b="1" dirty="0">
-                <a:solidFill>
-                  <a:srgbClr val="8FD0F0"/>
-                </a:solidFill>
-                <a:latin typeface="Microsoft YaHei" pitchFamily="34" charset="0"/>
-                <a:ea typeface="Microsoft YaHei" pitchFamily="34" charset="-122"/>
-                <a:cs typeface="Microsoft YaHei" pitchFamily="34" charset="-120"/>
-              </a:rPr>
-              <a:t>那张“考卷”（无损门 A2）：</a:t>
-            </a:r>
-            <a:r>
-              <a:rPr lang="en-US" sz="1150" dirty="0">
-                <a:solidFill>
-                  <a:srgbClr val="FFFFFF"/>
-                </a:solidFill>
-                <a:latin typeface="Microsoft YaHei" pitchFamily="34" charset="0"/>
-                <a:ea typeface="Microsoft YaHei" pitchFamily="34" charset="-122"/>
-                <a:cs typeface="Microsoft YaHei" pitchFamily="34" charset="-120"/>
-              </a:rPr>
-              <a:t>同一道题，“池内”与“首次超池”两条路径的答卷</a:t>
-            </a:r>
-            <a:r>
-              <a:rPr lang="en-US" sz="1150" b="1" dirty="0">
-                <a:solidFill>
-                  <a:srgbClr val="FFFFFF"/>
-                </a:solidFill>
-                <a:latin typeface="Microsoft YaHei" pitchFamily="34" charset="0"/>
-                <a:ea typeface="Microsoft YaHei" pitchFamily="34" charset="-122"/>
-                <a:cs typeface="Microsoft YaHei" pitchFamily="34" charset="-120"/>
-              </a:rPr>
-              <a:t>逐字相同</a:t>
-            </a:r>
-            <a:r>
-              <a:rPr lang="en-US" sz="1150" dirty="0">
-                <a:solidFill>
-                  <a:srgbClr val="FFFFFF"/>
-                </a:solidFill>
-                <a:latin typeface="Microsoft YaHei" pitchFamily="34" charset="0"/>
-                <a:ea typeface="Microsoft YaHei" pitchFamily="34" charset="-122"/>
-                <a:cs typeface="Microsoft YaHei" pitchFamily="34" charset="-120"/>
-              </a:rPr>
-              <a:t>——异步只改变搬运时机，不改变模型输出。</a:t>
-            </a:r>
-            <a:endParaRPr lang="en-US" sz="1150" dirty="0"/>
-          </a:p>
-        </p:txBody>
-      </p:sp>
-      <p:sp>
-        <p:nvSpPr>
-          <p:cNvPr id="380" name="Text 9"/>
-          <p:cNvSpPr/>
-          <p:nvPr/>
-        </p:nvSpPr>
-        <p:spPr>
-          <a:xfrm>
-            <a:off x="548640" y="4096512"/>
-            <a:ext cx="8046720" cy="457200"/>
-          </a:xfrm>
-          <a:prstGeom prst="rect">
-            <a:avLst/>
-          </a:prstGeom>
-          <a:noFill/>
-          <a:ln/>
-        </p:spPr>
-        <p:txBody>
-          <a:bodyPr wrap="square" lIns="0" tIns="0" rIns="0" bIns="0" rtlCol="0" anchor="ctr"/>
-          <a:lstStyle/>
-          <a:p>
-            <a:pPr marL="0" indent="0">
-              <a:buNone/>
-            </a:pPr>
-            <a:r>
-              <a:rPr lang="en-US" sz="1100" b="1" dirty="0">
-                <a:solidFill>
-                  <a:srgbClr val="FF8A75"/>
-                </a:solidFill>
-                <a:latin typeface="Microsoft YaHei" pitchFamily="34" charset="0"/>
-                <a:ea typeface="Microsoft YaHei" pitchFamily="34" charset="-122"/>
-                <a:cs typeface="Microsoft YaHei" pitchFamily="34" charset="-120"/>
-              </a:rPr>
-              <a:t>诚实披露：</a:t>
-            </a:r>
-            <a:r>
-              <a:rPr lang="en-US" sz="1100" dirty="0">
-                <a:solidFill>
-                  <a:srgbClr val="A9BECC"/>
-                </a:solidFill>
-                <a:latin typeface="Microsoft YaHei" pitchFamily="34" charset="0"/>
-                <a:ea typeface="Microsoft YaHei" pitchFamily="34" charset="-122"/>
-                <a:cs typeface="Microsoft YaHei" pitchFamily="34" charset="-120"/>
-              </a:rPr>
-              <a:t>慢峰时搬运会“藏不住”（单批接近步窗）——这就是流水的击穿边界，解法是深流水（见问题页）。</a:t>
-            </a:r>
-            <a:endParaRPr lang="en-US" sz="1100" dirty="0"/>
-          </a:p>
-        </p:txBody>
-      </p:sp>
-      <p:sp>
-        <p:nvSpPr>
-          <p:cNvPr id="381" name="Text 10"/>
-          <p:cNvSpPr/>
-          <p:nvPr/>
-        </p:nvSpPr>
-        <p:spPr>
-          <a:xfrm>
-            <a:off x="7874000" y="4826000"/>
-            <a:ext cx="1130300" cy="274320"/>
-          </a:xfrm>
-          <a:prstGeom prst="rect">
-            <a:avLst/>
-          </a:prstGeom>
-          <a:noFill/>
-          <a:ln/>
-        </p:spPr>
-        <p:txBody>
-          <a:bodyPr wrap="none" lIns="0" tIns="0" rIns="0" bIns="0" rtlCol="0" anchor="ctr"/>
-          <a:lstStyle/>
-          <a:p>
-            <a:pPr marL="0" indent="0" algn="r">
-              <a:buNone/>
-            </a:pPr>
-            <a:r>
-              <a:rPr b="1" sz="1000">
-                <a:solidFill>
-                  <a:srgbClr val="3FC6D6"/>
-                </a:solidFill>
-                <a:latin typeface="Microsoft YaHei"/>
-                <a:ea typeface="Microsoft YaHei"/>
-              </a:rPr>
-              <a:t>09</a:t>
-            </a:r>
-            <a:r>
-              <a:rPr sz="900">
-                <a:solidFill>
-                  <a:srgbClr val="8FA6B5"/>
-                </a:solidFill>
-                <a:latin typeface="Microsoft YaHei"/>
-                <a:ea typeface="Microsoft YaHei"/>
-              </a:rPr>
-              <a:t> / 18</a:t>
-            </a:r>
-            <a:endParaRPr lang="en-US" sz="1000" dirty="0"/>
-          </a:p>
-        </p:txBody>
-      </p:sp>
-      <p:sp>
-        <p:nvSpPr>
-          <p:cNvPr id="382" name="Text 11"/>
-          <p:cNvSpPr/>
-          <p:nvPr/>
-        </p:nvSpPr>
-        <p:spPr>
-          <a:xfrm>
-            <a:off x="457200" y="4828032"/>
-            <a:ext cx="5486400" cy="228600"/>
-          </a:xfrm>
-          <a:prstGeom prst="rect">
-            <a:avLst/>
-          </a:prstGeom>
-          <a:noFill/>
-          <a:ln/>
-        </p:spPr>
-        <p:txBody>
-          <a:bodyPr wrap="square" lIns="0" tIns="0" rIns="0" bIns="0" rtlCol="0" anchor="ctr"/>
-          <a:lstStyle/>
-          <a:p>
-            <a:pPr marL="0" indent="0">
-              <a:buNone/>
-            </a:pPr>
-            <a:r>
-              <a:rPr lang="en-US" sz="900" dirty="0">
-                <a:solidFill>
-                  <a:srgbClr val="A9BECC"/>
-                </a:solidFill>
-                <a:latin typeface="Microsoft YaHei" pitchFamily="34" charset="0"/>
-                <a:ea typeface="Microsoft YaHei" pitchFamily="34" charset="-122"/>
-                <a:cs typeface="Microsoft YaHei" pitchFamily="34" charset="-120"/>
-              </a:rPr>
-              <a:t>站在 KVMem 的肩膀上 · 异步页流水</a:t>
-            </a:r>
-            <a:endParaRPr lang="en-US" sz="900" dirty="0"/>
-          </a:p>
-        </p:txBody>
-      </p:sp>
-      <p:sp>
-        <p:nvSpPr>
-          <p:cNvPr id="383" name="Rectangle 382"/>
-          <p:cNvSpPr/>
-          <p:nvPr/>
-        </p:nvSpPr>
-        <p:spPr>
-          <a:xfrm>
-            <a:off x="457200" y="4711700"/>
-            <a:ext cx="8547100" cy="9525"/>
-          </a:xfrm>
-          <a:prstGeom prst="rect">
-            <a:avLst/>
-          </a:prstGeom>
-          <a:solidFill>
-            <a:srgbClr val="23465C"/>
+            <a:srgbClr val="3FC6D6"/>
           </a:solidFill>
           <a:ln>
             <a:noFill/>
           </a:ln>
-          <a:effectLst/>
         </p:spPr>
         <p:style>
           <a:lnRef idx="1">
@@ -22476,10 +22714,19 @@
           </a:fontRef>
         </p:style>
         <p:txBody>
-          <a:bodyPr rtlCol="0" anchor="ctr"/>
-          <a:lstStyle/>
-          <a:p>
-            <a:pPr algn="ctr"/>
+          <a:bodyPr rtlCol="0" anchor="ctr" wrap="square"/>
+          <a:lstStyle/>
+          <a:p>
+            <a:pPr algn="l"/>
+            <a:r>
+              <a:rPr sz="1150" b="1">
+                <a:solidFill>
+                  <a:srgbClr val="13314D"/>
+                </a:solidFill>
+                <a:latin typeface="Microsoft YaHei"/>
+              </a:rPr>
+              <a:t>不等式由守恒律与硬件并行性（DMA/SM）保证——实验的角色是测量收益幅度，不是判决理论生死</a:t>
+            </a:r>
           </a:p>
         </p:txBody>
       </p:sp>

--- a/docs/异步页流水-技术说明.pptx
+++ b/docs/异步页流水-技术说明.pptx
@@ -3231,7 +3231,7 @@
                 </a:solidFill>
                 <a:latin typeface="Microsoft YaHei"/>
               </a:rPr>
-              <a:t>▪ 实践甜蜜点 2-4 批：超过峰值义务深度的档位是闲置——排队批次不会让 DMA 更快，只是把同一笔义务摊得更平</a:t>
+              <a:t>▪ 理论甜蜜点 2-4 批（尚未实测，深载分档待测）：超过峰值义务深度的档位是闲置——排队批次不会让 DMA 更快，只是把同一笔义务摊得更平</a:t>
             </a:r>
           </a:p>
           <a:p>

--- a/docs/异步页流水-技术说明.pptx
+++ b/docs/异步页流水-技术说明.pptx
@@ -3263,7 +3263,7 @@
                 </a:solidFill>
                 <a:latin typeface="Microsoft YaHei"/>
               </a:rPr>
-              <a:t>▪ 决胜测量：深载长跑（深超池堆积 + 轮首爆发密集）ON/OFF 对照——理论预测收益落在“爆发规模 / 步窗”区间</a:t>
+              <a:t>▪ 关键对照：深载长跑（深超池堆积 + 轮首爆发密集）ON/OFF 对照——理论预测收益落在“爆发规模 / 步窗”区间</a:t>
             </a:r>
           </a:p>
         </p:txBody>
@@ -8364,7 +8364,7 @@
                 <a:ea typeface="Microsoft YaHei" pitchFamily="34" charset="-122"/>
                 <a:cs typeface="Microsoft YaHei" pitchFamily="34" charset="-120"/>
               </a:rPr>
-              <a:t>深轮重载（2.3-3.5× 超池）拆掉异步：decode 拖慢约 20%（r=0.80）</a:t>
+              <a:t>深轮重载（2.3-3.5× 超池）关闭异步（OFF）：decode 拖慢约 20%（r=0.80）</a:t>
             </a:r>
             <a:endParaRPr lang="en-US" sz="900" dirty="0"/>
           </a:p>
@@ -9045,7 +9045,7 @@
                 <a:ea typeface="Microsoft YaHei" pitchFamily="34" charset="-122"/>
                 <a:cs typeface="Microsoft YaHei" pitchFamily="34" charset="-120"/>
               </a:rPr>
-              <a:t>异步贡献的判决实验：极深池 AB 对照（2026-10-16）</a:t>
+              <a:t>异步贡献的对照实验：极深池 AB 对照（2026-10-16）</a:t>
             </a:r>
             <a:endParaRPr lang="en-US" sz="2400" dirty="0"/>
           </a:p>
@@ -22479,7 +22479,7 @@
                 </a:solidFill>
                 <a:latin typeface="Microsoft YaHei"/>
               </a:rPr>
-              <a:t>真边界只有两条：Host 配额耗尽（=原作者 SSD 层场景，128 GB 下远不可达）与瞬时涌入超流水深度（=深流水的主战场）</a:t>
+              <a:t>真边界只有两条：Host 配额耗尽（=原作者 SSD 层场景，128 GB 下远不可达）与瞬时涌入超流水深度（=深流水要覆盖的工况）</a:t>
             </a:r>
           </a:p>
         </p:txBody>
@@ -22570,7 +22570,7 @@
                 </a:solidFill>
                 <a:latin typeface="Microsoft YaHei"/>
               </a:rPr>
-              <a:t>数学基础：收益是一条不等式，不是一句口号</a:t>
+              <a:t>数学基础：异步页流水的收益不等式</a:t>
             </a:r>
           </a:p>
         </p:txBody>
@@ -22657,7 +22657,7 @@
                 </a:solidFill>
                 <a:latin typeface="Microsoft YaHei"/>
               </a:rPr>
-              <a:t>▪ 主战场 = 召回爆发：轮首 turn closure 集中召回数十 MiB——工作集越超池、轮次越长，爆发越大收益越大——这解释全部实测（浅载 r≈1 / 深轮 r=0.80）</a:t>
+              <a:t>▪ 收益主要来源 = 召回爆发：轮首 turn closure 集中召回数十 MiB——工作集越超池、轮次越长，爆发越大收益越大——这解释全部实测（浅载 r≈1 / 深轮 r=0.80）</a:t>
             </a:r>
           </a:p>
           <a:p>
@@ -22725,7 +22725,7 @@
                 </a:solidFill>
                 <a:latin typeface="Microsoft YaHei"/>
               </a:rPr>
-              <a:t>不等式由守恒律与硬件并行性（DMA/SM）保证——实验的角色是测量收益幅度，不是判决理论生死</a:t>
+              <a:t>不等式由守恒律与硬件并行性（DMA/SM）保证——收益幅度由义务率与步窗决定，由对照实验测定</a:t>
             </a:r>
           </a:p>
         </p:txBody>

--- a/docs/异步页流水-技术说明.pptx
+++ b/docs/异步页流水-技术说明.pptx
@@ -18,6 +18,7 @@
     <p:sldId id="274" r:id="rId24"/>
     <p:sldId id="275" r:id="rId25"/>
     <p:sldId id="276" r:id="rId26"/>
+    <p:sldId id="277" r:id="rId27"/>
     <p:sldId id="263" r:id="rId8"/>
     <p:sldId id="264" r:id="rId9"/>
     <p:sldId id="265" r:id="rId10"/>
@@ -3099,191 +3100,20 @@
       <p:grpSpPr/>
       <p:sp>
         <p:nvSpPr>
-          <p:cNvPr id="2" name="TextBox 1"/>
-          <p:cNvSpPr txBox="1"/>
-          <p:nvPr/>
-        </p:nvSpPr>
-        <p:spPr>
-          <a:xfrm>
-            <a:off x="548640" y="256032"/>
-            <a:ext cx="8046720" cy="292608"/>
-          </a:xfrm>
-          <a:prstGeom prst="rect">
-            <a:avLst/>
-          </a:prstGeom>
-          <a:noFill/>
-        </p:spPr>
-        <p:txBody>
-          <a:bodyPr wrap="none">
-            <a:spAutoFit/>
-          </a:bodyPr>
-          <a:lstStyle/>
-          <a:p>
-            <a:r>
-              <a:rPr sz="1200" b="1">
-                <a:solidFill>
-                  <a:srgbClr val="0E7E86"/>
-                </a:solidFill>
-                <a:latin typeface="Microsoft YaHei"/>
-              </a:rPr>
-              <a:t>DEPTH LIMITS</a:t>
-            </a:r>
-          </a:p>
-        </p:txBody>
-      </p:sp>
-      <p:sp>
-        <p:nvSpPr>
-          <p:cNvPr id="3" name="TextBox 2"/>
-          <p:cNvSpPr txBox="1"/>
-          <p:nvPr/>
-        </p:nvSpPr>
-        <p:spPr>
-          <a:xfrm>
-            <a:off x="548640" y="548640"/>
-            <a:ext cx="8046720" cy="566928"/>
-          </a:xfrm>
-          <a:prstGeom prst="rect">
-            <a:avLst/>
-          </a:prstGeom>
-          <a:noFill/>
-        </p:spPr>
-        <p:txBody>
-          <a:bodyPr wrap="none">
-            <a:spAutoFit/>
-          </a:bodyPr>
-          <a:lstStyle/>
-          <a:p>
-            <a:r>
-              <a:rPr sz="2300" b="1">
-                <a:solidFill>
-                  <a:srgbClr val="13314D"/>
-                </a:solidFill>
-                <a:latin typeface="Microsoft YaHei"/>
-              </a:rPr>
-              <a:t>流水深度的理论上限：最多几批同时在飞？</a:t>
-            </a:r>
-          </a:p>
-        </p:txBody>
-      </p:sp>
-      <p:sp>
-        <p:nvSpPr>
-          <p:cNvPr id="4" name="TextBox 3"/>
-          <p:cNvSpPr txBox="1"/>
-          <p:nvPr/>
-        </p:nvSpPr>
-        <p:spPr>
-          <a:xfrm>
-            <a:off x="548640" y="1261872"/>
-            <a:ext cx="8046720" cy="3127248"/>
-          </a:xfrm>
-          <a:prstGeom prst="rect">
-            <a:avLst/>
-          </a:prstGeom>
-          <a:noFill/>
-        </p:spPr>
-        <p:txBody>
-          <a:bodyPr wrap="square">
-            <a:spAutoFit/>
-          </a:bodyPr>
-          <a:lstStyle/>
-          <a:p>
-            <a:pPr>
-              <a:spcAft>
-                <a:spcPts val="700"/>
-              </a:spcAft>
-            </a:pPr>
-            <a:r>
-              <a:rPr sz="1050">
-                <a:solidFill>
-                  <a:srgbClr val="23465C"/>
-                </a:solidFill>
-                <a:latin typeface="Microsoft YaHei"/>
-              </a:rPr>
-              <a:t>▪ 需求侧：稳态义务 0.09 页/步 ⇒ 1 批（8 页）覆盖约 11 步；深度需求的真正来源 = 轮首召回爆发（爆发页数 ÷ 8 = 有意义批数）</a:t>
-            </a:r>
-          </a:p>
-          <a:p>
-            <a:pPr>
-              <a:spcAft>
-                <a:spcPts val="700"/>
-              </a:spcAft>
-            </a:pPr>
-            <a:r>
-              <a:rPr sz="1050">
-                <a:solidFill>
-                  <a:srgbClr val="23465C"/>
-                </a:solidFill>
-                <a:latin typeface="Microsoft YaHei"/>
-              </a:rPr>
-              <a:t>▪ 供给侧硬上限：设备 free 槽 ≤1,024 · Host 配额数千页 · 双份缓冲每批 ≈26 MiB——理论上几十批可行</a:t>
-            </a:r>
-          </a:p>
-          <a:p>
-            <a:pPr>
-              <a:spcAft>
-                <a:spcPts val="700"/>
-              </a:spcAft>
-            </a:pPr>
-            <a:r>
-              <a:rPr sz="1050">
-                <a:solidFill>
-                  <a:srgbClr val="23465C"/>
-                </a:solidFill>
-                <a:latin typeface="Microsoft YaHei"/>
-              </a:rPr>
-              <a:t>▪ 理论甜蜜点 2-4 批（尚未实测，深载分档待测）：超过峰值义务深度的档位是闲置——排队批次不会让 DMA 更快，只是把同一笔义务摊得更平</a:t>
-            </a:r>
-          </a:p>
-          <a:p>
-            <a:pPr>
-              <a:spcAft>
-                <a:spcPts val="700"/>
-              </a:spcAft>
-            </a:pPr>
-            <a:r>
-              <a:rPr sz="1050">
-                <a:solidFill>
-                  <a:srgbClr val="23465C"/>
-                </a:solidFill>
-                <a:latin typeface="Microsoft YaHei"/>
-              </a:rPr>
-              <a:t>▪ DEPTH=1 是最差配置（实测 D1 182.6 &lt; D0 183.6）：付半流水管理开销、无摊薄收益——要么 0（纯同步）要么 ≥2</a:t>
-            </a:r>
-          </a:p>
-          <a:p>
-            <a:pPr>
-              <a:spcAft>
-                <a:spcPts val="700"/>
-              </a:spcAft>
-            </a:pPr>
-            <a:r>
-              <a:rPr sz="1050">
-                <a:solidFill>
-                  <a:srgbClr val="23465C"/>
-                </a:solidFill>
-                <a:latin typeface="Microsoft YaHei"/>
-              </a:rPr>
-              <a:t>▪ 关键对照：深载长跑（深超池堆积 + 轮首爆发密集）ON/OFF 对照——理论预测收益落在“爆发规模 / 步窗”区间</a:t>
-            </a:r>
-          </a:p>
-        </p:txBody>
-      </p:sp>
-      <p:sp>
-        <p:nvSpPr>
-          <p:cNvPr id="5" name="Rectangle 4"/>
-          <p:cNvSpPr/>
-          <p:nvPr/>
-        </p:nvSpPr>
-        <p:spPr>
-          <a:xfrm>
-            <a:off x="548640" y="4498848"/>
-            <a:ext cx="8046720" cy="438912"/>
+          <p:cNvPr id="6" name="Rectangle 5"/>
+          <p:cNvSpPr/>
+          <p:nvPr/>
+        </p:nvSpPr>
+        <p:spPr>
+          <a:xfrm>
+            <a:off x="0" y="0"/>
+            <a:ext cx="9144000" cy="5143500"/>
           </a:xfrm>
           <a:prstGeom prst="rect">
             <a:avLst/>
           </a:prstGeom>
           <a:solidFill>
-            <a:srgbClr val="3FC6D6"/>
+            <a:srgbClr val="0B1F33"/>
           </a:solidFill>
           <a:ln>
             <a:noFill/>
@@ -3304,6 +3134,220 @@
           </a:fontRef>
         </p:style>
         <p:txBody>
+          <a:bodyPr rtlCol="0" anchor="ctr"/>
+          <a:lstStyle/>
+          <a:p>
+            <a:pPr algn="ctr"/>
+          </a:p>
+        </p:txBody>
+      </p:sp>
+      <p:sp>
+        <p:nvSpPr>
+          <p:cNvPr id="2" name="TextBox 1"/>
+          <p:cNvSpPr txBox="1"/>
+          <p:nvPr/>
+        </p:nvSpPr>
+        <p:spPr>
+          <a:xfrm>
+            <a:off x="548640" y="256032"/>
+            <a:ext cx="8046720" cy="292608"/>
+          </a:xfrm>
+          <a:prstGeom prst="rect">
+            <a:avLst/>
+          </a:prstGeom>
+          <a:noFill/>
+        </p:spPr>
+        <p:txBody>
+          <a:bodyPr wrap="none">
+            <a:spAutoFit/>
+          </a:bodyPr>
+          <a:lstStyle/>
+          <a:p>
+            <a:r>
+              <a:rPr sz="1200" b="1">
+                <a:solidFill>
+                  <a:srgbClr val="3FC6D6"/>
+                </a:solidFill>
+                <a:latin typeface="Microsoft YaHei"/>
+              </a:rPr>
+              <a:t>DEPTH LIMITS</a:t>
+            </a:r>
+          </a:p>
+        </p:txBody>
+      </p:sp>
+      <p:sp>
+        <p:nvSpPr>
+          <p:cNvPr id="3" name="TextBox 2"/>
+          <p:cNvSpPr txBox="1"/>
+          <p:nvPr/>
+        </p:nvSpPr>
+        <p:spPr>
+          <a:xfrm>
+            <a:off x="548640" y="548640"/>
+            <a:ext cx="8046720" cy="566928"/>
+          </a:xfrm>
+          <a:prstGeom prst="rect">
+            <a:avLst/>
+          </a:prstGeom>
+          <a:noFill/>
+        </p:spPr>
+        <p:txBody>
+          <a:bodyPr wrap="none">
+            <a:spAutoFit/>
+          </a:bodyPr>
+          <a:lstStyle/>
+          <a:p>
+            <a:r>
+              <a:rPr sz="2300" b="1">
+                <a:solidFill>
+                  <a:srgbClr val="FFFFFF"/>
+                </a:solidFill>
+                <a:latin typeface="Microsoft YaHei"/>
+              </a:rPr>
+              <a:t>流水深度的理论上限：最多几批同时在飞？</a:t>
+            </a:r>
+          </a:p>
+        </p:txBody>
+      </p:sp>
+      <p:sp>
+        <p:nvSpPr>
+          <p:cNvPr id="4" name="TextBox 3"/>
+          <p:cNvSpPr txBox="1"/>
+          <p:nvPr/>
+        </p:nvSpPr>
+        <p:spPr>
+          <a:xfrm>
+            <a:off x="548640" y="1261872"/>
+            <a:ext cx="8046720" cy="3127248"/>
+          </a:xfrm>
+          <a:prstGeom prst="rect">
+            <a:avLst/>
+          </a:prstGeom>
+          <a:noFill/>
+        </p:spPr>
+        <p:txBody>
+          <a:bodyPr wrap="square">
+            <a:spAutoFit/>
+          </a:bodyPr>
+          <a:lstStyle/>
+          <a:p>
+            <a:pPr>
+              <a:spcAft>
+                <a:spcPts val="700"/>
+              </a:spcAft>
+            </a:pPr>
+            <a:r>
+              <a:rPr sz="1050">
+                <a:solidFill>
+                  <a:srgbClr val="A9BECC"/>
+                </a:solidFill>
+                <a:latin typeface="Microsoft YaHei"/>
+              </a:rPr>
+              <a:t>▪ 需求侧：稳态义务 0.09 页/步 ⇒ 1 批（8 页）覆盖约 11 步；深度需求的真正来源 = 轮首召回爆发（爆发页数 ÷ 8 = 有意义批数）</a:t>
+            </a:r>
+          </a:p>
+          <a:p>
+            <a:pPr>
+              <a:spcAft>
+                <a:spcPts val="700"/>
+              </a:spcAft>
+            </a:pPr>
+            <a:r>
+              <a:rPr sz="1050">
+                <a:solidFill>
+                  <a:srgbClr val="A9BECC"/>
+                </a:solidFill>
+                <a:latin typeface="Microsoft YaHei"/>
+              </a:rPr>
+              <a:t>▪ 供给侧硬上限：设备 free 槽 ≤1,024 · Host 配额数千页 · 双份缓冲每批 ≈26 MiB——理论上几十批可行</a:t>
+            </a:r>
+          </a:p>
+          <a:p>
+            <a:pPr>
+              <a:spcAft>
+                <a:spcPts val="700"/>
+              </a:spcAft>
+            </a:pPr>
+            <a:r>
+              <a:rPr sz="1050">
+                <a:solidFill>
+                  <a:srgbClr val="A9BECC"/>
+                </a:solidFill>
+                <a:latin typeface="Microsoft YaHei"/>
+              </a:rPr>
+              <a:t>▪ 理论甜蜜点 2-4 批（尚未实测，深载分档待测）：超过峰值义务深度的档位是闲置——排队批次不会让 DMA 更快，只是把同一笔义务摊得更平</a:t>
+            </a:r>
+          </a:p>
+          <a:p>
+            <a:pPr>
+              <a:spcAft>
+                <a:spcPts val="700"/>
+              </a:spcAft>
+            </a:pPr>
+            <a:r>
+              <a:rPr sz="1050">
+                <a:solidFill>
+                  <a:srgbClr val="A9BECC"/>
+                </a:solidFill>
+                <a:latin typeface="Microsoft YaHei"/>
+              </a:rPr>
+              <a:t>▪ DEPTH=1 是最差配置（实测 D1 182.6 &lt; D0 183.6）：付半流水管理开销、无摊薄收益——要么 0（纯同步）要么 ≥2</a:t>
+            </a:r>
+          </a:p>
+          <a:p>
+            <a:pPr>
+              <a:spcAft>
+                <a:spcPts val="700"/>
+              </a:spcAft>
+            </a:pPr>
+            <a:r>
+              <a:rPr sz="1050">
+                <a:solidFill>
+                  <a:srgbClr val="A9BECC"/>
+                </a:solidFill>
+                <a:latin typeface="Microsoft YaHei"/>
+              </a:rPr>
+              <a:t>▪ 关键对照：深载长跑（深超池堆积 + 轮首爆发密集）ON/OFF 对照——理论预测收益落在“爆发规模 / 步窗”区间</a:t>
+            </a:r>
+          </a:p>
+        </p:txBody>
+      </p:sp>
+      <p:sp>
+        <p:nvSpPr>
+          <p:cNvPr id="5" name="Rectangle 4"/>
+          <p:cNvSpPr/>
+          <p:nvPr/>
+        </p:nvSpPr>
+        <p:spPr>
+          <a:xfrm>
+            <a:off x="548640" y="4498848"/>
+            <a:ext cx="8046720" cy="438912"/>
+          </a:xfrm>
+          <a:prstGeom prst="rect">
+            <a:avLst/>
+          </a:prstGeom>
+          <a:solidFill>
+            <a:srgbClr val="13314D"/>
+          </a:solidFill>
+          <a:ln>
+            <a:noFill/>
+          </a:ln>
+        </p:spPr>
+        <p:style>
+          <a:lnRef idx="1">
+            <a:schemeClr val="accent1"/>
+          </a:lnRef>
+          <a:fillRef idx="3">
+            <a:schemeClr val="accent1"/>
+          </a:fillRef>
+          <a:effectRef idx="2">
+            <a:schemeClr val="accent1"/>
+          </a:effectRef>
+          <a:fontRef idx="minor">
+            <a:schemeClr val="lt1"/>
+          </a:fontRef>
+        </p:style>
+        <p:txBody>
           <a:bodyPr rtlCol="0" anchor="ctr" wrap="square"/>
           <a:lstStyle/>
           <a:p>
@@ -3311,7 +3355,7 @@
             <a:r>
               <a:rPr sz="1150" b="1">
                 <a:solidFill>
-                  <a:srgbClr val="13314D"/>
+                  <a:srgbClr val="FFFFFF"/>
                 </a:solidFill>
                 <a:latin typeface="Microsoft YaHei"/>
               </a:rPr>
@@ -17292,6 +17336,290 @@
 </p:sld>
 </file>
 
+<file path=ppt/slides/slide22.xml><?xml version="1.0" encoding="utf-8"?>
+<p:sld xmlns:a="http://schemas.openxmlformats.org/drawingml/2006/main" xmlns:p="http://schemas.openxmlformats.org/presentationml/2006/main" xmlns:r="http://schemas.openxmlformats.org/officeDocument/2006/relationships">
+  <p:cSld>
+    <p:spTree>
+      <p:nvGrpSpPr>
+        <p:cNvPr id="1" name=""/>
+        <p:cNvGrpSpPr/>
+        <p:nvPr/>
+      </p:nvGrpSpPr>
+      <p:grpSpPr/>
+      <p:sp>
+        <p:nvSpPr>
+          <p:cNvPr id="2" name="Rectangle 1"/>
+          <p:cNvSpPr/>
+          <p:nvPr/>
+        </p:nvSpPr>
+        <p:spPr>
+          <a:xfrm>
+            <a:off x="0" y="0"/>
+            <a:ext cx="9144000" cy="5143500"/>
+          </a:xfrm>
+          <a:prstGeom prst="rect">
+            <a:avLst/>
+          </a:prstGeom>
+          <a:solidFill>
+            <a:srgbClr val="0B1F33"/>
+          </a:solidFill>
+          <a:ln>
+            <a:noFill/>
+          </a:ln>
+        </p:spPr>
+        <p:style>
+          <a:lnRef idx="1">
+            <a:schemeClr val="accent1"/>
+          </a:lnRef>
+          <a:fillRef idx="3">
+            <a:schemeClr val="accent1"/>
+          </a:fillRef>
+          <a:effectRef idx="2">
+            <a:schemeClr val="accent1"/>
+          </a:effectRef>
+          <a:fontRef idx="minor">
+            <a:schemeClr val="lt1"/>
+          </a:fontRef>
+        </p:style>
+        <p:txBody>
+          <a:bodyPr rtlCol="0" anchor="ctr"/>
+          <a:lstStyle/>
+          <a:p>
+            <a:pPr algn="ctr"/>
+          </a:p>
+        </p:txBody>
+      </p:sp>
+      <p:sp>
+        <p:nvSpPr>
+          <p:cNvPr id="3" name="TextBox 2"/>
+          <p:cNvSpPr txBox="1"/>
+          <p:nvPr/>
+        </p:nvSpPr>
+        <p:spPr>
+          <a:xfrm>
+            <a:off x="548640" y="256032"/>
+            <a:ext cx="8046720" cy="292608"/>
+          </a:xfrm>
+          <a:prstGeom prst="rect">
+            <a:avLst/>
+          </a:prstGeom>
+          <a:noFill/>
+        </p:spPr>
+        <p:txBody>
+          <a:bodyPr wrap="none">
+            <a:spAutoFit/>
+          </a:bodyPr>
+          <a:lstStyle/>
+          <a:p>
+            <a:r>
+              <a:rPr sz="1200" b="1">
+                <a:solidFill>
+                  <a:srgbClr val="3FC6D6"/>
+                </a:solidFill>
+                <a:latin typeface="Microsoft YaHei"/>
+              </a:rPr>
+              <a:t>THREE LAYERS</a:t>
+            </a:r>
+          </a:p>
+        </p:txBody>
+      </p:sp>
+      <p:sp>
+        <p:nvSpPr>
+          <p:cNvPr id="4" name="TextBox 3"/>
+          <p:cNvSpPr txBox="1"/>
+          <p:nvPr/>
+        </p:nvSpPr>
+        <p:spPr>
+          <a:xfrm>
+            <a:off x="548640" y="548640"/>
+            <a:ext cx="8046720" cy="566928"/>
+          </a:xfrm>
+          <a:prstGeom prst="rect">
+            <a:avLst/>
+          </a:prstGeom>
+          <a:noFill/>
+        </p:spPr>
+        <p:txBody>
+          <a:bodyPr wrap="none">
+            <a:spAutoFit/>
+          </a:bodyPr>
+          <a:lstStyle/>
+          <a:p>
+            <a:r>
+              <a:rPr sz="2300" b="1">
+                <a:solidFill>
+                  <a:srgbClr val="FFFFFF"/>
+                </a:solidFill>
+                <a:latin typeface="Microsoft YaHei"/>
+              </a:rPr>
+              <a:t>三层加速栈：单步与长程的分工</a:t>
+            </a:r>
+          </a:p>
+        </p:txBody>
+      </p:sp>
+      <p:sp>
+        <p:nvSpPr>
+          <p:cNvPr id="5" name="TextBox 4"/>
+          <p:cNvSpPr txBox="1"/>
+          <p:nvPr/>
+        </p:nvSpPr>
+        <p:spPr>
+          <a:xfrm>
+            <a:off x="548640" y="1261872"/>
+            <a:ext cx="8046720" cy="3127248"/>
+          </a:xfrm>
+          <a:prstGeom prst="rect">
+            <a:avLst/>
+          </a:prstGeom>
+          <a:noFill/>
+        </p:spPr>
+        <p:txBody>
+          <a:bodyPr wrap="square">
+            <a:spAutoFit/>
+          </a:bodyPr>
+          <a:lstStyle/>
+          <a:p>
+            <a:pPr>
+              <a:spcAft>
+                <a:spcPts val="700"/>
+              </a:spcAft>
+            </a:pPr>
+            <a:r>
+              <a:rPr sz="1050">
+                <a:solidFill>
+                  <a:srgbClr val="A9BECC"/>
+                </a:solidFill>
+                <a:latin typeface="Microsoft YaHei"/>
+              </a:rPr>
+              <a:t>▪ L1 硬件层（显卡带宽/算力）：单步解码的物理天花板——权重每 token 全读一遍（IQ3_S ≈ 11.3 GiB）；只能换卡或降比特</a:t>
+            </a:r>
+          </a:p>
+          <a:p>
+            <a:pPr>
+              <a:spcAft>
+                <a:spcPts val="700"/>
+              </a:spcAft>
+            </a:pPr>
+            <a:r>
+              <a:rPr sz="1050">
+                <a:solidFill>
+                  <a:srgbClr val="A9BECC"/>
+                </a:solidFill>
+                <a:latin typeface="Microsoft YaHei"/>
+              </a:rPr>
+              <a:t>▪ L2 算法层（投机解码 / MTP 接受率）：每 forward 多出 token（64% 接受 ≈ 1.64×）——决定单步的有效产出</a:t>
+            </a:r>
+          </a:p>
+          <a:p>
+            <a:pPr>
+              <a:spcAft>
+                <a:spcPts val="700"/>
+              </a:spcAft>
+            </a:pPr>
+            <a:r>
+              <a:rPr sz="1050">
+                <a:solidFill>
+                  <a:srgbClr val="A9BECC"/>
+                </a:solidFill>
+                <a:latin typeface="Microsoft YaHei"/>
+              </a:rPr>
+              <a:t>▪ L3 系统层（KVMem + 异步页流水）：不加速单步——解决"工作集装不下"与"换页不拖慢长程"，把长程保全系数拉回 ≈1.0</a:t>
+            </a:r>
+          </a:p>
+          <a:p>
+            <a:pPr>
+              <a:spcAft>
+                <a:spcPts val="700"/>
+              </a:spcAft>
+            </a:pPr>
+            <a:r>
+              <a:rPr sz="1050">
+                <a:solidFill>
+                  <a:srgbClr val="A9BECC"/>
+                </a:solidFill>
+                <a:latin typeface="Microsoft YaHei"/>
+              </a:rPr>
+              <a:t>▪ 长程有效速度 ≈ L1 × L2 × L3 保全系数——没有 L3，L1×L2 的数字只在第一轮成立（历史极端案例：换页侵蚀至 5.6 tok/s）</a:t>
+            </a:r>
+          </a:p>
+          <a:p>
+            <a:pPr>
+              <a:spcAft>
+                <a:spcPts val="700"/>
+              </a:spcAft>
+            </a:pPr>
+            <a:r>
+              <a:rPr sz="1050">
+                <a:solidFill>
+                  <a:srgbClr val="A9BECC"/>
+                </a:solidFill>
+                <a:latin typeface="Microsoft YaHei"/>
+              </a:rPr>
+              <a:t>▪ 耦合：L2 越快 → 页产生率越高 → 深超池下 L3 越重要——三者是同一流水线的上下游，不是竞争关系</a:t>
+            </a:r>
+          </a:p>
+        </p:txBody>
+      </p:sp>
+      <p:sp>
+        <p:nvSpPr>
+          <p:cNvPr id="6" name="Rectangle 5"/>
+          <p:cNvSpPr/>
+          <p:nvPr/>
+        </p:nvSpPr>
+        <p:spPr>
+          <a:xfrm>
+            <a:off x="548640" y="4498848"/>
+            <a:ext cx="8046720" cy="438912"/>
+          </a:xfrm>
+          <a:prstGeom prst="rect">
+            <a:avLst/>
+          </a:prstGeom>
+          <a:solidFill>
+            <a:srgbClr val="13314D"/>
+          </a:solidFill>
+          <a:ln>
+            <a:noFill/>
+          </a:ln>
+        </p:spPr>
+        <p:style>
+          <a:lnRef idx="1">
+            <a:schemeClr val="accent1"/>
+          </a:lnRef>
+          <a:fillRef idx="3">
+            <a:schemeClr val="accent1"/>
+          </a:fillRef>
+          <a:effectRef idx="2">
+            <a:schemeClr val="accent1"/>
+          </a:effectRef>
+          <a:fontRef idx="minor">
+            <a:schemeClr val="lt1"/>
+          </a:fontRef>
+        </p:style>
+        <p:txBody>
+          <a:bodyPr rtlCol="0" anchor="ctr" wrap="square"/>
+          <a:lstStyle/>
+          <a:p>
+            <a:pPr algn="ctr"/>
+            <a:r>
+              <a:rPr sz="1150" b="1">
+                <a:solidFill>
+                  <a:srgbClr val="FFFFFF"/>
+                </a:solidFill>
+                <a:latin typeface="Microsoft YaHei"/>
+              </a:rPr>
+              <a:t>单步要快靠 L1/L2；长程要快靠 L3——异步页流水保证的是后者</a:t>
+            </a:r>
+          </a:p>
+        </p:txBody>
+      </p:sp>
+    </p:spTree>
+  </p:cSld>
+  <p:clrMapOvr>
+    <a:masterClrMapping/>
+  </p:clrMapOvr>
+</p:sld>
+</file>
+
 <file path=ppt/slides/slide3.xml><?xml version="1.0" encoding="utf-8"?>
 <p:sld xmlns:p="http://schemas.openxmlformats.org/presentationml/2006/main" xmlns:a="http://schemas.openxmlformats.org/drawingml/2006/main">
   <p:cSld name="Slide 3">
@@ -22263,191 +22591,20 @@
       <p:grpSpPr/>
       <p:sp>
         <p:nvSpPr>
-          <p:cNvPr id="2" name="TextBox 1"/>
-          <p:cNvSpPr txBox="1"/>
-          <p:nvPr/>
-        </p:nvSpPr>
-        <p:spPr>
-          <a:xfrm>
-            <a:off x="548640" y="256032"/>
-            <a:ext cx="8046720" cy="292608"/>
-          </a:xfrm>
-          <a:prstGeom prst="rect">
-            <a:avLst/>
-          </a:prstGeom>
-          <a:noFill/>
-        </p:spPr>
-        <p:txBody>
-          <a:bodyPr wrap="none">
-            <a:spAutoFit/>
-          </a:bodyPr>
-          <a:lstStyle/>
-          <a:p>
-            <a:r>
-              <a:rPr sz="1200" b="1">
-                <a:solidFill>
-                  <a:srgbClr val="0E7E86"/>
-                </a:solidFill>
-                <a:latin typeface="Microsoft YaHei"/>
-              </a:rPr>
-              <a:t>WHERE PAGES LIVE</a:t>
-            </a:r>
-          </a:p>
-        </p:txBody>
-      </p:sp>
-      <p:sp>
-        <p:nvSpPr>
-          <p:cNvPr id="3" name="TextBox 2"/>
-          <p:cNvSpPr txBox="1"/>
-          <p:nvPr/>
-        </p:nvSpPr>
-        <p:spPr>
-          <a:xfrm>
-            <a:off x="548640" y="548640"/>
-            <a:ext cx="8046720" cy="566928"/>
-          </a:xfrm>
-          <a:prstGeom prst="rect">
-            <a:avLst/>
-          </a:prstGeom>
-          <a:noFill/>
-        </p:spPr>
-        <p:txBody>
-          <a:bodyPr wrap="none">
-            <a:spAutoFit/>
-          </a:bodyPr>
-          <a:lstStyle/>
-          <a:p>
-            <a:r>
-              <a:rPr sz="2300" b="1">
-                <a:solidFill>
-                  <a:srgbClr val="13314D"/>
-                </a:solidFill>
-                <a:latin typeface="Microsoft YaHei"/>
-              </a:rPr>
-              <a:t>提前搬运的页放在哪？——池页数恒定，搬运只换内容</a:t>
-            </a:r>
-          </a:p>
-        </p:txBody>
-      </p:sp>
-      <p:sp>
-        <p:nvSpPr>
-          <p:cNvPr id="4" name="TextBox 3"/>
-          <p:cNvSpPr txBox="1"/>
-          <p:nvPr/>
-        </p:nvSpPr>
-        <p:spPr>
-          <a:xfrm>
-            <a:off x="548640" y="1261872"/>
-            <a:ext cx="8046720" cy="3127248"/>
-          </a:xfrm>
-          <a:prstGeom prst="rect">
-            <a:avLst/>
-          </a:prstGeom>
-          <a:noFill/>
-        </p:spPr>
-        <p:txBody>
-          <a:bodyPr wrap="square">
-            <a:spAutoFit/>
-          </a:bodyPr>
-          <a:lstStyle/>
-          <a:p>
-            <a:pPr>
-              <a:spcAft>
-                <a:spcPts val="700"/>
-              </a:spcAft>
-            </a:pPr>
-            <a:r>
-              <a:rPr sz="1050">
-                <a:solidFill>
-                  <a:srgbClr val="23465C"/>
-                </a:solidFill>
-                <a:latin typeface="Microsoft YaHei"/>
-              </a:rPr>
-              <a:t>▪ 设备池 = 1,024 个页槽（65,536 tok ÷ 64），启动时一次分配、永不增减——搬运不是“加空间”，是“换槽里的内容”（同 OS 物理页帧）</a:t>
-            </a:r>
-          </a:p>
-          <a:p>
-            <a:pPr>
-              <a:spcAft>
-                <a:spcPts val="700"/>
-              </a:spcAft>
-            </a:pPr>
-            <a:r>
-              <a:rPr sz="1050">
-                <a:solidFill>
-                  <a:srgbClr val="23465C"/>
-                </a:solidFill>
-                <a:latin typeface="Microsoft YaHei"/>
-              </a:rPr>
-              <a:t>▪ restore（搬回）的落点 = 设备池的 free 槽；demote（搬出）的落点 = Host RAM 配额槽（写前取配额：host 没空槽就不发起）</a:t>
-            </a:r>
-          </a:p>
-          <a:p>
-            <a:pPr>
-              <a:spcAft>
-                <a:spcPts val="700"/>
-              </a:spcAft>
-            </a:pPr>
-            <a:r>
-              <a:rPr sz="1050">
-                <a:solidFill>
-                  <a:srgbClr val="23465C"/>
-                </a:solidFill>
-                <a:latin typeface="Microsoft YaHei"/>
-              </a:rPr>
-              <a:t>▪ 空间守恒律：restore 进来的每页 = demote 出去的一页的槽；每步新增 N 页 = 每步腾出 N 槽——稳态流水平衡</a:t>
-            </a:r>
-          </a:p>
-          <a:p>
-            <a:pPr>
-              <a:spcAft>
-                <a:spcPts val="700"/>
-              </a:spcAft>
-            </a:pPr>
-            <a:r>
-              <a:rPr sz="1050">
-                <a:solidFill>
-                  <a:srgbClr val="23465C"/>
-                </a:solidFill>
-                <a:latin typeface="Microsoft YaHei"/>
-              </a:rPr>
-              <a:t>▪ 唯一的瞬时额外 = 在飞批次的双份副本 ≈ 26 MiB（publish 前旧副本不丢——账本保证任何时刻至少一份有效）</a:t>
-            </a:r>
-          </a:p>
-          <a:p>
-            <a:pPr>
-              <a:spcAft>
-                <a:spcPts val="700"/>
-              </a:spcAft>
-            </a:pPr>
-            <a:r>
-              <a:rPr sz="1050">
-                <a:solidFill>
-                  <a:srgbClr val="23465C"/>
-                </a:solidFill>
-                <a:latin typeface="Microsoft YaHei"/>
-              </a:rPr>
-              <a:t>▪ 池满 = 换页体系的设计工况：池满不回退，池浅才等价（浅载无搬运需求，两条路自然一样快）</a:t>
-            </a:r>
-          </a:p>
-        </p:txBody>
-      </p:sp>
-      <p:sp>
-        <p:nvSpPr>
-          <p:cNvPr id="5" name="Rectangle 4"/>
-          <p:cNvSpPr/>
-          <p:nvPr/>
-        </p:nvSpPr>
-        <p:spPr>
-          <a:xfrm>
-            <a:off x="548640" y="4498848"/>
-            <a:ext cx="8046720" cy="438912"/>
+          <p:cNvPr id="6" name="Rectangle 5"/>
+          <p:cNvSpPr/>
+          <p:nvPr/>
+        </p:nvSpPr>
+        <p:spPr>
+          <a:xfrm>
+            <a:off x="0" y="0"/>
+            <a:ext cx="9144000" cy="5143500"/>
           </a:xfrm>
           <a:prstGeom prst="rect">
             <a:avLst/>
           </a:prstGeom>
           <a:solidFill>
-            <a:srgbClr val="3FC6D6"/>
+            <a:srgbClr val="0B1F33"/>
           </a:solidFill>
           <a:ln>
             <a:noFill/>
@@ -22468,6 +22625,220 @@
           </a:fontRef>
         </p:style>
         <p:txBody>
+          <a:bodyPr rtlCol="0" anchor="ctr"/>
+          <a:lstStyle/>
+          <a:p>
+            <a:pPr algn="ctr"/>
+          </a:p>
+        </p:txBody>
+      </p:sp>
+      <p:sp>
+        <p:nvSpPr>
+          <p:cNvPr id="2" name="TextBox 1"/>
+          <p:cNvSpPr txBox="1"/>
+          <p:nvPr/>
+        </p:nvSpPr>
+        <p:spPr>
+          <a:xfrm>
+            <a:off x="548640" y="256032"/>
+            <a:ext cx="8046720" cy="292608"/>
+          </a:xfrm>
+          <a:prstGeom prst="rect">
+            <a:avLst/>
+          </a:prstGeom>
+          <a:noFill/>
+        </p:spPr>
+        <p:txBody>
+          <a:bodyPr wrap="none">
+            <a:spAutoFit/>
+          </a:bodyPr>
+          <a:lstStyle/>
+          <a:p>
+            <a:r>
+              <a:rPr sz="1200" b="1">
+                <a:solidFill>
+                  <a:srgbClr val="3FC6D6"/>
+                </a:solidFill>
+                <a:latin typeface="Microsoft YaHei"/>
+              </a:rPr>
+              <a:t>WHERE PAGES LIVE</a:t>
+            </a:r>
+          </a:p>
+        </p:txBody>
+      </p:sp>
+      <p:sp>
+        <p:nvSpPr>
+          <p:cNvPr id="3" name="TextBox 2"/>
+          <p:cNvSpPr txBox="1"/>
+          <p:nvPr/>
+        </p:nvSpPr>
+        <p:spPr>
+          <a:xfrm>
+            <a:off x="548640" y="548640"/>
+            <a:ext cx="8046720" cy="566928"/>
+          </a:xfrm>
+          <a:prstGeom prst="rect">
+            <a:avLst/>
+          </a:prstGeom>
+          <a:noFill/>
+        </p:spPr>
+        <p:txBody>
+          <a:bodyPr wrap="none">
+            <a:spAutoFit/>
+          </a:bodyPr>
+          <a:lstStyle/>
+          <a:p>
+            <a:r>
+              <a:rPr sz="2300" b="1">
+                <a:solidFill>
+                  <a:srgbClr val="FFFFFF"/>
+                </a:solidFill>
+                <a:latin typeface="Microsoft YaHei"/>
+              </a:rPr>
+              <a:t>提前搬运的页放在哪？——池页数恒定，搬运只换内容</a:t>
+            </a:r>
+          </a:p>
+        </p:txBody>
+      </p:sp>
+      <p:sp>
+        <p:nvSpPr>
+          <p:cNvPr id="4" name="TextBox 3"/>
+          <p:cNvSpPr txBox="1"/>
+          <p:nvPr/>
+        </p:nvSpPr>
+        <p:spPr>
+          <a:xfrm>
+            <a:off x="548640" y="1261872"/>
+            <a:ext cx="8046720" cy="3127248"/>
+          </a:xfrm>
+          <a:prstGeom prst="rect">
+            <a:avLst/>
+          </a:prstGeom>
+          <a:noFill/>
+        </p:spPr>
+        <p:txBody>
+          <a:bodyPr wrap="square">
+            <a:spAutoFit/>
+          </a:bodyPr>
+          <a:lstStyle/>
+          <a:p>
+            <a:pPr>
+              <a:spcAft>
+                <a:spcPts val="700"/>
+              </a:spcAft>
+            </a:pPr>
+            <a:r>
+              <a:rPr sz="1050">
+                <a:solidFill>
+                  <a:srgbClr val="A9BECC"/>
+                </a:solidFill>
+                <a:latin typeface="Microsoft YaHei"/>
+              </a:rPr>
+              <a:t>▪ 设备池 = 1,024 个页槽（65,536 tok ÷ 64），启动时一次分配、永不增减——搬运不是“加空间”，是“换槽里的内容”（同 OS 物理页帧）</a:t>
+            </a:r>
+          </a:p>
+          <a:p>
+            <a:pPr>
+              <a:spcAft>
+                <a:spcPts val="700"/>
+              </a:spcAft>
+            </a:pPr>
+            <a:r>
+              <a:rPr sz="1050">
+                <a:solidFill>
+                  <a:srgbClr val="A9BECC"/>
+                </a:solidFill>
+                <a:latin typeface="Microsoft YaHei"/>
+              </a:rPr>
+              <a:t>▪ restore（搬回）的落点 = 设备池的 free 槽；demote（搬出）的落点 = Host RAM 配额槽（写前取配额：host 没空槽就不发起）</a:t>
+            </a:r>
+          </a:p>
+          <a:p>
+            <a:pPr>
+              <a:spcAft>
+                <a:spcPts val="700"/>
+              </a:spcAft>
+            </a:pPr>
+            <a:r>
+              <a:rPr sz="1050">
+                <a:solidFill>
+                  <a:srgbClr val="A9BECC"/>
+                </a:solidFill>
+                <a:latin typeface="Microsoft YaHei"/>
+              </a:rPr>
+              <a:t>▪ 空间守恒律：restore 进来的每页 = demote 出去的一页的槽；每步新增 N 页 = 每步腾出 N 槽——稳态流水平衡</a:t>
+            </a:r>
+          </a:p>
+          <a:p>
+            <a:pPr>
+              <a:spcAft>
+                <a:spcPts val="700"/>
+              </a:spcAft>
+            </a:pPr>
+            <a:r>
+              <a:rPr sz="1050">
+                <a:solidFill>
+                  <a:srgbClr val="A9BECC"/>
+                </a:solidFill>
+                <a:latin typeface="Microsoft YaHei"/>
+              </a:rPr>
+              <a:t>▪ 唯一的瞬时额外 = 在飞批次的双份副本 ≈ 26 MiB（publish 前旧副本不丢——账本保证任何时刻至少一份有效）</a:t>
+            </a:r>
+          </a:p>
+          <a:p>
+            <a:pPr>
+              <a:spcAft>
+                <a:spcPts val="700"/>
+              </a:spcAft>
+            </a:pPr>
+            <a:r>
+              <a:rPr sz="1050">
+                <a:solidFill>
+                  <a:srgbClr val="A9BECC"/>
+                </a:solidFill>
+                <a:latin typeface="Microsoft YaHei"/>
+              </a:rPr>
+              <a:t>▪ 池满 = 换页体系的设计工况：池满不回退，池浅才等价（浅载无搬运需求，两条路自然一样快）</a:t>
+            </a:r>
+          </a:p>
+        </p:txBody>
+      </p:sp>
+      <p:sp>
+        <p:nvSpPr>
+          <p:cNvPr id="5" name="Rectangle 4"/>
+          <p:cNvSpPr/>
+          <p:nvPr/>
+        </p:nvSpPr>
+        <p:spPr>
+          <a:xfrm>
+            <a:off x="548640" y="4498848"/>
+            <a:ext cx="8046720" cy="438912"/>
+          </a:xfrm>
+          <a:prstGeom prst="rect">
+            <a:avLst/>
+          </a:prstGeom>
+          <a:solidFill>
+            <a:srgbClr val="13314D"/>
+          </a:solidFill>
+          <a:ln>
+            <a:noFill/>
+          </a:ln>
+        </p:spPr>
+        <p:style>
+          <a:lnRef idx="1">
+            <a:schemeClr val="accent1"/>
+          </a:lnRef>
+          <a:fillRef idx="3">
+            <a:schemeClr val="accent1"/>
+          </a:fillRef>
+          <a:effectRef idx="2">
+            <a:schemeClr val="accent1"/>
+          </a:effectRef>
+          <a:fontRef idx="minor">
+            <a:schemeClr val="lt1"/>
+          </a:fontRef>
+        </p:style>
+        <p:txBody>
           <a:bodyPr rtlCol="0" anchor="ctr" wrap="square"/>
           <a:lstStyle/>
           <a:p>
@@ -22475,7 +22846,7 @@
             <a:r>
               <a:rPr sz="1150" b="1">
                 <a:solidFill>
-                  <a:srgbClr val="13314D"/>
+                  <a:srgbClr val="FFFFFF"/>
                 </a:solidFill>
                 <a:latin typeface="Microsoft YaHei"/>
               </a:rPr>
@@ -22504,196 +22875,20 @@
       <p:grpSpPr/>
       <p:sp>
         <p:nvSpPr>
-          <p:cNvPr id="2" name="TextBox 1"/>
-          <p:cNvSpPr txBox="1"/>
-          <p:nvPr/>
-        </p:nvSpPr>
-        <p:spPr>
-          <a:xfrm>
-            <a:off x="548640" y="256032"/>
-            <a:ext cx="8046720" cy="292608"/>
-          </a:xfrm>
-          <a:prstGeom prst="rect">
-            <a:avLst/>
-          </a:prstGeom>
-          <a:noFill/>
-        </p:spPr>
-        <p:txBody>
-          <a:bodyPr wrap="none">
-            <a:spAutoFit/>
-          </a:bodyPr>
-          <a:lstStyle/>
-          <a:p>
-            <a:r>
-              <a:rPr sz="1200" b="1">
-                <a:solidFill>
-                  <a:srgbClr val="0E7E86"/>
-                </a:solidFill>
-                <a:latin typeface="Microsoft YaHei"/>
-              </a:rPr>
-              <a:t>THEORY CHECK</a:t>
-            </a:r>
-          </a:p>
-        </p:txBody>
-      </p:sp>
-      <p:sp>
-        <p:nvSpPr>
-          <p:cNvPr id="3" name="TextBox 2"/>
-          <p:cNvSpPr txBox="1"/>
-          <p:nvPr/>
-        </p:nvSpPr>
-        <p:spPr>
-          <a:xfrm>
-            <a:off x="548640" y="548640"/>
-            <a:ext cx="8046720" cy="566928"/>
-          </a:xfrm>
-          <a:prstGeom prst="rect">
-            <a:avLst/>
-          </a:prstGeom>
-          <a:noFill/>
-        </p:spPr>
-        <p:txBody>
-          <a:bodyPr wrap="square">
-            <a:spAutoFit/>
-          </a:bodyPr>
-          <a:lstStyle/>
-          <a:p>
-            <a:pPr>
-              <a:spcAft>
-                <a:spcPts val="700"/>
-              </a:spcAft>
-            </a:pPr>
-            <a:r>
-              <a:rPr sz="2300" b="1">
-                <a:solidFill>
-                  <a:srgbClr val="13314D"/>
-                </a:solidFill>
-                <a:latin typeface="Microsoft YaHei"/>
-              </a:rPr>
-              <a:t>数学基础：异步页流水的收益不等式</a:t>
-            </a:r>
-          </a:p>
-        </p:txBody>
-      </p:sp>
-      <p:sp>
-        <p:nvSpPr>
-          <p:cNvPr id="4" name="TextBox 3"/>
-          <p:cNvSpPr txBox="1"/>
-          <p:nvPr/>
-        </p:nvSpPr>
-        <p:spPr>
-          <a:xfrm>
-            <a:off x="548640" y="1261872"/>
-            <a:ext cx="8046720" cy="3127248"/>
-          </a:xfrm>
-          <a:prstGeom prst="rect">
-            <a:avLst/>
-          </a:prstGeom>
-          <a:noFill/>
-        </p:spPr>
-        <p:txBody>
-          <a:bodyPr wrap="square">
-            <a:spAutoFit/>
-          </a:bodyPr>
-          <a:lstStyle/>
-          <a:p>
-            <a:pPr>
-              <a:spcAft>
-                <a:spcPts val="700"/>
-              </a:spcAft>
-            </a:pPr>
-            <a:r>
-              <a:rPr sz="1050">
-                <a:solidFill>
-                  <a:srgbClr val="23465C"/>
-                </a:solidFill>
-                <a:latin typeface="Microsoft YaHei"/>
-              </a:rPr>
-              <a:t>▪ 守恒律：工作集 &gt; 池 ⇒ 每步新增页必须换出等量页——搬运义务的总量由工作集/池比决定，与开关无关</a:t>
-            </a:r>
-          </a:p>
-          <a:p>
-            <a:pPr>
-              <a:spcAft>
-                <a:spcPts val="700"/>
-              </a:spcAft>
-            </a:pPr>
-            <a:r>
-              <a:rPr sz="1050">
-                <a:solidFill>
-                  <a:srgbClr val="23465C"/>
-                </a:solidFill>
-                <a:latin typeface="Microsoft YaHei"/>
-              </a:rPr>
-              <a:t>▪ 支付位置：同步把义务 100% 放在关键路径（解码等 DMA）；异步把义务放进影子时间 ⇒ T异步 ≤ T同步 恒成立，相等仅当义务为零</a:t>
-            </a:r>
-          </a:p>
-          <a:p>
-            <a:pPr>
-              <a:spcAft>
-                <a:spcPts val="700"/>
-              </a:spcAft>
-            </a:pPr>
-            <a:r>
-              <a:rPr sz="1050">
-                <a:solidFill>
-                  <a:srgbClr val="23465C"/>
-                </a:solidFill>
-                <a:latin typeface="Microsoft YaHei"/>
-              </a:rPr>
-              <a:t>▪ 三参数公式：收益% =（义务率 × 单位成本）/ 步窗 =（0.09 页/步 × 1.6 MiB）/ 30 ms ≈ 0.05%（稳态换页义务微不足道）</a:t>
-            </a:r>
-          </a:p>
-          <a:p>
-            <a:pPr>
-              <a:spcAft>
-                <a:spcPts val="700"/>
-              </a:spcAft>
-            </a:pPr>
-            <a:r>
-              <a:rPr sz="1050">
-                <a:solidFill>
-                  <a:srgbClr val="23465C"/>
-                </a:solidFill>
-                <a:latin typeface="Microsoft YaHei"/>
-              </a:rPr>
-              <a:t>▪ 收益主要来源 = 召回爆发：轮首 turn closure 集中召回数十 MiB——工作集越超池、轮次越长，爆发越大收益越大——这解释全部实测（浅载 r≈1 / 深轮 r=0.80）</a:t>
-            </a:r>
-          </a:p>
-          <a:p>
-            <a:pPr>
-              <a:spcAft>
-                <a:spcPts val="700"/>
-              </a:spcAft>
-            </a:pPr>
-            <a:r>
-              <a:rPr sz="1050">
-                <a:solidFill>
-                  <a:srgbClr val="23465C"/>
-                </a:solidFill>
-                <a:latin typeface="Microsoft YaHei"/>
-              </a:rPr>
-              <a:t>▪ 实测对照（10-19 三档浅载）：D2 187.1 &gt; D0 183.6 &gt; D1 182.6——方向与不等式一致；D1 反常（半流水开销）已立挂账复查</a:t>
-            </a:r>
-          </a:p>
-        </p:txBody>
-      </p:sp>
-      <p:sp>
-        <p:nvSpPr>
-          <p:cNvPr id="5" name="Rectangle 4"/>
-          <p:cNvSpPr/>
-          <p:nvPr/>
-        </p:nvSpPr>
-        <p:spPr>
-          <a:xfrm>
-            <a:off x="548640" y="4498848"/>
-            <a:ext cx="8046720" cy="438912"/>
+          <p:cNvPr id="6" name="Rectangle 5"/>
+          <p:cNvSpPr/>
+          <p:nvPr/>
+        </p:nvSpPr>
+        <p:spPr>
+          <a:xfrm>
+            <a:off x="0" y="0"/>
+            <a:ext cx="9144000" cy="5143500"/>
           </a:xfrm>
           <a:prstGeom prst="rect">
             <a:avLst/>
           </a:prstGeom>
           <a:solidFill>
-            <a:srgbClr val="3FC6D6"/>
+            <a:srgbClr val="0B1F33"/>
           </a:solidFill>
           <a:ln>
             <a:noFill/>
@@ -22714,6 +22909,225 @@
           </a:fontRef>
         </p:style>
         <p:txBody>
+          <a:bodyPr rtlCol="0" anchor="ctr"/>
+          <a:lstStyle/>
+          <a:p>
+            <a:pPr algn="ctr"/>
+          </a:p>
+        </p:txBody>
+      </p:sp>
+      <p:sp>
+        <p:nvSpPr>
+          <p:cNvPr id="2" name="TextBox 1"/>
+          <p:cNvSpPr txBox="1"/>
+          <p:nvPr/>
+        </p:nvSpPr>
+        <p:spPr>
+          <a:xfrm>
+            <a:off x="548640" y="256032"/>
+            <a:ext cx="8046720" cy="292608"/>
+          </a:xfrm>
+          <a:prstGeom prst="rect">
+            <a:avLst/>
+          </a:prstGeom>
+          <a:noFill/>
+        </p:spPr>
+        <p:txBody>
+          <a:bodyPr wrap="none">
+            <a:spAutoFit/>
+          </a:bodyPr>
+          <a:lstStyle/>
+          <a:p>
+            <a:r>
+              <a:rPr sz="1200" b="1">
+                <a:solidFill>
+                  <a:srgbClr val="3FC6D6"/>
+                </a:solidFill>
+                <a:latin typeface="Microsoft YaHei"/>
+              </a:rPr>
+              <a:t>THEORY CHECK</a:t>
+            </a:r>
+          </a:p>
+        </p:txBody>
+      </p:sp>
+      <p:sp>
+        <p:nvSpPr>
+          <p:cNvPr id="3" name="TextBox 2"/>
+          <p:cNvSpPr txBox="1"/>
+          <p:nvPr/>
+        </p:nvSpPr>
+        <p:spPr>
+          <a:xfrm>
+            <a:off x="548640" y="548640"/>
+            <a:ext cx="8046720" cy="566928"/>
+          </a:xfrm>
+          <a:prstGeom prst="rect">
+            <a:avLst/>
+          </a:prstGeom>
+          <a:noFill/>
+        </p:spPr>
+        <p:txBody>
+          <a:bodyPr wrap="square">
+            <a:spAutoFit/>
+          </a:bodyPr>
+          <a:lstStyle/>
+          <a:p>
+            <a:pPr>
+              <a:spcAft>
+                <a:spcPts val="700"/>
+              </a:spcAft>
+            </a:pPr>
+            <a:r>
+              <a:rPr sz="2300" b="1">
+                <a:solidFill>
+                  <a:srgbClr val="FFFFFF"/>
+                </a:solidFill>
+                <a:latin typeface="Microsoft YaHei"/>
+              </a:rPr>
+              <a:t>数学基础：异步页流水的收益不等式</a:t>
+            </a:r>
+          </a:p>
+        </p:txBody>
+      </p:sp>
+      <p:sp>
+        <p:nvSpPr>
+          <p:cNvPr id="4" name="TextBox 3"/>
+          <p:cNvSpPr txBox="1"/>
+          <p:nvPr/>
+        </p:nvSpPr>
+        <p:spPr>
+          <a:xfrm>
+            <a:off x="548640" y="1261872"/>
+            <a:ext cx="8046720" cy="3127248"/>
+          </a:xfrm>
+          <a:prstGeom prst="rect">
+            <a:avLst/>
+          </a:prstGeom>
+          <a:noFill/>
+        </p:spPr>
+        <p:txBody>
+          <a:bodyPr wrap="square">
+            <a:spAutoFit/>
+          </a:bodyPr>
+          <a:lstStyle/>
+          <a:p>
+            <a:pPr>
+              <a:spcAft>
+                <a:spcPts val="700"/>
+              </a:spcAft>
+            </a:pPr>
+            <a:r>
+              <a:rPr sz="1050">
+                <a:solidFill>
+                  <a:srgbClr val="A9BECC"/>
+                </a:solidFill>
+                <a:latin typeface="Microsoft YaHei"/>
+              </a:rPr>
+              <a:t>▪ 守恒律：工作集 &gt; 池 ⇒ 每步新增页必须换出等量页——搬运义务的总量由工作集/池比决定，与开关无关</a:t>
+            </a:r>
+          </a:p>
+          <a:p>
+            <a:pPr>
+              <a:spcAft>
+                <a:spcPts val="700"/>
+              </a:spcAft>
+            </a:pPr>
+            <a:r>
+              <a:rPr sz="1050">
+                <a:solidFill>
+                  <a:srgbClr val="A9BECC"/>
+                </a:solidFill>
+                <a:latin typeface="Microsoft YaHei"/>
+              </a:rPr>
+              <a:t>▪ 支付位置：同步把义务 100% 放在关键路径（解码等 DMA）；异步把义务放进影子时间 ⇒ T异步 ≤ T同步 恒成立，相等仅当义务为零</a:t>
+            </a:r>
+          </a:p>
+          <a:p>
+            <a:pPr>
+              <a:spcAft>
+                <a:spcPts val="700"/>
+              </a:spcAft>
+            </a:pPr>
+            <a:r>
+              <a:rPr sz="1050">
+                <a:solidFill>
+                  <a:srgbClr val="A9BECC"/>
+                </a:solidFill>
+                <a:latin typeface="Microsoft YaHei"/>
+              </a:rPr>
+              <a:t>▪ 三参数公式：收益% =（义务率 × 单位成本）/ 步窗 =（0.09 页/步 × 1.6 MiB）/ 30 ms ≈ 0.05%（稳态换页义务微不足道）</a:t>
+            </a:r>
+          </a:p>
+          <a:p>
+            <a:pPr>
+              <a:spcAft>
+                <a:spcPts val="700"/>
+              </a:spcAft>
+            </a:pPr>
+            <a:r>
+              <a:rPr sz="1050">
+                <a:solidFill>
+                  <a:srgbClr val="A9BECC"/>
+                </a:solidFill>
+                <a:latin typeface="Microsoft YaHei"/>
+              </a:rPr>
+              <a:t>▪ 收益主要来源 = 召回爆发：轮首 turn closure 集中召回数十 MiB——工作集越超池、轮次越长，爆发越大收益越大——这解释全部实测（浅载 r≈1 / 深轮 r=0.80）</a:t>
+            </a:r>
+          </a:p>
+          <a:p>
+            <a:pPr>
+              <a:spcAft>
+                <a:spcPts val="700"/>
+              </a:spcAft>
+            </a:pPr>
+            <a:r>
+              <a:rPr sz="1050">
+                <a:solidFill>
+                  <a:srgbClr val="A9BECC"/>
+                </a:solidFill>
+                <a:latin typeface="Microsoft YaHei"/>
+              </a:rPr>
+              <a:t>▪ 实测对照（10-19 三档浅载）：D2 187.1 &gt; D0 183.6 &gt; D1 182.6——方向与不等式一致；D1 反常（半流水开销）已立挂账复查</a:t>
+            </a:r>
+          </a:p>
+        </p:txBody>
+      </p:sp>
+      <p:sp>
+        <p:nvSpPr>
+          <p:cNvPr id="5" name="Rectangle 4"/>
+          <p:cNvSpPr/>
+          <p:nvPr/>
+        </p:nvSpPr>
+        <p:spPr>
+          <a:xfrm>
+            <a:off x="548640" y="4498848"/>
+            <a:ext cx="8046720" cy="438912"/>
+          </a:xfrm>
+          <a:prstGeom prst="rect">
+            <a:avLst/>
+          </a:prstGeom>
+          <a:solidFill>
+            <a:srgbClr val="13314D"/>
+          </a:solidFill>
+          <a:ln>
+            <a:noFill/>
+          </a:ln>
+        </p:spPr>
+        <p:style>
+          <a:lnRef idx="1">
+            <a:schemeClr val="accent1"/>
+          </a:lnRef>
+          <a:fillRef idx="3">
+            <a:schemeClr val="accent1"/>
+          </a:fillRef>
+          <a:effectRef idx="2">
+            <a:schemeClr val="accent1"/>
+          </a:effectRef>
+          <a:fontRef idx="minor">
+            <a:schemeClr val="lt1"/>
+          </a:fontRef>
+        </p:style>
+        <p:txBody>
           <a:bodyPr rtlCol="0" anchor="ctr" wrap="square"/>
           <a:lstStyle/>
           <a:p>
@@ -22721,7 +23135,7 @@
             <a:r>
               <a:rPr sz="1150" b="1">
                 <a:solidFill>
-                  <a:srgbClr val="13314D"/>
+                  <a:srgbClr val="FFFFFF"/>
                 </a:solidFill>
                 <a:latin typeface="Microsoft YaHei"/>
               </a:rPr>
